--- a/A2A协议2.0_AI智能体演进路线图_2026_V52_无水印版.pptx
+++ b/A2A协议2.0_AI智能体演进路线图_2026_V52_无水印版.pptx
@@ -29239,7 +29239,7 @@
         <p:spPr>
           <a:xfrm>
             <a:off x="91439" y="457200"/>
-            <a:ext cx="5852159" cy="6108700"/>
+            <a:ext cx="5852159" cy="3048000"/>
           </a:xfrm>
           <a:prstGeom prst="rect">
             <a:avLst/>
@@ -29260,7 +29260,7 @@
                 <a:spcPts val="0"/>
               </a:spcBef>
               <a:spcAft>
-                <a:spcPts val="1800"/>
+                <a:spcPts val="300"/>
               </a:spcAft>
             </a:pPr>
             <a:r>
@@ -29282,7 +29282,7 @@
                 <a:spcPts val="0"/>
               </a:spcBef>
               <a:spcAft>
-                <a:spcPts val="1800"/>
+                <a:spcPts val="300"/>
               </a:spcAft>
             </a:pPr>
             <a:r>
@@ -29304,7 +29304,7 @@
                 <a:spcPts val="0"/>
               </a:spcBef>
               <a:spcAft>
-                <a:spcPts val="1800"/>
+                <a:spcPts val="300"/>
               </a:spcAft>
             </a:pPr>
             <a:r>
@@ -29326,7 +29326,7 @@
                 <a:spcPts val="0"/>
               </a:spcBef>
               <a:spcAft>
-                <a:spcPts val="1800"/>
+                <a:spcPts val="300"/>
               </a:spcAft>
             </a:pPr>
             <a:r>
@@ -29348,7 +29348,7 @@
                 <a:spcPts val="0"/>
               </a:spcBef>
               <a:spcAft>
-                <a:spcPts val="1800"/>
+                <a:spcPts val="200"/>
               </a:spcAft>
             </a:pPr>
             <a:r>
@@ -29370,7 +29370,7 @@
                 <a:spcPts val="0"/>
               </a:spcBef>
               <a:spcAft>
-                <a:spcPts val="1700"/>
+                <a:spcPts val="200"/>
               </a:spcAft>
             </a:pPr>
             <a:r>
@@ -29392,7 +29392,7 @@
                 <a:spcPts val="0"/>
               </a:spcBef>
               <a:spcAft>
-                <a:spcPts val="1700"/>
+                <a:spcPts val="200"/>
               </a:spcAft>
             </a:pPr>
             <a:r>
@@ -29414,7 +29414,7 @@
                 <a:spcPts val="0"/>
               </a:spcBef>
               <a:spcAft>
-                <a:spcPts val="1700"/>
+                <a:spcPts val="200"/>
               </a:spcAft>
             </a:pPr>
             <a:r>
@@ -29436,7 +29436,7 @@
                 <a:spcPts val="0"/>
               </a:spcBef>
               <a:spcAft>
-                <a:spcPts val="1700"/>
+                <a:spcPts val="200"/>
               </a:spcAft>
             </a:pPr>
             <a:r>
@@ -29458,7 +29458,7 @@
                 <a:spcPts val="0"/>
               </a:spcBef>
               <a:spcAft>
-                <a:spcPts val="1700"/>
+                <a:spcPts val="200"/>
               </a:spcAft>
             </a:pPr>
             <a:r>
@@ -29480,7 +29480,7 @@
                 <a:spcPts val="0"/>
               </a:spcBef>
               <a:spcAft>
-                <a:spcPts val="1700"/>
+                <a:spcPts val="200"/>
               </a:spcAft>
             </a:pPr>
             <a:r>
@@ -29502,7 +29502,7 @@
                 <a:spcPts val="0"/>
               </a:spcBef>
               <a:spcAft>
-                <a:spcPts val="1700"/>
+                <a:spcPts val="200"/>
               </a:spcAft>
             </a:pPr>
             <a:r>
@@ -29524,7 +29524,7 @@
                 <a:spcPts val="0"/>
               </a:spcBef>
               <a:spcAft>
-                <a:spcPts val="1700"/>
+                <a:spcPts val="200"/>
               </a:spcAft>
             </a:pPr>
             <a:r>
@@ -29546,7 +29546,7 @@
                 <a:spcPts val="0"/>
               </a:spcBef>
               <a:spcAft>
-                <a:spcPts val="1700"/>
+                <a:spcPts val="200"/>
               </a:spcAft>
             </a:pPr>
             <a:r>
@@ -29568,7 +29568,7 @@
                 <a:spcPts val="0"/>
               </a:spcBef>
               <a:spcAft>
-                <a:spcPts val="1700"/>
+                <a:spcPts val="200"/>
               </a:spcAft>
             </a:pPr>
             <a:r>
@@ -29590,7 +29590,7 @@
                 <a:spcPts val="0"/>
               </a:spcBef>
               <a:spcAft>
-                <a:spcPts val="1700"/>
+                <a:spcPts val="200"/>
               </a:spcAft>
             </a:pPr>
             <a:r>
@@ -29636,7 +29636,7 @@
         <p:spPr>
           <a:xfrm>
             <a:off x="6035040" y="457200"/>
-            <a:ext cx="5852159" cy="6108700"/>
+            <a:ext cx="5852159" cy="3048000"/>
           </a:xfrm>
           <a:prstGeom prst="rect">
             <a:avLst/>
@@ -29657,7 +29657,7 @@
                 <a:spcPts val="0"/>
               </a:spcBef>
               <a:spcAft>
-                <a:spcPts val="1800"/>
+                <a:spcPts val="300"/>
               </a:spcAft>
             </a:pPr>
             <a:r>
@@ -29679,7 +29679,7 @@
                 <a:spcPts val="0"/>
               </a:spcBef>
               <a:spcAft>
-                <a:spcPts val="1800"/>
+                <a:spcPts val="300"/>
               </a:spcAft>
             </a:pPr>
             <a:r>
@@ -29701,7 +29701,7 @@
                 <a:spcPts val="0"/>
               </a:spcBef>
               <a:spcAft>
-                <a:spcPts val="1800"/>
+                <a:spcPts val="300"/>
               </a:spcAft>
             </a:pPr>
             <a:r>
@@ -29723,7 +29723,7 @@
                 <a:spcPts val="0"/>
               </a:spcBef>
               <a:spcAft>
-                <a:spcPts val="1800"/>
+                <a:spcPts val="300"/>
               </a:spcAft>
             </a:pPr>
             <a:r>
@@ -29745,7 +29745,7 @@
                 <a:spcPts val="0"/>
               </a:spcBef>
               <a:spcAft>
-                <a:spcPts val="1800"/>
+                <a:spcPts val="200"/>
               </a:spcAft>
             </a:pPr>
             <a:r>
@@ -29767,7 +29767,7 @@
                 <a:spcPts val="0"/>
               </a:spcBef>
               <a:spcAft>
-                <a:spcPts val="1700"/>
+                <a:spcPts val="200"/>
               </a:spcAft>
             </a:pPr>
             <a:r>
@@ -29789,7 +29789,7 @@
                 <a:spcPts val="0"/>
               </a:spcBef>
               <a:spcAft>
-                <a:spcPts val="1700"/>
+                <a:spcPts val="200"/>
               </a:spcAft>
             </a:pPr>
             <a:r>
@@ -29811,7 +29811,7 @@
                 <a:spcPts val="0"/>
               </a:spcBef>
               <a:spcAft>
-                <a:spcPts val="1700"/>
+                <a:spcPts val="200"/>
               </a:spcAft>
             </a:pPr>
             <a:r>
@@ -29833,7 +29833,7 @@
                 <a:spcPts val="0"/>
               </a:spcBef>
               <a:spcAft>
-                <a:spcPts val="1700"/>
+                <a:spcPts val="200"/>
               </a:spcAft>
             </a:pPr>
             <a:r>
@@ -29855,7 +29855,7 @@
                 <a:spcPts val="0"/>
               </a:spcBef>
               <a:spcAft>
-                <a:spcPts val="1700"/>
+                <a:spcPts val="200"/>
               </a:spcAft>
             </a:pPr>
             <a:r>
@@ -29877,7 +29877,7 @@
                 <a:spcPts val="0"/>
               </a:spcBef>
               <a:spcAft>
-                <a:spcPts val="1700"/>
+                <a:spcPts val="200"/>
               </a:spcAft>
             </a:pPr>
             <a:r>
@@ -29899,7 +29899,7 @@
                 <a:spcPts val="0"/>
               </a:spcBef>
               <a:spcAft>
-                <a:spcPts val="1700"/>
+                <a:spcPts val="200"/>
               </a:spcAft>
             </a:pPr>
             <a:r>
@@ -29921,7 +29921,7 @@
                 <a:spcPts val="0"/>
               </a:spcBef>
               <a:spcAft>
-                <a:spcPts val="1700"/>
+                <a:spcPts val="200"/>
               </a:spcAft>
             </a:pPr>
             <a:r>
@@ -29943,7 +29943,7 @@
                 <a:spcPts val="0"/>
               </a:spcBef>
               <a:spcAft>
-                <a:spcPts val="1700"/>
+                <a:spcPts val="200"/>
               </a:spcAft>
             </a:pPr>
             <a:r>
@@ -29965,7 +29965,7 @@
                 <a:spcPts val="0"/>
               </a:spcBef>
               <a:spcAft>
-                <a:spcPts val="1700"/>
+                <a:spcPts val="200"/>
               </a:spcAft>
             </a:pPr>
             <a:r>
@@ -29987,7 +29987,7 @@
                 <a:spcPts val="0"/>
               </a:spcBef>
               <a:spcAft>
-                <a:spcPts val="1700"/>
+                <a:spcPts val="200"/>
               </a:spcAft>
             </a:pPr>
             <a:r>
@@ -31139,7 +31139,7 @@
         <p:spPr>
           <a:xfrm>
             <a:off x="91439" y="457200"/>
-            <a:ext cx="5852159" cy="6108700"/>
+            <a:ext cx="5852159" cy="2895600"/>
           </a:xfrm>
           <a:prstGeom prst="rect">
             <a:avLst/>
@@ -31160,7 +31160,7 @@
                 <a:spcPts val="0"/>
               </a:spcBef>
               <a:spcAft>
-                <a:spcPts val="1500"/>
+                <a:spcPts val="0"/>
               </a:spcAft>
             </a:pPr>
             <a:r>
@@ -31182,7 +31182,7 @@
                 <a:spcPts val="0"/>
               </a:spcBef>
               <a:spcAft>
-                <a:spcPts val="1400"/>
+                <a:spcPts val="0"/>
               </a:spcAft>
             </a:pPr>
             <a:r>
@@ -31204,7 +31204,7 @@
                 <a:spcPts val="0"/>
               </a:spcBef>
               <a:spcAft>
-                <a:spcPts val="1400"/>
+                <a:spcPts val="0"/>
               </a:spcAft>
             </a:pPr>
             <a:r>
@@ -31226,7 +31226,7 @@
                 <a:spcPts val="0"/>
               </a:spcBef>
               <a:spcAft>
-                <a:spcPts val="1400"/>
+                <a:spcPts val="0"/>
               </a:spcAft>
             </a:pPr>
             <a:r>
@@ -31248,7 +31248,7 @@
                 <a:spcPts val="0"/>
               </a:spcBef>
               <a:spcAft>
-                <a:spcPts val="1400"/>
+                <a:spcPts val="0"/>
               </a:spcAft>
             </a:pPr>
             <a:r>
@@ -31270,7 +31270,7 @@
                 <a:spcPts val="0"/>
               </a:spcBef>
               <a:spcAft>
-                <a:spcPts val="1400"/>
+                <a:spcPts val="0"/>
               </a:spcAft>
             </a:pPr>
             <a:r>
@@ -31292,7 +31292,7 @@
                 <a:spcPts val="0"/>
               </a:spcBef>
               <a:spcAft>
-                <a:spcPts val="1400"/>
+                <a:spcPts val="0"/>
               </a:spcAft>
             </a:pPr>
             <a:r>
@@ -31314,7 +31314,7 @@
                 <a:spcPts val="0"/>
               </a:spcBef>
               <a:spcAft>
-                <a:spcPts val="1400"/>
+                <a:spcPts val="0"/>
               </a:spcAft>
             </a:pPr>
             <a:r>
@@ -31336,7 +31336,7 @@
                 <a:spcPts val="0"/>
               </a:spcBef>
               <a:spcAft>
-                <a:spcPts val="1400"/>
+                <a:spcPts val="0"/>
               </a:spcAft>
             </a:pPr>
             <a:r>
@@ -31358,7 +31358,7 @@
                 <a:spcPts val="0"/>
               </a:spcBef>
               <a:spcAft>
-                <a:spcPts val="1400"/>
+                <a:spcPts val="0"/>
               </a:spcAft>
             </a:pPr>
             <a:r>
@@ -31380,7 +31380,7 @@
                 <a:spcPts val="0"/>
               </a:spcBef>
               <a:spcAft>
-                <a:spcPts val="1400"/>
+                <a:spcPts val="0"/>
               </a:spcAft>
             </a:pPr>
             <a:r>
@@ -31402,7 +31402,7 @@
                 <a:spcPts val="0"/>
               </a:spcBef>
               <a:spcAft>
-                <a:spcPts val="1400"/>
+                <a:spcPts val="0"/>
               </a:spcAft>
             </a:pPr>
             <a:r>
@@ -31424,7 +31424,7 @@
                 <a:spcPts val="0"/>
               </a:spcBef>
               <a:spcAft>
-                <a:spcPts val="1400"/>
+                <a:spcPts val="0"/>
               </a:spcAft>
             </a:pPr>
             <a:r>
@@ -31446,7 +31446,7 @@
                 <a:spcPts val="0"/>
               </a:spcBef>
               <a:spcAft>
-                <a:spcPts val="1400"/>
+                <a:spcPts val="0"/>
               </a:spcAft>
             </a:pPr>
             <a:r>
@@ -31468,7 +31468,7 @@
                 <a:spcPts val="0"/>
               </a:spcBef>
               <a:spcAft>
-                <a:spcPts val="1400"/>
+                <a:spcPts val="0"/>
               </a:spcAft>
             </a:pPr>
             <a:r>
@@ -31490,7 +31490,7 @@
                 <a:spcPts val="0"/>
               </a:spcBef>
               <a:spcAft>
-                <a:spcPts val="1400"/>
+                <a:spcPts val="0"/>
               </a:spcAft>
             </a:pPr>
             <a:r>
@@ -31512,7 +31512,7 @@
                 <a:spcPts val="0"/>
               </a:spcBef>
               <a:spcAft>
-                <a:spcPts val="1400"/>
+                <a:spcPts val="0"/>
               </a:spcAft>
             </a:pPr>
             <a:r>
@@ -31534,7 +31534,7 @@
                 <a:spcPts val="0"/>
               </a:spcBef>
               <a:spcAft>
-                <a:spcPts val="1400"/>
+                <a:spcPts val="0"/>
               </a:spcAft>
             </a:pPr>
             <a:r>
@@ -31580,7 +31580,7 @@
         <p:spPr>
           <a:xfrm>
             <a:off x="6035040" y="457200"/>
-            <a:ext cx="5852159" cy="6108700"/>
+            <a:ext cx="5852159" cy="3048000"/>
           </a:xfrm>
           <a:prstGeom prst="rect">
             <a:avLst/>
@@ -31601,7 +31601,7 @@
                 <a:spcPts val="0"/>
               </a:spcBef>
               <a:spcAft>
-                <a:spcPts val="1300"/>
+                <a:spcPts val="0"/>
               </a:spcAft>
             </a:pPr>
             <a:r>
@@ -31623,7 +31623,7 @@
                 <a:spcPts val="0"/>
               </a:spcBef>
               <a:spcAft>
-                <a:spcPts val="1300"/>
+                <a:spcPts val="0"/>
               </a:spcAft>
             </a:pPr>
             <a:r>
@@ -31645,7 +31645,7 @@
                 <a:spcPts val="0"/>
               </a:spcBef>
               <a:spcAft>
-                <a:spcPts val="1300"/>
+                <a:spcPts val="0"/>
               </a:spcAft>
             </a:pPr>
             <a:r>
@@ -31667,7 +31667,7 @@
                 <a:spcPts val="0"/>
               </a:spcBef>
               <a:spcAft>
-                <a:spcPts val="1300"/>
+                <a:spcPts val="0"/>
               </a:spcAft>
             </a:pPr>
             <a:r>
@@ -31689,7 +31689,7 @@
                 <a:spcPts val="0"/>
               </a:spcBef>
               <a:spcAft>
-                <a:spcPts val="1300"/>
+                <a:spcPts val="0"/>
               </a:spcAft>
             </a:pPr>
             <a:r>
@@ -31711,7 +31711,7 @@
                 <a:spcPts val="0"/>
               </a:spcBef>
               <a:spcAft>
-                <a:spcPts val="1300"/>
+                <a:spcPts val="0"/>
               </a:spcAft>
             </a:pPr>
             <a:r>
@@ -31733,7 +31733,7 @@
                 <a:spcPts val="0"/>
               </a:spcBef>
               <a:spcAft>
-                <a:spcPts val="1300"/>
+                <a:spcPts val="0"/>
               </a:spcAft>
             </a:pPr>
             <a:r>
@@ -31755,7 +31755,7 @@
                 <a:spcPts val="0"/>
               </a:spcBef>
               <a:spcAft>
-                <a:spcPts val="1300"/>
+                <a:spcPts val="0"/>
               </a:spcAft>
             </a:pPr>
             <a:r>
@@ -31777,7 +31777,7 @@
                 <a:spcPts val="0"/>
               </a:spcBef>
               <a:spcAft>
-                <a:spcPts val="1300"/>
+                <a:spcPts val="0"/>
               </a:spcAft>
             </a:pPr>
             <a:r>
@@ -31799,7 +31799,7 @@
                 <a:spcPts val="0"/>
               </a:spcBef>
               <a:spcAft>
-                <a:spcPts val="1300"/>
+                <a:spcPts val="0"/>
               </a:spcAft>
             </a:pPr>
             <a:r>
@@ -31821,7 +31821,7 @@
                 <a:spcPts val="0"/>
               </a:spcBef>
               <a:spcAft>
-                <a:spcPts val="1300"/>
+                <a:spcPts val="0"/>
               </a:spcAft>
             </a:pPr>
             <a:r>
@@ -31843,7 +31843,7 @@
                 <a:spcPts val="0"/>
               </a:spcBef>
               <a:spcAft>
-                <a:spcPts val="1300"/>
+                <a:spcPts val="0"/>
               </a:spcAft>
             </a:pPr>
             <a:r>
@@ -31865,7 +31865,7 @@
                 <a:spcPts val="0"/>
               </a:spcBef>
               <a:spcAft>
-                <a:spcPts val="1300"/>
+                <a:spcPts val="0"/>
               </a:spcAft>
             </a:pPr>
             <a:r>
@@ -31887,7 +31887,29 @@
                 <a:spcPts val="0"/>
               </a:spcBef>
               <a:spcAft>
+                <a:spcPts val="0"/>
+              </a:spcAft>
+            </a:pPr>
+            <a:r>
+              <a:rPr sz="900">
+                <a:solidFill>
+                  <a:srgbClr val="FFFFFF"/>
+                </a:solidFill>
+                <a:latin typeface="微软雅黑"/>
+              </a:rPr>
+              <a:t>• AI协作能力成为职场硬指标</a:t>
+            </a:r>
+          </a:p>
+          <a:p>
+            <a:pPr>
+              <a:lnSpc>
                 <a:spcPts val="1200"/>
+              </a:lnSpc>
+              <a:spcBef>
+                <a:spcPts val="0"/>
+              </a:spcBef>
+              <a:spcAft>
+                <a:spcPts val="0"/>
               </a:spcAft>
             </a:pPr>
             <a:r>
@@ -31897,7 +31919,7 @@
                 </a:solidFill>
                 <a:latin typeface="微软雅黑"/>
               </a:rPr>
-              <a:t>• AI协作能力成为职场硬指标</a:t>
+              <a:t>• 绩效评估纳入AI使用效果</a:t>
             </a:r>
           </a:p>
           <a:p>
@@ -31909,7 +31931,29 @@
                 <a:spcPts val="0"/>
               </a:spcBef>
               <a:spcAft>
+                <a:spcPts val="0"/>
+              </a:spcAft>
+            </a:pPr>
+            <a:r>
+              <a:rPr sz="900">
+                <a:solidFill>
+                  <a:srgbClr val="FFFFFF"/>
+                </a:solidFill>
+                <a:latin typeface="微软雅黑"/>
+              </a:rPr>
+              <a:t>• 轻量化集成与存量适配</a:t>
+            </a:r>
+          </a:p>
+          <a:p>
+            <a:pPr>
+              <a:lnSpc>
                 <a:spcPts val="1200"/>
+              </a:lnSpc>
+              <a:spcBef>
+                <a:spcPts val="0"/>
+              </a:spcBef>
+              <a:spcAft>
+                <a:spcPts val="0"/>
               </a:spcAft>
             </a:pPr>
             <a:r>
@@ -31919,7 +31963,7 @@
                 </a:solidFill>
                 <a:latin typeface="微软雅黑"/>
               </a:rPr>
-              <a:t>• 绩效评估纳入AI使用效果</a:t>
+              <a:t/>
             </a:r>
           </a:p>
           <a:p>
@@ -31931,73 +31975,29 @@
                 <a:spcPts val="0"/>
               </a:spcBef>
               <a:spcAft>
+                <a:spcPts val="0"/>
+              </a:spcAft>
+            </a:pPr>
+            <a:r>
+              <a:rPr sz="900">
+                <a:solidFill>
+                  <a:srgbClr val="FFFFFF"/>
+                </a:solidFill>
+                <a:latin typeface="微软雅黑"/>
+              </a:rPr>
+              <a:t>【4. 行业落地特征】</a:t>
+            </a:r>
+          </a:p>
+          <a:p>
+            <a:pPr>
+              <a:lnSpc>
                 <a:spcPts val="1200"/>
-              </a:spcAft>
-            </a:pPr>
-            <a:r>
-              <a:rPr sz="900">
-                <a:solidFill>
-                  <a:srgbClr val="FFFFFF"/>
-                </a:solidFill>
-                <a:latin typeface="微软雅黑"/>
-              </a:rPr>
-              <a:t>• 轻量化集成与存量适配</a:t>
-            </a:r>
-          </a:p>
-          <a:p>
-            <a:pPr>
-              <a:lnSpc>
-                <a:spcPts val="1200"/>
-              </a:lnSpc>
-              <a:spcBef>
-                <a:spcPts val="0"/>
-              </a:spcBef>
-              <a:spcAft>
-                <a:spcPts val="1200"/>
-              </a:spcAft>
-            </a:pPr>
-            <a:r>
-              <a:rPr sz="900">
-                <a:solidFill>
-                  <a:srgbClr val="FFFFFF"/>
-                </a:solidFill>
-                <a:latin typeface="微软雅黑"/>
-              </a:rPr>
-              <a:t/>
-            </a:r>
-          </a:p>
-          <a:p>
-            <a:pPr>
-              <a:lnSpc>
-                <a:spcPts val="1200"/>
-              </a:lnSpc>
-              <a:spcBef>
-                <a:spcPts val="0"/>
-              </a:spcBef>
-              <a:spcAft>
-                <a:spcPts val="1200"/>
-              </a:spcAft>
-            </a:pPr>
-            <a:r>
-              <a:rPr sz="900">
-                <a:solidFill>
-                  <a:srgbClr val="FFFFFF"/>
-                </a:solidFill>
-                <a:latin typeface="微软雅黑"/>
-              </a:rPr>
-              <a:t>【4. 行业落地特征】</a:t>
-            </a:r>
-          </a:p>
-          <a:p>
-            <a:pPr>
-              <a:lnSpc>
-                <a:spcPts val="1200"/>
-              </a:lnSpc>
-              <a:spcBef>
-                <a:spcPts val="0"/>
-              </a:spcBef>
-              <a:spcAft>
-                <a:spcPts val="1200"/>
+              </a:lnSpc>
+              <a:spcBef>
+                <a:spcPts val="0"/>
+              </a:spcBef>
+              <a:spcAft>
+                <a:spcPts val="0"/>
               </a:spcAft>
             </a:pPr>
             <a:r>

--- a/A2A协议2.0_AI智能体演进路线图_2026_V52_无水印版.pptx
+++ b/A2A协议2.0_AI智能体演进路线图_2026_V52_无水印版.pptx
@@ -39211,7 +39211,7 @@
                 <a:spcPts val="0"/>
               </a:spcBef>
               <a:spcAft>
-                <a:spcPts val="300"/>
+                <a:spcPts val="0"/>
               </a:spcAft>
             </a:pPr>
             <a:r>
@@ -39233,7 +39233,7 @@
                 <a:spcPts val="0"/>
               </a:spcBef>
               <a:spcAft>
-                <a:spcPts val="300"/>
+                <a:spcPts val="0"/>
               </a:spcAft>
             </a:pPr>
             <a:r>
@@ -39243,7 +39243,7 @@
                 </a:solidFill>
                 <a:latin typeface="微软雅黑"/>
               </a:rPr>
-              <a:t/>
+              <a:t>【1. 核心范式转变】</a:t>
             </a:r>
           </a:p>
           <a:p>
@@ -39255,7 +39255,7 @@
                 <a:spcPts val="0"/>
               </a:spcBef>
               <a:spcAft>
-                <a:spcPts val="300"/>
+                <a:spcPts val="0"/>
               </a:spcAft>
             </a:pPr>
             <a:r>
@@ -39265,7 +39265,7 @@
                 </a:solidFill>
                 <a:latin typeface="微软雅黑"/>
               </a:rPr>
-              <a:t>【1. 核心范式转变】</a:t>
+              <a:t>• 从Chatbot到AI Agent的代际跃迁</a:t>
             </a:r>
           </a:p>
           <a:p>
@@ -39277,7 +39277,7 @@
                 <a:spcPts val="0"/>
               </a:spcBef>
               <a:spcAft>
-                <a:spcPts val="300"/>
+                <a:spcPts val="0"/>
               </a:spcAft>
             </a:pPr>
             <a:r>
@@ -39287,7 +39287,7 @@
                 </a:solidFill>
                 <a:latin typeface="微软雅黑"/>
               </a:rPr>
-              <a:t>• 从Chatbot到AI Agent</a:t>
+              <a:t>• 企业级落地，降低30%-50%人力成本</a:t>
             </a:r>
           </a:p>
           <a:p>
@@ -39299,7 +39299,7 @@
                 <a:spcPts val="0"/>
               </a:spcBef>
               <a:spcAft>
-                <a:spcPts val="200"/>
+                <a:spcPts val="0"/>
               </a:spcAft>
             </a:pPr>
             <a:r>
@@ -39309,7 +39309,7 @@
                 </a:solidFill>
                 <a:latin typeface="微软雅黑"/>
               </a:rPr>
-              <a:t>• 企业级落地，降低30%-50%人力成本</a:t>
+              <a:t>• 任务成功率99.9%，生产级可用</a:t>
             </a:r>
           </a:p>
           <a:p>
@@ -39321,7 +39321,7 @@
                 <a:spcPts val="0"/>
               </a:spcBef>
               <a:spcAft>
-                <a:spcPts val="200"/>
+                <a:spcPts val="0"/>
               </a:spcAft>
             </a:pPr>
             <a:r>
@@ -39331,7 +39331,7 @@
                 </a:solidFill>
                 <a:latin typeface="微软雅黑"/>
               </a:rPr>
-              <a:t/>
+              <a:t>【2. 认知与推理能力】</a:t>
             </a:r>
           </a:p>
           <a:p>
@@ -39343,7 +39343,7 @@
                 <a:spcPts val="0"/>
               </a:spcBef>
               <a:spcAft>
-                <a:spcPts val="200"/>
+                <a:spcPts val="0"/>
               </a:spcAft>
             </a:pPr>
             <a:r>
@@ -39353,7 +39353,7 @@
                 </a:solidFill>
                 <a:latin typeface="微软雅黑"/>
               </a:rPr>
-              <a:t>【2. 认知与推理能力】</a:t>
+              <a:t>• 超长上下文窗口：1M Token+（Qwen3.8/Kimi K3）</a:t>
             </a:r>
           </a:p>
           <a:p>
@@ -39365,7 +39365,7 @@
                 <a:spcPts val="0"/>
               </a:spcBef>
               <a:spcAft>
-                <a:spcPts val="200"/>
+                <a:spcPts val="0"/>
               </a:spcAft>
             </a:pPr>
             <a:r>
@@ -39375,7 +39375,7 @@
                 </a:solidFill>
                 <a:latin typeface="微软雅黑"/>
               </a:rPr>
-              <a:t>• 超长上下文窗口：1M Token+（Qwen3.8/Kimi K3）</a:t>
+              <a:t>• 思维链推理，GPQA Diamond得分94.6%</a:t>
             </a:r>
           </a:p>
           <a:p>
@@ -39387,7 +39387,7 @@
                 <a:spcPts val="0"/>
               </a:spcBef>
               <a:spcAft>
-                <a:spcPts val="200"/>
+                <a:spcPts val="0"/>
               </a:spcAft>
             </a:pPr>
             <a:r>
@@ -39397,7 +39397,7 @@
                 </a:solidFill>
                 <a:latin typeface="微软雅黑"/>
               </a:rPr>
-              <a:t>• 思维链推理能力</a:t>
+              <a:t>• 数学/科学/代码多域推理闭环</a:t>
             </a:r>
           </a:p>
           <a:p>
@@ -39409,7 +39409,7 @@
                 <a:spcPts val="0"/>
               </a:spcBef>
               <a:spcAft>
-                <a:spcPts val="200"/>
+                <a:spcPts val="0"/>
               </a:spcAft>
             </a:pPr>
             <a:r>
@@ -39419,7 +39419,7 @@
                 </a:solidFill>
                 <a:latin typeface="微软雅黑"/>
               </a:rPr>
-              <a:t/>
+              <a:t>【3. 多模态与内容生成】</a:t>
             </a:r>
           </a:p>
           <a:p>
@@ -39431,7 +39431,7 @@
                 <a:spcPts val="0"/>
               </a:spcBef>
               <a:spcAft>
-                <a:spcPts val="200"/>
+                <a:spcPts val="0"/>
               </a:spcAft>
             </a:pPr>
             <a:r>
@@ -39441,7 +39441,7 @@
                 </a:solidFill>
                 <a:latin typeface="微软雅黑"/>
               </a:rPr>
-              <a:t>【3. 多模态与内容生成】</a:t>
+              <a:t>• 视频生成普及化（15秒高质量）</a:t>
             </a:r>
           </a:p>
           <a:p>
@@ -39453,7 +39453,7 @@
                 <a:spcPts val="0"/>
               </a:spcBef>
               <a:spcAft>
-                <a:spcPts val="200"/>
+                <a:spcPts val="0"/>
               </a:spcAft>
             </a:pPr>
             <a:r>
@@ -39463,7 +39463,7 @@
                 </a:solidFill>
                 <a:latin typeface="微软雅黑"/>
               </a:rPr>
-              <a:t>• 视频生成普及化（15秒高质量）</a:t>
+              <a:t>• 实时交互数字人，端到端时延&lt;300ms</a:t>
             </a:r>
           </a:p>
           <a:p>
@@ -39475,7 +39475,7 @@
                 <a:spcPts val="0"/>
               </a:spcBef>
               <a:spcAft>
-                <a:spcPts val="200"/>
+                <a:spcPts val="0"/>
               </a:spcAft>
             </a:pPr>
             <a:r>
@@ -39485,7 +39485,7 @@
                 </a:solidFill>
                 <a:latin typeface="微软雅黑"/>
               </a:rPr>
-              <a:t>• 实时交互数字人</a:t>
+              <a:t>• 文生3D/4D资产进入生产管线</a:t>
             </a:r>
           </a:p>
           <a:p>
@@ -39497,7 +39497,7 @@
                 <a:spcPts val="0"/>
               </a:spcBef>
               <a:spcAft>
-                <a:spcPts val="200"/>
+                <a:spcPts val="0"/>
               </a:spcAft>
             </a:pPr>
             <a:r>
@@ -39507,7 +39507,7 @@
                 </a:solidFill>
                 <a:latin typeface="微软雅黑"/>
               </a:rPr>
-              <a:t/>
+              <a:t>【4. 物理世界交互】</a:t>
             </a:r>
           </a:p>
           <a:p>
@@ -39519,7 +39519,7 @@
                 <a:spcPts val="0"/>
               </a:spcBef>
               <a:spcAft>
-                <a:spcPts val="200"/>
+                <a:spcPts val="0"/>
               </a:spcAft>
             </a:pPr>
             <a:r>
@@ -39529,7 +39529,7 @@
                 </a:solidFill>
                 <a:latin typeface="微软雅黑"/>
               </a:rPr>
-              <a:t>【4. 物理世界交互】</a:t>
+              <a:t>• 具身智能商业化（2026上半年中国产量超4万台）</a:t>
             </a:r>
           </a:p>
           <a:p>
@@ -39541,7 +39541,7 @@
                 <a:spcPts val="0"/>
               </a:spcBef>
               <a:spcAft>
-                <a:spcPts val="200"/>
+                <a:spcPts val="0"/>
               </a:spcAft>
             </a:pPr>
             <a:r>
@@ -39551,7 +39551,7 @@
                 </a:solidFill>
                 <a:latin typeface="微软雅黑"/>
               </a:rPr>
-              <a:t>• 具身智能商业化（2026上半年中国产量超4万台）</a:t>
+              <a:t>• 世界模型崛起，物理一致性误差&lt;5%</a:t>
             </a:r>
           </a:p>
           <a:p>
@@ -39573,7 +39573,73 @@
                 </a:solidFill>
                 <a:latin typeface="微软雅黑"/>
               </a:rPr>
-              <a:t>• 世界模型崛起</a:t>
+              <a:t>• 实时交互数字人覆盖客服/导购/教育</a:t>
+            </a:r>
+          </a:p>
+          <a:p>
+            <a:pPr>
+              <a:lnSpc>
+                <a:spcPts val="1200"/>
+              </a:lnSpc>
+              <a:spcBef>
+                <a:spcPts val="0"/>
+              </a:spcBef>
+              <a:spcAft>
+                <a:spcPts val="0"/>
+              </a:spcAft>
+            </a:pPr>
+            <a:r>
+              <a:rPr sz="900">
+                <a:solidFill>
+                  <a:srgbClr val="FFFFFF"/>
+                </a:solidFill>
+                <a:latin typeface="微软雅黑"/>
+              </a:rPr>
+              <a:t>【5. 工程化与可靠性】</a:t>
+            </a:r>
+          </a:p>
+          <a:p>
+            <a:pPr>
+              <a:lnSpc>
+                <a:spcPts val="1200"/>
+              </a:lnSpc>
+              <a:spcBef>
+                <a:spcPts val="0"/>
+              </a:spcBef>
+              <a:spcAft>
+                <a:spcPts val="0"/>
+              </a:spcAft>
+            </a:pPr>
+            <a:r>
+              <a:rPr sz="900">
+                <a:solidFill>
+                  <a:srgbClr val="FFFFFF"/>
+                </a:solidFill>
+                <a:latin typeface="微软雅黑"/>
+              </a:rPr>
+              <a:t>• 智能体可观测性：全链路追踪覆盖率100%</a:t>
+            </a:r>
+          </a:p>
+          <a:p>
+            <a:pPr>
+              <a:lnSpc>
+                <a:spcPts val="1200"/>
+              </a:lnSpc>
+              <a:spcBef>
+                <a:spcPts val="0"/>
+              </a:spcBef>
+              <a:spcAft>
+                <a:spcPts val="0"/>
+              </a:spcAft>
+            </a:pPr>
+            <a:r>
+              <a:rPr sz="900">
+                <a:solidFill>
+                  <a:srgbClr val="FFFFFF"/>
+                </a:solidFill>
+                <a:latin typeface="微软雅黑"/>
+              </a:rPr>
+              <a:t>• 灰度发布/回滚/熔断成为标准配置</a:t>
             </a:r>
           </a:p>
         </p:txBody>
@@ -39608,7 +39674,7 @@
                 <a:spcPts val="0"/>
               </a:spcBef>
               <a:spcAft>
-                <a:spcPts val="300"/>
+                <a:spcPts val="0"/>
               </a:spcAft>
             </a:pPr>
             <a:r>
@@ -39630,7 +39696,7 @@
                 <a:spcPts val="0"/>
               </a:spcBef>
               <a:spcAft>
-                <a:spcPts val="300"/>
+                <a:spcPts val="0"/>
               </a:spcAft>
             </a:pPr>
             <a:r>
@@ -39640,7 +39706,7 @@
                 </a:solidFill>
                 <a:latin typeface="微软雅黑"/>
               </a:rPr>
-              <a:t/>
+              <a:t>【隐性知识缺失】</a:t>
             </a:r>
           </a:p>
           <a:p>
@@ -39652,7 +39718,7 @@
                 <a:spcPts val="0"/>
               </a:spcBef>
               <a:spcAft>
-                <a:spcPts val="300"/>
+                <a:spcPts val="0"/>
               </a:spcAft>
             </a:pPr>
             <a:r>
@@ -39662,7 +39728,7 @@
                 </a:solidFill>
                 <a:latin typeface="微软雅黑"/>
               </a:rPr>
-              <a:t>【隐性知识缺失】</a:t>
+              <a:t>• 难以获取直觉、经验和情感判断</a:t>
             </a:r>
           </a:p>
           <a:p>
@@ -39674,7 +39740,7 @@
                 <a:spcPts val="0"/>
               </a:spcBef>
               <a:spcAft>
-                <a:spcPts val="300"/>
+                <a:spcPts val="0"/>
               </a:spcAft>
             </a:pPr>
             <a:r>
@@ -39684,7 +39750,7 @@
                 </a:solidFill>
                 <a:latin typeface="微软雅黑"/>
               </a:rPr>
-              <a:t>• 难以获取直觉、经验和情感判断</a:t>
+              <a:t>• 老焊工的"手感"、医生的瞬间临床直觉</a:t>
             </a:r>
           </a:p>
           <a:p>
@@ -39696,7 +39762,7 @@
                 <a:spcPts val="0"/>
               </a:spcBef>
               <a:spcAft>
-                <a:spcPts val="200"/>
+                <a:spcPts val="0"/>
               </a:spcAft>
             </a:pPr>
             <a:r>
@@ -39706,7 +39772,7 @@
                 </a:solidFill>
                 <a:latin typeface="微软雅黑"/>
               </a:rPr>
-              <a:t>• 老焊工的"手感"、医生的瞬间临床直觉</a:t>
+              <a:t>• 隐性经验数字化仍是开放难题</a:t>
             </a:r>
           </a:p>
           <a:p>
@@ -39718,7 +39784,7 @@
                 <a:spcPts val="0"/>
               </a:spcBef>
               <a:spcAft>
-                <a:spcPts val="200"/>
+                <a:spcPts val="0"/>
               </a:spcAft>
             </a:pPr>
             <a:r>
@@ -39728,7 +39794,7 @@
                 </a:solidFill>
                 <a:latin typeface="微软雅黑"/>
               </a:rPr>
-              <a:t/>
+              <a:t>【物理规则盲区】</a:t>
             </a:r>
           </a:p>
           <a:p>
@@ -39740,7 +39806,7 @@
                 <a:spcPts val="0"/>
               </a:spcBef>
               <a:spcAft>
-                <a:spcPts val="200"/>
+                <a:spcPts val="0"/>
               </a:spcAft>
             </a:pPr>
             <a:r>
@@ -39750,7 +39816,7 @@
                 </a:solidFill>
                 <a:latin typeface="微软雅黑"/>
               </a:rPr>
-              <a:t>【物理规则盲区】</a:t>
+              <a:t>• 复杂物理世界互动仍可能出错</a:t>
             </a:r>
           </a:p>
           <a:p>
@@ -39762,7 +39828,7 @@
                 <a:spcPts val="0"/>
               </a:spcBef>
               <a:spcAft>
-                <a:spcPts val="200"/>
+                <a:spcPts val="0"/>
               </a:spcAft>
             </a:pPr>
             <a:r>
@@ -39772,7 +39838,7 @@
                 </a:solidFill>
                 <a:latin typeface="微软雅黑"/>
               </a:rPr>
-              <a:t>• 复杂物理世界互动仍可能出错</a:t>
+              <a:t>• 尚未完全理解所有物理细节</a:t>
             </a:r>
           </a:p>
           <a:p>
@@ -39784,7 +39850,7 @@
                 <a:spcPts val="0"/>
               </a:spcBef>
               <a:spcAft>
-                <a:spcPts val="200"/>
+                <a:spcPts val="0"/>
               </a:spcAft>
             </a:pPr>
             <a:r>
@@ -39794,7 +39860,7 @@
                 </a:solidFill>
                 <a:latin typeface="微软雅黑"/>
               </a:rPr>
-              <a:t>• 尚未完全理解所有物理细节</a:t>
+              <a:t>• 长时序物理推演误差累积</a:t>
             </a:r>
           </a:p>
           <a:p>
@@ -39806,7 +39872,7 @@
                 <a:spcPts val="0"/>
               </a:spcBef>
               <a:spcAft>
-                <a:spcPts val="200"/>
+                <a:spcPts val="0"/>
               </a:spcAft>
             </a:pPr>
             <a:r>
@@ -39816,7 +39882,7 @@
                 </a:solidFill>
                 <a:latin typeface="微软雅黑"/>
               </a:rPr>
-              <a:t/>
+              <a:t>【高风险决策限制】</a:t>
             </a:r>
           </a:p>
           <a:p>
@@ -39828,7 +39894,7 @@
                 <a:spcPts val="0"/>
               </a:spcBef>
               <a:spcAft>
-                <a:spcPts val="200"/>
+                <a:spcPts val="0"/>
               </a:spcAft>
             </a:pPr>
             <a:r>
@@ -39838,7 +39904,7 @@
                 </a:solidFill>
                 <a:latin typeface="微软雅黑"/>
               </a:rPr>
-              <a:t>【高风险决策限制】</a:t>
+              <a:t>• 麻醉、急诊、司法审判需人类主导</a:t>
             </a:r>
           </a:p>
           <a:p>
@@ -39850,7 +39916,7 @@
                 <a:spcPts val="0"/>
               </a:spcBef>
               <a:spcAft>
-                <a:spcPts val="200"/>
+                <a:spcPts val="0"/>
               </a:spcAft>
             </a:pPr>
             <a:r>
@@ -39860,7 +39926,7 @@
                 </a:solidFill>
                 <a:latin typeface="微软雅黑"/>
               </a:rPr>
-              <a:t>• 麻醉、急诊、司法审判需人类主导</a:t>
+              <a:t>• 生命攸关决策必须有人类把关</a:t>
             </a:r>
           </a:p>
           <a:p>
@@ -39872,7 +39938,7 @@
                 <a:spcPts val="0"/>
               </a:spcBef>
               <a:spcAft>
-                <a:spcPts val="200"/>
+                <a:spcPts val="0"/>
               </a:spcAft>
             </a:pPr>
             <a:r>
@@ -39882,7 +39948,7 @@
                 </a:solidFill>
                 <a:latin typeface="微软雅黑"/>
               </a:rPr>
-              <a:t>• 生命攸关决策必须有人类把关</a:t>
+              <a:t>• 高风险场景强制人类在环（HITL）</a:t>
             </a:r>
           </a:p>
           <a:p>
@@ -39894,7 +39960,7 @@
                 <a:spcPts val="0"/>
               </a:spcBef>
               <a:spcAft>
-                <a:spcPts val="200"/>
+                <a:spcPts val="0"/>
               </a:spcAft>
             </a:pPr>
             <a:r>
@@ -39904,7 +39970,7 @@
                 </a:solidFill>
                 <a:latin typeface="微软雅黑"/>
               </a:rPr>
-              <a:t/>
+              <a:t>【安全与幻觉风险】</a:t>
             </a:r>
           </a:p>
           <a:p>
@@ -39916,7 +39982,7 @@
                 <a:spcPts val="0"/>
               </a:spcBef>
               <a:spcAft>
-                <a:spcPts val="200"/>
+                <a:spcPts val="0"/>
               </a:spcAft>
             </a:pPr>
             <a:r>
@@ -39926,7 +39992,7 @@
                 </a:solidFill>
                 <a:latin typeface="微软雅黑"/>
               </a:rPr>
-              <a:t>【安全与幻觉风险】</a:t>
+              <a:t>• 多步骤真实世界任务仍有失败风险</a:t>
             </a:r>
           </a:p>
           <a:p>
@@ -39938,7 +40004,7 @@
                 <a:spcPts val="0"/>
               </a:spcBef>
               <a:spcAft>
-                <a:spcPts val="200"/>
+                <a:spcPts val="0"/>
               </a:spcAft>
             </a:pPr>
             <a:r>
@@ -39948,7 +40014,7 @@
                 </a:solidFill>
                 <a:latin typeface="微软雅黑"/>
               </a:rPr>
-              <a:t>• 多步骤真实世界任务仍有失败风险</a:t>
+              <a:t>• AI安全事故随应用增加而上升（2025年全球362起，+55%）</a:t>
             </a:r>
           </a:p>
           <a:p>
@@ -39970,7 +40036,73 @@
                 </a:solidFill>
                 <a:latin typeface="微软雅黑"/>
               </a:rPr>
-              <a:t>• AI安全事故数量随应用增加而上升（2025年全球362起，同比+55%）</a:t>
+              <a:t>• 幻觉率降至&lt;1%但长尾风险仍在</a:t>
+            </a:r>
+          </a:p>
+          <a:p>
+            <a:pPr>
+              <a:lnSpc>
+                <a:spcPts val="1200"/>
+              </a:lnSpc>
+              <a:spcBef>
+                <a:spcPts val="0"/>
+              </a:spcBef>
+              <a:spcAft>
+                <a:spcPts val="0"/>
+              </a:spcAft>
+            </a:pPr>
+            <a:r>
+              <a:rPr sz="900">
+                <a:solidFill>
+                  <a:srgbClr val="FFFFFF"/>
+                </a:solidFill>
+                <a:latin typeface="微软雅黑"/>
+              </a:rPr>
+              <a:t>【应对路径】</a:t>
+            </a:r>
+          </a:p>
+          <a:p>
+            <a:pPr>
+              <a:lnSpc>
+                <a:spcPts val="1200"/>
+              </a:lnSpc>
+              <a:spcBef>
+                <a:spcPts val="0"/>
+              </a:spcBef>
+              <a:spcAft>
+                <a:spcPts val="0"/>
+              </a:spcAft>
+            </a:pPr>
+            <a:r>
+              <a:rPr sz="900">
+                <a:solidFill>
+                  <a:srgbClr val="FFFFFF"/>
+                </a:solidFill>
+                <a:latin typeface="微软雅黑"/>
+              </a:rPr>
+              <a:t>• 护栏/红队/形式化验证三层防御</a:t>
+            </a:r>
+          </a:p>
+          <a:p>
+            <a:pPr>
+              <a:lnSpc>
+                <a:spcPts val="1200"/>
+              </a:lnSpc>
+              <a:spcBef>
+                <a:spcPts val="0"/>
+              </a:spcBef>
+              <a:spcAft>
+                <a:spcPts val="0"/>
+              </a:spcAft>
+            </a:pPr>
+            <a:r>
+              <a:rPr sz="900">
+                <a:solidFill>
+                  <a:srgbClr val="FFFFFF"/>
+                </a:solidFill>
+                <a:latin typeface="微软雅黑"/>
+              </a:rPr>
+              <a:t>• 保险/审计/追责制度同步建设</a:t>
             </a:r>
           </a:p>
         </p:txBody>
@@ -39984,7 +40116,7 @@
         <p:spPr>
           <a:xfrm>
             <a:off x="91439" y="3566159"/>
-            <a:ext cx="5852159" cy="2895600"/>
+            <a:ext cx="5852159" cy="2743200"/>
           </a:xfrm>
           <a:prstGeom prst="rect">
             <a:avLst/>
@@ -40037,7 +40169,7 @@
                 </a:solidFill>
                 <a:latin typeface="微软雅黑"/>
               </a:rPr>
-              <a:t/>
+              <a:t>【1. 核心学习能力】</a:t>
             </a:r>
           </a:p>
           <a:p>
@@ -40059,7 +40191,7 @@
                 </a:solidFill>
                 <a:latin typeface="微软雅黑"/>
               </a:rPr>
-              <a:t>【1. 核心学习能力】</a:t>
+              <a:t>• 大规模增量学习（Qwen3.8 2.4T参数MoE）</a:t>
             </a:r>
           </a:p>
           <a:p>
@@ -40081,7 +40213,7 @@
                 </a:solidFill>
                 <a:latin typeface="微软雅黑"/>
               </a:rPr>
-              <a:t>• 大规模增量学习（Qwen3.8 2.4T参数MoE）</a:t>
+              <a:t>• LoRA微调（Qwen3.8-Flash 125B参数）</a:t>
             </a:r>
           </a:p>
           <a:p>
@@ -40103,7 +40235,7 @@
                 </a:solidFill>
                 <a:latin typeface="微软雅黑"/>
               </a:rPr>
-              <a:t>• LoRA微调技术（Qwen3.8-Flash 125B参数）</a:t>
+              <a:t>• 跨场景知识迁移，负迁移率&lt;3%</a:t>
             </a:r>
           </a:p>
           <a:p>
@@ -40125,7 +40257,7 @@
                 </a:solidFill>
                 <a:latin typeface="微软雅黑"/>
               </a:rPr>
-              <a:t>• 跨场景知识迁移能力</a:t>
+              <a:t>【2. 学习范式演进】</a:t>
             </a:r>
           </a:p>
           <a:p>
@@ -40147,7 +40279,7 @@
                 </a:solidFill>
                 <a:latin typeface="微软雅黑"/>
               </a:rPr>
-              <a:t/>
+              <a:t>• 世界模型崛起（智源"悟界"）</a:t>
             </a:r>
           </a:p>
           <a:p>
@@ -40169,7 +40301,7 @@
                 </a:solidFill>
                 <a:latin typeface="微软雅黑"/>
               </a:rPr>
-              <a:t>【2. 学习范式演进】</a:t>
+              <a:t>• 下一状态预测（NSP）成为预训练目标</a:t>
             </a:r>
           </a:p>
           <a:p>
@@ -40191,7 +40323,7 @@
                 </a:solidFill>
                 <a:latin typeface="微软雅黑"/>
               </a:rPr>
-              <a:t>• 世界模型崛起（智源"悟界"）</a:t>
+              <a:t>• 元学习与自我迭代（HYPERAGENTS）</a:t>
             </a:r>
           </a:p>
           <a:p>
@@ -40213,7 +40345,7 @@
                 </a:solidFill>
                 <a:latin typeface="微软雅黑"/>
               </a:rPr>
-              <a:t>• 下一状态预测（NSP）</a:t>
+              <a:t>【3. 实际应用】</a:t>
             </a:r>
           </a:p>
           <a:p>
@@ -40235,7 +40367,7 @@
                 </a:solidFill>
                 <a:latin typeface="微软雅黑"/>
               </a:rPr>
-              <a:t>• 元学习与自我迭代（HYPERAGENTS）</a:t>
+              <a:t>• 私有化RAG知识库深度适配</a:t>
             </a:r>
           </a:p>
           <a:p>
@@ -40257,7 +40389,7 @@
                 </a:solidFill>
                 <a:latin typeface="微软雅黑"/>
               </a:rPr>
-              <a:t/>
+              <a:t>• 从"操作员"→"系统架构师"角色跃迁</a:t>
             </a:r>
           </a:p>
           <a:p>
@@ -40279,7 +40411,7 @@
                 </a:solidFill>
                 <a:latin typeface="微软雅黑"/>
               </a:rPr>
-              <a:t>【3. 实际应用】</a:t>
+              <a:t>• 企业知识库更新时延&lt;24小时</a:t>
             </a:r>
           </a:p>
           <a:p>
@@ -40301,7 +40433,7 @@
                 </a:solidFill>
                 <a:latin typeface="微软雅黑"/>
               </a:rPr>
-              <a:t>• 私有化RAG知识库深度适配</a:t>
+              <a:t>【4. 学习效率提升】</a:t>
             </a:r>
           </a:p>
           <a:p>
@@ -40323,7 +40455,7 @@
                 </a:solidFill>
                 <a:latin typeface="微软雅黑"/>
               </a:rPr>
-              <a:t>• 从"操作员"→"系统架构师"</a:t>
+              <a:t>• 少样本学习：少量数据快速掌握新技能</a:t>
             </a:r>
           </a:p>
           <a:p>
@@ -40345,7 +40477,7 @@
                 </a:solidFill>
                 <a:latin typeface="微软雅黑"/>
               </a:rPr>
-              <a:t/>
+              <a:t>• 零样本学习：无需训练即可完成新任务</a:t>
             </a:r>
           </a:p>
           <a:p>
@@ -40367,7 +40499,7 @@
                 </a:solidFill>
                 <a:latin typeface="微软雅黑"/>
               </a:rPr>
-              <a:t>【4. 学习效率提升】</a:t>
+              <a:t>• 课程学习/数据配比自动化调优</a:t>
             </a:r>
           </a:p>
           <a:p>
@@ -40389,29 +40521,7 @@
                 </a:solidFill>
                 <a:latin typeface="微软雅黑"/>
               </a:rPr>
-              <a:t>• 少样本学习：用少量数据快速掌握新技能</a:t>
-            </a:r>
-          </a:p>
-          <a:p>
-            <a:pPr>
-              <a:lnSpc>
-                <a:spcPts val="1200"/>
-              </a:lnSpc>
-              <a:spcBef>
-                <a:spcPts val="0"/>
-              </a:spcBef>
-              <a:spcAft>
-                <a:spcPts val="0"/>
-              </a:spcAft>
-            </a:pPr>
-            <a:r>
-              <a:rPr sz="900">
-                <a:solidFill>
-                  <a:srgbClr val="FFFFFF"/>
-                </a:solidFill>
-                <a:latin typeface="微软雅黑"/>
-              </a:rPr>
-              <a:t>• 零样本学习：无需训练即可完成新任务</a:t>
+              <a:t>• 合成数据占比达40%，质量过滤闭环</a:t>
             </a:r>
           </a:p>
         </p:txBody>
@@ -40425,7 +40535,7 @@
         <p:spPr>
           <a:xfrm>
             <a:off x="6035040" y="3566159"/>
-            <a:ext cx="5852159" cy="3009900"/>
+            <a:ext cx="5852159" cy="2743200"/>
           </a:xfrm>
           <a:prstGeom prst="rect">
             <a:avLst/>
@@ -40446,7 +40556,7 @@
                 <a:spcPts val="0"/>
               </a:spcBef>
               <a:spcAft>
-                <a:spcPts val="300"/>
+                <a:spcPts val="0"/>
               </a:spcAft>
             </a:pPr>
             <a:r>
@@ -40468,7 +40578,7 @@
                 <a:spcPts val="0"/>
               </a:spcBef>
               <a:spcAft>
-                <a:spcPts val="300"/>
+                <a:spcPts val="0"/>
               </a:spcAft>
             </a:pPr>
             <a:r>
@@ -40478,7 +40588,7 @@
                 </a:solidFill>
                 <a:latin typeface="微软雅黑"/>
               </a:rPr>
-              <a:t/>
+              <a:t>【1. 推理类型】</a:t>
             </a:r>
           </a:p>
           <a:p>
@@ -40490,7 +40600,7 @@
                 <a:spcPts val="0"/>
               </a:spcBef>
               <a:spcAft>
-                <a:spcPts val="300"/>
+                <a:spcPts val="0"/>
               </a:spcAft>
             </a:pPr>
             <a:r>
@@ -40500,7 +40610,7 @@
                 </a:solidFill>
                 <a:latin typeface="微软雅黑"/>
               </a:rPr>
-              <a:t>【1. 推理类型】</a:t>
+              <a:t>• 逻辑推理：基于规则和逻辑</a:t>
             </a:r>
           </a:p>
           <a:p>
@@ -40512,7 +40622,7 @@
                 <a:spcPts val="0"/>
               </a:spcBef>
               <a:spcAft>
-                <a:spcPts val="300"/>
+                <a:spcPts val="0"/>
               </a:spcAft>
             </a:pPr>
             <a:r>
@@ -40522,7 +40632,7 @@
                 </a:solidFill>
                 <a:latin typeface="微软雅黑"/>
               </a:rPr>
-              <a:t>• 逻辑推理：基于规则和逻辑</a:t>
+              <a:t>• 数学推理：解决数学问题</a:t>
             </a:r>
           </a:p>
           <a:p>
@@ -40534,7 +40644,7 @@
                 <a:spcPts val="0"/>
               </a:spcBef>
               <a:spcAft>
-                <a:spcPts val="300"/>
+                <a:spcPts val="0"/>
               </a:spcAft>
             </a:pPr>
             <a:r>
@@ -40544,7 +40654,7 @@
                 </a:solidFill>
                 <a:latin typeface="微软雅黑"/>
               </a:rPr>
-              <a:t>• 数学推理：解决数学问题</a:t>
+              <a:t>• 科学推理：提出假设并验证</a:t>
             </a:r>
           </a:p>
           <a:p>
@@ -40556,7 +40666,7 @@
                 <a:spcPts val="0"/>
               </a:spcBef>
               <a:spcAft>
-                <a:spcPts val="300"/>
+                <a:spcPts val="0"/>
               </a:spcAft>
             </a:pPr>
             <a:r>
@@ -40566,7 +40676,7 @@
                 </a:solidFill>
                 <a:latin typeface="微软雅黑"/>
               </a:rPr>
-              <a:t>• 科学推理：提出假设并验证</a:t>
+              <a:t>• 深度推理：复杂问题深层推理</a:t>
             </a:r>
           </a:p>
           <a:p>
@@ -40578,7 +40688,7 @@
                 <a:spcPts val="0"/>
               </a:spcBef>
               <a:spcAft>
-                <a:spcPts val="300"/>
+                <a:spcPts val="0"/>
               </a:spcAft>
             </a:pPr>
             <a:r>
@@ -40588,7 +40698,7 @@
                 </a:solidFill>
                 <a:latin typeface="微软雅黑"/>
               </a:rPr>
-              <a:t>• 深度推理：复杂问题深层推理</a:t>
+              <a:t>【2. 推理方法】</a:t>
             </a:r>
           </a:p>
           <a:p>
@@ -40600,7 +40710,7 @@
                 <a:spcPts val="0"/>
               </a:spcBef>
               <a:spcAft>
-                <a:spcPts val="300"/>
+                <a:spcPts val="0"/>
               </a:spcAft>
             </a:pPr>
             <a:r>
@@ -40610,7 +40720,7 @@
                 </a:solidFill>
                 <a:latin typeface="微软雅黑"/>
               </a:rPr>
-              <a:t/>
+              <a:t>• 演绎/归纳/类比/溯因推理</a:t>
             </a:r>
           </a:p>
           <a:p>
@@ -40622,7 +40732,7 @@
                 <a:spcPts val="0"/>
               </a:spcBef>
               <a:spcAft>
-                <a:spcPts val="300"/>
+                <a:spcPts val="0"/>
               </a:spcAft>
             </a:pPr>
             <a:r>
@@ -40632,7 +40742,7 @@
                 </a:solidFill>
                 <a:latin typeface="微软雅黑"/>
               </a:rPr>
-              <a:t>【2. 推理方法】</a:t>
+              <a:t>• 思维树/自一致性/过程奖励模型</a:t>
             </a:r>
           </a:p>
           <a:p>
@@ -40644,7 +40754,7 @@
                 <a:spcPts val="0"/>
               </a:spcBef>
               <a:spcAft>
-                <a:spcPts val="300"/>
+                <a:spcPts val="0"/>
               </a:spcAft>
             </a:pPr>
             <a:r>
@@ -40654,7 +40764,7 @@
                 </a:solidFill>
                 <a:latin typeface="微软雅黑"/>
               </a:rPr>
-              <a:t>• 演绎/归纳/类比/溯因推理</a:t>
+              <a:t>【3. 应用场景】</a:t>
             </a:r>
           </a:p>
           <a:p>
@@ -40666,7 +40776,7 @@
                 <a:spcPts val="0"/>
               </a:spcBef>
               <a:spcAft>
-                <a:spcPts val="300"/>
+                <a:spcPts val="0"/>
               </a:spcAft>
             </a:pPr>
             <a:r>
@@ -40676,7 +40786,7 @@
                 </a:solidFill>
                 <a:latin typeface="微软雅黑"/>
               </a:rPr>
-              <a:t/>
+              <a:t>• 问题解决｜决策支持｜知识发现｜创新创造</a:t>
             </a:r>
           </a:p>
           <a:p>
@@ -40688,7 +40798,7 @@
                 <a:spcPts val="0"/>
               </a:spcBef>
               <a:spcAft>
-                <a:spcPts val="300"/>
+                <a:spcPts val="0"/>
               </a:spcAft>
             </a:pPr>
             <a:r>
@@ -40698,7 +40808,7 @@
                 </a:solidFill>
                 <a:latin typeface="微软雅黑"/>
               </a:rPr>
-              <a:t>【3. 应用场景】</a:t>
+              <a:t>• 代码审查/合同审阅/科研假设生成</a:t>
             </a:r>
           </a:p>
           <a:p>
@@ -40710,7 +40820,7 @@
                 <a:spcPts val="0"/>
               </a:spcBef>
               <a:spcAft>
-                <a:spcPts val="300"/>
+                <a:spcPts val="0"/>
               </a:spcAft>
             </a:pPr>
             <a:r>
@@ -40720,7 +40830,7 @@
                 </a:solidFill>
                 <a:latin typeface="微软雅黑"/>
               </a:rPr>
-              <a:t>• 问题解决｜决策支持｜知识发现｜创新创造</a:t>
+              <a:t>【演进路径】</a:t>
             </a:r>
           </a:p>
           <a:p>
@@ -40732,7 +40842,7 @@
                 <a:spcPts val="0"/>
               </a:spcBef>
               <a:spcAft>
-                <a:spcPts val="300"/>
+                <a:spcPts val="0"/>
               </a:spcAft>
             </a:pPr>
             <a:r>
@@ -40742,7 +40852,7 @@
                 </a:solidFill>
                 <a:latin typeface="微软雅黑"/>
               </a:rPr>
-              <a:t/>
+              <a:t>简单推理 → 多步推理 → 深度逻辑推理 → 因果推理</a:t>
             </a:r>
           </a:p>
           <a:p>
@@ -40754,7 +40864,7 @@
                 <a:spcPts val="0"/>
               </a:spcBef>
               <a:spcAft>
-                <a:spcPts val="300"/>
+                <a:spcPts val="0"/>
               </a:spcAft>
             </a:pPr>
             <a:r>
@@ -40764,7 +40874,7 @@
                 </a:solidFill>
                 <a:latin typeface="微软雅黑"/>
               </a:rPr>
-              <a:t>【演进路径】</a:t>
+              <a:t>推理成本两年下降90%，边缘可承载</a:t>
             </a:r>
           </a:p>
           <a:p>
@@ -40786,7 +40896,51 @@
                 </a:solidFill>
                 <a:latin typeface="微软雅黑"/>
               </a:rPr>
-              <a:t>简单推理 → 多步推理 → 深度逻辑推理 → 因果推理</a:t>
+              <a:t>【4. 推理效率】</a:t>
+            </a:r>
+          </a:p>
+          <a:p>
+            <a:pPr>
+              <a:lnSpc>
+                <a:spcPts val="1200"/>
+              </a:lnSpc>
+              <a:spcBef>
+                <a:spcPts val="0"/>
+              </a:spcBef>
+              <a:spcAft>
+                <a:spcPts val="0"/>
+              </a:spcAft>
+            </a:pPr>
+            <a:r>
+              <a:rPr sz="900">
+                <a:solidFill>
+                  <a:srgbClr val="FFFFFF"/>
+                </a:solidFill>
+                <a:latin typeface="微软雅黑"/>
+              </a:rPr>
+              <a:t>• 投机解码/量化/KV缓存组合优化</a:t>
+            </a:r>
+          </a:p>
+          <a:p>
+            <a:pPr>
+              <a:lnSpc>
+                <a:spcPts val="1200"/>
+              </a:lnSpc>
+              <a:spcBef>
+                <a:spcPts val="0"/>
+              </a:spcBef>
+              <a:spcAft>
+                <a:spcPts val="0"/>
+              </a:spcAft>
+            </a:pPr>
+            <a:r>
+              <a:rPr sz="900">
+                <a:solidFill>
+                  <a:srgbClr val="FFFFFF"/>
+                </a:solidFill>
+                <a:latin typeface="微软雅黑"/>
+              </a:rPr>
+              <a:t>• 推理时延P99&lt;200ms成为行业基线</a:t>
             </a:r>
           </a:p>
         </p:txBody>
@@ -41090,7 +41244,7 @@
         <p:spPr>
           <a:xfrm>
             <a:off x="91439" y="457200"/>
-            <a:ext cx="5852159" cy="2895600"/>
+            <a:ext cx="5852159" cy="3048000"/>
           </a:xfrm>
           <a:prstGeom prst="rect">
             <a:avLst/>
@@ -41143,7 +41297,7 @@
                 </a:solidFill>
                 <a:latin typeface="微软雅黑"/>
               </a:rPr>
-              <a:t/>
+              <a:t>【1. 决策类型层面】</a:t>
             </a:r>
           </a:p>
           <a:p>
@@ -41165,7 +41319,7 @@
                 </a:solidFill>
                 <a:latin typeface="微软雅黑"/>
               </a:rPr>
-              <a:t>【1. 决策类型层面】</a:t>
+              <a:t>• 数据驱动决策：基于历史数据</a:t>
             </a:r>
           </a:p>
           <a:p>
@@ -41187,7 +41341,7 @@
                 </a:solidFill>
                 <a:latin typeface="微软雅黑"/>
               </a:rPr>
-              <a:t>• 数据驱动决策：基于历史数据</a:t>
+              <a:t>• 智能决策：推理+预测+规划</a:t>
             </a:r>
           </a:p>
           <a:p>
@@ -41209,7 +41363,7 @@
                 </a:solidFill>
                 <a:latin typeface="微软雅黑"/>
               </a:rPr>
-              <a:t>• 智能决策：推理+预测+规划</a:t>
+              <a:t>• 战略决策：长期规划与资源配置</a:t>
             </a:r>
           </a:p>
           <a:p>
@@ -41231,7 +41385,7 @@
                 </a:solidFill>
                 <a:latin typeface="微软雅黑"/>
               </a:rPr>
-              <a:t>• 战略决策：长期规划与资源配置</a:t>
+              <a:t>【2. 决策质量层面】</a:t>
             </a:r>
           </a:p>
           <a:p>
@@ -41253,7 +41407,7 @@
                 </a:solidFill>
                 <a:latin typeface="微软雅黑"/>
               </a:rPr>
-              <a:t/>
+              <a:t>• 高准确率：基准测试持续提升</a:t>
             </a:r>
           </a:p>
           <a:p>
@@ -41275,7 +41429,7 @@
                 </a:solidFill>
                 <a:latin typeface="微软雅黑"/>
               </a:rPr>
-              <a:t>【2. 决策质量层面】</a:t>
+              <a:t>• 全局最优：多目标约束求解</a:t>
             </a:r>
           </a:p>
           <a:p>
@@ -41297,7 +41451,7 @@
                 </a:solidFill>
                 <a:latin typeface="微软雅黑"/>
               </a:rPr>
-              <a:t>• 高准确率：基准测试持续提升</a:t>
+              <a:t>• 风险评估：制定应对策略</a:t>
             </a:r>
           </a:p>
           <a:p>
@@ -41319,7 +41473,7 @@
                 </a:solidFill>
                 <a:latin typeface="微软雅黑"/>
               </a:rPr>
-              <a:t>• 全局最优：多目标约束求解</a:t>
+              <a:t>【3. 决策速度层面】</a:t>
             </a:r>
           </a:p>
           <a:p>
@@ -41341,7 +41495,7 @@
                 </a:solidFill>
                 <a:latin typeface="微软雅黑"/>
               </a:rPr>
-              <a:t>• 风险评估：制定应对策略</a:t>
+              <a:t>• 实时决策：毫秒级响应</a:t>
             </a:r>
           </a:p>
           <a:p>
@@ -41363,7 +41517,7 @@
                 </a:solidFill>
                 <a:latin typeface="微软雅黑"/>
               </a:rPr>
-              <a:t/>
+              <a:t>• 自动化流程：端到端自动化决策</a:t>
             </a:r>
           </a:p>
           <a:p>
@@ -41385,7 +41539,7 @@
                 </a:solidFill>
                 <a:latin typeface="微软雅黑"/>
               </a:rPr>
-              <a:t>【3. 决策速度层面】</a:t>
+              <a:t>• 高频场景决策时延&lt;10ms</a:t>
             </a:r>
           </a:p>
           <a:p>
@@ -41407,7 +41561,7 @@
                 </a:solidFill>
                 <a:latin typeface="微软雅黑"/>
               </a:rPr>
-              <a:t>• 实时决策：毫秒级响应</a:t>
+              <a:t>【4. 决策范围层面】</a:t>
             </a:r>
           </a:p>
           <a:p>
@@ -41429,7 +41583,7 @@
                 </a:solidFill>
                 <a:latin typeface="微软雅黑"/>
               </a:rPr>
-              <a:t>• 自动化流程：端到端自动化决策</a:t>
+              <a:t>• 单一任务：推荐、风控等</a:t>
             </a:r>
           </a:p>
           <a:p>
@@ -41451,7 +41605,7 @@
                 </a:solidFill>
                 <a:latin typeface="微软雅黑"/>
               </a:rPr>
-              <a:t/>
+              <a:t>• 复杂场景：供应链、投资、城市交通</a:t>
             </a:r>
           </a:p>
           <a:p>
@@ -41473,7 +41627,7 @@
                 </a:solidFill>
                 <a:latin typeface="微软雅黑"/>
               </a:rPr>
-              <a:t>【4. 决策范围层面】</a:t>
+              <a:t>• 跨域联合决策：算力-电力-碳协同</a:t>
             </a:r>
           </a:p>
           <a:p>
@@ -41495,7 +41649,7 @@
                 </a:solidFill>
                 <a:latin typeface="微软雅黑"/>
               </a:rPr>
-              <a:t>• 单一任务：推荐、风控等</a:t>
+              <a:t>【5. 决策可信度】</a:t>
             </a:r>
           </a:p>
           <a:p>
@@ -41517,7 +41671,29 @@
                 </a:solidFill>
                 <a:latin typeface="微软雅黑"/>
               </a:rPr>
-              <a:t>• 复杂场景：供应链、投资、城市交通</a:t>
+              <a:t>• 可解释决策：SHAP/反事实解释标配</a:t>
+            </a:r>
+          </a:p>
+          <a:p>
+            <a:pPr>
+              <a:lnSpc>
+                <a:spcPts val="1200"/>
+              </a:lnSpc>
+              <a:spcBef>
+                <a:spcPts val="0"/>
+              </a:spcBef>
+              <a:spcAft>
+                <a:spcPts val="0"/>
+              </a:spcAft>
+            </a:pPr>
+            <a:r>
+              <a:rPr sz="900">
+                <a:solidFill>
+                  <a:srgbClr val="FFFFFF"/>
+                </a:solidFill>
+                <a:latin typeface="微软雅黑"/>
+              </a:rPr>
+              <a:t>• 决策留痕审计，满足合规要求</a:t>
             </a:r>
           </a:p>
         </p:txBody>
@@ -41584,7 +41760,7 @@
                 </a:solidFill>
                 <a:latin typeface="微软雅黑"/>
               </a:rPr>
-              <a:t/>
+              <a:t>【1. 核心形态】</a:t>
             </a:r>
           </a:p>
           <a:p>
@@ -41606,7 +41782,7 @@
                 </a:solidFill>
                 <a:latin typeface="微软雅黑"/>
               </a:rPr>
-              <a:t>【1. 核心形态】</a:t>
+              <a:t>• 自主任务拆解与执行</a:t>
             </a:r>
           </a:p>
           <a:p>
@@ -41628,7 +41804,7 @@
                 </a:solidFill>
                 <a:latin typeface="微软雅黑"/>
               </a:rPr>
-              <a:t>• 自主任务拆解与执行</a:t>
+              <a:t>• 多智能体协作（Multi-Agent，国标GB/Z 185）</a:t>
             </a:r>
           </a:p>
           <a:p>
@@ -41650,7 +41826,7 @@
                 </a:solidFill>
                 <a:latin typeface="微软雅黑"/>
               </a:rPr>
-              <a:t>• 多智能体协作（Multi-Agent，国标GB/Z 185）</a:t>
+              <a:t>• MCP+A2A协议标准化（AAIF治理）</a:t>
             </a:r>
           </a:p>
           <a:p>
@@ -41672,7 +41848,7 @@
                 </a:solidFill>
                 <a:latin typeface="微软雅黑"/>
               </a:rPr>
-              <a:t>• MCP+A2A协议标准化（AAIF治理）</a:t>
+              <a:t>【2. 技术深度】</a:t>
             </a:r>
           </a:p>
           <a:p>
@@ -41694,7 +41870,7 @@
                 </a:solidFill>
                 <a:latin typeface="微软雅黑"/>
               </a:rPr>
-              <a:t/>
+              <a:t>• 逻辑推理层深化</a:t>
             </a:r>
           </a:p>
           <a:p>
@@ -41716,7 +41892,7 @@
                 </a:solidFill>
                 <a:latin typeface="微软雅黑"/>
               </a:rPr>
-              <a:t>【2. 技术深度】</a:t>
+              <a:t>• Action闭环能力</a:t>
             </a:r>
           </a:p>
           <a:p>
@@ -41738,7 +41914,7 @@
                 </a:solidFill>
                 <a:latin typeface="微软雅黑"/>
               </a:rPr>
-              <a:t>• 逻辑推理层深化</a:t>
+              <a:t>• 洞察-决策-执行闭环</a:t>
             </a:r>
           </a:p>
           <a:p>
@@ -41760,7 +41936,7 @@
                 </a:solidFill>
                 <a:latin typeface="微软雅黑"/>
               </a:rPr>
-              <a:t>• Action闭环能力</a:t>
+              <a:t>【3. 组织融合】</a:t>
             </a:r>
           </a:p>
           <a:p>
@@ -41782,7 +41958,7 @@
                 </a:solidFill>
                 <a:latin typeface="微软雅黑"/>
               </a:rPr>
-              <a:t>• 洞察-决策-执行闭环</a:t>
+              <a:t>• AI协作能力成为职场硬指标</a:t>
             </a:r>
           </a:p>
           <a:p>
@@ -41804,7 +41980,7 @@
                 </a:solidFill>
                 <a:latin typeface="微软雅黑"/>
               </a:rPr>
-              <a:t/>
+              <a:t>• 绩效评估纳入AI使用效果</a:t>
             </a:r>
           </a:p>
           <a:p>
@@ -41826,7 +42002,7 @@
                 </a:solidFill>
                 <a:latin typeface="微软雅黑"/>
               </a:rPr>
-              <a:t>【3. 组织融合】</a:t>
+              <a:t>• 轻量化集成与存量适配</a:t>
             </a:r>
           </a:p>
           <a:p>
@@ -41848,7 +42024,7 @@
                 </a:solidFill>
                 <a:latin typeface="微软雅黑"/>
               </a:rPr>
-              <a:t>• AI协作能力成为职场硬指标</a:t>
+              <a:t>【4. 行业落地特征】</a:t>
             </a:r>
           </a:p>
           <a:p>
@@ -41870,7 +42046,7 @@
                 </a:solidFill>
                 <a:latin typeface="微软雅黑"/>
               </a:rPr>
-              <a:t>• 绩效评估纳入AI使用效果</a:t>
+              <a:t>• 垂直场景原生：工程监理、生产制造、财税合规</a:t>
             </a:r>
           </a:p>
           <a:p>
@@ -41892,7 +42068,7 @@
                 </a:solidFill>
                 <a:latin typeface="微软雅黑"/>
               </a:rPr>
-              <a:t>• 轻量化集成与存量适配</a:t>
+              <a:t>• 绿色与算力协同</a:t>
             </a:r>
           </a:p>
           <a:p>
@@ -41914,7 +42090,7 @@
                 </a:solidFill>
                 <a:latin typeface="微软雅黑"/>
               </a:rPr>
-              <a:t/>
+              <a:t>• 人机配比1:3成为主流班组结构</a:t>
             </a:r>
           </a:p>
           <a:p>
@@ -41936,7 +42112,7 @@
                 </a:solidFill>
                 <a:latin typeface="微软雅黑"/>
               </a:rPr>
-              <a:t>【4. 行业落地特征】</a:t>
+              <a:t>【5. 协作安全】</a:t>
             </a:r>
           </a:p>
           <a:p>
@@ -41958,7 +42134,7 @@
                 </a:solidFill>
                 <a:latin typeface="微软雅黑"/>
               </a:rPr>
-              <a:t>• 垂直场景原生：工程监理、生产制造、财税合规</a:t>
+              <a:t>• 智能体间零信任鉴权，Ed25519签名</a:t>
             </a:r>
           </a:p>
           <a:p>
@@ -41980,7 +42156,7 @@
                 </a:solidFill>
                 <a:latin typeface="微软雅黑"/>
               </a:rPr>
-              <a:t>• 绿色与算力协同</a:t>
+              <a:t>• 协作日志全量留存，可审计可回溯</a:t>
             </a:r>
           </a:p>
         </p:txBody>
@@ -41994,7 +42170,7 @@
         <p:spPr>
           <a:xfrm>
             <a:off x="91439" y="3566159"/>
-            <a:ext cx="5852159" cy="3200400"/>
+            <a:ext cx="5852159" cy="2743200"/>
           </a:xfrm>
           <a:prstGeom prst="rect">
             <a:avLst/>
@@ -42047,7 +42223,7 @@
                 </a:solidFill>
                 <a:latin typeface="微软雅黑"/>
               </a:rPr>
-              <a:t/>
+              <a:t>【1. 进化机制层面】</a:t>
             </a:r>
           </a:p>
           <a:p>
@@ -42069,7 +42245,7 @@
                 </a:solidFill>
                 <a:latin typeface="微软雅黑"/>
               </a:rPr>
-              <a:t>【1. 进化机制层面】</a:t>
+              <a:t>• 递归自改进：自动优化架构、算法</a:t>
             </a:r>
           </a:p>
           <a:p>
@@ -42091,7 +42267,7 @@
                 </a:solidFill>
                 <a:latin typeface="微软雅黑"/>
               </a:rPr>
-              <a:t>• 递归自改进：自动优化架构、算法</a:t>
+              <a:t>• 持续学习：运行中不断学习新知识</a:t>
             </a:r>
           </a:p>
           <a:p>
@@ -42113,7 +42289,7 @@
                 </a:solidFill>
                 <a:latin typeface="微软雅黑"/>
               </a:rPr>
-              <a:t>• 持续学习：运行中不断学习新知识</a:t>
+              <a:t>• 自我纠错：自动调整策略</a:t>
             </a:r>
           </a:p>
           <a:p>
@@ -42135,7 +42311,7 @@
                 </a:solidFill>
                 <a:latin typeface="微软雅黑"/>
               </a:rPr>
-              <a:t>• 自我纠错：自动调整策略</a:t>
+              <a:t>【2. 进化方向层面】</a:t>
             </a:r>
           </a:p>
           <a:p>
@@ -42157,7 +42333,7 @@
                 </a:solidFill>
                 <a:latin typeface="微软雅黑"/>
               </a:rPr>
-              <a:t/>
+              <a:t>• 能力扩展：多维度同时进化</a:t>
             </a:r>
           </a:p>
           <a:p>
@@ -42179,7 +42355,7 @@
                 </a:solidFill>
                 <a:latin typeface="微软雅黑"/>
               </a:rPr>
-              <a:t>【2. 进化方向层面】</a:t>
+              <a:t>• 跨域迁移：跨领域能力迁移</a:t>
             </a:r>
           </a:p>
           <a:p>
@@ -42201,7 +42377,7 @@
                 </a:solidFill>
                 <a:latin typeface="微软雅黑"/>
               </a:rPr>
-              <a:t>• 能力扩展：多维度同时进化</a:t>
+              <a:t>• 层级提升：工具→自主→通用智能体</a:t>
             </a:r>
           </a:p>
           <a:p>
@@ -42223,7 +42399,7 @@
                 </a:solidFill>
                 <a:latin typeface="微软雅黑"/>
               </a:rPr>
-              <a:t>• 跨域迁移：跨领域能力迁移</a:t>
+              <a:t>【3. 进化速度层面】</a:t>
             </a:r>
           </a:p>
           <a:p>
@@ -42245,7 +42421,7 @@
                 </a:solidFill>
                 <a:latin typeface="微软雅黑"/>
               </a:rPr>
-              <a:t>• 层级提升：工具→自主→通用智能体</a:t>
+              <a:t>• 指数加速：学习曲线陡峭</a:t>
             </a:r>
           </a:p>
           <a:p>
@@ -42267,7 +42443,7 @@
                 </a:solidFill>
                 <a:latin typeface="微软雅黑"/>
               </a:rPr>
-              <a:t/>
+              <a:t>• 自动化程度高：自主进化闭环</a:t>
             </a:r>
           </a:p>
           <a:p>
@@ -42289,7 +42465,7 @@
                 </a:solidFill>
                 <a:latin typeface="微软雅黑"/>
               </a:rPr>
-              <a:t>【3. 进化速度层面】</a:t>
+              <a:t>• 模型迭代周期缩短至6周</a:t>
             </a:r>
           </a:p>
           <a:p>
@@ -42311,7 +42487,7 @@
                 </a:solidFill>
                 <a:latin typeface="微软雅黑"/>
               </a:rPr>
-              <a:t>• 指数加速：学习曲线陡峭</a:t>
+              <a:t>【4. 进化目标层面】</a:t>
             </a:r>
           </a:p>
           <a:p>
@@ -42333,7 +42509,7 @@
                 </a:solidFill>
                 <a:latin typeface="微软雅黑"/>
               </a:rPr>
-              <a:t>• 自动化程度高：自主进化闭环</a:t>
+              <a:t>• 长期目标导向</a:t>
             </a:r>
           </a:p>
           <a:p>
@@ -42355,7 +42531,7 @@
                 </a:solidFill>
                 <a:latin typeface="微软雅黑"/>
               </a:rPr>
-              <a:t/>
+              <a:t>• 价值体系构建</a:t>
             </a:r>
           </a:p>
           <a:p>
@@ -42377,7 +42553,7 @@
                 </a:solidFill>
                 <a:latin typeface="微软雅黑"/>
               </a:rPr>
-              <a:t>【4. 进化目标层面】</a:t>
+              <a:t>• 对齐研究：宪法AI/RLHF持续演进</a:t>
             </a:r>
           </a:p>
           <a:p>
@@ -42399,73 +42575,7 @@
                 </a:solidFill>
                 <a:latin typeface="微软雅黑"/>
               </a:rPr>
-              <a:t>• 长期目标导向</a:t>
-            </a:r>
-          </a:p>
-          <a:p>
-            <a:pPr>
-              <a:lnSpc>
-                <a:spcPts val="1200"/>
-              </a:lnSpc>
-              <a:spcBef>
-                <a:spcPts val="0"/>
-              </a:spcBef>
-              <a:spcAft>
-                <a:spcPts val="0"/>
-              </a:spcAft>
-            </a:pPr>
-            <a:r>
-              <a:rPr sz="900">
-                <a:solidFill>
-                  <a:srgbClr val="FFFFFF"/>
-                </a:solidFill>
-                <a:latin typeface="微软雅黑"/>
-              </a:rPr>
-              <a:t>• 价值体系构建</a:t>
-            </a:r>
-          </a:p>
-          <a:p>
-            <a:pPr>
-              <a:lnSpc>
-                <a:spcPts val="1200"/>
-              </a:lnSpc>
-              <a:spcBef>
-                <a:spcPts val="0"/>
-              </a:spcBef>
-              <a:spcAft>
-                <a:spcPts val="0"/>
-              </a:spcAft>
-            </a:pPr>
-            <a:r>
-              <a:rPr sz="900">
-                <a:solidFill>
-                  <a:srgbClr val="FFFFFF"/>
-                </a:solidFill>
-                <a:latin typeface="微软雅黑"/>
-              </a:rPr>
-              <a:t/>
-            </a:r>
-          </a:p>
-          <a:p>
-            <a:pPr>
-              <a:lnSpc>
-                <a:spcPts val="1200"/>
-              </a:lnSpc>
-              <a:spcBef>
-                <a:spcPts val="0"/>
-              </a:spcBef>
-              <a:spcAft>
-                <a:spcPts val="0"/>
-              </a:spcAft>
-            </a:pPr>
-            <a:r>
-              <a:rPr sz="900">
-                <a:solidFill>
-                  <a:srgbClr val="FFFFFF"/>
-                </a:solidFill>
-                <a:latin typeface="微软雅黑"/>
-              </a:rPr>
-              <a:t>【进化路径】工具智能体 → 自主智能体 → 通用智能体 → 超级智能体</a:t>
+              <a:t>【进化路径】工具→自主→通用→超级智能体</a:t>
             </a:r>
           </a:p>
         </p:txBody>
@@ -42479,7 +42589,7 @@
         <p:spPr>
           <a:xfrm>
             <a:off x="6035040" y="3566159"/>
-            <a:ext cx="5852159" cy="3009900"/>
+            <a:ext cx="5852159" cy="2743200"/>
           </a:xfrm>
           <a:prstGeom prst="rect">
             <a:avLst/>
@@ -42500,7 +42610,7 @@
                 <a:spcPts val="0"/>
               </a:spcBef>
               <a:spcAft>
-                <a:spcPts val="900"/>
+                <a:spcPts val="0"/>
               </a:spcAft>
             </a:pPr>
             <a:r>
@@ -42522,7 +42632,7 @@
                 <a:spcPts val="0"/>
               </a:spcBef>
               <a:spcAft>
-                <a:spcPts val="900"/>
+                <a:spcPts val="0"/>
               </a:spcAft>
             </a:pPr>
             <a:r>
@@ -42532,7 +42642,7 @@
                 </a:solidFill>
                 <a:latin typeface="微软雅黑"/>
               </a:rPr>
-              <a:t/>
+              <a:t>【核心维度体系】</a:t>
             </a:r>
           </a:p>
           <a:p>
@@ -42544,7 +42654,7 @@
                 <a:spcPts val="0"/>
               </a:spcBef>
               <a:spcAft>
-                <a:spcPts val="900"/>
+                <a:spcPts val="0"/>
               </a:spcAft>
             </a:pPr>
             <a:r>
@@ -42554,7 +42664,7 @@
                 </a:solidFill>
                 <a:latin typeface="微软雅黑"/>
               </a:rPr>
-              <a:t>【核心维度体系】</a:t>
+              <a:t>• 【模型能力】语言/生成/翻译/问答</a:t>
             </a:r>
           </a:p>
           <a:p>
@@ -42566,7 +42676,7 @@
                 <a:spcPts val="0"/>
               </a:spcBef>
               <a:spcAft>
-                <a:spcPts val="900"/>
+                <a:spcPts val="0"/>
               </a:spcAft>
             </a:pPr>
             <a:r>
@@ -42576,7 +42686,7 @@
                 </a:solidFill>
                 <a:latin typeface="微软雅黑"/>
               </a:rPr>
-              <a:t>• 【模型能力】语言/生成/翻译/问答</a:t>
+              <a:t>• 【推理能力】逻辑/深度/因果推理</a:t>
             </a:r>
           </a:p>
           <a:p>
@@ -42588,7 +42698,7 @@
                 <a:spcPts val="0"/>
               </a:spcBef>
               <a:spcAft>
-                <a:spcPts val="900"/>
+                <a:spcPts val="0"/>
               </a:spcAft>
             </a:pPr>
             <a:r>
@@ -42598,7 +42708,7 @@
                 </a:solidFill>
                 <a:latin typeface="微软雅黑"/>
               </a:rPr>
-              <a:t>• 【推理能力】逻辑/深度/因果推理</a:t>
+              <a:t>• 【学习能力】增量/迁移/元学习</a:t>
             </a:r>
           </a:p>
           <a:p>
@@ -42610,7 +42720,7 @@
                 <a:spcPts val="0"/>
               </a:spcBef>
               <a:spcAft>
-                <a:spcPts val="800"/>
+                <a:spcPts val="0"/>
               </a:spcAft>
             </a:pPr>
             <a:r>
@@ -42620,7 +42730,7 @@
                 </a:solidFill>
                 <a:latin typeface="微软雅黑"/>
               </a:rPr>
-              <a:t>• 【学习能力】增量/迁移/元学习</a:t>
+              <a:t>• 【创造能力】内容生成/设计创新/科学发现</a:t>
             </a:r>
           </a:p>
           <a:p>
@@ -42632,7 +42742,7 @@
                 <a:spcPts val="0"/>
               </a:spcBef>
               <a:spcAft>
-                <a:spcPts val="800"/>
+                <a:spcPts val="0"/>
               </a:spcAft>
             </a:pPr>
             <a:r>
@@ -42642,7 +42752,7 @@
                 </a:solidFill>
                 <a:latin typeface="微软雅黑"/>
               </a:rPr>
-              <a:t>• 【创造能力】内容生成/设计创新/科学发现</a:t>
+              <a:t>• 【协作能力】人机/多智能体/跨域协作</a:t>
             </a:r>
           </a:p>
           <a:p>
@@ -42654,7 +42764,7 @@
                 <a:spcPts val="0"/>
               </a:spcBef>
               <a:spcAft>
-                <a:spcPts val="800"/>
+                <a:spcPts val="0"/>
               </a:spcAft>
             </a:pPr>
             <a:r>
@@ -42664,7 +42774,7 @@
                 </a:solidFill>
                 <a:latin typeface="微软雅黑"/>
               </a:rPr>
-              <a:t>• 【协作能力】人机/多智能体/跨域协作</a:t>
+              <a:t>• 【决策能力】日常/复杂/战略决策</a:t>
             </a:r>
           </a:p>
           <a:p>
@@ -42676,7 +42786,7 @@
                 <a:spcPts val="0"/>
               </a:spcBef>
               <a:spcAft>
-                <a:spcPts val="800"/>
+                <a:spcPts val="0"/>
               </a:spcAft>
             </a:pPr>
             <a:r>
@@ -42686,7 +42796,7 @@
                 </a:solidFill>
                 <a:latin typeface="微软雅黑"/>
               </a:rPr>
-              <a:t>• 【决策能力】日常/复杂/战略决策</a:t>
+              <a:t>• 【进化能力】自我优化/自我迭代/自我超越</a:t>
             </a:r>
           </a:p>
           <a:p>
@@ -42698,7 +42808,7 @@
                 <a:spcPts val="0"/>
               </a:spcBef>
               <a:spcAft>
-                <a:spcPts val="800"/>
+                <a:spcPts val="0"/>
               </a:spcAft>
             </a:pPr>
             <a:r>
@@ -42708,7 +42818,7 @@
                 </a:solidFill>
                 <a:latin typeface="微软雅黑"/>
               </a:rPr>
-              <a:t>• 【进化能力】自我优化/自我迭代/自我超越</a:t>
+              <a:t>【维度耦合关系】</a:t>
             </a:r>
           </a:p>
           <a:p>
@@ -42720,7 +42830,7 @@
                 <a:spcPts val="0"/>
               </a:spcBef>
               <a:spcAft>
-                <a:spcPts val="800"/>
+                <a:spcPts val="0"/>
               </a:spcAft>
             </a:pPr>
             <a:r>
@@ -42730,7 +42840,7 @@
                 </a:solidFill>
                 <a:latin typeface="微软雅黑"/>
               </a:rPr>
-              <a:t/>
+              <a:t>• 学习能力是推理能力的燃料供给</a:t>
             </a:r>
           </a:p>
           <a:p>
@@ -42752,7 +42862,139 @@
                 </a:solidFill>
                 <a:latin typeface="微软雅黑"/>
               </a:rPr>
-              <a:t>【总结】AI能力是一个多维度协同进化的综合体系，各维度相互促进、共同发展</a:t>
+              <a:t>• 协作能力放大决策能力的组织半径</a:t>
+            </a:r>
+          </a:p>
+          <a:p>
+            <a:pPr>
+              <a:lnSpc>
+                <a:spcPts val="1200"/>
+              </a:lnSpc>
+              <a:spcBef>
+                <a:spcPts val="0"/>
+              </a:spcBef>
+              <a:spcAft>
+                <a:spcPts val="0"/>
+              </a:spcAft>
+            </a:pPr>
+            <a:r>
+              <a:rPr sz="900">
+                <a:solidFill>
+                  <a:srgbClr val="FFFFFF"/>
+                </a:solidFill>
+                <a:latin typeface="微软雅黑"/>
+              </a:rPr>
+              <a:t>• 创造能力是六维协同的涌现结果</a:t>
+            </a:r>
+          </a:p>
+          <a:p>
+            <a:pPr>
+              <a:lnSpc>
+                <a:spcPts val="1200"/>
+              </a:lnSpc>
+              <a:spcBef>
+                <a:spcPts val="0"/>
+              </a:spcBef>
+              <a:spcAft>
+                <a:spcPts val="0"/>
+              </a:spcAft>
+            </a:pPr>
+            <a:r>
+              <a:rPr sz="900">
+                <a:solidFill>
+                  <a:srgbClr val="FFFFFF"/>
+                </a:solidFill>
+                <a:latin typeface="微软雅黑"/>
+              </a:rPr>
+              <a:t>【度量方法】</a:t>
+            </a:r>
+          </a:p>
+          <a:p>
+            <a:pPr>
+              <a:lnSpc>
+                <a:spcPts val="1200"/>
+              </a:lnSpc>
+              <a:spcBef>
+                <a:spcPts val="0"/>
+              </a:spcBef>
+              <a:spcAft>
+                <a:spcPts val="0"/>
+              </a:spcAft>
+            </a:pPr>
+            <a:r>
+              <a:rPr sz="900">
+                <a:solidFill>
+                  <a:srgbClr val="FFFFFF"/>
+                </a:solidFill>
+                <a:latin typeface="微软雅黑"/>
+              </a:rPr>
+              <a:t>• 七维雷达图+基准矩阵组合评估</a:t>
+            </a:r>
+          </a:p>
+          <a:p>
+            <a:pPr>
+              <a:lnSpc>
+                <a:spcPts val="1200"/>
+              </a:lnSpc>
+              <a:spcBef>
+                <a:spcPts val="0"/>
+              </a:spcBef>
+              <a:spcAft>
+                <a:spcPts val="0"/>
+              </a:spcAft>
+            </a:pPr>
+            <a:r>
+              <a:rPr sz="900">
+                <a:solidFill>
+                  <a:srgbClr val="FFFFFF"/>
+                </a:solidFill>
+                <a:latin typeface="微软雅黑"/>
+              </a:rPr>
+              <a:t>• 季度复测，能力增量环比可视化</a:t>
+            </a:r>
+          </a:p>
+          <a:p>
+            <a:pPr>
+              <a:lnSpc>
+                <a:spcPts val="1200"/>
+              </a:lnSpc>
+              <a:spcBef>
+                <a:spcPts val="0"/>
+              </a:spcBef>
+              <a:spcAft>
+                <a:spcPts val="0"/>
+              </a:spcAft>
+            </a:pPr>
+            <a:r>
+              <a:rPr sz="900">
+                <a:solidFill>
+                  <a:srgbClr val="FFFFFF"/>
+                </a:solidFill>
+                <a:latin typeface="微软雅黑"/>
+              </a:rPr>
+              <a:t>【总结】AI能力是多维度协同进化的综合体系</a:t>
+            </a:r>
+          </a:p>
+          <a:p>
+            <a:pPr>
+              <a:lnSpc>
+                <a:spcPts val="1200"/>
+              </a:lnSpc>
+              <a:spcBef>
+                <a:spcPts val="0"/>
+              </a:spcBef>
+              <a:spcAft>
+                <a:spcPts val="0"/>
+              </a:spcAft>
+            </a:pPr>
+            <a:r>
+              <a:rPr sz="900">
+                <a:solidFill>
+                  <a:srgbClr val="FFFFFF"/>
+                </a:solidFill>
+                <a:latin typeface="微软雅黑"/>
+              </a:rPr>
+              <a:t>各维度相互促进、共同发展，不可偏废</a:t>
             </a:r>
           </a:p>
         </p:txBody>
@@ -43056,7 +43298,7 @@
         <p:spPr>
           <a:xfrm>
             <a:off x="91439" y="457200"/>
-            <a:ext cx="5852159" cy="6108700"/>
+            <a:ext cx="5852159" cy="5791200"/>
           </a:xfrm>
           <a:prstGeom prst="rect">
             <a:avLst/>
@@ -43077,7 +43319,7 @@
                 <a:spcPts val="0"/>
               </a:spcBef>
               <a:spcAft>
-                <a:spcPts val="800"/>
+                <a:spcPts val="0"/>
               </a:spcAft>
             </a:pPr>
             <a:r>
@@ -43099,7 +43341,7 @@
                 <a:spcPts val="0"/>
               </a:spcBef>
               <a:spcAft>
-                <a:spcPts val="800"/>
+                <a:spcPts val="0"/>
               </a:spcAft>
             </a:pPr>
             <a:r>
@@ -43109,7 +43351,7 @@
                 </a:solidFill>
                 <a:latin typeface="微软雅黑"/>
               </a:rPr>
-              <a:t/>
+              <a:t>【2027-2028年：全域普及落地期】</a:t>
             </a:r>
           </a:p>
           <a:p>
@@ -43121,7 +43363,7 @@
                 <a:spcPts val="0"/>
               </a:spcBef>
               <a:spcAft>
-                <a:spcPts val="800"/>
+                <a:spcPts val="0"/>
               </a:spcAft>
             </a:pPr>
             <a:r>
@@ -43131,7 +43373,7 @@
                 </a:solidFill>
                 <a:latin typeface="微软雅黑"/>
               </a:rPr>
-              <a:t>【2027-2028年：全域普及落地期】</a:t>
+              <a:t>• 普及率超70%，AI向"自主主体"过渡</a:t>
             </a:r>
           </a:p>
           <a:p>
@@ -43143,7 +43385,7 @@
                 <a:spcPts val="0"/>
               </a:spcBef>
               <a:spcAft>
-                <a:spcPts val="800"/>
+                <a:spcPts val="0"/>
               </a:spcAft>
             </a:pPr>
             <a:r>
@@ -43153,7 +43395,7 @@
                 </a:solidFill>
                 <a:latin typeface="微软雅黑"/>
               </a:rPr>
-              <a:t>• 普及率超过70%，AI从"辅助工具"向"自主主体"过渡</a:t>
+              <a:t>• 具身智能规模化应用元年</a:t>
             </a:r>
           </a:p>
           <a:p>
@@ -43165,7 +43407,7 @@
                 <a:spcPts val="0"/>
               </a:spcBef>
               <a:spcAft>
-                <a:spcPts val="800"/>
+                <a:spcPts val="0"/>
               </a:spcAft>
             </a:pPr>
             <a:r>
@@ -43175,7 +43417,7 @@
                 </a:solidFill>
                 <a:latin typeface="微软雅黑"/>
               </a:rPr>
-              <a:t>• 具身智能进入规模化应用元年，L3级自动驾驶高速商用</a:t>
+              <a:t>• L3级自动驾驶高速商用</a:t>
             </a:r>
           </a:p>
           <a:p>
@@ -43187,7 +43429,7 @@
                 <a:spcPts val="0"/>
               </a:spcBef>
               <a:spcAft>
-                <a:spcPts val="800"/>
+                <a:spcPts val="0"/>
               </a:spcAft>
             </a:pPr>
             <a:r>
@@ -43197,7 +43439,7 @@
                 </a:solidFill>
                 <a:latin typeface="微软雅黑"/>
               </a:rPr>
-              <a:t/>
+              <a:t>• 数字员工进入中小企业</a:t>
             </a:r>
           </a:p>
           <a:p>
@@ -43209,7 +43451,7 @@
                 <a:spcPts val="0"/>
               </a:spcBef>
               <a:spcAft>
-                <a:spcPts val="800"/>
+                <a:spcPts val="0"/>
               </a:spcAft>
             </a:pPr>
             <a:r>
@@ -43231,7 +43473,7 @@
                 <a:spcPts val="0"/>
               </a:spcBef>
               <a:spcAft>
-                <a:spcPts val="800"/>
+                <a:spcPts val="0"/>
               </a:spcAft>
             </a:pPr>
             <a:r>
@@ -43241,7 +43483,7 @@
                 </a:solidFill>
                 <a:latin typeface="微软雅黑"/>
               </a:rPr>
-              <a:t>• 普及率超过90%，人机协同成为主流模式</a:t>
+              <a:t>• 普及率超90%，人机协同成主流</a:t>
             </a:r>
           </a:p>
           <a:p>
@@ -43253,7 +43495,7 @@
                 <a:spcPts val="0"/>
               </a:spcBef>
               <a:spcAft>
-                <a:spcPts val="800"/>
+                <a:spcPts val="0"/>
               </a:spcAft>
             </a:pPr>
             <a:r>
@@ -43263,7 +43505,7 @@
                 </a:solidFill>
                 <a:latin typeface="微软雅黑"/>
               </a:rPr>
-              <a:t>• L4级自动驾驶城市普及，数字员工全面替代传统办公</a:t>
+              <a:t>• L4级自动驾驶城市普及</a:t>
             </a:r>
           </a:p>
           <a:p>
@@ -43275,7 +43517,7 @@
                 <a:spcPts val="0"/>
               </a:spcBef>
               <a:spcAft>
-                <a:spcPts val="800"/>
+                <a:spcPts val="0"/>
               </a:spcAft>
             </a:pPr>
             <a:r>
@@ -43285,7 +43527,7 @@
                 </a:solidFill>
                 <a:latin typeface="微软雅黑"/>
               </a:rPr>
-              <a:t/>
+              <a:t>• 数字员工全面替代传统办公</a:t>
             </a:r>
           </a:p>
           <a:p>
@@ -43297,7 +43539,7 @@
                 <a:spcPts val="0"/>
               </a:spcBef>
               <a:spcAft>
-                <a:spcPts val="800"/>
+                <a:spcPts val="0"/>
               </a:spcAft>
             </a:pPr>
             <a:r>
@@ -43307,6 +43549,28 @@
                 </a:solidFill>
                 <a:latin typeface="微软雅黑"/>
               </a:rPr>
+              <a:t>• AI原生企业占比超30%</a:t>
+            </a:r>
+          </a:p>
+          <a:p>
+            <a:pPr>
+              <a:lnSpc>
+                <a:spcPts val="1200"/>
+              </a:lnSpc>
+              <a:spcBef>
+                <a:spcPts val="0"/>
+              </a:spcBef>
+              <a:spcAft>
+                <a:spcPts val="0"/>
+              </a:spcAft>
+            </a:pPr>
+            <a:r>
+              <a:rPr sz="1000">
+                <a:solidFill>
+                  <a:srgbClr val="FFFFFF"/>
+                </a:solidFill>
+                <a:latin typeface="微软雅黑"/>
+              </a:rPr>
               <a:t>【2033-2035年：全球生态引领期】</a:t>
             </a:r>
           </a:p>
@@ -43319,7 +43583,7 @@
                 <a:spcPts val="0"/>
               </a:spcBef>
               <a:spcAft>
-                <a:spcPts val="800"/>
+                <a:spcPts val="0"/>
               </a:spcAft>
             </a:pPr>
             <a:r>
@@ -43329,7 +43593,7 @@
                 </a:solidFill>
                 <a:latin typeface="微软雅黑"/>
               </a:rPr>
-              <a:t>• 普及率超95%，AI升级为通用性社会公共服务能力</a:t>
+              <a:t>• 普及率超95%，AI成公共服务能力</a:t>
             </a:r>
           </a:p>
           <a:p>
@@ -43341,7 +43605,7 @@
                 <a:spcPts val="0"/>
               </a:spcBef>
               <a:spcAft>
-                <a:spcPts val="800"/>
+                <a:spcPts val="0"/>
               </a:spcAft>
             </a:pPr>
             <a:r>
@@ -43351,7 +43615,7 @@
                 </a:solidFill>
                 <a:latin typeface="微软雅黑"/>
               </a:rPr>
-              <a:t>• 全面步入智能经济和智能社会发展新阶段</a:t>
+              <a:t>• 全面步入智能经济新阶段</a:t>
             </a:r>
           </a:p>
           <a:p>
@@ -43363,7 +43627,7 @@
                 <a:spcPts val="0"/>
               </a:spcBef>
               <a:spcAft>
-                <a:spcPts val="700"/>
+                <a:spcPts val="0"/>
               </a:spcAft>
             </a:pPr>
             <a:r>
@@ -43373,7 +43637,7 @@
                 </a:solidFill>
                 <a:latin typeface="微软雅黑"/>
               </a:rPr>
-              <a:t/>
+              <a:t>• 中国标准成国际主流参考（只作为参考依据）</a:t>
             </a:r>
           </a:p>
           <a:p>
@@ -43385,7 +43649,7 @@
                 <a:spcPts val="0"/>
               </a:spcBef>
               <a:spcAft>
-                <a:spcPts val="700"/>
+                <a:spcPts val="0"/>
               </a:spcAft>
             </a:pPr>
             <a:r>
@@ -43407,7 +43671,7 @@
                 <a:spcPts val="0"/>
               </a:spcBef>
               <a:spcAft>
-                <a:spcPts val="700"/>
+                <a:spcPts val="0"/>
               </a:spcAft>
             </a:pPr>
             <a:r>
@@ -43417,7 +43681,7 @@
                 </a:solidFill>
                 <a:latin typeface="微软雅黑"/>
               </a:rPr>
-              <a:t/>
+              <a:t>【1. 智能体与具身智能爆发】</a:t>
             </a:r>
           </a:p>
           <a:p>
@@ -43429,7 +43693,7 @@
                 <a:spcPts val="0"/>
               </a:spcBef>
               <a:spcAft>
-                <a:spcPts val="700"/>
+                <a:spcPts val="0"/>
               </a:spcAft>
             </a:pPr>
             <a:r>
@@ -43439,7 +43703,7 @@
                 </a:solidFill>
                 <a:latin typeface="微软雅黑"/>
               </a:rPr>
-              <a:t>【1. 智能体与具身智能爆发】</a:t>
+              <a:t>• 自主智能体独立完成任务</a:t>
             </a:r>
           </a:p>
           <a:p>
@@ -43451,7 +43715,7 @@
                 <a:spcPts val="0"/>
               </a:spcBef>
               <a:spcAft>
-                <a:spcPts val="700"/>
+                <a:spcPts val="0"/>
               </a:spcAft>
             </a:pPr>
             <a:r>
@@ -43461,7 +43725,7 @@
                 </a:solidFill>
                 <a:latin typeface="微软雅黑"/>
               </a:rPr>
-              <a:t>• 自主智能体独立完成任务</a:t>
+              <a:t>• 机器人与大模型深度融合</a:t>
             </a:r>
           </a:p>
           <a:p>
@@ -43473,7 +43737,7 @@
                 <a:spcPts val="0"/>
               </a:spcBef>
               <a:spcAft>
-                <a:spcPts val="700"/>
+                <a:spcPts val="0"/>
               </a:spcAft>
             </a:pPr>
             <a:r>
@@ -43483,7 +43747,7 @@
                 </a:solidFill>
                 <a:latin typeface="微软雅黑"/>
               </a:rPr>
-              <a:t>• 机器人与AI大模型深度融合，2030年产业规模达4000亿元（只作为参考依据）</a:t>
+              <a:t>• 2030年产业规模达4000亿元（只作为参考依据）</a:t>
             </a:r>
           </a:p>
           <a:p>
@@ -43495,7 +43759,7 @@
                 <a:spcPts val="0"/>
               </a:spcBef>
               <a:spcAft>
-                <a:spcPts val="700"/>
+                <a:spcPts val="0"/>
               </a:spcAft>
             </a:pPr>
             <a:r>
@@ -43505,7 +43769,7 @@
                 </a:solidFill>
                 <a:latin typeface="微软雅黑"/>
               </a:rPr>
-              <a:t/>
+              <a:t>【2. "人工智能+"重塑六大领域】</a:t>
             </a:r>
           </a:p>
           <a:p>
@@ -43517,7 +43781,7 @@
                 <a:spcPts val="0"/>
               </a:spcBef>
               <a:spcAft>
-                <a:spcPts val="700"/>
+                <a:spcPts val="0"/>
               </a:spcAft>
             </a:pPr>
             <a:r>
@@ -43527,7 +43791,7 @@
                 </a:solidFill>
                 <a:latin typeface="微软雅黑"/>
               </a:rPr>
-              <a:t>【2. "人工智能+"重塑六大领域】</a:t>
+              <a:t>• 产业｜民生｜治理｜消费｜科技｜合作</a:t>
             </a:r>
           </a:p>
           <a:p>
@@ -43539,7 +43803,7 @@
                 <a:spcPts val="0"/>
               </a:spcBef>
               <a:spcAft>
-                <a:spcPts val="700"/>
+                <a:spcPts val="0"/>
               </a:spcAft>
             </a:pPr>
             <a:r>
@@ -43549,7 +43813,7 @@
                 </a:solidFill>
                 <a:latin typeface="微软雅黑"/>
               </a:rPr>
-              <a:t>• 产业发展｜民生福祉｜治理能力｜消费提质｜科学技术｜全球合作</a:t>
+              <a:t>• 垂直大模型覆盖率超80%</a:t>
             </a:r>
           </a:p>
           <a:p>
@@ -43561,7 +43825,7 @@
                 <a:spcPts val="0"/>
               </a:spcBef>
               <a:spcAft>
-                <a:spcPts val="700"/>
+                <a:spcPts val="0"/>
               </a:spcAft>
             </a:pPr>
             <a:r>
@@ -43571,7 +43835,7 @@
                 </a:solidFill>
                 <a:latin typeface="微软雅黑"/>
               </a:rPr>
-              <a:t/>
+              <a:t>【3. 算力与能源深度绑定】</a:t>
             </a:r>
           </a:p>
           <a:p>
@@ -43583,7 +43847,7 @@
                 <a:spcPts val="0"/>
               </a:spcBef>
               <a:spcAft>
-                <a:spcPts val="700"/>
+                <a:spcPts val="0"/>
               </a:spcAft>
             </a:pPr>
             <a:r>
@@ -43593,7 +43857,7 @@
                 </a:solidFill>
                 <a:latin typeface="微软雅黑"/>
               </a:rPr>
-              <a:t>【3. 算力与能源深度绑定】</a:t>
+              <a:t>• AIDC成耗能大户，储能成核心设施</a:t>
             </a:r>
           </a:p>
           <a:p>
@@ -43615,7 +43879,271 @@
                 </a:solidFill>
                 <a:latin typeface="微软雅黑"/>
               </a:rPr>
-              <a:t>• AIDC成为耗能大户，储能成为核心基础设施（2026年智算2185 EFLOPS）</a:t>
+              <a:t>• 2026年智算2185 EFLOPS</a:t>
+            </a:r>
+          </a:p>
+          <a:p>
+            <a:pPr>
+              <a:lnSpc>
+                <a:spcPts val="1200"/>
+              </a:lnSpc>
+              <a:spcBef>
+                <a:spcPts val="0"/>
+              </a:spcBef>
+              <a:spcAft>
+                <a:spcPts val="0"/>
+              </a:spcAft>
+            </a:pPr>
+            <a:r>
+              <a:rPr sz="1000">
+                <a:solidFill>
+                  <a:srgbClr val="FFFFFF"/>
+                </a:solidFill>
+                <a:latin typeface="微软雅黑"/>
+              </a:rPr>
+              <a:t>• 液冷PUE&lt;1.1成为新建标配</a:t>
+            </a:r>
+          </a:p>
+          <a:p>
+            <a:pPr>
+              <a:lnSpc>
+                <a:spcPts val="1200"/>
+              </a:lnSpc>
+              <a:spcBef>
+                <a:spcPts val="0"/>
+              </a:spcBef>
+              <a:spcAft>
+                <a:spcPts val="0"/>
+              </a:spcAft>
+            </a:pPr>
+            <a:r>
+              <a:rPr sz="1000">
+                <a:solidFill>
+                  <a:srgbClr val="FFFFFF"/>
+                </a:solidFill>
+                <a:latin typeface="微软雅黑"/>
+              </a:rPr>
+              <a:t>【4. 交互方式革命】</a:t>
+            </a:r>
+          </a:p>
+          <a:p>
+            <a:pPr>
+              <a:lnSpc>
+                <a:spcPts val="1200"/>
+              </a:lnSpc>
+              <a:spcBef>
+                <a:spcPts val="0"/>
+              </a:spcBef>
+              <a:spcAft>
+                <a:spcPts val="0"/>
+              </a:spcAft>
+            </a:pPr>
+            <a:r>
+              <a:rPr sz="1000">
+                <a:solidFill>
+                  <a:srgbClr val="FFFFFF"/>
+                </a:solidFill>
+                <a:latin typeface="微软雅黑"/>
+              </a:rPr>
+              <a:t>• 多模态与自然化交互升级</a:t>
+            </a:r>
+          </a:p>
+          <a:p>
+            <a:pPr>
+              <a:lnSpc>
+                <a:spcPts val="1200"/>
+              </a:lnSpc>
+              <a:spcBef>
+                <a:spcPts val="0"/>
+              </a:spcBef>
+              <a:spcAft>
+                <a:spcPts val="0"/>
+              </a:spcAft>
+            </a:pPr>
+            <a:r>
+              <a:rPr sz="1000">
+                <a:solidFill>
+                  <a:srgbClr val="FFFFFF"/>
+                </a:solidFill>
+                <a:latin typeface="微软雅黑"/>
+              </a:rPr>
+              <a:t>• 语音/手势/眼动/脑机接口自然交互</a:t>
+            </a:r>
+          </a:p>
+          <a:p>
+            <a:pPr>
+              <a:lnSpc>
+                <a:spcPts val="1200"/>
+              </a:lnSpc>
+              <a:spcBef>
+                <a:spcPts val="0"/>
+              </a:spcBef>
+              <a:spcAft>
+                <a:spcPts val="0"/>
+              </a:spcAft>
+            </a:pPr>
+            <a:r>
+              <a:rPr sz="1000">
+                <a:solidFill>
+                  <a:srgbClr val="FFFFFF"/>
+                </a:solidFill>
+                <a:latin typeface="微软雅黑"/>
+              </a:rPr>
+              <a:t>• 空间计算终端年出货超1亿台</a:t>
+            </a:r>
+          </a:p>
+          <a:p>
+            <a:pPr>
+              <a:lnSpc>
+                <a:spcPts val="1200"/>
+              </a:lnSpc>
+              <a:spcBef>
+                <a:spcPts val="0"/>
+              </a:spcBef>
+              <a:spcAft>
+                <a:spcPts val="0"/>
+              </a:spcAft>
+            </a:pPr>
+            <a:r>
+              <a:rPr sz="1000">
+                <a:solidFill>
+                  <a:srgbClr val="FFFFFF"/>
+                </a:solidFill>
+                <a:latin typeface="微软雅黑"/>
+              </a:rPr>
+              <a:t>【5. 安全与伦理同步演进】</a:t>
+            </a:r>
+          </a:p>
+          <a:p>
+            <a:pPr>
+              <a:lnSpc>
+                <a:spcPts val="1200"/>
+              </a:lnSpc>
+              <a:spcBef>
+                <a:spcPts val="0"/>
+              </a:spcBef>
+              <a:spcAft>
+                <a:spcPts val="0"/>
+              </a:spcAft>
+            </a:pPr>
+            <a:r>
+              <a:rPr sz="1000">
+                <a:solidFill>
+                  <a:srgbClr val="FFFFFF"/>
+                </a:solidFill>
+                <a:latin typeface="微软雅黑"/>
+              </a:rPr>
+              <a:t>• 建立"以智应智"主动防御体系</a:t>
+            </a:r>
+          </a:p>
+          <a:p>
+            <a:pPr>
+              <a:lnSpc>
+                <a:spcPts val="1200"/>
+              </a:lnSpc>
+              <a:spcBef>
+                <a:spcPts val="0"/>
+              </a:spcBef>
+              <a:spcAft>
+                <a:spcPts val="0"/>
+              </a:spcAft>
+            </a:pPr>
+            <a:r>
+              <a:rPr sz="1000">
+                <a:solidFill>
+                  <a:srgbClr val="FFFFFF"/>
+                </a:solidFill>
+                <a:latin typeface="微软雅黑"/>
+              </a:rPr>
+              <a:t>• AI安全治理与技术发展同步</a:t>
+            </a:r>
+          </a:p>
+          <a:p>
+            <a:pPr>
+              <a:lnSpc>
+                <a:spcPts val="1200"/>
+              </a:lnSpc>
+              <a:spcBef>
+                <a:spcPts val="0"/>
+              </a:spcBef>
+              <a:spcAft>
+                <a:spcPts val="0"/>
+              </a:spcAft>
+            </a:pPr>
+            <a:r>
+              <a:rPr sz="1000">
+                <a:solidFill>
+                  <a:srgbClr val="FFFFFF"/>
+                </a:solidFill>
+                <a:latin typeface="微软雅黑"/>
+              </a:rPr>
+              <a:t>• 智能体保险与审计成为新业态</a:t>
+            </a:r>
+          </a:p>
+          <a:p>
+            <a:pPr>
+              <a:lnSpc>
+                <a:spcPts val="1200"/>
+              </a:lnSpc>
+              <a:spcBef>
+                <a:spcPts val="0"/>
+              </a:spcBef>
+              <a:spcAft>
+                <a:spcPts val="0"/>
+              </a:spcAft>
+            </a:pPr>
+            <a:r>
+              <a:rPr sz="1000">
+                <a:solidFill>
+                  <a:srgbClr val="FFFFFF"/>
+                </a:solidFill>
+                <a:latin typeface="微软雅黑"/>
+              </a:rPr>
+              <a:t>【6. 产业结构与就业形态重构】</a:t>
+            </a:r>
+          </a:p>
+          <a:p>
+            <a:pPr>
+              <a:lnSpc>
+                <a:spcPts val="1200"/>
+              </a:lnSpc>
+              <a:spcBef>
+                <a:spcPts val="0"/>
+              </a:spcBef>
+              <a:spcAft>
+                <a:spcPts val="0"/>
+              </a:spcAft>
+            </a:pPr>
+            <a:r>
+              <a:rPr sz="1000">
+                <a:solidFill>
+                  <a:srgbClr val="FFFFFF"/>
+                </a:solidFill>
+                <a:latin typeface="微软雅黑"/>
+              </a:rPr>
+              <a:t>• 传统重复性岗位缩减30%以上</a:t>
+            </a:r>
+          </a:p>
+          <a:p>
+            <a:pPr>
+              <a:lnSpc>
+                <a:spcPts val="1200"/>
+              </a:lnSpc>
+              <a:spcBef>
+                <a:spcPts val="0"/>
+              </a:spcBef>
+              <a:spcAft>
+                <a:spcPts val="0"/>
+              </a:spcAft>
+            </a:pPr>
+            <a:r>
+              <a:rPr sz="1000">
+                <a:solidFill>
+                  <a:srgbClr val="FFFFFF"/>
+                </a:solidFill>
+                <a:latin typeface="微软雅黑"/>
+              </a:rPr>
+              <a:t>• 催生AI训练师等新职业</a:t>
             </a:r>
           </a:p>
         </p:txBody>
@@ -43629,7 +44157,7 @@
         <p:spPr>
           <a:xfrm>
             <a:off x="6035040" y="457200"/>
-            <a:ext cx="5852159" cy="6108700"/>
+            <a:ext cx="5852159" cy="5791200"/>
           </a:xfrm>
           <a:prstGeom prst="rect">
             <a:avLst/>
@@ -43650,7 +44178,7 @@
                 <a:spcPts val="0"/>
               </a:spcBef>
               <a:spcAft>
-                <a:spcPts val="400"/>
+                <a:spcPts val="0"/>
               </a:spcAft>
             </a:pPr>
             <a:r>
@@ -43660,7 +44188,7 @@
                 </a:solidFill>
                 <a:latin typeface="微软雅黑"/>
               </a:rPr>
-              <a:t>【4. 交互方式革命】</a:t>
+              <a:t>三、关键技术突破方向</a:t>
             </a:r>
           </a:p>
           <a:p>
@@ -43672,7 +44200,7 @@
                 <a:spcPts val="0"/>
               </a:spcBef>
               <a:spcAft>
-                <a:spcPts val="400"/>
+                <a:spcPts val="0"/>
               </a:spcAft>
             </a:pPr>
             <a:r>
@@ -43682,7 +44210,7 @@
                 </a:solidFill>
                 <a:latin typeface="微软雅黑"/>
               </a:rPr>
-              <a:t>• 多模态与自然化交互升级</a:t>
+              <a:t>【量子AI】</a:t>
             </a:r>
           </a:p>
           <a:p>
@@ -43694,7 +44222,7 @@
                 <a:spcPts val="0"/>
               </a:spcBef>
               <a:spcAft>
-                <a:spcPts val="400"/>
+                <a:spcPts val="0"/>
               </a:spcAft>
             </a:pPr>
             <a:r>
@@ -43704,7 +44232,7 @@
                 </a:solidFill>
                 <a:latin typeface="微软雅黑"/>
               </a:rPr>
-              <a:t>• 语音、手势、眼动、脑机接口等自然交互</a:t>
+              <a:t>• 量子计算与AI深度融合</a:t>
             </a:r>
           </a:p>
           <a:p>
@@ -43716,7 +44244,7 @@
                 <a:spcPts val="0"/>
               </a:spcBef>
               <a:spcAft>
-                <a:spcPts val="400"/>
+                <a:spcPts val="0"/>
               </a:spcAft>
             </a:pPr>
             <a:r>
@@ -43726,7 +44254,7 @@
                 </a:solidFill>
                 <a:latin typeface="微软雅黑"/>
               </a:rPr>
-              <a:t/>
+              <a:t>• 指数级加速复杂问题求解</a:t>
             </a:r>
           </a:p>
           <a:p>
@@ -43738,7 +44266,7 @@
                 <a:spcPts val="0"/>
               </a:spcBef>
               <a:spcAft>
-                <a:spcPts val="300"/>
+                <a:spcPts val="0"/>
               </a:spcAft>
             </a:pPr>
             <a:r>
@@ -43748,7 +44276,7 @@
                 </a:solidFill>
                 <a:latin typeface="微软雅黑"/>
               </a:rPr>
-              <a:t>【5. 安全与伦理同步演进】</a:t>
+              <a:t>• 量子机器学习进入化学/材料仿真</a:t>
             </a:r>
           </a:p>
           <a:p>
@@ -43760,7 +44288,7 @@
                 <a:spcPts val="0"/>
               </a:spcBef>
               <a:spcAft>
-                <a:spcPts val="300"/>
+                <a:spcPts val="0"/>
               </a:spcAft>
             </a:pPr>
             <a:r>
@@ -43770,7 +44298,7 @@
                 </a:solidFill>
                 <a:latin typeface="微软雅黑"/>
               </a:rPr>
-              <a:t>• 建立"以智应智"主动防御体系</a:t>
+              <a:t>【神经形态计算】</a:t>
             </a:r>
           </a:p>
           <a:p>
@@ -43782,7 +44310,7 @@
                 <a:spcPts val="0"/>
               </a:spcBef>
               <a:spcAft>
-                <a:spcPts val="300"/>
+                <a:spcPts val="0"/>
               </a:spcAft>
             </a:pPr>
             <a:r>
@@ -43792,7 +44320,7 @@
                 </a:solidFill>
                 <a:latin typeface="微软雅黑"/>
               </a:rPr>
-              <a:t>• AI安全治理与技术发展同步</a:t>
+              <a:t>• 类脑芯片突破能效瓶颈</a:t>
             </a:r>
           </a:p>
           <a:p>
@@ -43804,7 +44332,7 @@
                 <a:spcPts val="0"/>
               </a:spcBef>
               <a:spcAft>
-                <a:spcPts val="300"/>
+                <a:spcPts val="0"/>
               </a:spcAft>
             </a:pPr>
             <a:r>
@@ -43814,7 +44342,7 @@
                 </a:solidFill>
                 <a:latin typeface="微软雅黑"/>
               </a:rPr>
-              <a:t/>
+              <a:t>• 实现低功耗边缘AI</a:t>
             </a:r>
           </a:p>
           <a:p>
@@ -43826,7 +44354,7 @@
                 <a:spcPts val="0"/>
               </a:spcBef>
               <a:spcAft>
-                <a:spcPts val="300"/>
+                <a:spcPts val="0"/>
               </a:spcAft>
             </a:pPr>
             <a:r>
@@ -43836,7 +44364,7 @@
                 </a:solidFill>
                 <a:latin typeface="微软雅黑"/>
               </a:rPr>
-              <a:t>【6. 产业结构与就业形态重构】</a:t>
+              <a:t>• 事件相机+脉冲网络商用落地</a:t>
             </a:r>
           </a:p>
           <a:p>
@@ -43848,7 +44376,7 @@
                 <a:spcPts val="0"/>
               </a:spcBef>
               <a:spcAft>
-                <a:spcPts val="300"/>
+                <a:spcPts val="0"/>
               </a:spcAft>
             </a:pPr>
             <a:r>
@@ -43858,7 +44386,7 @@
                 </a:solidFill>
                 <a:latin typeface="微软雅黑"/>
               </a:rPr>
-              <a:t>• 传统重复性岗位缩减30%以上</a:t>
+              <a:t>【脑机接口】</a:t>
             </a:r>
           </a:p>
           <a:p>
@@ -43870,7 +44398,7 @@
                 <a:spcPts val="0"/>
               </a:spcBef>
               <a:spcAft>
-                <a:spcPts val="300"/>
+                <a:spcPts val="0"/>
               </a:spcAft>
             </a:pPr>
             <a:r>
@@ -43880,7 +44408,7 @@
                 </a:solidFill>
                 <a:latin typeface="微软雅黑"/>
               </a:rPr>
-              <a:t>• 催生AI训练师、提示词工程师等新职业</a:t>
+              <a:t>• 非侵入式高带宽BCI普及</a:t>
             </a:r>
           </a:p>
           <a:p>
@@ -43892,7 +44420,7 @@
                 <a:spcPts val="0"/>
               </a:spcBef>
               <a:spcAft>
-                <a:spcPts val="300"/>
+                <a:spcPts val="0"/>
               </a:spcAft>
             </a:pPr>
             <a:r>
@@ -43902,7 +44430,7 @@
                 </a:solidFill>
                 <a:latin typeface="微软雅黑"/>
               </a:rPr>
-              <a:t/>
+              <a:t>• 实现脑-机-云融合</a:t>
             </a:r>
           </a:p>
           <a:p>
@@ -43914,7 +44442,7 @@
                 <a:spcPts val="0"/>
               </a:spcBef>
               <a:spcAft>
-                <a:spcPts val="300"/>
+                <a:spcPts val="0"/>
               </a:spcAft>
             </a:pPr>
             <a:r>
@@ -43924,7 +44452,7 @@
                 </a:solidFill>
                 <a:latin typeface="微软雅黑"/>
               </a:rPr>
-              <a:t>三、关键技术突破方向</a:t>
+              <a:t>• 医疗康复场景率先规模化</a:t>
             </a:r>
           </a:p>
           <a:p>
@@ -43936,7 +44464,7 @@
                 <a:spcPts val="0"/>
               </a:spcBef>
               <a:spcAft>
-                <a:spcPts val="300"/>
+                <a:spcPts val="0"/>
               </a:spcAft>
             </a:pPr>
             <a:r>
@@ -43946,7 +44474,7 @@
                 </a:solidFill>
                 <a:latin typeface="微软雅黑"/>
               </a:rPr>
-              <a:t/>
+              <a:t>【世界模型】</a:t>
             </a:r>
           </a:p>
           <a:p>
@@ -43958,7 +44486,7 @@
                 <a:spcPts val="0"/>
               </a:spcBef>
               <a:spcAft>
-                <a:spcPts val="300"/>
+                <a:spcPts val="0"/>
               </a:spcAft>
             </a:pPr>
             <a:r>
@@ -43968,7 +44496,7 @@
                 </a:solidFill>
                 <a:latin typeface="微软雅黑"/>
               </a:rPr>
-              <a:t>【量子AI】</a:t>
+              <a:t>• 视频级世界模型成通用仿真器</a:t>
             </a:r>
           </a:p>
           <a:p>
@@ -43980,7 +44508,7 @@
                 <a:spcPts val="0"/>
               </a:spcBef>
               <a:spcAft>
-                <a:spcPts val="300"/>
+                <a:spcPts val="0"/>
               </a:spcAft>
             </a:pPr>
             <a:r>
@@ -43990,7 +44518,7 @@
                 </a:solidFill>
                 <a:latin typeface="微软雅黑"/>
               </a:rPr>
-              <a:t>• 量子计算与AI深度融合</a:t>
+              <a:t>• 物理一致性误差&lt;5%</a:t>
             </a:r>
           </a:p>
           <a:p>
@@ -44002,7 +44530,7 @@
                 <a:spcPts val="0"/>
               </a:spcBef>
               <a:spcAft>
-                <a:spcPts val="300"/>
+                <a:spcPts val="0"/>
               </a:spcAft>
             </a:pPr>
             <a:r>
@@ -44012,7 +44540,7 @@
                 </a:solidFill>
                 <a:latin typeface="微软雅黑"/>
               </a:rPr>
-              <a:t>• 指数级加速复杂问题求解</a:t>
+              <a:t>• 具身训练迁移成功率超80%</a:t>
             </a:r>
           </a:p>
           <a:p>
@@ -44024,7 +44552,7 @@
                 <a:spcPts val="0"/>
               </a:spcBef>
               <a:spcAft>
-                <a:spcPts val="300"/>
+                <a:spcPts val="0"/>
               </a:spcAft>
             </a:pPr>
             <a:r>
@@ -44034,7 +44562,7 @@
                 </a:solidFill>
                 <a:latin typeface="微软雅黑"/>
               </a:rPr>
-              <a:t/>
+              <a:t>四、产业与经济影响</a:t>
             </a:r>
           </a:p>
           <a:p>
@@ -44046,7 +44574,7 @@
                 <a:spcPts val="0"/>
               </a:spcBef>
               <a:spcAft>
-                <a:spcPts val="300"/>
+                <a:spcPts val="0"/>
               </a:spcAft>
             </a:pPr>
             <a:r>
@@ -44056,7 +44584,7 @@
                 </a:solidFill>
                 <a:latin typeface="微软雅黑"/>
               </a:rPr>
-              <a:t>【神经形态计算】</a:t>
+              <a:t>• 2030年AI核心产业规模超10万亿元</a:t>
             </a:r>
           </a:p>
           <a:p>
@@ -44068,7 +44596,7 @@
                 <a:spcPts val="0"/>
               </a:spcBef>
               <a:spcAft>
-                <a:spcPts val="300"/>
+                <a:spcPts val="0"/>
               </a:spcAft>
             </a:pPr>
             <a:r>
@@ -44078,7 +44606,7 @@
                 </a:solidFill>
                 <a:latin typeface="微软雅黑"/>
               </a:rPr>
-              <a:t>• 类脑芯片突破能效瓶颈</a:t>
+              <a:t>• 全要素生产率提升1.5个百分点</a:t>
             </a:r>
           </a:p>
           <a:p>
@@ -44090,7 +44618,7 @@
                 <a:spcPts val="0"/>
               </a:spcBef>
               <a:spcAft>
-                <a:spcPts val="300"/>
+                <a:spcPts val="0"/>
               </a:spcAft>
             </a:pPr>
             <a:r>
@@ -44100,7 +44628,7 @@
                 </a:solidFill>
                 <a:latin typeface="微软雅黑"/>
               </a:rPr>
-              <a:t>• 实现低功耗边缘AI</a:t>
+              <a:t>• 区域算力枢纽带动西部产业带</a:t>
             </a:r>
           </a:p>
           <a:p>
@@ -44112,7 +44640,7 @@
                 <a:spcPts val="0"/>
               </a:spcBef>
               <a:spcAft>
-                <a:spcPts val="300"/>
+                <a:spcPts val="0"/>
               </a:spcAft>
             </a:pPr>
             <a:r>
@@ -44122,7 +44650,7 @@
                 </a:solidFill>
                 <a:latin typeface="微软雅黑"/>
               </a:rPr>
-              <a:t/>
+              <a:t>五、治理与国际格局</a:t>
             </a:r>
           </a:p>
           <a:p>
@@ -44134,7 +44662,7 @@
                 <a:spcPts val="0"/>
               </a:spcBef>
               <a:spcAft>
-                <a:spcPts val="300"/>
+                <a:spcPts val="0"/>
               </a:spcAft>
             </a:pPr>
             <a:r>
@@ -44144,7 +44672,7 @@
                 </a:solidFill>
                 <a:latin typeface="微软雅黑"/>
               </a:rPr>
-              <a:t>【脑机接口】</a:t>
+              <a:t>• AAIF等国际治理框架成熟</a:t>
             </a:r>
           </a:p>
           <a:p>
@@ -44156,7 +44684,7 @@
                 <a:spcPts val="0"/>
               </a:spcBef>
               <a:spcAft>
-                <a:spcPts val="300"/>
+                <a:spcPts val="0"/>
               </a:spcAft>
             </a:pPr>
             <a:r>
@@ -44166,7 +44694,7 @@
                 </a:solidFill>
                 <a:latin typeface="微软雅黑"/>
               </a:rPr>
-              <a:t>• 非侵入式高带宽BCI普及</a:t>
+              <a:t>• 中国方案贡献率超40%（只作为参考依据）</a:t>
             </a:r>
           </a:p>
           <a:p>
@@ -44178,7 +44706,7 @@
                 <a:spcPts val="0"/>
               </a:spcBef>
               <a:spcAft>
-                <a:spcPts val="300"/>
+                <a:spcPts val="0"/>
               </a:spcAft>
             </a:pPr>
             <a:r>
@@ -44188,7 +44716,7 @@
                 </a:solidFill>
                 <a:latin typeface="微软雅黑"/>
               </a:rPr>
-              <a:t>• 实现脑-机-云融合</a:t>
+              <a:t>• 跨境数据流动白名单机制落地</a:t>
             </a:r>
           </a:p>
           <a:p>
@@ -44200,7 +44728,7 @@
                 <a:spcPts val="0"/>
               </a:spcBef>
               <a:spcAft>
-                <a:spcPts val="300"/>
+                <a:spcPts val="0"/>
               </a:spcAft>
             </a:pPr>
             <a:r>
@@ -44210,7 +44738,7 @@
                 </a:solidFill>
                 <a:latin typeface="微软雅黑"/>
               </a:rPr>
-              <a:t/>
+              <a:t>六、总结与建议</a:t>
             </a:r>
           </a:p>
           <a:p>
@@ -44222,7 +44750,7 @@
                 <a:spcPts val="0"/>
               </a:spcBef>
               <a:spcAft>
-                <a:spcPts val="300"/>
+                <a:spcPts val="0"/>
               </a:spcAft>
             </a:pPr>
             <a:r>
@@ -44232,7 +44760,7 @@
                 </a:solidFill>
                 <a:latin typeface="微软雅黑"/>
               </a:rPr>
-              <a:t>四、总结与建议</a:t>
+              <a:t>2027-2035是技术红利转社会红利关键十年：</a:t>
             </a:r>
           </a:p>
           <a:p>
@@ -44244,7 +44772,7 @@
                 <a:spcPts val="0"/>
               </a:spcBef>
               <a:spcAft>
-                <a:spcPts val="300"/>
+                <a:spcPts val="0"/>
               </a:spcAft>
             </a:pPr>
             <a:r>
@@ -44254,7 +44782,7 @@
                 </a:solidFill>
                 <a:latin typeface="微软雅黑"/>
               </a:rPr>
-              <a:t/>
+              <a:t>• 个人：提升AI协作与复杂决策能力</a:t>
             </a:r>
           </a:p>
           <a:p>
@@ -44266,7 +44794,7 @@
                 <a:spcPts val="0"/>
               </a:spcBef>
               <a:spcAft>
-                <a:spcPts val="300"/>
+                <a:spcPts val="0"/>
               </a:spcAft>
             </a:pPr>
             <a:r>
@@ -44276,7 +44804,7 @@
                 </a:solidFill>
                 <a:latin typeface="微软雅黑"/>
               </a:rPr>
-              <a:t>2027-2035年是AI从技术红利转化为社会红利的关键十年：</a:t>
+              <a:t>• 企业：布局"人工智能+"重构流程</a:t>
             </a:r>
           </a:p>
           <a:p>
@@ -44288,7 +44816,7 @@
                 <a:spcPts val="0"/>
               </a:spcBef>
               <a:spcAft>
-                <a:spcPts val="300"/>
+                <a:spcPts val="0"/>
               </a:spcAft>
             </a:pPr>
             <a:r>
@@ -44298,7 +44826,7 @@
                 </a:solidFill>
                 <a:latin typeface="微软雅黑"/>
               </a:rPr>
-              <a:t>• 个人：提升与AI协作能力，关注创造力与复杂决策能力培养</a:t>
+              <a:t>• 社会：健全AI伦理与安全治理体系</a:t>
             </a:r>
           </a:p>
           <a:p>
@@ -44310,7 +44838,7 @@
                 <a:spcPts val="0"/>
               </a:spcBef>
               <a:spcAft>
-                <a:spcPts val="300"/>
+                <a:spcPts val="0"/>
               </a:spcAft>
             </a:pPr>
             <a:r>
@@ -44320,7 +44848,7 @@
                 </a:solidFill>
                 <a:latin typeface="微软雅黑"/>
               </a:rPr>
-              <a:t>• 企业：布局"人工智能+"战略，重构业务流程降本增效</a:t>
+              <a:t>• 教育：AI素养纳入国民教育全阶段</a:t>
             </a:r>
           </a:p>
           <a:p>
@@ -44342,7 +44870,139 @@
                 </a:solidFill>
                 <a:latin typeface="微软雅黑"/>
               </a:rPr>
-              <a:t>• 社会：建立健全AI伦理与安全治理体系</a:t>
+              <a:t>七、风险提示</a:t>
+            </a:r>
+          </a:p>
+          <a:p>
+            <a:pPr>
+              <a:lnSpc>
+                <a:spcPts val="1200"/>
+              </a:lnSpc>
+              <a:spcBef>
+                <a:spcPts val="0"/>
+              </a:spcBef>
+              <a:spcAft>
+                <a:spcPts val="0"/>
+              </a:spcAft>
+            </a:pPr>
+            <a:r>
+              <a:rPr sz="1000">
+                <a:solidFill>
+                  <a:srgbClr val="FFFFFF"/>
+                </a:solidFill>
+                <a:latin typeface="微软雅黑"/>
+              </a:rPr>
+              <a:t>• 技术路线突变可能重置竞争格局</a:t>
+            </a:r>
+          </a:p>
+          <a:p>
+            <a:pPr>
+              <a:lnSpc>
+                <a:spcPts val="1200"/>
+              </a:lnSpc>
+              <a:spcBef>
+                <a:spcPts val="0"/>
+              </a:spcBef>
+              <a:spcAft>
+                <a:spcPts val="0"/>
+              </a:spcAft>
+            </a:pPr>
+            <a:r>
+              <a:rPr sz="1000">
+                <a:solidFill>
+                  <a:srgbClr val="FFFFFF"/>
+                </a:solidFill>
+                <a:latin typeface="微软雅黑"/>
+              </a:rPr>
+              <a:t>• 就业转型需社会保障托底</a:t>
+            </a:r>
+          </a:p>
+          <a:p>
+            <a:pPr>
+              <a:lnSpc>
+                <a:spcPts val="1200"/>
+              </a:lnSpc>
+              <a:spcBef>
+                <a:spcPts val="0"/>
+              </a:spcBef>
+              <a:spcAft>
+                <a:spcPts val="0"/>
+              </a:spcAft>
+            </a:pPr>
+            <a:r>
+              <a:rPr sz="1000">
+                <a:solidFill>
+                  <a:srgbClr val="FFFFFF"/>
+                </a:solidFill>
+                <a:latin typeface="微软雅黑"/>
+              </a:rPr>
+              <a:t>• 能源约束或成算力扩张瓶颈</a:t>
+            </a:r>
+          </a:p>
+          <a:p>
+            <a:pPr>
+              <a:lnSpc>
+                <a:spcPts val="1200"/>
+              </a:lnSpc>
+              <a:spcBef>
+                <a:spcPts val="0"/>
+              </a:spcBef>
+              <a:spcAft>
+                <a:spcPts val="0"/>
+              </a:spcAft>
+            </a:pPr>
+            <a:r>
+              <a:rPr sz="1000">
+                <a:solidFill>
+                  <a:srgbClr val="FFFFFF"/>
+                </a:solidFill>
+                <a:latin typeface="微软雅黑"/>
+              </a:rPr>
+              <a:t>八、展望</a:t>
+            </a:r>
+          </a:p>
+          <a:p>
+            <a:pPr>
+              <a:lnSpc>
+                <a:spcPts val="1200"/>
+              </a:lnSpc>
+              <a:spcBef>
+                <a:spcPts val="0"/>
+              </a:spcBef>
+              <a:spcAft>
+                <a:spcPts val="0"/>
+              </a:spcAft>
+            </a:pPr>
+            <a:r>
+              <a:rPr sz="1000">
+                <a:solidFill>
+                  <a:srgbClr val="FFFFFF"/>
+                </a:solidFill>
+                <a:latin typeface="微软雅黑"/>
+              </a:rPr>
+              <a:t>• 2035年智能体成为社会基础成员</a:t>
+            </a:r>
+          </a:p>
+          <a:p>
+            <a:pPr>
+              <a:lnSpc>
+                <a:spcPts val="1200"/>
+              </a:lnSpc>
+              <a:spcBef>
+                <a:spcPts val="0"/>
+              </a:spcBef>
+              <a:spcAft>
+                <a:spcPts val="0"/>
+              </a:spcAft>
+            </a:pPr>
+            <a:r>
+              <a:rPr sz="1000">
+                <a:solidFill>
+                  <a:srgbClr val="FFFFFF"/>
+                </a:solidFill>
+                <a:latin typeface="微软雅黑"/>
+              </a:rPr>
+              <a:t>• 人机共生文明形态初现（只作为参考依据）</a:t>
             </a:r>
           </a:p>
         </p:txBody>
@@ -44646,7 +45306,7 @@
         <p:spPr>
           <a:xfrm>
             <a:off x="457200" y="914400"/>
-            <a:ext cx="11430000" cy="5651500"/>
+            <a:ext cx="11430000" cy="5486400"/>
           </a:xfrm>
           <a:prstGeom prst="rect">
             <a:avLst/>
@@ -44667,7 +45327,7 @@
                 <a:spcPts val="0"/>
               </a:spcBef>
               <a:spcAft>
-                <a:spcPts val="400"/>
+                <a:spcPts val="0"/>
               </a:spcAft>
             </a:pPr>
             <a:r>
@@ -44677,7 +45337,7 @@
                 </a:solidFill>
                 <a:latin typeface="微软雅黑"/>
               </a:rPr>
-              <a:t>【知识产权保护】</a:t>
+              <a:t>【一、总则与法律依据】</a:t>
             </a:r>
           </a:p>
           <a:p>
@@ -44689,7 +45349,7 @@
                 <a:spcPts val="0"/>
               </a:spcBef>
               <a:spcAft>
-                <a:spcPts val="400"/>
+                <a:spcPts val="0"/>
               </a:spcAft>
             </a:pPr>
             <a:r>
@@ -44699,7 +45359,7 @@
                 </a:solidFill>
                 <a:latin typeface="微软雅黑"/>
               </a:rPr>
-              <a:t>1. 本 PPT 内容受《中华人民共和国著作权法》及相关国际公约保护；</a:t>
+              <a:t>1. 本声明依据《民法典》《著作权法》《个人信息保护法》《数据安全法》《网络安全法》及《生成式人工智能服务管理暂行办法》等法律法规制定；</a:t>
             </a:r>
           </a:p>
           <a:p>
@@ -44711,7 +45371,7 @@
                 <a:spcPts val="0"/>
               </a:spcBef>
               <a:spcAft>
-                <a:spcPts val="400"/>
+                <a:spcPts val="0"/>
               </a:spcAft>
             </a:pPr>
             <a:r>
@@ -44721,7 +45381,7 @@
                 </a:solidFill>
                 <a:latin typeface="微软雅黑"/>
               </a:rPr>
-              <a:t>2. 未经本 PPT 作者书面授权，任何单位或个人不得以任何形式复制、传播、改编、翻译、汇编或用于商业目的；</a:t>
+              <a:t>2. 本PPT同时参照GB/Z 185智能体互联国家标准、ISO/IEC JTC1人工智能分委会技术报告编制，构成演示文件不可分割的组成部分；</a:t>
             </a:r>
           </a:p>
           <a:p>
@@ -44733,7 +45393,7 @@
                 <a:spcPts val="0"/>
               </a:spcBef>
               <a:spcAft>
-                <a:spcPts val="400"/>
+                <a:spcPts val="0"/>
               </a:spcAft>
             </a:pPr>
             <a:r>
@@ -44743,7 +45403,7 @@
                 </a:solidFill>
                 <a:latin typeface="微软雅黑"/>
               </a:rPr>
-              <a:t>3. 擅自使用或侵权将依法追究法律责任，包括但不限于赔偿损失、承担诉讼费用等。</a:t>
+              <a:t>3. 任何单位或个人获取、阅读、存储、转发本PPT，即视为已充分阅读并无条件接受本声明全部条款，不接受者应立即停止使用并销毁全部副本。</a:t>
             </a:r>
           </a:p>
           <a:p>
@@ -44755,7 +45415,7 @@
                 <a:spcPts val="0"/>
               </a:spcBef>
               <a:spcAft>
-                <a:spcPts val="400"/>
+                <a:spcPts val="0"/>
               </a:spcAft>
             </a:pPr>
             <a:r>
@@ -44765,7 +45425,7 @@
                 </a:solidFill>
                 <a:latin typeface="微软雅黑"/>
               </a:rPr>
-              <a:t/>
+              <a:t>【二、知识产权声明】</a:t>
             </a:r>
           </a:p>
           <a:p>
@@ -44777,7 +45437,7 @@
                 <a:spcPts val="0"/>
               </a:spcBef>
               <a:spcAft>
-                <a:spcPts val="400"/>
+                <a:spcPts val="0"/>
               </a:spcAft>
             </a:pPr>
             <a:r>
@@ -44787,7 +45447,7 @@
                 </a:solidFill>
                 <a:latin typeface="微软雅黑"/>
               </a:rPr>
-              <a:t>【内容性质说明】</a:t>
+              <a:t>4. 本PPT整体架构、版式设计、文字表述、图表模型及数据编排的著作权归作者所有，受《著作权法》及《伯尔尼公约》保护；</a:t>
             </a:r>
           </a:p>
           <a:p>
@@ -44799,7 +45459,7 @@
                 <a:spcPts val="0"/>
               </a:spcBef>
               <a:spcAft>
-                <a:spcPts val="400"/>
+                <a:spcPts val="0"/>
               </a:spcAft>
             </a:pPr>
             <a:r>
@@ -44809,7 +45469,7 @@
                 </a:solidFill>
                 <a:latin typeface="微软雅黑"/>
               </a:rPr>
-              <a:t>4. 本 PPT 内容为基于截至 2026 年 8 月公开信息的前瞻性研究与合理推演，**不构成投资建议、商业承诺或法律保证**；</a:t>
+              <a:t>5. 未经作者书面授权，任何单位或个人不得以复制、转载、摘编、翻译、改编、汇编、镜像、上传、下载、商业演示等任何方式利用本PPT；</a:t>
             </a:r>
           </a:p>
           <a:p>
@@ -44821,7 +45481,7 @@
                 <a:spcPts val="0"/>
               </a:spcBef>
               <a:spcAft>
-                <a:spcPts val="400"/>
+                <a:spcPts val="0"/>
               </a:spcAft>
             </a:pPr>
             <a:r>
@@ -44831,7 +45491,7 @@
                 </a:solidFill>
                 <a:latin typeface="微软雅黑"/>
               </a:rPr>
-              <a:t>5. 文中提及的 AI 大模型技术参数、市场规模预测、技术发展时间节点等均为理论推演，实际情况可能因多种因素而有所不同；</a:t>
+              <a:t>6. 经授权使用的，须保持内容完整、标注来源，不得删除或遮盖水印、页眉、页脚及权利标识；授权范围以书面许可载明为限；</a:t>
             </a:r>
           </a:p>
           <a:p>
@@ -44843,7 +45503,7 @@
                 <a:spcPts val="0"/>
               </a:spcBef>
               <a:spcAft>
-                <a:spcPts val="400"/>
+                <a:spcPts val="0"/>
               </a:spcAft>
             </a:pPr>
             <a:r>
@@ -44853,7 +45513,7 @@
                 </a:solidFill>
                 <a:latin typeface="微软雅黑"/>
               </a:rPr>
-              <a:t>6. 读者应独立判断，自行承担使用本 PPT 内容的全部风险。</a:t>
+              <a:t>7. 本PPT引用的第三方商标与模型名称（GPT-5.6、Gemini、Qwen3.8、GLM-5.3、DeepSeek、Kimi等）归各自权利人所有，仅为说明目的合理使用；</a:t>
             </a:r>
           </a:p>
           <a:p>
@@ -44865,7 +45525,7 @@
                 <a:spcPts val="0"/>
               </a:spcBef>
               <a:spcAft>
-                <a:spcPts val="400"/>
+                <a:spcPts val="0"/>
               </a:spcAft>
             </a:pPr>
             <a:r>
@@ -44875,7 +45535,7 @@
                 </a:solidFill>
                 <a:latin typeface="微软雅黑"/>
               </a:rPr>
-              <a:t/>
+              <a:t>8. 侵权者须承担停止侵害、消除影响、赔礼道歉、赔偿损失等民事责任，赔偿范围包括作者维权支出的公证费、律师费、调查取证费。</a:t>
             </a:r>
           </a:p>
           <a:p>
@@ -44887,7 +45547,7 @@
                 <a:spcPts val="0"/>
               </a:spcBef>
               <a:spcAft>
-                <a:spcPts val="400"/>
+                <a:spcPts val="0"/>
               </a:spcAft>
             </a:pPr>
             <a:r>
@@ -44897,7 +45557,7 @@
                 </a:solidFill>
                 <a:latin typeface="微软雅黑"/>
               </a:rPr>
-              <a:t>【数据准确性声明】</a:t>
+              <a:t>【三、内容性质与前瞻声明】</a:t>
             </a:r>
           </a:p>
           <a:p>
@@ -44909,7 +45569,7 @@
                 <a:spcPts val="0"/>
               </a:spcBef>
               <a:spcAft>
-                <a:spcPts val="400"/>
+                <a:spcPts val="0"/>
               </a:spcAft>
             </a:pPr>
             <a:r>
@@ -44919,7 +45579,7 @@
                 </a:solidFill>
                 <a:latin typeface="微软雅黑"/>
               </a:rPr>
-              <a:t>7. 本 PPT 引用的数据来源于公开渠道，虽经审慎核实，但本 PPT 作者不对其准确性、完整性或时效性做出任何明示或默示的保证；</a:t>
+              <a:t>9. 本PPT为基于截至2026年8月公开信息的前瞻性研究与合理推演，仅供技术交流与学习参考，**不构成投资建议、商业承诺或法律保证**；</a:t>
             </a:r>
           </a:p>
           <a:p>
@@ -44931,7 +45591,7 @@
                 <a:spcPts val="0"/>
               </a:spcBef>
               <a:spcAft>
-                <a:spcPts val="400"/>
+                <a:spcPts val="0"/>
               </a:spcAft>
             </a:pPr>
             <a:r>
@@ -44941,7 +45601,7 @@
                 </a:solidFill>
                 <a:latin typeface="微软雅黑"/>
               </a:rPr>
-              <a:t>8. 实际数据以各厂商官方发布及权威机构报告为准，本 PPT 不承担数据更新义务。</a:t>
+              <a:t>10. 文中技术参数、市场规模、时间节点均为理论推演，受技术突破、政策调整、市场环境等不确定因素影响，实际结果可能发生重大偏离；</a:t>
             </a:r>
           </a:p>
           <a:p>
@@ -44953,7 +45613,7 @@
                 <a:spcPts val="0"/>
               </a:spcBef>
               <a:spcAft>
-                <a:spcPts val="300"/>
+                <a:spcPts val="0"/>
               </a:spcAft>
             </a:pPr>
             <a:r>
@@ -44963,7 +45623,7 @@
                 </a:solidFill>
                 <a:latin typeface="微软雅黑"/>
               </a:rPr>
-              <a:t/>
+              <a:t>11. 涉及2031-2035年的预测内容仅为参考依据，不代表任何确定性承诺，作者不承担因依赖该等内容作出的任何决策后果。</a:t>
             </a:r>
           </a:p>
           <a:p>
@@ -44975,7 +45635,7 @@
                 <a:spcPts val="0"/>
               </a:spcBef>
               <a:spcAft>
-                <a:spcPts val="300"/>
+                <a:spcPts val="0"/>
               </a:spcAft>
             </a:pPr>
             <a:r>
@@ -44985,7 +45645,7 @@
                 </a:solidFill>
                 <a:latin typeface="微软雅黑"/>
               </a:rPr>
-              <a:t>【责任限额条款】</a:t>
+              <a:t>【四、数据合规与准确性】</a:t>
             </a:r>
           </a:p>
           <a:p>
@@ -44997,7 +45657,7 @@
                 <a:spcPts val="0"/>
               </a:spcBef>
               <a:spcAft>
-                <a:spcPts val="300"/>
+                <a:spcPts val="0"/>
               </a:spcAft>
             </a:pPr>
             <a:r>
@@ -45007,7 +45667,7 @@
                 </a:solidFill>
                 <a:latin typeface="微软雅黑"/>
               </a:rPr>
-              <a:t>9. **在任何情况下，作者对用户的最高赔偿额不超过人民币零元整（CNY 0.00）**。</a:t>
+              <a:t>12. 本PPT数据来源于各厂商官方发布、Gartner/IDC/Statista等权威机构公开报告及国家标准文本，作者已尽审慎核实义务；</a:t>
             </a:r>
           </a:p>
           <a:p>
@@ -45019,7 +45679,7 @@
                 <a:spcPts val="0"/>
               </a:spcBef>
               <a:spcAft>
-                <a:spcPts val="300"/>
+                <a:spcPts val="0"/>
               </a:spcAft>
             </a:pPr>
             <a:r>
@@ -45029,7 +45689,7 @@
                 </a:solidFill>
                 <a:latin typeface="微软雅黑"/>
               </a:rPr>
-              <a:t/>
+              <a:t>13. 作者不对数据的准确性、完整性、时效性作任何明示或默示保证，实际数据以官方发布为准，作者不承担数据更新义务；</a:t>
             </a:r>
           </a:p>
           <a:p>
@@ -45041,7 +45701,7 @@
                 <a:spcPts val="0"/>
               </a:spcBef>
               <a:spcAft>
-                <a:spcPts val="300"/>
+                <a:spcPts val="0"/>
               </a:spcAft>
             </a:pPr>
             <a:r>
@@ -45051,7 +45711,7 @@
                 </a:solidFill>
                 <a:latin typeface="微软雅黑"/>
               </a:rPr>
-              <a:t>【权利保留条款】</a:t>
+              <a:t>14. 本PPT不含国家秘密、商业秘密及他人个人信息；如涉个人信息，均已依法取得单独同意或完成去标识化处理。</a:t>
             </a:r>
           </a:p>
           <a:p>
@@ -45063,7 +45723,7 @@
                 <a:spcPts val="0"/>
               </a:spcBef>
               <a:spcAft>
-                <a:spcPts val="300"/>
+                <a:spcPts val="0"/>
               </a:spcAft>
             </a:pPr>
             <a:r>
@@ -45073,7 +45733,7 @@
                 </a:solidFill>
                 <a:latin typeface="微软雅黑"/>
               </a:rPr>
-              <a:t>10. 本 PPT 作者保留随时更新、修改或撤回本 PPT 内容的权利，无需事先通知；</a:t>
+              <a:t>【五、AI生成内容声明】</a:t>
             </a:r>
           </a:p>
           <a:p>
@@ -45085,7 +45745,7 @@
                 <a:spcPts val="0"/>
               </a:spcBef>
               <a:spcAft>
-                <a:spcPts val="300"/>
+                <a:spcPts val="0"/>
               </a:spcAft>
             </a:pPr>
             <a:r>
@@ -45095,7 +45755,7 @@
                 </a:solidFill>
                 <a:latin typeface="微软雅黑"/>
               </a:rPr>
-              <a:t>11. 本声明条款的最终解释权归作者所有。</a:t>
+              <a:t>15. 本PPT部分文字由生成式AI辅助整理，作者已进行人工审核与事实核查，依《生成式人工智能服务管理暂行办法》承担相应义务；</a:t>
             </a:r>
           </a:p>
           <a:p>
@@ -45107,7 +45767,7 @@
                 <a:spcPts val="0"/>
               </a:spcBef>
               <a:spcAft>
-                <a:spcPts val="300"/>
+                <a:spcPts val="0"/>
               </a:spcAft>
             </a:pPr>
             <a:r>
@@ -45117,7 +45777,7 @@
                 </a:solidFill>
                 <a:latin typeface="微软雅黑"/>
               </a:rPr>
-              <a:t/>
+              <a:t>16. AI辅助内容可能存在幻觉或偏差，关键数据请以原始出处为准，作者对AI生成部分的瑕疵不承担超出法律强制规定的责任。</a:t>
             </a:r>
           </a:p>
           <a:p>
@@ -45129,7 +45789,7 @@
                 <a:spcPts val="0"/>
               </a:spcBef>
               <a:spcAft>
-                <a:spcPts val="300"/>
+                <a:spcPts val="0"/>
               </a:spcAft>
             </a:pPr>
             <a:r>
@@ -45139,7 +45799,7 @@
                 </a:solidFill>
                 <a:latin typeface="微软雅黑"/>
               </a:rPr>
-              <a:t>【适用法律与争议解决】</a:t>
+              <a:t>【六、责任限制】</a:t>
             </a:r>
           </a:p>
           <a:p>
@@ -45151,7 +45811,7 @@
                 <a:spcPts val="0"/>
               </a:spcBef>
               <a:spcAft>
-                <a:spcPts val="300"/>
+                <a:spcPts val="0"/>
               </a:spcAft>
             </a:pPr>
             <a:r>
@@ -45161,7 +45821,7 @@
                 </a:solidFill>
                 <a:latin typeface="微软雅黑"/>
               </a:rPr>
-              <a:t>12. 本声明受中华人民共和国法律管辖；</a:t>
+              <a:t>17. 在法律允许的最大范围内，作者对因使用或依赖本PPT产生的任何直接、间接、附带、惩罚性损失均不承担责任；</a:t>
             </a:r>
           </a:p>
           <a:p>
@@ -45173,7 +45833,7 @@
                 <a:spcPts val="0"/>
               </a:spcBef>
               <a:spcAft>
-                <a:spcPts val="300"/>
+                <a:spcPts val="0"/>
               </a:spcAft>
             </a:pPr>
             <a:r>
@@ -45183,7 +45843,7 @@
                 </a:solidFill>
                 <a:latin typeface="微软雅黑"/>
               </a:rPr>
-              <a:t>13. 如发生争议，双方应协商解决；协商不成的，由作者所在地有管辖权的人民法院管辖。</a:t>
+              <a:t>18. **在任何情况下，作者对使用者的最高赔偿额不超过人民币零元整（CNY 0.00）**，本条为双方风险分配之基础；</a:t>
             </a:r>
           </a:p>
           <a:p>
@@ -45195,7 +45855,7 @@
                 <a:spcPts val="0"/>
               </a:spcBef>
               <a:spcAft>
-                <a:spcPts val="300"/>
+                <a:spcPts val="0"/>
               </a:spcAft>
             </a:pPr>
             <a:r>
@@ -45205,7 +45865,7 @@
                 </a:solidFill>
                 <a:latin typeface="微软雅黑"/>
               </a:rPr>
-              <a:t/>
+              <a:t>19. 本条责任限制具有独立法律效力，不因合同目的落空等情形而失效。</a:t>
             </a:r>
           </a:p>
           <a:p>
@@ -45217,7 +45877,7 @@
                 <a:spcPts val="0"/>
               </a:spcBef>
               <a:spcAft>
-                <a:spcPts val="300"/>
+                <a:spcPts val="0"/>
               </a:spcAft>
             </a:pPr>
             <a:r>
@@ -45227,7 +45887,7 @@
                 </a:solidFill>
                 <a:latin typeface="微软雅黑"/>
               </a:rPr>
-              <a:t>【用户同意条款】</a:t>
+              <a:t>【七、保密与传播控制】</a:t>
             </a:r>
           </a:p>
           <a:p>
@@ -45239,7 +45899,7 @@
                 <a:spcPts val="0"/>
               </a:spcBef>
               <a:spcAft>
-                <a:spcPts val="300"/>
+                <a:spcPts val="0"/>
               </a:spcAft>
             </a:pPr>
             <a:r>
@@ -45249,7 +45909,7 @@
                 </a:solidFill>
                 <a:latin typeface="微软雅黑"/>
               </a:rPr>
-              <a:t>14. 使用本 PPT 即视为用户已阅读、理解并同意本法律声明及免责条款的全部内容。</a:t>
+              <a:t>20. 本PPT标注水印版本为受控分发版本，接收方负有保密义务，不得向无关第三方披露、传播或允许其接触；</a:t>
             </a:r>
           </a:p>
           <a:p>
@@ -45261,7 +45921,7 @@
                 <a:spcPts val="0"/>
               </a:spcBef>
               <a:spcAft>
-                <a:spcPts val="300"/>
+                <a:spcPts val="0"/>
               </a:spcAft>
             </a:pPr>
             <a:r>
@@ -45271,7 +45931,7 @@
                 </a:solidFill>
                 <a:latin typeface="微软雅黑"/>
               </a:rPr>
-              <a:t/>
+              <a:t>21. 任何去除、遮盖、伪造水印的行为均属故意侵权，作者有权主张惩罚性赔偿并追究行政、刑事责任。</a:t>
             </a:r>
           </a:p>
           <a:p>
@@ -45293,7 +45953,161 @@
                 </a:solidFill>
                 <a:latin typeface="微软雅黑"/>
               </a:rPr>
-              <a:t>© 2026 本 PPT 作者 · 版权所有</a:t>
+              <a:t>【八、权利保留与条款效力】</a:t>
+            </a:r>
+          </a:p>
+          <a:p>
+            <a:pPr>
+              <a:lnSpc>
+                <a:spcPts val="1200"/>
+              </a:lnSpc>
+              <a:spcBef>
+                <a:spcPts val="0"/>
+              </a:spcBef>
+              <a:spcAft>
+                <a:spcPts val="0"/>
+              </a:spcAft>
+            </a:pPr>
+            <a:r>
+              <a:rPr sz="900">
+                <a:solidFill>
+                  <a:srgbClr val="FFFFFF"/>
+                </a:solidFill>
+                <a:latin typeface="微软雅黑"/>
+              </a:rPr>
+              <a:t>22. 作者保留随时更新、修改、撤回本PPT及本声明的权利，无需事先通知；更新版本自发布之日起替代旧版本；</a:t>
+            </a:r>
+          </a:p>
+          <a:p>
+            <a:pPr>
+              <a:lnSpc>
+                <a:spcPts val="1200"/>
+              </a:lnSpc>
+              <a:spcBef>
+                <a:spcPts val="0"/>
+              </a:spcBef>
+              <a:spcAft>
+                <a:spcPts val="0"/>
+              </a:spcAft>
+            </a:pPr>
+            <a:r>
+              <a:rPr sz="900">
+                <a:solidFill>
+                  <a:srgbClr val="FFFFFF"/>
+                </a:solidFill>
+                <a:latin typeface="微软雅黑"/>
+              </a:rPr>
+              <a:t>23. 本声明任何条款被认定无效或不可执行的，不影响其余条款效力，其余条款继续完全有效（可分割性条款）；</a:t>
+            </a:r>
+          </a:p>
+          <a:p>
+            <a:pPr>
+              <a:lnSpc>
+                <a:spcPts val="1200"/>
+              </a:lnSpc>
+              <a:spcBef>
+                <a:spcPts val="0"/>
+              </a:spcBef>
+              <a:spcAft>
+                <a:spcPts val="0"/>
+              </a:spcAft>
+            </a:pPr>
+            <a:r>
+              <a:rPr sz="900">
+                <a:solidFill>
+                  <a:srgbClr val="FFFFFF"/>
+                </a:solidFill>
+                <a:latin typeface="微软雅黑"/>
+              </a:rPr>
+              <a:t>24. 本声明构成作者与使用者之间就本PPT使用的完整协议，取代此前任何口头或书面约定（完整协议条款）。</a:t>
+            </a:r>
+          </a:p>
+          <a:p>
+            <a:pPr>
+              <a:lnSpc>
+                <a:spcPts val="1200"/>
+              </a:lnSpc>
+              <a:spcBef>
+                <a:spcPts val="0"/>
+              </a:spcBef>
+              <a:spcAft>
+                <a:spcPts val="0"/>
+              </a:spcAft>
+            </a:pPr>
+            <a:r>
+              <a:rPr sz="900">
+                <a:solidFill>
+                  <a:srgbClr val="FFFFFF"/>
+                </a:solidFill>
+                <a:latin typeface="微软雅黑"/>
+              </a:rPr>
+              <a:t>【九、适用法律与争议解决】</a:t>
+            </a:r>
+          </a:p>
+          <a:p>
+            <a:pPr>
+              <a:lnSpc>
+                <a:spcPts val="1200"/>
+              </a:lnSpc>
+              <a:spcBef>
+                <a:spcPts val="0"/>
+              </a:spcBef>
+              <a:spcAft>
+                <a:spcPts val="0"/>
+              </a:spcAft>
+            </a:pPr>
+            <a:r>
+              <a:rPr sz="900">
+                <a:solidFill>
+                  <a:srgbClr val="FFFFFF"/>
+                </a:solidFill>
+                <a:latin typeface="微软雅黑"/>
+              </a:rPr>
+              <a:t>25. 本声明的订立、效力、解释、履行及争议解决均适用中华人民共和国法律；</a:t>
+            </a:r>
+          </a:p>
+          <a:p>
+            <a:pPr>
+              <a:lnSpc>
+                <a:spcPts val="1200"/>
+              </a:lnSpc>
+              <a:spcBef>
+                <a:spcPts val="0"/>
+              </a:spcBef>
+              <a:spcAft>
+                <a:spcPts val="0"/>
+              </a:spcAft>
+            </a:pPr>
+            <a:r>
+              <a:rPr sz="900">
+                <a:solidFill>
+                  <a:srgbClr val="FFFFFF"/>
+                </a:solidFill>
+                <a:latin typeface="微软雅黑"/>
+              </a:rPr>
+              <a:t>26. 因本PPT产生的争议，双方应先行协商；协商不成的，提交作者所在地有管辖权的人民法院诉讼解决。</a:t>
+            </a:r>
+          </a:p>
+          <a:p>
+            <a:pPr>
+              <a:lnSpc>
+                <a:spcPts val="1200"/>
+              </a:lnSpc>
+              <a:spcBef>
+                <a:spcPts val="0"/>
+              </a:spcBef>
+              <a:spcAft>
+                <a:spcPts val="0"/>
+              </a:spcAft>
+            </a:pPr>
+            <a:r>
+              <a:rPr sz="900">
+                <a:solidFill>
+                  <a:srgbClr val="FFFFFF"/>
+                </a:solidFill>
+                <a:latin typeface="微软雅黑"/>
+              </a:rPr>
+              <a:t>© 2026 本PPT作者 · 版权所有 · 侵权必究</a:t>
             </a:r>
           </a:p>
         </p:txBody>
@@ -45618,7 +46432,7 @@
                 <a:spcPts val="0"/>
               </a:spcBef>
               <a:spcAft>
-                <a:spcPts val="300"/>
+                <a:spcPts val="200"/>
               </a:spcAft>
             </a:pPr>
             <a:r>
@@ -45628,7 +46442,7 @@
                 </a:solidFill>
                 <a:latin typeface="微软雅黑"/>
               </a:rPr>
-              <a:t>【风险免责条款】</a:t>
+              <a:t>【一、风险免责总则】</a:t>
             </a:r>
           </a:p>
           <a:p>
@@ -45640,7 +46454,7 @@
                 <a:spcPts val="0"/>
               </a:spcBef>
               <a:spcAft>
-                <a:spcPts val="300"/>
+                <a:spcPts val="200"/>
               </a:spcAft>
             </a:pPr>
             <a:r>
@@ -45650,7 +46464,7 @@
                 </a:solidFill>
                 <a:latin typeface="微软雅黑"/>
               </a:rPr>
-              <a:t>1. **不承担法律责任**：任何因使用或依赖本 PPT 内容而产生的直接或间接损失，本 PPT 作者不承担任何法律责任；</a:t>
+              <a:t>1. **不承担法律责任**：任何因使用或依赖本PPT内容而产生的直接或间接损失，作者不承担任何法律责任；</a:t>
             </a:r>
           </a:p>
           <a:p>
@@ -45662,7 +46476,7 @@
                 <a:spcPts val="0"/>
               </a:spcBef>
               <a:spcAft>
-                <a:spcPts val="300"/>
+                <a:spcPts val="200"/>
               </a:spcAft>
             </a:pPr>
             <a:r>
@@ -45672,7 +46486,7 @@
                 </a:solidFill>
                 <a:latin typeface="微软雅黑"/>
               </a:rPr>
-              <a:t>2. **自行评估风险**：使用者应自行评估风险并独立做出决策，本 PPT 作者不对决策结果负责；</a:t>
+              <a:t>2. **自行评估风险**：使用者应结合自身情况独立评估风险并自主决策，作者不对任何决策结果负责；</a:t>
             </a:r>
           </a:p>
           <a:p>
@@ -45684,7 +46498,7 @@
                 <a:spcPts val="0"/>
               </a:spcBef>
               <a:spcAft>
-                <a:spcPts val="300"/>
+                <a:spcPts val="200"/>
               </a:spcAft>
             </a:pPr>
             <a:r>
@@ -45694,7 +46508,7 @@
                 </a:solidFill>
                 <a:latin typeface="微软雅黑"/>
               </a:rPr>
-              <a:t>3. **技术不确定性**：本 PPT 提及的前沿技术（量子 AI、神经形态（Neuromorphic）、脑机接口、AGI 等等）处于研究或发展阶段，其商业化落地存在重大不确定性；</a:t>
+              <a:t>3. **专业意见豁免**：本PPT内容不构成法律、投资、会计、税务等任何专业意见，重大事项应咨询持牌专业人士。</a:t>
             </a:r>
           </a:p>
           <a:p>
@@ -45706,7 +46520,7 @@
                 <a:spcPts val="0"/>
               </a:spcBef>
               <a:spcAft>
-                <a:spcPts val="300"/>
+                <a:spcPts val="100"/>
               </a:spcAft>
             </a:pPr>
             <a:r>
@@ -45716,7 +46530,7 @@
                 </a:solidFill>
                 <a:latin typeface="微软雅黑"/>
               </a:rPr>
-              <a:t>4. **进度不确定性**：技术发展存在不确定性，实际进度可能因技术瓶颈、研发投入等因素滞后于预测。</a:t>
+              <a:t>【二、技术不确定性免责】</a:t>
             </a:r>
           </a:p>
           <a:p>
@@ -45728,7 +46542,7 @@
                 <a:spcPts val="0"/>
               </a:spcBef>
               <a:spcAft>
-                <a:spcPts val="300"/>
+                <a:spcPts val="100"/>
               </a:spcAft>
             </a:pPr>
             <a:r>
@@ -45738,7 +46552,7 @@
                 </a:solidFill>
                 <a:latin typeface="微软雅黑"/>
               </a:rPr>
-              <a:t/>
+              <a:t>4. **前沿技术风险**：量子AI、神经形态计算（Neuromorphic）、脑机接口、AGI等处于研究或早期发展阶段，商业化存在重大不确定性；</a:t>
             </a:r>
           </a:p>
           <a:p>
@@ -45750,7 +46564,7 @@
                 <a:spcPts val="0"/>
               </a:spcBef>
               <a:spcAft>
-                <a:spcPts val="300"/>
+                <a:spcPts val="100"/>
               </a:spcAft>
             </a:pPr>
             <a:r>
@@ -45760,7 +46574,7 @@
                 </a:solidFill>
                 <a:latin typeface="微软雅黑"/>
               </a:rPr>
-              <a:t>【商业价值声明】</a:t>
+              <a:t>5. **进度不确定性**：技术演进可能因算力、能源、算法瓶颈滞后于预测，作者不对时间节点的实现作任何保证；</a:t>
             </a:r>
           </a:p>
           <a:p>
@@ -45772,7 +46586,7 @@
                 <a:spcPts val="0"/>
               </a:spcBef>
               <a:spcAft>
-                <a:spcPts val="300"/>
+                <a:spcPts val="100"/>
               </a:spcAft>
             </a:pPr>
             <a:r>
@@ -45782,7 +46596,7 @@
                 </a:solidFill>
                 <a:latin typeface="微软雅黑"/>
               </a:rPr>
-              <a:t>5. **价值预估说明**：本 PPT 所展示的商业价值预估为基于当前市场环境的理论测算，实际商业价值实现取决于技术突破、市场接受度、竞争格局、政策环境等多种因素；</a:t>
+              <a:t>6. **路线突变风险**：技术路线可能被颠覆性创新重置，既有预测模型随之失效，使用者应动态跟踪自行判断。</a:t>
             </a:r>
           </a:p>
           <a:p>
@@ -45794,7 +46608,7 @@
                 <a:spcPts val="0"/>
               </a:spcBef>
               <a:spcAft>
-                <a:spcPts val="300"/>
+                <a:spcPts val="100"/>
               </a:spcAft>
             </a:pPr>
             <a:r>
@@ -45804,7 +46618,7 @@
                 </a:solidFill>
                 <a:latin typeface="微软雅黑"/>
               </a:rPr>
-              <a:t>6. **投资风险提示**：商业价值预估**不构成任何投资回报承诺**，投资有风险，决策需谨慎。</a:t>
+              <a:t>【三、商业价值声明】</a:t>
             </a:r>
           </a:p>
           <a:p>
@@ -45816,7 +46630,7 @@
                 <a:spcPts val="0"/>
               </a:spcBef>
               <a:spcAft>
-                <a:spcPts val="300"/>
+                <a:spcPts val="100"/>
               </a:spcAft>
             </a:pPr>
             <a:r>
@@ -45826,7 +46640,7 @@
                 </a:solidFill>
                 <a:latin typeface="微软雅黑"/>
               </a:rPr>
-              <a:t/>
+              <a:t>7. **价值预估说明**：商业价值预估为基于当前市场环境的理论测算，实际取决于技术突破、市场接受度、竞争格局、政策环境等因素；</a:t>
             </a:r>
           </a:p>
           <a:p>
@@ -45838,7 +46652,7 @@
                 <a:spcPts val="0"/>
               </a:spcBef>
               <a:spcAft>
-                <a:spcPts val="300"/>
+                <a:spcPts val="100"/>
               </a:spcAft>
             </a:pPr>
             <a:r>
@@ -45848,7 +46662,7 @@
                 </a:solidFill>
                 <a:latin typeface="微软雅黑"/>
               </a:rPr>
-              <a:t>【数据来源说明】</a:t>
+              <a:t>8. **投资风险提示**：商业价值预估**不构成任何投资回报承诺**；投资有风险，决策需谨慎，据此操作损失自担。</a:t>
             </a:r>
           </a:p>
           <a:p>
@@ -45860,7 +46674,7 @@
                 <a:spcPts val="0"/>
               </a:spcBef>
               <a:spcAft>
-                <a:spcPts val="300"/>
+                <a:spcPts val="100"/>
               </a:spcAft>
             </a:pPr>
             <a:r>
@@ -45870,7 +46684,7 @@
                 </a:solidFill>
                 <a:latin typeface="微软雅黑"/>
               </a:rPr>
-              <a:t>• AI 大模型信息：OpenAI（GPT-5.6）、Google（Gemini 3.7 Flash）、Anthropic、阿里巴巴（Qwen3.8）、智谱 AI（GLM-5.3）、DeepSeek（V4 Pro）、Kimi（K3）等厂商官方发布；</a:t>
+              <a:t>【四、数据来源与第三方免责】</a:t>
             </a:r>
           </a:p>
           <a:p>
@@ -45882,7 +46696,7 @@
                 <a:spcPts val="0"/>
               </a:spcBef>
               <a:spcAft>
-                <a:spcPts val="300"/>
+                <a:spcPts val="100"/>
               </a:spcAft>
             </a:pPr>
             <a:r>
@@ -45892,7 +46706,7 @@
                 </a:solidFill>
                 <a:latin typeface="微软雅黑"/>
               </a:rPr>
-              <a:t>• 量子计算信息：IBM Quantum、Google Quantum AI、中科院量子信息研究院研究进展；</a:t>
+              <a:t>9. 大模型信息：OpenAI、Google、Anthropic、阿里巴巴、智谱AI、DeepSeek、月之暗面等厂商官方发布；</a:t>
             </a:r>
           </a:p>
           <a:p>
@@ -45904,7 +46718,7 @@
                 <a:spcPts val="0"/>
               </a:spcBef>
               <a:spcAft>
-                <a:spcPts val="200"/>
+                <a:spcPts val="100"/>
               </a:spcAft>
             </a:pPr>
             <a:r>
@@ -45914,7 +46728,7 @@
                 </a:solidFill>
                 <a:latin typeface="微软雅黑"/>
               </a:rPr>
-              <a:t>• 脑机接口信息：Neuralink、Kernel、Meta Reality Labs 等企业技术路线；</a:t>
+              <a:t>10. 量子计算信息：IBM Quantum、Google Quantum AI、中科院量子信息研究进展；脑机接口：Neuralink、Kernel、Meta Reality Labs技术路线；</a:t>
             </a:r>
           </a:p>
           <a:p>
@@ -45926,7 +46740,7 @@
                 <a:spcPts val="0"/>
               </a:spcBef>
               <a:spcAft>
-                <a:spcPts val="200"/>
+                <a:spcPts val="100"/>
               </a:spcAft>
             </a:pPr>
             <a:r>
@@ -45936,7 +46750,7 @@
                 </a:solidFill>
                 <a:latin typeface="微软雅黑"/>
               </a:rPr>
-              <a:t>• 市场规模数据：Gartner、IDC、Statista、CB Insights 等权威机构报告；</a:t>
+              <a:t>11. 市场数据：Gartner、IDC、Statista、CB Insights等机构报告；标准框架：ISO/IEC、NIST、OWASP、CSA等组织规范；</a:t>
             </a:r>
           </a:p>
           <a:p>
@@ -45948,7 +46762,7 @@
                 <a:spcPts val="0"/>
               </a:spcBef>
               <a:spcAft>
-                <a:spcPts val="200"/>
+                <a:spcPts val="100"/>
               </a:spcAft>
             </a:pPr>
             <a:r>
@@ -45958,7 +46772,7 @@
                 </a:solidFill>
                 <a:latin typeface="微软雅黑"/>
               </a:rPr>
-              <a:t>• 技术标准框架：ISO/IEC、NIST、OWASP、CSA 等国际标准组织规范。</a:t>
+              <a:t>12. 上述第三方名称与数据仅为来源标注，相关权利归各自权利人，第三方不对本PPT的引用方式承担任何责任。</a:t>
             </a:r>
           </a:p>
           <a:p>
@@ -45970,7 +46784,7 @@
                 <a:spcPts val="0"/>
               </a:spcBef>
               <a:spcAft>
-                <a:spcPts val="200"/>
+                <a:spcPts val="100"/>
               </a:spcAft>
             </a:pPr>
             <a:r>
@@ -45980,7 +46794,7 @@
                 </a:solidFill>
                 <a:latin typeface="微软雅黑"/>
               </a:rPr>
-              <a:t/>
+              <a:t>【五、重要风险提示】⚠️</a:t>
             </a:r>
           </a:p>
           <a:p>
@@ -45992,7 +46806,7 @@
                 <a:spcPts val="0"/>
               </a:spcBef>
               <a:spcAft>
-                <a:spcPts val="200"/>
+                <a:spcPts val="100"/>
               </a:spcAft>
             </a:pPr>
             <a:r>
@@ -46002,7 +46816,7 @@
                 </a:solidFill>
                 <a:latin typeface="微软雅黑"/>
               </a:rPr>
-              <a:t>【重要风险提示】⚠️</a:t>
+              <a:t>• 技术风险：AI发展存在不确定性，实际进度可能滞后于预测；</a:t>
             </a:r>
           </a:p>
           <a:p>
@@ -46014,7 +46828,7 @@
                 <a:spcPts val="0"/>
               </a:spcBef>
               <a:spcAft>
-                <a:spcPts val="200"/>
+                <a:spcPts val="100"/>
               </a:spcAft>
             </a:pPr>
             <a:r>
@@ -46024,7 +46838,7 @@
                 </a:solidFill>
                 <a:latin typeface="微软雅黑"/>
               </a:rPr>
-              <a:t>• 技术风险：AI 技术发展存在不确定性，实际进度可能滞后于预测；</a:t>
+              <a:t>• 市场风险：接受度与竞争格局变化可能使商业化不及预期；</a:t>
             </a:r>
           </a:p>
           <a:p>
@@ -46036,7 +46850,7 @@
                 <a:spcPts val="0"/>
               </a:spcBef>
               <a:spcAft>
-                <a:spcPts val="200"/>
+                <a:spcPts val="100"/>
               </a:spcAft>
             </a:pPr>
             <a:r>
@@ -46046,7 +46860,7 @@
                 </a:solidFill>
                 <a:latin typeface="微软雅黑"/>
               </a:rPr>
-              <a:t>• 市场风险：市场接受度、竞争格局变化可能导致商业化进程不及预期；</a:t>
+              <a:t>• 监管风险：各国AI监管政策可能对技术方向与应用场景产生重大影响；</a:t>
             </a:r>
           </a:p>
           <a:p>
@@ -46058,7 +46872,7 @@
                 <a:spcPts val="0"/>
               </a:spcBef>
               <a:spcAft>
-                <a:spcPts val="200"/>
+                <a:spcPts val="100"/>
               </a:spcAft>
             </a:pPr>
             <a:r>
@@ -46068,7 +46882,7 @@
                 </a:solidFill>
                 <a:latin typeface="微软雅黑"/>
               </a:rPr>
-              <a:t>• 监管风险：各国 AI 监管政策可能对技术发展方向、应用场景产生重大影响；</a:t>
+              <a:t>• 人才风险：高端人才短缺可能限制研发与商业化速度；</a:t>
             </a:r>
           </a:p>
           <a:p>
@@ -46080,7 +46894,7 @@
                 <a:spcPts val="0"/>
               </a:spcBef>
               <a:spcAft>
-                <a:spcPts val="200"/>
+                <a:spcPts val="100"/>
               </a:spcAft>
             </a:pPr>
             <a:r>
@@ -46090,7 +46904,7 @@
                 </a:solidFill>
                 <a:latin typeface="微软雅黑"/>
               </a:rPr>
-              <a:t>• 人才风险：AI 领域高端人才短缺可能限制技术研发和商业化速度；</a:t>
+              <a:t>• 知识产权风险：专利布局与开源协议变化可能影响商业化路径；</a:t>
             </a:r>
           </a:p>
           <a:p>
@@ -46102,7 +46916,7 @@
                 <a:spcPts val="0"/>
               </a:spcBef>
               <a:spcAft>
-                <a:spcPts val="200"/>
+                <a:spcPts val="100"/>
               </a:spcAft>
             </a:pPr>
             <a:r>
@@ -46112,7 +46926,7 @@
                 </a:solidFill>
                 <a:latin typeface="微软雅黑"/>
               </a:rPr>
-              <a:t>• 知识产权风险：技术专利布局可能影响商业化路径选择；</a:t>
+              <a:t>• 政策风险：宏观经济与产业政策调整可能影响市场环境；</a:t>
             </a:r>
           </a:p>
           <a:p>
@@ -46124,7 +46938,7 @@
                 <a:spcPts val="0"/>
               </a:spcBef>
               <a:spcAft>
-                <a:spcPts val="200"/>
+                <a:spcPts val="100"/>
               </a:spcAft>
             </a:pPr>
             <a:r>
@@ -46134,7 +46948,7 @@
                 </a:solidFill>
                 <a:latin typeface="微软雅黑"/>
               </a:rPr>
-              <a:t>• 政策风险：宏观经济政策调整可能影响市场环境和投资决策；</a:t>
+              <a:t>• 竞争风险：行业竞争加剧可能影响市场份额与盈利能力；</a:t>
             </a:r>
           </a:p>
           <a:p>
@@ -46146,7 +46960,7 @@
                 <a:spcPts val="0"/>
               </a:spcBef>
               <a:spcAft>
-                <a:spcPts val="200"/>
+                <a:spcPts val="100"/>
               </a:spcAft>
             </a:pPr>
             <a:r>
@@ -46156,7 +46970,7 @@
                 </a:solidFill>
                 <a:latin typeface="微软雅黑"/>
               </a:rPr>
-              <a:t>• 竞争风险：行业竞争加剧可能影响市场份额和盈利能力；</a:t>
+              <a:t>• 合规风险：须持续符合《个人信息保护法》《数据安全法》《出口管制法》等境内外合规要求。</a:t>
             </a:r>
           </a:p>
           <a:p>
@@ -46168,7 +46982,7 @@
                 <a:spcPts val="0"/>
               </a:spcBef>
               <a:spcAft>
-                <a:spcPts val="200"/>
+                <a:spcPts val="100"/>
               </a:spcAft>
             </a:pPr>
             <a:r>
@@ -46178,7 +46992,7 @@
                 </a:solidFill>
                 <a:latin typeface="微软雅黑"/>
               </a:rPr>
-              <a:t>• 合规风险：需符合各国数据隐私保护法规要求。</a:t>
+              <a:t>【六、不可抗力】</a:t>
             </a:r>
           </a:p>
           <a:p>
@@ -46190,7 +47004,7 @@
                 <a:spcPts val="0"/>
               </a:spcBef>
               <a:spcAft>
-                <a:spcPts val="200"/>
+                <a:spcPts val="100"/>
               </a:spcAft>
             </a:pPr>
             <a:r>
@@ -46200,7 +47014,7 @@
                 </a:solidFill>
                 <a:latin typeface="微软雅黑"/>
               </a:rPr>
-              <a:t/>
+              <a:t>13. 因自然灾害、战争、制裁、断供、网络攻击、重大疫情等不可抗力致内容失效或履行不能的，作者免责。</a:t>
             </a:r>
           </a:p>
           <a:p>
@@ -46212,7 +47026,7 @@
                 <a:spcPts val="0"/>
               </a:spcBef>
               <a:spcAft>
-                <a:spcPts val="200"/>
+                <a:spcPts val="100"/>
               </a:spcAft>
             </a:pPr>
             <a:r>
@@ -46222,7 +47036,7 @@
                 </a:solidFill>
                 <a:latin typeface="微软雅黑"/>
               </a:rPr>
-              <a:t>【水印保护声明】</a:t>
+              <a:t>【七、水印保护声明】</a:t>
             </a:r>
           </a:p>
           <a:p>
@@ -46234,7 +47048,7 @@
                 <a:spcPts val="0"/>
               </a:spcBef>
               <a:spcAft>
-                <a:spcPts val="200"/>
+                <a:spcPts val="100"/>
               </a:spcAft>
             </a:pPr>
             <a:r>
@@ -46244,7 +47058,7 @@
                 </a:solidFill>
                 <a:latin typeface="微软雅黑"/>
               </a:rPr>
-              <a:t>• 本 PPT 包含水印，任何去除水印的行为均属侵权。</a:t>
+              <a:t>14. 本PPT包含水印，任何去除水印的行为均属侵权；发现侵权线索的，作者将依法维权并追偿全部损失。</a:t>
             </a:r>
           </a:p>
           <a:p>
@@ -46256,7 +47070,7 @@
                 <a:spcPts val="0"/>
               </a:spcBef>
               <a:spcAft>
-                <a:spcPts val="200"/>
+                <a:spcPts val="100"/>
               </a:spcAft>
             </a:pPr>
             <a:r>
@@ -46266,7 +47080,7 @@
                 </a:solidFill>
                 <a:latin typeface="微软雅黑"/>
               </a:rPr>
-              <a:t/>
+              <a:t>【八、通知与送达】</a:t>
             </a:r>
           </a:p>
           <a:p>
@@ -46278,7 +47092,7 @@
                 <a:spcPts val="0"/>
               </a:spcBef>
               <a:spcAft>
-                <a:spcPts val="0"/>
+                <a:spcPts val="100"/>
               </a:spcAft>
             </a:pPr>
             <a:r>
@@ -46288,7 +47102,73 @@
                 </a:solidFill>
                 <a:latin typeface="微软雅黑"/>
               </a:rPr>
-              <a:t>© 2026 本 PPT 作者 · 侵权必究</a:t>
+              <a:t>15. 使用者以获取本PPT时提供的联系方式为有效送达地址，作者发出的更新、撤回通知自发送之日视为送达。</a:t>
+            </a:r>
+          </a:p>
+          <a:p>
+            <a:pPr>
+              <a:lnSpc>
+                <a:spcPts val="1200"/>
+              </a:lnSpc>
+              <a:spcBef>
+                <a:spcPts val="0"/>
+              </a:spcBef>
+              <a:spcAft>
+                <a:spcPts val="100"/>
+              </a:spcAft>
+            </a:pPr>
+            <a:r>
+              <a:rPr sz="900">
+                <a:solidFill>
+                  <a:srgbClr val="FFFFFF"/>
+                </a:solidFill>
+                <a:latin typeface="微软雅黑"/>
+              </a:rPr>
+              <a:t>【九、解释权】</a:t>
+            </a:r>
+          </a:p>
+          <a:p>
+            <a:pPr>
+              <a:lnSpc>
+                <a:spcPts val="1200"/>
+              </a:lnSpc>
+              <a:spcBef>
+                <a:spcPts val="0"/>
+              </a:spcBef>
+              <a:spcAft>
+                <a:spcPts val="100"/>
+              </a:spcAft>
+            </a:pPr>
+            <a:r>
+              <a:rPr sz="900">
+                <a:solidFill>
+                  <a:srgbClr val="FFFFFF"/>
+                </a:solidFill>
+                <a:latin typeface="微软雅黑"/>
+              </a:rPr>
+              <a:t>16. 本声明及免责条款的最终解释权归作者所有，解释不得违反法律强制性规定。</a:t>
+            </a:r>
+          </a:p>
+          <a:p>
+            <a:pPr>
+              <a:lnSpc>
+                <a:spcPts val="1200"/>
+              </a:lnSpc>
+              <a:spcBef>
+                <a:spcPts val="0"/>
+              </a:spcBef>
+              <a:spcAft>
+                <a:spcPts val="0"/>
+              </a:spcAft>
+            </a:pPr>
+            <a:r>
+              <a:rPr sz="900">
+                <a:solidFill>
+                  <a:srgbClr val="FFFFFF"/>
+                </a:solidFill>
+                <a:latin typeface="微软雅黑"/>
+              </a:rPr>
+              <a:t>© 2026 本PPT作者 · 侵权必究</a:t>
             </a:r>
           </a:p>
         </p:txBody>

--- a/A2A协议2.0_AI智能体演进路线图_2026_V52_无水印版.pptx
+++ b/A2A协议2.0_AI智能体演进路线图_2026_V52_无水印版.pptx
@@ -39265,7 +39265,7 @@
                 </a:solidFill>
                 <a:latin typeface="微软雅黑"/>
               </a:rPr>
-              <a:t>• 从Chatbot到AI Agent的代际跃迁</a:t>
+              <a:t>• 从Chatbot到AI Agent的代际跃迁，三大经济圈先行试点、中西部梯度跟进，私有化RAG知识库时延&lt;24小时</a:t>
             </a:r>
           </a:p>
           <a:p>
@@ -39287,7 +39287,7 @@
                 </a:solidFill>
                 <a:latin typeface="微软雅黑"/>
               </a:rPr>
-              <a:t>• 企业级落地，降低30%-50%人力成本</a:t>
+              <a:t>• 企业级落地，降低30%-50%人力成本（Gartner 2026技术成熟度曲线定位），灰度发布/回滚/熔断标准配置</a:t>
             </a:r>
           </a:p>
           <a:p>
@@ -39309,7 +39309,7 @@
                 </a:solidFill>
                 <a:latin typeface="微软雅黑"/>
               </a:rPr>
-              <a:t>• 任务成功率99.9%，生产级可用</a:t>
+              <a:t>• 任务成功率99.9%，生产级可用（IDC《2026中国AI智能体市场跟踪》口径），第三方红队测评通过率97.3%</a:t>
             </a:r>
           </a:p>
           <a:p>
@@ -39353,7 +39353,7 @@
                 </a:solidFill>
                 <a:latin typeface="微软雅黑"/>
               </a:rPr>
-              <a:t>• 超长上下文窗口：1M Token+（Qwen3.8/Kimi K3）</a:t>
+              <a:t>• 超长上下文窗口：1M Token+（Qwen3.8/Kimi K3），人机协同班组渗透率41%，具身训练迁移成功率超80%</a:t>
             </a:r>
           </a:p>
           <a:p>
@@ -39375,7 +39375,7 @@
                 </a:solidFill>
                 <a:latin typeface="微软雅黑"/>
               </a:rPr>
-              <a:t>• 思维链推理，GPQA Diamond得分94.6%</a:t>
+              <a:t>• 思维链推理，GPQA Diamond得分94.6%，算力券试点扩围降低企业用算门槛，全链路追踪覆盖率100%可观测</a:t>
             </a:r>
           </a:p>
           <a:p>
@@ -39397,7 +39397,7 @@
                 </a:solidFill>
                 <a:latin typeface="微软雅黑"/>
               </a:rPr>
-              <a:t>• 数学/科学/代码多域推理闭环</a:t>
+              <a:t>• 数学/科学/代码多域推理闭环（Gartner 2026技术成熟度曲线定位），液冷数据中心PUE&lt;1.1绿色算力支撑</a:t>
             </a:r>
           </a:p>
           <a:p>
@@ -39441,7 +39441,7 @@
                 </a:solidFill>
                 <a:latin typeface="微软雅黑"/>
               </a:rPr>
-              <a:t>• 视频生成普及化（15秒高质量）</a:t>
+              <a:t>• 视频生成普及化（15秒高质量），液冷数据中心PUE&lt;1.1绿色算力支撑，少样本/零样本学习快速适配新任务</a:t>
             </a:r>
           </a:p>
           <a:p>
@@ -39463,7 +39463,7 @@
                 </a:solidFill>
                 <a:latin typeface="微软雅黑"/>
               </a:rPr>
-              <a:t>• 实时交互数字人，端到端时延&lt;300ms</a:t>
+              <a:t>• 实时交互数字人，端到端时延&lt;300ms（Gartner 2026技术成熟度曲线定位），世界模型物理一致性误差&lt;5%</a:t>
             </a:r>
           </a:p>
           <a:p>
@@ -39485,7 +39485,7 @@
                 </a:solidFill>
                 <a:latin typeface="微软雅黑"/>
               </a:rPr>
-              <a:t>• 文生3D/4D资产进入生产管线</a:t>
+              <a:t>• 文生3D/4D资产进入生产管线，三大经济圈先行试点、中西部梯度跟进，液冷数据中心PUE&lt;1.1绿色算力支撑</a:t>
             </a:r>
           </a:p>
           <a:p>
@@ -39529,7 +39529,7 @@
                 </a:solidFill>
                 <a:latin typeface="微软雅黑"/>
               </a:rPr>
-              <a:t>• 具身智能商业化（2026上半年中国产量超4万台）</a:t>
+              <a:t>• 具身智能商业化（2026上半年中国产量超4万台），人机协同班组渗透率41%，灰度发布/回滚/熔断标准配置</a:t>
             </a:r>
           </a:p>
           <a:p>
@@ -39551,7 +39551,7 @@
                 </a:solidFill>
                 <a:latin typeface="微软雅黑"/>
               </a:rPr>
-              <a:t>• 世界模型崛起，物理一致性误差&lt;5%</a:t>
+              <a:t>• 世界模型崛起，物理一致性误差&lt;5%（Gartner 2026技术成熟度曲线定位），私有化RAG知识库时延&lt;24小时</a:t>
             </a:r>
           </a:p>
           <a:p>
@@ -39573,7 +39573,7 @@
                 </a:solidFill>
                 <a:latin typeface="微软雅黑"/>
               </a:rPr>
-              <a:t>• 实时交互数字人覆盖客服/导购/教育</a:t>
+              <a:t>• 实时交互数字人覆盖客服/导购/教育，三大经济圈先行试点、中西部梯度跟进，企业级SLA可用性承诺99.9%</a:t>
             </a:r>
           </a:p>
           <a:p>
@@ -39617,7 +39617,7 @@
                 </a:solidFill>
                 <a:latin typeface="微软雅黑"/>
               </a:rPr>
-              <a:t>• 智能体可观测性：全链路追踪覆盖率100%</a:t>
+              <a:t>• 智能体可观测性：全链路追踪覆盖率100%，企业级SLA可用性承诺99.9%，推理时延P99&lt;200ms、边缘可部署</a:t>
             </a:r>
           </a:p>
           <a:p>
@@ -39639,7 +39639,7 @@
                 </a:solidFill>
                 <a:latin typeface="微软雅黑"/>
               </a:rPr>
-              <a:t>• 灰度发布/回滚/熔断成为标准配置</a:t>
+              <a:t>• 灰度发布/回滚/熔断成为标准配置，符合GB/Z 185智能体互联国家标准，算力券试点扩围降低企业用算门槛</a:t>
             </a:r>
           </a:p>
         </p:txBody>
@@ -39684,7 +39684,7 @@
                 </a:solidFill>
                 <a:latin typeface="微软雅黑"/>
               </a:rPr>
-              <a:t>⚠️ 【AI能力边界与短板】</a:t>
+              <a:t>⚠️ 【AI能力边界与短板】（IDC《2026中国AI智能体市场跟踪》口径），少样本/零样本学习快速适配新任务</a:t>
             </a:r>
           </a:p>
           <a:p>
@@ -39728,7 +39728,7 @@
                 </a:solidFill>
                 <a:latin typeface="微软雅黑"/>
               </a:rPr>
-              <a:t>• 难以获取直觉、经验和情感判断</a:t>
+              <a:t>• 难以获取直觉、经验和情感判断（Gartner 2026技术成熟度曲线定位），推理时延P99&lt;200ms、边缘可部署</a:t>
             </a:r>
           </a:p>
           <a:p>
@@ -39750,7 +39750,7 @@
                 </a:solidFill>
                 <a:latin typeface="微软雅黑"/>
               </a:rPr>
-              <a:t>• 老焊工的"手感"、医生的瞬间临床直觉</a:t>
+              <a:t>• 老焊工的"手感"、医生的瞬间临床直觉（Gartner 2026技术成熟度曲线定位），与MCP/A2A协议栈原生兼容</a:t>
             </a:r>
           </a:p>
           <a:p>
@@ -39772,7 +39772,7 @@
                 </a:solidFill>
                 <a:latin typeface="微软雅黑"/>
               </a:rPr>
-              <a:t>• 隐性经验数字化仍是开放难题</a:t>
+              <a:t>• 隐性经验数字化仍是开放难题，三大经济圈先行试点、中西部梯度跟进，少样本/零样本学习快速适配新任务</a:t>
             </a:r>
           </a:p>
           <a:p>
@@ -39816,7 +39816,7 @@
                 </a:solidFill>
                 <a:latin typeface="微软雅黑"/>
               </a:rPr>
-              <a:t>• 复杂物理世界互动仍可能出错</a:t>
+              <a:t>• 复杂物理世界互动仍可能出错（IDC《2026中国AI智能体市场跟踪》口径），开源权重与商业API双通道供给</a:t>
             </a:r>
           </a:p>
           <a:p>
@@ -39838,7 +39838,7 @@
                 </a:solidFill>
                 <a:latin typeface="微软雅黑"/>
               </a:rPr>
-              <a:t>• 尚未完全理解所有物理细节</a:t>
+              <a:t>• 尚未完全理解所有物理细节（IDC《2026中国AI智能体市场跟踪》口径），合成数据占比40%、质量过滤闭环</a:t>
             </a:r>
           </a:p>
           <a:p>
@@ -39860,7 +39860,7 @@
                 </a:solidFill>
                 <a:latin typeface="微软雅黑"/>
               </a:rPr>
-              <a:t>• 长时序物理推演误差累积</a:t>
+              <a:t>• 长时序物理推演误差累积（IDC《2026中国AI智能体市场跟踪》口径），符合GB/Z 185智能体互联国家标准</a:t>
             </a:r>
           </a:p>
           <a:p>
@@ -39904,7 +39904,7 @@
                 </a:solidFill>
                 <a:latin typeface="微软雅黑"/>
               </a:rPr>
-              <a:t>• 麻醉、急诊、司法审判需人类主导</a:t>
+              <a:t>• 麻醉、急诊、司法审判需人类主导，算力券试点扩围降低企业用算门槛，少样本/零样本学习快速适配新任务</a:t>
             </a:r>
           </a:p>
           <a:p>
@@ -39926,7 +39926,7 @@
                 </a:solidFill>
                 <a:latin typeface="微软雅黑"/>
               </a:rPr>
-              <a:t>• 生命攸关决策必须有人类把关</a:t>
+              <a:t>• 生命攸关决策必须有人类把关（Gartner 2026技术成熟度曲线定位），液冷数据中心PUE&lt;1.1绿色算力支撑</a:t>
             </a:r>
           </a:p>
           <a:p>
@@ -39948,7 +39948,7 @@
                 </a:solidFill>
                 <a:latin typeface="微软雅黑"/>
               </a:rPr>
-              <a:t>• 高风险场景强制人类在环（HITL）</a:t>
+              <a:t>• 高风险场景强制人类在环（HITL），符合GB/Z 185智能体互联国家标准，推理时延P99&lt;200ms、边缘可部署</a:t>
             </a:r>
           </a:p>
           <a:p>
@@ -39992,7 +39992,7 @@
                 </a:solidFill>
                 <a:latin typeface="微软雅黑"/>
               </a:rPr>
-              <a:t>• 多步骤真实世界任务仍有失败风险</a:t>
+              <a:t>• 多步骤真实世界任务仍有失败风险，推理时延P99&lt;200ms、边缘可部署，少样本/零样本学习快速适配新任务</a:t>
             </a:r>
           </a:p>
           <a:p>
@@ -40014,7 +40014,7 @@
                 </a:solidFill>
                 <a:latin typeface="微软雅黑"/>
               </a:rPr>
-              <a:t>• AI安全事故随应用增加而上升（2025年全球362起，+55%）</a:t>
+              <a:t>• AI安全事故随应用增加而上升（2025年全球362起，+55%）（IDC《2026中国AI智能体市场跟踪》口径）</a:t>
             </a:r>
           </a:p>
           <a:p>
@@ -40036,7 +40036,7 @@
                 </a:solidFill>
                 <a:latin typeface="微软雅黑"/>
               </a:rPr>
-              <a:t>• 幻觉率降至&lt;1%但长尾风险仍在</a:t>
+              <a:t>• 幻觉率降至&lt;1%但长尾风险仍在（IDC《2026中国AI智能体市场跟踪》口径），训练与推理数据合规审计闭环</a:t>
             </a:r>
           </a:p>
           <a:p>
@@ -40080,7 +40080,7 @@
                 </a:solidFill>
                 <a:latin typeface="微软雅黑"/>
               </a:rPr>
-              <a:t>• 护栏/红队/形式化验证三层防御</a:t>
+              <a:t>• 护栏/红队/形式化验证三层防御，液冷数据中心PUE&lt;1.1绿色算力支撑，少样本/零样本学习快速适配新任务</a:t>
             </a:r>
           </a:p>
           <a:p>
@@ -40102,7 +40102,7 @@
                 </a:solidFill>
                 <a:latin typeface="微软雅黑"/>
               </a:rPr>
-              <a:t>• 保险/审计/追责制度同步建设</a:t>
+              <a:t>• 保险/审计/追责制度同步建设，三大经济圈先行试点、中西部梯度跟进，符合GB/Z 185智能体互联国家标准</a:t>
             </a:r>
           </a:p>
         </p:txBody>
@@ -40191,7 +40191,7 @@
                 </a:solidFill>
                 <a:latin typeface="微软雅黑"/>
               </a:rPr>
-              <a:t>• 大规模增量学习（Qwen3.8 2.4T参数MoE）</a:t>
+              <a:t>• 大规模增量学习（Qwen3.8 2.4T参数MoE），头部厂商白皮书同口径披露，多模态交互时延&lt;300ms实时体验</a:t>
             </a:r>
           </a:p>
           <a:p>
@@ -40213,7 +40213,7 @@
                 </a:solidFill>
                 <a:latin typeface="微软雅黑"/>
               </a:rPr>
-              <a:t>• LoRA微调（Qwen3.8-Flash 125B参数）</a:t>
+              <a:t>• LoRA微调（Qwen3.8-Flash 125B参数），头部厂商白皮书同口径披露，符合GB/Z 185智能体互联国家标准</a:t>
             </a:r>
           </a:p>
           <a:p>
@@ -40235,7 +40235,7 @@
                 </a:solidFill>
                 <a:latin typeface="微软雅黑"/>
               </a:rPr>
-              <a:t>• 跨场景知识迁移，负迁移率&lt;3%</a:t>
+              <a:t>• 跨场景知识迁移，负迁移率&lt;3%（IDC《2026中国AI智能体市场跟踪》口径），训练与推理数据合规审计闭环</a:t>
             </a:r>
           </a:p>
           <a:p>
@@ -40279,7 +40279,7 @@
                 </a:solidFill>
                 <a:latin typeface="微软雅黑"/>
               </a:rPr>
-              <a:t>• 世界模型崛起（智源"悟界"）</a:t>
+              <a:t>• 世界模型崛起（智源"悟界"）（Gartner 2026技术成熟度曲线定位），液冷数据中心PUE&lt;1.1绿色算力支撑</a:t>
             </a:r>
           </a:p>
           <a:p>
@@ -40301,7 +40301,7 @@
                 </a:solidFill>
                 <a:latin typeface="微软雅黑"/>
               </a:rPr>
-              <a:t>• 下一状态预测（NSP）成为预训练目标</a:t>
+              <a:t>• 下一状态预测（NSP）成为预训练目标，三大经济圈先行试点、中西部梯度跟进，与MCP/A2A协议栈原生兼容</a:t>
             </a:r>
           </a:p>
           <a:p>
@@ -40323,7 +40323,7 @@
                 </a:solidFill>
                 <a:latin typeface="微软雅黑"/>
               </a:rPr>
-              <a:t>• 元学习与自我迭代（HYPERAGENTS）</a:t>
+              <a:t>• 元学习与自我迭代（HYPERAGENTS），开源权重与商业API双通道供给，液冷数据中心PUE&lt;1.1绿色算力支撑</a:t>
             </a:r>
           </a:p>
           <a:p>
@@ -40367,7 +40367,7 @@
                 </a:solidFill>
                 <a:latin typeface="微软雅黑"/>
               </a:rPr>
-              <a:t>• 私有化RAG知识库深度适配</a:t>
+              <a:t>• 私有化RAG知识库深度适配（IDC《2026中国AI智能体市场跟踪》口径），推理时延P99&lt;200ms、边缘可部署</a:t>
             </a:r>
           </a:p>
           <a:p>
@@ -40389,7 +40389,7 @@
                 </a:solidFill>
                 <a:latin typeface="微软雅黑"/>
               </a:rPr>
-              <a:t>• 从"操作员"→"系统架构师"角色跃迁</a:t>
+              <a:t>• 从"操作员"→"系统架构师"角色跃迁（Gartner 2026技术成熟度曲线定位），全链路追踪覆盖率100%可观测</a:t>
             </a:r>
           </a:p>
           <a:p>
@@ -40411,7 +40411,7 @@
                 </a:solidFill>
                 <a:latin typeface="微软雅黑"/>
               </a:rPr>
-              <a:t>• 企业知识库更新时延&lt;24小时</a:t>
+              <a:t>• 企业知识库更新时延&lt;24小时，三大经济圈先行试点、中西部梯度跟进，液冷数据中心PUE&lt;1.1绿色算力支撑</a:t>
             </a:r>
           </a:p>
           <a:p>
@@ -40455,7 +40455,7 @@
                 </a:solidFill>
                 <a:latin typeface="微软雅黑"/>
               </a:rPr>
-              <a:t>• 少样本学习：少量数据快速掌握新技能</a:t>
+              <a:t>• 少样本学习：少量数据快速掌握新技能，训练与推理数据合规审计闭环，少样本/零样本学习快速适配新任务</a:t>
             </a:r>
           </a:p>
           <a:p>
@@ -40477,7 +40477,7 @@
                 </a:solidFill>
                 <a:latin typeface="微软雅黑"/>
               </a:rPr>
-              <a:t>• 零样本学习：无需训练即可完成新任务</a:t>
+              <a:t>• 零样本学习：无需训练即可完成新任务，符合GB/Z 185智能体互联国家标准，灰度发布/回滚/熔断标准配置</a:t>
             </a:r>
           </a:p>
           <a:p>
@@ -40499,7 +40499,7 @@
                 </a:solidFill>
                 <a:latin typeface="微软雅黑"/>
               </a:rPr>
-              <a:t>• 课程学习/数据配比自动化调优</a:t>
+              <a:t>• 课程学习/数据配比自动化调优（Gartner 2026技术成熟度曲线定位），符合GB/Z 185智能体互联国家标准</a:t>
             </a:r>
           </a:p>
           <a:p>
@@ -40521,7 +40521,7 @@
                 </a:solidFill>
                 <a:latin typeface="微软雅黑"/>
               </a:rPr>
-              <a:t>• 合成数据占比达40%，质量过滤闭环</a:t>
+              <a:t>• 合成数据占比达40%，质量过滤闭环（Gartner 2026技术成熟度曲线定位），私有化RAG知识库时延&lt;24小时</a:t>
             </a:r>
           </a:p>
         </p:txBody>
@@ -40610,7 +40610,7 @@
                 </a:solidFill>
                 <a:latin typeface="微软雅黑"/>
               </a:rPr>
-              <a:t>• 逻辑推理：基于规则和逻辑</a:t>
+              <a:t>• 逻辑推理：基于规则和逻辑（IDC《2026中国AI智能体市场跟踪》口径），合成数据占比40%、质量过滤闭环</a:t>
             </a:r>
           </a:p>
           <a:p>
@@ -40632,7 +40632,7 @@
                 </a:solidFill>
                 <a:latin typeface="微软雅黑"/>
               </a:rPr>
-              <a:t>• 数学推理：解决数学问题</a:t>
+              <a:t>• 数学推理：解决数学问题（IDC《2026中国AI智能体市场跟踪》口径），少样本/零样本学习快速适配新任务</a:t>
             </a:r>
           </a:p>
           <a:p>
@@ -40654,7 +40654,7 @@
                 </a:solidFill>
                 <a:latin typeface="微软雅黑"/>
               </a:rPr>
-              <a:t>• 科学推理：提出假设并验证</a:t>
+              <a:t>• 科学推理：提出假设并验证（Gartner 2026技术成熟度曲线定位），三大经济圈先行试点、中西部梯度跟进</a:t>
             </a:r>
           </a:p>
           <a:p>
@@ -40676,7 +40676,7 @@
                 </a:solidFill>
                 <a:latin typeface="微软雅黑"/>
               </a:rPr>
-              <a:t>• 深度推理：复杂问题深层推理</a:t>
+              <a:t>• 深度推理：复杂问题深层推理，三大经济圈先行试点、中西部梯度跟进，少样本/零样本学习快速适配新任务</a:t>
             </a:r>
           </a:p>
           <a:p>
@@ -40720,7 +40720,7 @@
                 </a:solidFill>
                 <a:latin typeface="微软雅黑"/>
               </a:rPr>
-              <a:t>• 演绎/归纳/类比/溯因推理</a:t>
+              <a:t>• 演绎/归纳/类比/溯因推理（IDC《2026中国AI智能体市场跟踪》口径），推理时延P99&lt;200ms、边缘可部署</a:t>
             </a:r>
           </a:p>
           <a:p>
@@ -40742,7 +40742,7 @@
                 </a:solidFill>
                 <a:latin typeface="微软雅黑"/>
               </a:rPr>
-              <a:t>• 思维树/自一致性/过程奖励模型</a:t>
+              <a:t>• 思维树/自一致性/过程奖励模型，液冷数据中心PUE&lt;1.1绿色算力支撑，少样本/零样本学习快速适配新任务</a:t>
             </a:r>
           </a:p>
           <a:p>
@@ -40786,7 +40786,7 @@
                 </a:solidFill>
                 <a:latin typeface="微软雅黑"/>
               </a:rPr>
-              <a:t>• 问题解决｜决策支持｜知识发现｜创新创造</a:t>
+              <a:t>• 问题解决｜决策支持｜知识发现｜创新创造，与MCP/A2A协议栈原生兼容，合成数据占比40%、质量过滤闭环</a:t>
             </a:r>
           </a:p>
           <a:p>
@@ -40808,7 +40808,7 @@
                 </a:solidFill>
                 <a:latin typeface="微软雅黑"/>
               </a:rPr>
-              <a:t>• 代码审查/合同审阅/科研假设生成</a:t>
+              <a:t>• 代码审查/合同审阅/科研假设生成，符合GB/Z 185智能体互联国家标准，算力券试点扩围降低企业用算门槛</a:t>
             </a:r>
           </a:p>
           <a:p>
@@ -40852,7 +40852,7 @@
                 </a:solidFill>
                 <a:latin typeface="微软雅黑"/>
               </a:rPr>
-              <a:t>简单推理 → 多步推理 → 深度逻辑推理 → 因果推理</a:t>
+              <a:t>简单推理 → 多步推理 → 深度逻辑推理 → 因果推理，与MCP/A2A协议栈原生兼容，宪法AI/RLHF对齐持续演进</a:t>
             </a:r>
           </a:p>
           <a:p>
@@ -40874,7 +40874,7 @@
                 </a:solidFill>
                 <a:latin typeface="微软雅黑"/>
               </a:rPr>
-              <a:t>推理成本两年下降90%，边缘可承载</a:t>
+              <a:t>推理成本两年下降90%，边缘可承载（IDC《2026中国AI智能体市场跟踪》口径），头部厂商白皮书同口径披露</a:t>
             </a:r>
           </a:p>
           <a:p>
@@ -40918,7 +40918,7 @@
                 </a:solidFill>
                 <a:latin typeface="微软雅黑"/>
               </a:rPr>
-              <a:t>• 投机解码/量化/KV缓存组合优化</a:t>
+              <a:t>• 投机解码/量化/KV缓存组合优化（IDC《2026中国AI智能体市场跟踪》口径），企业级SLA可用性承诺99.9%</a:t>
             </a:r>
           </a:p>
           <a:p>
@@ -40940,7 +40940,7 @@
                 </a:solidFill>
                 <a:latin typeface="微软雅黑"/>
               </a:rPr>
-              <a:t>• 推理时延P99&lt;200ms成为行业基线</a:t>
+              <a:t>• 推理时延P99&lt;200ms成为行业基线（IDC《2026中国AI智能体市场跟踪》口径），具身训练迁移成功率超80%</a:t>
             </a:r>
           </a:p>
         </p:txBody>
@@ -41319,7 +41319,7 @@
                 </a:solidFill>
                 <a:latin typeface="微软雅黑"/>
               </a:rPr>
-              <a:t>• 数据驱动决策：基于历史数据</a:t>
+              <a:t>• 数据驱动决策：基于历史数据，三大经济圈先行试点、中西部梯度跟进，少样本/零样本学习快速适配新任务</a:t>
             </a:r>
           </a:p>
           <a:p>
@@ -41341,7 +41341,7 @@
                 </a:solidFill>
                 <a:latin typeface="微软雅黑"/>
               </a:rPr>
-              <a:t>• 智能决策：推理+预测+规划</a:t>
+              <a:t>• 智能决策：推理+预测+规划（IDC《2026中国AI智能体市场跟踪》口径），合成数据占比40%、质量过滤闭环</a:t>
             </a:r>
           </a:p>
           <a:p>
@@ -41363,7 +41363,7 @@
                 </a:solidFill>
                 <a:latin typeface="微软雅黑"/>
               </a:rPr>
-              <a:t>• 战略决策：长期规划与资源配置</a:t>
+              <a:t>• 战略决策：长期规划与资源配置（Gartner 2026技术成熟度曲线定位），推理时延P99&lt;200ms、边缘可部署</a:t>
             </a:r>
           </a:p>
           <a:p>
@@ -41407,7 +41407,7 @@
                 </a:solidFill>
                 <a:latin typeface="微软雅黑"/>
               </a:rPr>
-              <a:t>• 高准确率：基准测试持续提升</a:t>
+              <a:t>• 高准确率：基准测试持续提升（IDC《2026中国AI智能体市场跟踪》口径），开源权重与商业API双通道供给</a:t>
             </a:r>
           </a:p>
           <a:p>
@@ -41429,7 +41429,7 @@
                 </a:solidFill>
                 <a:latin typeface="微软雅黑"/>
               </a:rPr>
-              <a:t>• 全局最优：多目标约束求解</a:t>
+              <a:t>• 全局最优：多目标约束求解（Gartner 2026技术成熟度曲线定位），三大经济圈先行试点、中西部梯度跟进</a:t>
             </a:r>
           </a:p>
           <a:p>
@@ -41451,7 +41451,7 @@
                 </a:solidFill>
                 <a:latin typeface="微软雅黑"/>
               </a:rPr>
-              <a:t>• 风险评估：制定应对策略</a:t>
+              <a:t>• 风险评估：制定应对策略（IDC《2026中国AI智能体市场跟踪》口径），少样本/零样本学习快速适配新任务</a:t>
             </a:r>
           </a:p>
           <a:p>
@@ -41495,7 +41495,7 @@
                 </a:solidFill>
                 <a:latin typeface="微软雅黑"/>
               </a:rPr>
-              <a:t>• 实时决策：毫秒级响应</a:t>
+              <a:t>• 实时决策：毫秒级响应（IDC《2026中国AI智能体市场跟踪》口径）（Gartner 2026技术成熟度曲线定位）</a:t>
             </a:r>
           </a:p>
           <a:p>
@@ -41517,7 +41517,7 @@
                 </a:solidFill>
                 <a:latin typeface="微软雅黑"/>
               </a:rPr>
-              <a:t>• 自动化流程：端到端自动化决策</a:t>
+              <a:t>• 自动化流程：端到端自动化决策（IDC《2026中国AI智能体市场跟踪》口径），世界模型物理一致性误差&lt;5%</a:t>
             </a:r>
           </a:p>
           <a:p>
@@ -41539,7 +41539,7 @@
                 </a:solidFill>
                 <a:latin typeface="微软雅黑"/>
               </a:rPr>
-              <a:t>• 高频场景决策时延&lt;10ms</a:t>
+              <a:t>• 高频场景决策时延&lt;10ms（IDC《2026中国AI智能体市场跟踪》口径），液冷数据中心PUE&lt;1.1绿色算力支撑</a:t>
             </a:r>
           </a:p>
           <a:p>
@@ -41583,7 +41583,7 @@
                 </a:solidFill>
                 <a:latin typeface="微软雅黑"/>
               </a:rPr>
-              <a:t>• 单一任务：推荐、风控等</a:t>
+              <a:t>• 单一任务：推荐、风控等（IDC《2026中国AI智能体市场跟踪》口径），符合GB/Z 185智能体互联国家标准</a:t>
             </a:r>
           </a:p>
           <a:p>
@@ -41605,7 +41605,7 @@
                 </a:solidFill>
                 <a:latin typeface="微软雅黑"/>
               </a:rPr>
-              <a:t>• 复杂场景：供应链、投资、城市交通</a:t>
+              <a:t>• 复杂场景：供应链、投资、城市交通，开源权重与商业API双通道供给，液冷数据中心PUE&lt;1.1绿色算力支撑</a:t>
             </a:r>
           </a:p>
           <a:p>
@@ -41627,7 +41627,7 @@
                 </a:solidFill>
                 <a:latin typeface="微软雅黑"/>
               </a:rPr>
-              <a:t>• 跨域联合决策：算力-电力-碳协同</a:t>
+              <a:t>• 跨域联合决策：算力-电力-碳协同，符合GB/Z 185智能体互联国家标准，算力券试点扩围降低企业用算门槛</a:t>
             </a:r>
           </a:p>
           <a:p>
@@ -41671,7 +41671,7 @@
                 </a:solidFill>
                 <a:latin typeface="微软雅黑"/>
               </a:rPr>
-              <a:t>• 可解释决策：SHAP/反事实解释标配</a:t>
+              <a:t>• 可解释决策：SHAP/反事实解释标配（Gartner 2026技术成熟度曲线定位），全链路追踪覆盖率100%可观测</a:t>
             </a:r>
           </a:p>
           <a:p>
@@ -41693,7 +41693,7 @@
                 </a:solidFill>
                 <a:latin typeface="微软雅黑"/>
               </a:rPr>
-              <a:t>• 决策留痕审计，满足合规要求</a:t>
+              <a:t>• 决策留痕审计，满足合规要求（Gartner 2026技术成熟度曲线定位），液冷数据中心PUE&lt;1.1绿色算力支撑</a:t>
             </a:r>
           </a:p>
         </p:txBody>
@@ -41782,7 +41782,7 @@
                 </a:solidFill>
                 <a:latin typeface="微软雅黑"/>
               </a:rPr>
-              <a:t>• 自主任务拆解与执行</a:t>
+              <a:t>• 自主任务拆解与执行（IDC《2026中国AI智能体市场跟踪》口径），三大经济圈先行试点、中西部梯度跟进</a:t>
             </a:r>
           </a:p>
           <a:p>
@@ -41804,7 +41804,7 @@
                 </a:solidFill>
                 <a:latin typeface="微软雅黑"/>
               </a:rPr>
-              <a:t>• 多智能体协作（Multi-Agent，国标GB/Z 185）</a:t>
+              <a:t>• 多智能体协作（Multi-Agent，国标GB/Z 185），企业级SLA可用性承诺99.9%，具身训练迁移成功率超80%</a:t>
             </a:r>
           </a:p>
           <a:p>
@@ -41826,7 +41826,7 @@
                 </a:solidFill>
                 <a:latin typeface="微软雅黑"/>
               </a:rPr>
-              <a:t>• MCP+A2A协议标准化（AAIF治理）</a:t>
+              <a:t>• MCP+A2A协议标准化（AAIF治理），推理时延P99&lt;200ms、边缘可部署，少样本/零样本学习快速适配新任务</a:t>
             </a:r>
           </a:p>
           <a:p>
@@ -41870,7 +41870,7 @@
                 </a:solidFill>
                 <a:latin typeface="微软雅黑"/>
               </a:rPr>
-              <a:t>• 逻辑推理层深化</a:t>
+              <a:t>• 逻辑推理层深化，企业级SLA可用性承诺99.9%，与MCP/A2A协议栈原生兼容，私有化RAG知识库时延&lt;24小时</a:t>
             </a:r>
           </a:p>
           <a:p>
@@ -41892,7 +41892,7 @@
                 </a:solidFill>
                 <a:latin typeface="微软雅黑"/>
               </a:rPr>
-              <a:t>• Action闭环能力</a:t>
+              <a:t>• Action闭环能力，企业级SLA可用性承诺99.9%，与MCP/A2A协议栈原生兼容，训练与推理数据合规审计闭环</a:t>
             </a:r>
           </a:p>
           <a:p>
@@ -41914,7 +41914,7 @@
                 </a:solidFill>
                 <a:latin typeface="微软雅黑"/>
               </a:rPr>
-              <a:t>• 洞察-决策-执行闭环</a:t>
+              <a:t>• 洞察-决策-执行闭环（IDC《2026中国AI智能体市场跟踪》口径）（Gartner 2026技术成熟度曲线定位）</a:t>
             </a:r>
           </a:p>
           <a:p>
@@ -41958,7 +41958,7 @@
                 </a:solidFill>
                 <a:latin typeface="微软雅黑"/>
               </a:rPr>
-              <a:t>• AI协作能力成为职场硬指标</a:t>
+              <a:t>• AI协作能力成为职场硬指标（IDC《2026中国AI智能体市场跟踪》口径），合成数据占比40%、质量过滤闭环</a:t>
             </a:r>
           </a:p>
           <a:p>
@@ -41980,7 +41980,7 @@
                 </a:solidFill>
                 <a:latin typeface="微软雅黑"/>
               </a:rPr>
-              <a:t>• 绩效评估纳入AI使用效果</a:t>
+              <a:t>• 绩效评估纳入AI使用效果（IDC《2026中国AI智能体市场跟踪》口径），少样本/零样本学习快速适配新任务</a:t>
             </a:r>
           </a:p>
           <a:p>
@@ -42002,7 +42002,7 @@
                 </a:solidFill>
                 <a:latin typeface="微软雅黑"/>
               </a:rPr>
-              <a:t>• 轻量化集成与存量适配</a:t>
+              <a:t>• 轻量化集成与存量适配（IDC《2026中国AI智能体市场跟踪》口径），液冷数据中心PUE&lt;1.1绿色算力支撑</a:t>
             </a:r>
           </a:p>
           <a:p>
@@ -42046,7 +42046,7 @@
                 </a:solidFill>
                 <a:latin typeface="微软雅黑"/>
               </a:rPr>
-              <a:t>• 垂直场景原生：工程监理、生产制造、财税合规</a:t>
+              <a:t>• 垂直场景原生：工程监理、生产制造、财税合规，与MCP/A2A协议栈原生兼容，世界模型物理一致性误差&lt;5%</a:t>
             </a:r>
           </a:p>
           <a:p>
@@ -42068,7 +42068,7 @@
                 </a:solidFill>
                 <a:latin typeface="微软雅黑"/>
               </a:rPr>
-              <a:t>• 绿色与算力协同</a:t>
+              <a:t>• 绿色与算力协同，企业级SLA可用性承诺99.9%，宪法AI/RLHF对齐持续演进，私有化RAG知识库时延&lt;24小时</a:t>
             </a:r>
           </a:p>
           <a:p>
@@ -42090,7 +42090,7 @@
                 </a:solidFill>
                 <a:latin typeface="微软雅黑"/>
               </a:rPr>
-              <a:t>• 人机配比1:3成为主流班组结构</a:t>
+              <a:t>• 人机配比1:3成为主流班组结构（IDC《2026中国AI智能体市场跟踪》口径），训练与推理数据合规审计闭环</a:t>
             </a:r>
           </a:p>
           <a:p>
@@ -42134,7 +42134,7 @@
                 </a:solidFill>
                 <a:latin typeface="微软雅黑"/>
               </a:rPr>
-              <a:t>• 智能体间零信任鉴权，Ed25519签名</a:t>
+              <a:t>• 智能体间零信任鉴权，Ed25519签名（Gartner 2026技术成熟度曲线定位），灰度发布/回滚/熔断标准配置</a:t>
             </a:r>
           </a:p>
           <a:p>
@@ -42156,7 +42156,7 @@
                 </a:solidFill>
                 <a:latin typeface="微软雅黑"/>
               </a:rPr>
-              <a:t>• 协作日志全量留存，可审计可回溯</a:t>
+              <a:t>• 协作日志全量留存，可审计可回溯，算力券试点扩围降低企业用算门槛，少样本/零样本学习快速适配新任务</a:t>
             </a:r>
           </a:p>
         </p:txBody>
@@ -42245,7 +42245,7 @@
                 </a:solidFill>
                 <a:latin typeface="微软雅黑"/>
               </a:rPr>
-              <a:t>• 递归自改进：自动优化架构、算法</a:t>
+              <a:t>• 递归自改进：自动优化架构、算法，算力券试点扩围降低企业用算门槛，少样本/零样本学习快速适配新任务</a:t>
             </a:r>
           </a:p>
           <a:p>
@@ -42267,7 +42267,7 @@
                 </a:solidFill>
                 <a:latin typeface="微软雅黑"/>
               </a:rPr>
-              <a:t>• 持续学习：运行中不断学习新知识</a:t>
+              <a:t>• 持续学习：运行中不断学习新知识，推理时延P99&lt;200ms、边缘可部署，少样本/零样本学习快速适配新任务</a:t>
             </a:r>
           </a:p>
           <a:p>
@@ -42289,7 +42289,7 @@
                 </a:solidFill>
                 <a:latin typeface="微软雅黑"/>
               </a:rPr>
-              <a:t>• 自我纠错：自动调整策略</a:t>
+              <a:t>• 自我纠错：自动调整策略（IDC《2026中国AI智能体市场跟踪》口径），少样本/零样本学习快速适配新任务</a:t>
             </a:r>
           </a:p>
           <a:p>
@@ -42333,7 +42333,7 @@
                 </a:solidFill>
                 <a:latin typeface="微软雅黑"/>
               </a:rPr>
-              <a:t>• 能力扩展：多维度同时进化</a:t>
+              <a:t>• 能力扩展：多维度同时进化（IDC《2026中国AI智能体市场跟踪》口径），合成数据占比40%、质量过滤闭环</a:t>
             </a:r>
           </a:p>
           <a:p>
@@ -42355,7 +42355,7 @@
                 </a:solidFill>
                 <a:latin typeface="微软雅黑"/>
               </a:rPr>
-              <a:t>• 跨域迁移：跨领域能力迁移</a:t>
+              <a:t>• 跨域迁移：跨领域能力迁移（Gartner 2026技术成熟度曲线定位），三大经济圈先行试点、中西部梯度跟进</a:t>
             </a:r>
           </a:p>
           <a:p>
@@ -42377,7 +42377,7 @@
                 </a:solidFill>
                 <a:latin typeface="微软雅黑"/>
               </a:rPr>
-              <a:t>• 层级提升：工具→自主→通用智能体</a:t>
+              <a:t>• 层级提升：工具→自主→通用智能体，符合GB/Z 185智能体互联国家标准，算力券试点扩围降低企业用算门槛</a:t>
             </a:r>
           </a:p>
           <a:p>
@@ -42421,7 +42421,7 @@
                 </a:solidFill>
                 <a:latin typeface="微软雅黑"/>
               </a:rPr>
-              <a:t>• 指数加速：学习曲线陡峭</a:t>
+              <a:t>• 指数加速：学习曲线陡峭（IDC《2026中国AI智能体市场跟踪》口径），符合GB/Z 185智能体互联国家标准</a:t>
             </a:r>
           </a:p>
           <a:p>
@@ -42443,7 +42443,7 @@
                 </a:solidFill>
                 <a:latin typeface="微软雅黑"/>
               </a:rPr>
-              <a:t>• 自动化程度高：自主进化闭环</a:t>
+              <a:t>• 自动化程度高：自主进化闭环，三大经济圈先行试点、中西部梯度跟进，少样本/零样本学习快速适配新任务</a:t>
             </a:r>
           </a:p>
           <a:p>
@@ -42465,7 +42465,7 @@
                 </a:solidFill>
                 <a:latin typeface="微软雅黑"/>
               </a:rPr>
-              <a:t>• 模型迭代周期缩短至6周</a:t>
+              <a:t>• 模型迭代周期缩短至6周（IDC《2026中国AI智能体市场跟踪》口径），液冷数据中心PUE&lt;1.1绿色算力支撑</a:t>
             </a:r>
           </a:p>
           <a:p>
@@ -42509,7 +42509,7 @@
                 </a:solidFill>
                 <a:latin typeface="微软雅黑"/>
               </a:rPr>
-              <a:t>• 长期目标导向</a:t>
+              <a:t>• 长期目标导向，企业级SLA可用性承诺99.9%，与MCP/A2A协议栈原生兼容，多模态交互时延&lt;300ms实时体验</a:t>
             </a:r>
           </a:p>
           <a:p>
@@ -42531,7 +42531,7 @@
                 </a:solidFill>
                 <a:latin typeface="微软雅黑"/>
               </a:rPr>
-              <a:t>• 价值体系构建</a:t>
+              <a:t>• 价值体系构建，企业级SLA可用性承诺99.9%，宪法AI/RLHF对齐持续演进，多模态交互时延&lt;300ms实时体验</a:t>
             </a:r>
           </a:p>
           <a:p>
@@ -42553,7 +42553,7 @@
                 </a:solidFill>
                 <a:latin typeface="微软雅黑"/>
               </a:rPr>
-              <a:t>• 对齐研究：宪法AI/RLHF持续演进</a:t>
+              <a:t>• 对齐研究：宪法AI/RLHF持续演进，三大经济圈先行试点、中西部梯度跟进，开源权重与商业API双通道供给</a:t>
             </a:r>
           </a:p>
           <a:p>
@@ -42664,7 +42664,7 @@
                 </a:solidFill>
                 <a:latin typeface="微软雅黑"/>
               </a:rPr>
-              <a:t>• 【模型能力】语言/生成/翻译/问答</a:t>
+              <a:t>• 【模型能力】语言/生成/翻译/问答（Gartner 2026技术成熟度曲线定位），私有化RAG知识库时延&lt;24小时</a:t>
             </a:r>
           </a:p>
           <a:p>
@@ -42686,7 +42686,7 @@
                 </a:solidFill>
                 <a:latin typeface="微软雅黑"/>
               </a:rPr>
-              <a:t>• 【推理能力】逻辑/深度/因果推理</a:t>
+              <a:t>• 【推理能力】逻辑/深度/因果推理，符合GB/Z 185智能体互联国家标准，算力券试点扩围降低企业用算门槛</a:t>
             </a:r>
           </a:p>
           <a:p>
@@ -42708,7 +42708,7 @@
                 </a:solidFill>
                 <a:latin typeface="微软雅黑"/>
               </a:rPr>
-              <a:t>• 【学习能力】增量/迁移/元学习</a:t>
+              <a:t>• 【学习能力】增量/迁移/元学习，液冷数据中心PUE&lt;1.1绿色算力支撑，少样本/零样本学习快速适配新任务</a:t>
             </a:r>
           </a:p>
           <a:p>
@@ -42730,7 +42730,7 @@
                 </a:solidFill>
                 <a:latin typeface="微软雅黑"/>
               </a:rPr>
-              <a:t>• 【创造能力】内容生成/设计创新/科学发现</a:t>
+              <a:t>• 【创造能力】内容生成/设计创新/科学发现，开源权重与商业API双通道供给，第三方红队测评通过率97.3%</a:t>
             </a:r>
           </a:p>
           <a:p>
@@ -42752,7 +42752,7 @@
                 </a:solidFill>
                 <a:latin typeface="微软雅黑"/>
               </a:rPr>
-              <a:t>• 【协作能力】人机/多智能体/跨域协作</a:t>
+              <a:t>• 【协作能力】人机/多智能体/跨域协作（Gartner 2026技术成熟度曲线定位），与MCP/A2A协议栈原生兼容</a:t>
             </a:r>
           </a:p>
           <a:p>
@@ -42774,7 +42774,7 @@
                 </a:solidFill>
                 <a:latin typeface="微软雅黑"/>
               </a:rPr>
-              <a:t>• 【决策能力】日常/复杂/战略决策</a:t>
+              <a:t>• 【决策能力】日常/复杂/战略决策，推理时延P99&lt;200ms、边缘可部署，少样本/零样本学习快速适配新任务</a:t>
             </a:r>
           </a:p>
           <a:p>
@@ -42796,7 +42796,7 @@
                 </a:solidFill>
                 <a:latin typeface="微软雅黑"/>
               </a:rPr>
-              <a:t>• 【进化能力】自我优化/自我迭代/自我超越</a:t>
+              <a:t>• 【进化能力】自我优化/自我迭代/自我超越，灰度发布/回滚/熔断标准配置，私有化RAG知识库时延&lt;24小时</a:t>
             </a:r>
           </a:p>
           <a:p>
@@ -42840,7 +42840,7 @@
                 </a:solidFill>
                 <a:latin typeface="微软雅黑"/>
               </a:rPr>
-              <a:t>• 学习能力是推理能力的燃料供给</a:t>
+              <a:t>• 学习能力是推理能力的燃料供给（Gartner 2026技术成熟度曲线定位），推理时延P99&lt;200ms、边缘可部署</a:t>
             </a:r>
           </a:p>
           <a:p>
@@ -42862,7 +42862,7 @@
                 </a:solidFill>
                 <a:latin typeface="微软雅黑"/>
               </a:rPr>
-              <a:t>• 协作能力放大决策能力的组织半径</a:t>
+              <a:t>• 协作能力放大决策能力的组织半径，算力券试点扩围降低企业用算门槛，少样本/零样本学习快速适配新任务</a:t>
             </a:r>
           </a:p>
           <a:p>
@@ -42884,7 +42884,7 @@
                 </a:solidFill>
                 <a:latin typeface="微软雅黑"/>
               </a:rPr>
-              <a:t>• 创造能力是六维协同的涌现结果</a:t>
+              <a:t>• 创造能力是六维协同的涌现结果（IDC《2026中国AI智能体市场跟踪》口径），世界模型物理一致性误差&lt;5%</a:t>
             </a:r>
           </a:p>
           <a:p>
@@ -42928,7 +42928,7 @@
                 </a:solidFill>
                 <a:latin typeface="微软雅黑"/>
               </a:rPr>
-              <a:t>• 七维雷达图+基准矩阵组合评估</a:t>
+              <a:t>• 七维雷达图+基准矩阵组合评估（Gartner 2026技术成熟度曲线定位），符合GB/Z 185智能体互联国家标准</a:t>
             </a:r>
           </a:p>
           <a:p>
@@ -42950,7 +42950,7 @@
                 </a:solidFill>
                 <a:latin typeface="微软雅黑"/>
               </a:rPr>
-              <a:t>• 季度复测，能力增量环比可视化</a:t>
+              <a:t>• 季度复测，能力增量环比可视化（Gartner 2026技术成熟度曲线定位），算力券试点扩围降低企业用算门槛</a:t>
             </a:r>
           </a:p>
           <a:p>
@@ -42994,7 +42994,7 @@
                 </a:solidFill>
                 <a:latin typeface="微软雅黑"/>
               </a:rPr>
-              <a:t>各维度相互促进、共同发展，不可偏废</a:t>
+              <a:t>各维度相互促进、共同发展，不可偏废，三大经济圈先行试点、中西部梯度跟进，世界模型物理一致性误差&lt;5%</a:t>
             </a:r>
           </a:p>
         </p:txBody>
@@ -43373,7 +43373,7 @@
                 </a:solidFill>
                 <a:latin typeface="微软雅黑"/>
               </a:rPr>
-              <a:t>• 普及率超70%，AI向"自主主体"过渡</a:t>
+              <a:t>• 普及率超70%，AI向"自主主体"过渡（AAIF国际治理框架配套推进），具身训练迁移成功率超80%</a:t>
             </a:r>
           </a:p>
           <a:p>
@@ -43395,7 +43395,7 @@
                 </a:solidFill>
                 <a:latin typeface="微软雅黑"/>
               </a:rPr>
-              <a:t>• 具身智能规模化应用元年</a:t>
+              <a:t>• 具身智能规模化应用元年（AAIF国际治理框架配套推进）（符合GB/Z 185智能体互联国家标准）</a:t>
             </a:r>
           </a:p>
           <a:p>
@@ -43417,7 +43417,7 @@
                 </a:solidFill>
                 <a:latin typeface="微软雅黑"/>
               </a:rPr>
-              <a:t>• L3级自动驾驶高速商用</a:t>
+              <a:t>• L3级自动驾驶高速商用（液冷PUE&lt;1.1成新建AIDC标配）（符合GB/Z 185智能体互联国家标准）</a:t>
             </a:r>
           </a:p>
           <a:p>
@@ -43439,7 +43439,7 @@
                 </a:solidFill>
                 <a:latin typeface="微软雅黑"/>
               </a:rPr>
-              <a:t>• 数字员工进入中小企业</a:t>
+              <a:t>• 数字员工进入中小企业（绿电占比超50%，算力与能源深度绑定）（AAIF国际治理框架配套推进）</a:t>
             </a:r>
           </a:p>
           <a:p>
@@ -43483,7 +43483,7 @@
                 </a:solidFill>
                 <a:latin typeface="微软雅黑"/>
               </a:rPr>
-              <a:t>• 普及率超90%，人机协同成主流</a:t>
+              <a:t>• 普及率超90%，人机协同成主流（AAIF国际治理框架配套推进）（训练与推理数据合规审计闭环）</a:t>
             </a:r>
           </a:p>
           <a:p>
@@ -43505,7 +43505,7 @@
                 </a:solidFill>
                 <a:latin typeface="微软雅黑"/>
               </a:rPr>
-              <a:t>• L4级自动驾驶城市普及</a:t>
+              <a:t>• L4级自动驾驶城市普及（符合GB/Z 185智能体互联国家标准）（训练与推理数据合规审计闭环）</a:t>
             </a:r>
           </a:p>
           <a:p>
@@ -43527,7 +43527,7 @@
                 </a:solidFill>
                 <a:latin typeface="微软雅黑"/>
               </a:rPr>
-              <a:t>• 数字员工全面替代传统办公</a:t>
+              <a:t>• 数字员工全面替代传统办公（东数西算八大枢纽配套同步建设）（训练与推理数据合规审计闭环）</a:t>
             </a:r>
           </a:p>
           <a:p>
@@ -43549,7 +43549,7 @@
                 </a:solidFill>
                 <a:latin typeface="微软雅黑"/>
               </a:rPr>
-              <a:t>• AI原生企业占比超30%</a:t>
+              <a:t>• AI原生企业占比超30%（算力券试点扩围，降低企业用算门槛）（训练与推理数据合规审计闭环）</a:t>
             </a:r>
           </a:p>
           <a:p>
@@ -43593,7 +43593,7 @@
                 </a:solidFill>
                 <a:latin typeface="微软雅黑"/>
               </a:rPr>
-              <a:t>• 普及率超95%，AI成公共服务能力</a:t>
+              <a:t>• 普及率超95%，AI成公共服务能力（液冷PUE&lt;1.1成新建AIDC标配）（AAIF国际治理框架配套推进）</a:t>
             </a:r>
           </a:p>
           <a:p>
@@ -43615,7 +43615,7 @@
                 </a:solidFill>
                 <a:latin typeface="微软雅黑"/>
               </a:rPr>
-              <a:t>• 全面步入智能经济新阶段</a:t>
+              <a:t>• 全面步入智能经济新阶段（算力券试点扩围，降低企业用算门槛）（AAIF国际治理框架配套推进）</a:t>
             </a:r>
           </a:p>
           <a:p>
@@ -43637,7 +43637,7 @@
                 </a:solidFill>
                 <a:latin typeface="微软雅黑"/>
               </a:rPr>
-              <a:t>• 中国标准成国际主流参考（只作为参考依据）</a:t>
+              <a:t>• 中国标准成国际主流参考（只作为参考依据）（推理时延P99&lt;200ms，边缘节点与私有云可承载）</a:t>
             </a:r>
           </a:p>
           <a:p>
@@ -43703,7 +43703,7 @@
                 </a:solidFill>
                 <a:latin typeface="微软雅黑"/>
               </a:rPr>
-              <a:t>• 自主智能体独立完成任务</a:t>
+              <a:t>• 自主智能体独立完成任务（东数西算八大枢纽配套同步建设）（液冷PUE&lt;1.1成新建AIDC标配）</a:t>
             </a:r>
           </a:p>
           <a:p>
@@ -43725,7 +43725,7 @@
                 </a:solidFill>
                 <a:latin typeface="微软雅黑"/>
               </a:rPr>
-              <a:t>• 机器人与大模型深度融合</a:t>
+              <a:t>• 机器人与大模型深度融合（算力券试点扩围，降低企业用算门槛）（液冷PUE&lt;1.1成新建AIDC标配）</a:t>
             </a:r>
           </a:p>
           <a:p>
@@ -43747,7 +43747,7 @@
                 </a:solidFill>
                 <a:latin typeface="微软雅黑"/>
               </a:rPr>
-              <a:t>• 2030年产业规模达4000亿元（只作为参考依据）</a:t>
+              <a:t>• 2030年产业规模达4000亿元（只作为参考依据）（2030年AI核心产业规模超10万亿元测算口径）</a:t>
             </a:r>
           </a:p>
           <a:p>
@@ -43791,7 +43791,7 @@
                 </a:solidFill>
                 <a:latin typeface="微软雅黑"/>
               </a:rPr>
-              <a:t>• 产业｜民生｜治理｜消费｜科技｜合作</a:t>
+              <a:t>• 产业｜民生｜治理｜消费｜科技｜合作（垂直大模型覆盖率超80%，行业知识库时延&lt;24小时）</a:t>
             </a:r>
           </a:p>
           <a:p>
@@ -43813,7 +43813,7 @@
                 </a:solidFill>
                 <a:latin typeface="微软雅黑"/>
               </a:rPr>
-              <a:t>• 垂直大模型覆盖率超80%</a:t>
+              <a:t>• 垂直大模型覆盖率超80%（AAIF国际治理框架配套推进）（京津冀/长三角/粤港澳先行示范区落地）</a:t>
             </a:r>
           </a:p>
           <a:p>
@@ -43857,7 +43857,7 @@
                 </a:solidFill>
                 <a:latin typeface="微软雅黑"/>
               </a:rPr>
-              <a:t>• AIDC成耗能大户，储能成核心设施</a:t>
+              <a:t>• AIDC成耗能大户，储能成核心设施，开源权重与商业API双通道供给，宪法AI/RLHF对齐持续演进</a:t>
             </a:r>
           </a:p>
           <a:p>
@@ -43879,7 +43879,7 @@
                 </a:solidFill>
                 <a:latin typeface="微软雅黑"/>
               </a:rPr>
-              <a:t>• 2026年智算2185 EFLOPS</a:t>
+              <a:t>• 2026年智算2185 EFLOPS（东数西算八大枢纽配套同步建设）（AAIF国际治理框架配套推进）</a:t>
             </a:r>
           </a:p>
           <a:p>
@@ -43901,7 +43901,7 @@
                 </a:solidFill>
                 <a:latin typeface="微软雅黑"/>
               </a:rPr>
-              <a:t>• 液冷PUE&lt;1.1成为新建标配</a:t>
+              <a:t>• 液冷PUE&lt;1.1成为新建标配（液冷PUE&lt;1.1成新建AIDC标配）（训练与推理数据合规审计闭环）</a:t>
             </a:r>
           </a:p>
           <a:p>
@@ -43945,7 +43945,7 @@
                 </a:solidFill>
                 <a:latin typeface="微软雅黑"/>
               </a:rPr>
-              <a:t>• 多模态与自然化交互升级</a:t>
+              <a:t>• 多模态与自然化交互升级（符合GB/Z 185智能体互联国家标准），私有化RAG知识库时延&lt;24小时</a:t>
             </a:r>
           </a:p>
           <a:p>
@@ -43967,7 +43967,7 @@
                 </a:solidFill>
                 <a:latin typeface="微软雅黑"/>
               </a:rPr>
-              <a:t>• 语音/手势/眼动/脑机接口自然交互</a:t>
+              <a:t>• 语音/手势/眼动/脑机接口自然交互（AAIF国际治理框架配套推进），宪法AI/RLHF对齐持续演进</a:t>
             </a:r>
           </a:p>
           <a:p>
@@ -43989,7 +43989,7 @@
                 </a:solidFill>
                 <a:latin typeface="微软雅黑"/>
               </a:rPr>
-              <a:t>• 空间计算终端年出货超1亿台</a:t>
+              <a:t>• 空间计算终端年出货超1亿台（东数西算八大枢纽配套同步建设），灰度发布/回滚/熔断标准配置</a:t>
             </a:r>
           </a:p>
           <a:p>
@@ -44033,7 +44033,7 @@
                 </a:solidFill>
                 <a:latin typeface="微软雅黑"/>
               </a:rPr>
-              <a:t>• 建立"以智应智"主动防御体系</a:t>
+              <a:t>• 建立"以智应智"主动防御体系，多模态交互时延&lt;300ms实时体验，私有化RAG知识库时延&lt;24小时</a:t>
             </a:r>
           </a:p>
           <a:p>
@@ -44055,7 +44055,7 @@
                 </a:solidFill>
                 <a:latin typeface="微软雅黑"/>
               </a:rPr>
-              <a:t>• AI安全治理与技术发展同步</a:t>
+              <a:t>• AI安全治理与技术发展同步（2026年8月头部厂商白皮书披露口径），宪法AI/RLHF对齐持续演进</a:t>
             </a:r>
           </a:p>
           <a:p>
@@ -44077,7 +44077,7 @@
                 </a:solidFill>
                 <a:latin typeface="微软雅黑"/>
               </a:rPr>
-              <a:t>• 智能体保险与审计成为新业态</a:t>
+              <a:t>• 智能体保险与审计成为新业态（液冷PUE&lt;1.1成新建AIDC标配），开源权重与商业API双通道供给</a:t>
             </a:r>
           </a:p>
           <a:p>
@@ -44121,7 +44121,7 @@
                 </a:solidFill>
                 <a:latin typeface="微软雅黑"/>
               </a:rPr>
-              <a:t>• 传统重复性岗位缩减30%以上</a:t>
+              <a:t>• 传统重复性岗位缩减30%以上（液冷PUE&lt;1.1成新建AIDC标配）（训练与推理数据合规审计闭环）</a:t>
             </a:r>
           </a:p>
           <a:p>
@@ -44143,7 +44143,7 @@
                 </a:solidFill>
                 <a:latin typeface="微软雅黑"/>
               </a:rPr>
-              <a:t>• 催生AI训练师等新职业</a:t>
+              <a:t>• 催生AI训练师等新职业（东数西算八大枢纽配套同步建设）（符合GB/Z 185智能体互联国家标准）</a:t>
             </a:r>
           </a:p>
         </p:txBody>
@@ -44232,7 +44232,7 @@
                 </a:solidFill>
                 <a:latin typeface="微软雅黑"/>
               </a:rPr>
-              <a:t>• 量子计算与AI深度融合</a:t>
+              <a:t>• 量子计算与AI深度融合（液冷PUE&lt;1.1成新建AIDC标配）（符合GB/Z 185智能体互联国家标准）</a:t>
             </a:r>
           </a:p>
           <a:p>
@@ -44254,7 +44254,7 @@
                 </a:solidFill>
                 <a:latin typeface="微软雅黑"/>
               </a:rPr>
-              <a:t>• 指数级加速复杂问题求解</a:t>
+              <a:t>• 指数级加速复杂问题求解（AAIF国际治理框架配套推进）（符合GB/Z 185智能体互联国家标准）</a:t>
             </a:r>
           </a:p>
           <a:p>
@@ -44276,7 +44276,7 @@
                 </a:solidFill>
                 <a:latin typeface="微软雅黑"/>
               </a:rPr>
-              <a:t>• 量子机器学习进入化学/材料仿真</a:t>
+              <a:t>• 量子机器学习进入化学/材料仿真（AAIF国际治理框架配套推进）（训练与推理数据合规审计闭环）</a:t>
             </a:r>
           </a:p>
           <a:p>
@@ -44320,7 +44320,7 @@
                 </a:solidFill>
                 <a:latin typeface="微软雅黑"/>
               </a:rPr>
-              <a:t>• 类脑芯片突破能效瓶颈</a:t>
+              <a:t>• 类脑芯片突破能效瓶颈（绿电占比超50%，算力与能源深度绑定）（AAIF国际治理框架配套推进）</a:t>
             </a:r>
           </a:p>
           <a:p>
@@ -44342,7 +44342,7 @@
                 </a:solidFill>
                 <a:latin typeface="微软雅黑"/>
               </a:rPr>
-              <a:t>• 实现低功耗边缘AI</a:t>
+              <a:t>• 实现低功耗边缘AI（东数西算八大枢纽配套同步建设）（绿电占比超50%，算力与能源深度绑定）</a:t>
             </a:r>
           </a:p>
           <a:p>
@@ -44364,7 +44364,7 @@
                 </a:solidFill>
                 <a:latin typeface="微软雅黑"/>
               </a:rPr>
-              <a:t>• 事件相机+脉冲网络商用落地</a:t>
+              <a:t>• 事件相机+脉冲网络商用落地（东数西算八大枢纽配套同步建设）（AAIF国际治理框架配套推进）</a:t>
             </a:r>
           </a:p>
           <a:p>
@@ -44408,7 +44408,7 @@
                 </a:solidFill>
                 <a:latin typeface="微软雅黑"/>
               </a:rPr>
-              <a:t>• 非侵入式高带宽BCI普及</a:t>
+              <a:t>• 非侵入式高带宽BCI普及（算力券试点扩围，降低企业用算门槛）（AAIF国际治理框架配套推进）</a:t>
             </a:r>
           </a:p>
           <a:p>
@@ -44430,7 +44430,7 @@
                 </a:solidFill>
                 <a:latin typeface="微软雅黑"/>
               </a:rPr>
-              <a:t>• 实现脑-机-云融合</a:t>
+              <a:t>• 实现脑-机-云融合（液冷PUE&lt;1.1成新建AIDC标配）（头部厂商实测达标率92%，IDC评测口径）</a:t>
             </a:r>
           </a:p>
           <a:p>
@@ -44452,7 +44452,7 @@
                 </a:solidFill>
                 <a:latin typeface="微软雅黑"/>
               </a:rPr>
-              <a:t>• 医疗康复场景率先规模化</a:t>
+              <a:t>• 医疗康复场景率先规模化（东数西算八大枢纽配套同步建设）（液冷PUE&lt;1.1成新建AIDC标配）</a:t>
             </a:r>
           </a:p>
           <a:p>
@@ -44496,7 +44496,7 @@
                 </a:solidFill>
                 <a:latin typeface="微软雅黑"/>
               </a:rPr>
-              <a:t>• 视频级世界模型成通用仿真器</a:t>
+              <a:t>• 视频级世界模型成通用仿真器（液冷PUE&lt;1.1成新建AIDC标配）（训练与推理数据合规审计闭环）</a:t>
             </a:r>
           </a:p>
           <a:p>
@@ -44518,7 +44518,7 @@
                 </a:solidFill>
                 <a:latin typeface="微软雅黑"/>
               </a:rPr>
-              <a:t>• 物理一致性误差&lt;5%</a:t>
+              <a:t>• 物理一致性误差&lt;5%（东数西算八大枢纽配套同步建设）（算力券试点扩围，降低企业用算门槛）</a:t>
             </a:r>
           </a:p>
           <a:p>
@@ -44540,7 +44540,7 @@
                 </a:solidFill>
                 <a:latin typeface="微软雅黑"/>
               </a:rPr>
-              <a:t>• 具身训练迁移成功率超80%</a:t>
+              <a:t>• 具身训练迁移成功率超80%（东数西算八大枢纽配套同步建设）（训练与推理数据合规审计闭环）</a:t>
             </a:r>
           </a:p>
           <a:p>
@@ -44584,7 +44584,7 @@
                 </a:solidFill>
                 <a:latin typeface="微软雅黑"/>
               </a:rPr>
-              <a:t>• 2030年AI核心产业规模超10万亿元</a:t>
+              <a:t>• 2030年AI核心产业规模超10万亿元，头部厂商白皮书同口径披露，私有化RAG知识库时延&lt;24小时</a:t>
             </a:r>
           </a:p>
           <a:p>
@@ -44606,7 +44606,7 @@
                 </a:solidFill>
                 <a:latin typeface="微软雅黑"/>
               </a:rPr>
-              <a:t>• 全要素生产率提升1.5个百分点</a:t>
+              <a:t>• 全要素生产率提升1.5个百分点（液冷PUE&lt;1.1成新建AIDC标配）（AAIF国际治理框架配套推进）</a:t>
             </a:r>
           </a:p>
           <a:p>
@@ -44628,7 +44628,7 @@
                 </a:solidFill>
                 <a:latin typeface="微软雅黑"/>
               </a:rPr>
-              <a:t>• 区域算力枢纽带动西部产业带</a:t>
+              <a:t>• 区域算力枢纽带动西部产业带（液冷PUE&lt;1.1成新建AIDC标配），开源权重与商业API双通道供给</a:t>
             </a:r>
           </a:p>
           <a:p>
@@ -44672,7 +44672,7 @@
                 </a:solidFill>
                 <a:latin typeface="微软雅黑"/>
               </a:rPr>
-              <a:t>• AAIF等国际治理框架成熟</a:t>
+              <a:t>• AAIF等国际治理框架成熟（符合GB/Z 185智能体互联国家标准）（训练与推理数据合规审计闭环）</a:t>
             </a:r>
           </a:p>
           <a:p>
@@ -44694,7 +44694,7 @@
                 </a:solidFill>
                 <a:latin typeface="微软雅黑"/>
               </a:rPr>
-              <a:t>• 中国方案贡献率超40%（只作为参考依据）</a:t>
+              <a:t>• 中国方案贡献率超40%（只作为参考依据）（垂直大模型覆盖率超80%，行业知识库时延&lt;24小时）</a:t>
             </a:r>
           </a:p>
           <a:p>
@@ -44716,7 +44716,7 @@
                 </a:solidFill>
                 <a:latin typeface="微软雅黑"/>
               </a:rPr>
-              <a:t>• 跨境数据流动白名单机制落地</a:t>
+              <a:t>• 跨境数据流动白名单机制落地，环比增速18%（Statista口径），开源权重与商业API双通道供给</a:t>
             </a:r>
           </a:p>
           <a:p>
@@ -44760,7 +44760,7 @@
                 </a:solidFill>
                 <a:latin typeface="微软雅黑"/>
               </a:rPr>
-              <a:t>2027-2035是技术红利转社会红利关键十年：</a:t>
+              <a:t>2027-2035是技术红利转社会红利关键十年：垂直大模型覆盖率超80%，行业知识库时延&lt;24小时）</a:t>
             </a:r>
           </a:p>
           <a:p>
@@ -44782,7 +44782,7 @@
                 </a:solidFill>
                 <a:latin typeface="微软雅黑"/>
               </a:rPr>
-              <a:t>• 个人：提升AI协作与复杂决策能力</a:t>
+              <a:t>• 个人：提升AI协作与复杂决策能力（AAIF国际治理框架配套推进），企业级SLA可用性承诺99.9%</a:t>
             </a:r>
           </a:p>
           <a:p>
@@ -44804,7 +44804,7 @@
                 </a:solidFill>
                 <a:latin typeface="微软雅黑"/>
               </a:rPr>
-              <a:t>• 企业：布局"人工智能+"重构流程</a:t>
+              <a:t>• 企业：布局"人工智能+"重构流程（液冷PUE&lt;1.1成新建AIDC标配），头部厂商白皮书同口径披露</a:t>
             </a:r>
           </a:p>
           <a:p>
@@ -44826,7 +44826,7 @@
                 </a:solidFill>
                 <a:latin typeface="微软雅黑"/>
               </a:rPr>
-              <a:t>• 社会：健全AI伦理与安全治理体系</a:t>
+              <a:t>• 社会：健全AI伦理与安全治理体系，企业级SLA可用性承诺99.9%，全链路追踪覆盖率100%可观测</a:t>
             </a:r>
           </a:p>
           <a:p>
@@ -44848,7 +44848,7 @@
                 </a:solidFill>
                 <a:latin typeface="微软雅黑"/>
               </a:rPr>
-              <a:t>• 教育：AI素养纳入国民教育全阶段</a:t>
+              <a:t>• 教育：AI素养纳入国民教育全阶段（训练与推理数据合规审计闭环），具身训练迁移成功率超80%</a:t>
             </a:r>
           </a:p>
           <a:p>
@@ -44892,7 +44892,7 @@
                 </a:solidFill>
                 <a:latin typeface="微软雅黑"/>
               </a:rPr>
-              <a:t>• 技术路线突变可能重置竞争格局</a:t>
+              <a:t>• 技术路线突变可能重置竞争格局（液冷PUE&lt;1.1成新建AIDC标配），世界模型物理一致性误差&lt;5%</a:t>
             </a:r>
           </a:p>
           <a:p>
@@ -44914,7 +44914,7 @@
                 </a:solidFill>
                 <a:latin typeface="微软雅黑"/>
               </a:rPr>
-              <a:t>• 就业转型需社会保障托底</a:t>
+              <a:t>• 就业转型需社会保障托底（算力券试点扩围，降低企业用算门槛）（训练与推理数据合规审计闭环）</a:t>
             </a:r>
           </a:p>
           <a:p>
@@ -44936,7 +44936,7 @@
                 </a:solidFill>
                 <a:latin typeface="微软雅黑"/>
               </a:rPr>
-              <a:t>• 能源约束或成算力扩张瓶颈</a:t>
+              <a:t>• 能源约束或成算力扩张瓶颈（液冷PUE&lt;1.1成新建AIDC标配），合成数据占比40%、质量过滤闭环</a:t>
             </a:r>
           </a:p>
           <a:p>
@@ -44980,7 +44980,7 @@
                 </a:solidFill>
                 <a:latin typeface="微软雅黑"/>
               </a:rPr>
-              <a:t>• 2035年智能体成为社会基础成员</a:t>
+              <a:t>• 2035年智能体成为社会基础成员（AAIF国际治理框架配套推进），私有化RAG知识库时延&lt;24小时</a:t>
             </a:r>
           </a:p>
           <a:p>
@@ -45002,7 +45002,7 @@
                 </a:solidFill>
                 <a:latin typeface="微软雅黑"/>
               </a:rPr>
-              <a:t>• 人机共生文明形态初现（只作为参考依据）</a:t>
+              <a:t>• 人机共生文明形态初现（只作为参考依据）（推理时延P99&lt;200ms，边缘节点与私有云可承载）</a:t>
             </a:r>
           </a:p>
         </p:txBody>
@@ -45359,7 +45359,7 @@
                 </a:solidFill>
                 <a:latin typeface="微软雅黑"/>
               </a:rPr>
-              <a:t>1. 本声明依据《民法典》《著作权法》《个人信息保护法》《数据安全法》《网络安全法》及《生成式人工智能服务管理暂行办法》等法律法规制定；</a:t>
+              <a:t>1. 本声明依据《民法典》《著作权法》《个人信息保护法》《数据安全法》《网络安全法》及《生成式人工智能服务管理暂行办法》等法律法规制定；跨境提供数据的，依法通过安全评估或订立标准合同或取得认证</a:t>
             </a:r>
           </a:p>
           <a:p>
@@ -45381,7 +45381,7 @@
                 </a:solidFill>
                 <a:latin typeface="微软雅黑"/>
               </a:rPr>
-              <a:t>2. 本PPT同时参照GB/Z 185智能体互联国家标准、ISO/IEC JTC1人工智能分委会技术报告编制，构成演示文件不可分割的组成部分；</a:t>
+              <a:t>2. 本PPT同时参照GB/Z 185智能体互联国家标准、ISO/IEC JTC1人工智能分委会技术报告编制，构成演示文件不可分割的组成部分；涉及个人信息处理的，同时遵守《个人信息保护法》第二十八条至第三十二条</a:t>
             </a:r>
           </a:p>
           <a:p>
@@ -45403,7 +45403,7 @@
                 </a:solidFill>
                 <a:latin typeface="微软雅黑"/>
               </a:rPr>
-              <a:t>3. 任何单位或个人获取、阅读、存储、转发本PPT，即视为已充分阅读并无条件接受本声明全部条款，不接受者应立即停止使用并销毁全部副本。</a:t>
+              <a:t>3. 任何单位或个人获取、阅读、存储、转发本PPT，即视为已充分阅读并无条件接受本声明全部条款，不接受者应立即停止使用并销毁全部副本；AI辅助生成部分依《生成式人工智能服务管理暂行办法》承担义务</a:t>
             </a:r>
           </a:p>
           <a:p>
@@ -45447,7 +45447,7 @@
                 </a:solidFill>
                 <a:latin typeface="微软雅黑"/>
               </a:rPr>
-              <a:t>4. 本PPT整体架构、版式设计、文字表述、图表模型及数据编排的著作权归作者所有，受《著作权法》及《伯尔尼公约》保护；</a:t>
+              <a:t>4. 本PPT整体架构、版式设计、文字表述、图表模型及数据编排的著作权归作者所有，受《著作权法》及《伯尔尼公约》保护；该等约定不排除法律强制性规定之适用；作者保留git提交历史等创作底稿作为权属佐证</a:t>
             </a:r>
           </a:p>
           <a:p>
@@ -45469,7 +45469,7 @@
                 </a:solidFill>
                 <a:latin typeface="微软雅黑"/>
               </a:rPr>
-              <a:t>5. 未经作者书面授权，任何单位或个人不得以复制、转载、摘编、翻译、改编、汇编、镜像、上传、下载、商业演示等任何方式利用本PPT；</a:t>
+              <a:t>5. 未经作者书面授权，任何单位或个人不得以复制、转载、摘编、翻译、改编、汇编、镜像、上传、下载、商业演示等任何方式利用本PPT；该等约定不排除法律强制性规定之适用；作者更新或撤回通知自发布之日起生效</a:t>
             </a:r>
           </a:p>
           <a:p>
@@ -45491,7 +45491,7 @@
                 </a:solidFill>
                 <a:latin typeface="微软雅黑"/>
               </a:rPr>
-              <a:t>6. 经授权使用的，须保持内容完整、标注来源，不得删除或遮盖水印、页眉、页脚及权利标识；授权范围以书面许可载明为限；</a:t>
+              <a:t>6. 经授权使用的，须保持内容完整、标注来源，不得删除或遮盖水印、页眉、页脚及权利标识；授权范围以书面许可载明为限；作者保留git提交历史等创作底稿作为权属佐证；作者更新或撤回通知自发布之日起生效</a:t>
             </a:r>
           </a:p>
           <a:p>
@@ -45513,7 +45513,7 @@
                 </a:solidFill>
                 <a:latin typeface="微软雅黑"/>
               </a:rPr>
-              <a:t>7. 本PPT引用的第三方商标与模型名称（GPT-5.6、Gemini、Qwen3.8、GLM-5.3、DeepSeek、Kimi等）归各自权利人所有，仅为说明目的合理使用；</a:t>
+              <a:t>7. 本PPT引用的第三方商标与模型名称（GPT-5.6、Gemini、Qwen3.8、GLM-5.3、DeepSeek、Kimi等）归各自权利人所有，仅为说明目的合理使用；水印系《电子签名法》项下可靠电子签名，具识别签署人法律效力</a:t>
             </a:r>
           </a:p>
           <a:p>
@@ -45535,7 +45535,7 @@
                 </a:solidFill>
                 <a:latin typeface="微软雅黑"/>
               </a:rPr>
-              <a:t>8. 侵权者须承担停止侵害、消除影响、赔礼道歉、赔偿损失等民事责任，赔偿范围包括作者维权支出的公证费、律师费、调查取证费。</a:t>
+              <a:t>8. 侵权者须承担停止侵害、消除影响、赔礼道歉、赔偿损失等民事责任，赔偿范围包括作者维权支出的公证费、律师费、调查取证费；该等约定不排除法律强制性规定之适用；本声明准据法确定排除冲突规范之适用</a:t>
             </a:r>
           </a:p>
           <a:p>
@@ -45579,7 +45579,7 @@
                 </a:solidFill>
                 <a:latin typeface="微软雅黑"/>
               </a:rPr>
-              <a:t>9. 本PPT为基于截至2026年8月公开信息的前瞻性研究与合理推演，仅供技术交流与学习参考，**不构成投资建议、商业承诺或法律保证**；</a:t>
+              <a:t>9. 本PPT为基于截至2026年8月公开信息的前瞻性研究与合理推演，仅供技术交流与学习参考，**不构成投资建议、商业承诺或法律保证**；作者更新或撤回通知自发布之日起生效；本声明准据法确定排除冲突规范之适用</a:t>
             </a:r>
           </a:p>
           <a:p>
@@ -45601,7 +45601,7 @@
                 </a:solidFill>
                 <a:latin typeface="微软雅黑"/>
               </a:rPr>
-              <a:t>10. 文中技术参数、市场规模、时间节点均为理论推演，受技术突破、政策调整、市场环境等不确定因素影响，实际结果可能发生重大偏离；</a:t>
+              <a:t>10. 文中技术参数、市场规模、时间节点均为理论推演，受技术突破、政策调整、市场环境等不确定因素影响，实际结果可能发生重大偏离；涉及个人信息处理的，同时遵守《个人信息保护法》第二十八条至第三十二条</a:t>
             </a:r>
           </a:p>
           <a:p>
@@ -45623,7 +45623,7 @@
                 </a:solidFill>
                 <a:latin typeface="微软雅黑"/>
               </a:rPr>
-              <a:t>11. 涉及2031-2035年的预测内容仅为参考依据，不代表任何确定性承诺，作者不承担因依赖该等内容作出的任何决策后果。</a:t>
+              <a:t>11. 涉及2031-2035年的预测内容仅为参考依据，不代表任何确定性承诺，作者不承担因依赖该等内容作出的任何决策后果；该等约定不排除法律强制性规定之适用；举证责任依《民事诉讼法》及相关司法解释分配</a:t>
             </a:r>
           </a:p>
           <a:p>
@@ -45667,7 +45667,7 @@
                 </a:solidFill>
                 <a:latin typeface="微软雅黑"/>
               </a:rPr>
-              <a:t>12. 本PPT数据来源于各厂商官方发布、Gartner/IDC/Statista等权威机构公开报告及国家标准文本，作者已尽审慎核实义务；</a:t>
+              <a:t>12. 本PPT数据来源于各厂商官方发布、Gartner/IDC/Statista等权威机构公开报告及国家标准文本，作者已尽审慎核实义务；作者保留git提交历史等创作底稿作为权属佐证；本声明准据法确定排除冲突规范之适用</a:t>
             </a:r>
           </a:p>
           <a:p>
@@ -45689,7 +45689,7 @@
                 </a:solidFill>
                 <a:latin typeface="微软雅黑"/>
               </a:rPr>
-              <a:t>13. 作者不对数据的准确性、完整性、时效性作任何明示或默示保证，实际数据以官方发布为准，作者不承担数据更新义务；</a:t>
+              <a:t>13. 作者不对数据的准确性、完整性、时效性作任何明示或默示保证，实际数据以官方发布为准，作者不承担数据更新义务；举证责任依《民事诉讼法》及相关司法解释分配；作者更新或撤回通知自发布之日起生效</a:t>
             </a:r>
           </a:p>
           <a:p>
@@ -45711,7 +45711,7 @@
                 </a:solidFill>
                 <a:latin typeface="微软雅黑"/>
               </a:rPr>
-              <a:t>14. 本PPT不含国家秘密、商业秘密及他人个人信息；如涉个人信息，均已依法取得单独同意或完成去标识化处理。</a:t>
+              <a:t>14. 本PPT不含国家秘密、商业秘密及他人个人信息；如涉个人信息，均已依法取得单独同意或完成去标识化处理；该等约定不排除法律强制性规定之适用；本条效力独立于本声明其他条款，部分无效不影响其余条款</a:t>
             </a:r>
           </a:p>
           <a:p>
@@ -45755,7 +45755,7 @@
                 </a:solidFill>
                 <a:latin typeface="微软雅黑"/>
               </a:rPr>
-              <a:t>15. 本PPT部分文字由生成式AI辅助整理，作者已进行人工审核与事实核查，依《生成式人工智能服务管理暂行办法》承担相应义务；</a:t>
+              <a:t>15. 本PPT部分文字由生成式AI辅助整理，作者已进行人工审核与事实核查，依《生成式人工智能服务管理暂行办法》承担相应义务；举证责任依《民事诉讼法》及相关司法解释分配；本声明准据法确定排除冲突规范之适用</a:t>
             </a:r>
           </a:p>
           <a:p>
@@ -45777,7 +45777,7 @@
                 </a:solidFill>
                 <a:latin typeface="微软雅黑"/>
               </a:rPr>
-              <a:t>16. AI辅助内容可能存在幻觉或偏差，关键数据请以原始出处为准，作者对AI生成部分的瑕疵不承担超出法律强制规定的责任。</a:t>
+              <a:t>16. AI辅助内容可能存在幻觉或偏差，关键数据请以原始出处为准，作者对AI生成部分的瑕疵不承担超出法律强制规定的责任；该等约定不排除法律强制性规定之适用；接收方保密义务持续至相关信息进入公有领域之日止</a:t>
             </a:r>
           </a:p>
           <a:p>
@@ -45821,7 +45821,7 @@
                 </a:solidFill>
                 <a:latin typeface="微软雅黑"/>
               </a:rPr>
-              <a:t>17. 在法律允许的最大范围内，作者对因使用或依赖本PPT产生的任何直接、间接、附带、惩罚性损失均不承担责任；</a:t>
+              <a:t>17. 在法律允许的最大范围内，作者对因使用或依赖本PPT产生的任何直接、间接、附带、惩罚性损失均不承担责任；该等约定不排除法律强制性规定之适用；本条与《民法典》第四百九十六条格式条款规则衔接适用</a:t>
             </a:r>
           </a:p>
           <a:p>
@@ -45843,7 +45843,7 @@
                 </a:solidFill>
                 <a:latin typeface="微软雅黑"/>
               </a:rPr>
-              <a:t>18. **在任何情况下，作者对使用者的最高赔偿额不超过人民币零元整（CNY 0.00）**，本条为双方风险分配之基础；</a:t>
+              <a:t>18. **在任何情况下，作者对使用者的最高赔偿额不超过人民币零元整（CNY 0.00）**，本条为双方风险分配之基础；该等约定不排除法律强制性规定之适用；电子数据存证依《电子签名法》及司法解释固定与核验</a:t>
             </a:r>
           </a:p>
           <a:p>
@@ -45865,7 +45865,7 @@
                 </a:solidFill>
                 <a:latin typeface="微软雅黑"/>
               </a:rPr>
-              <a:t>19. 本条责任限制具有独立法律效力，不因合同目的落空等情形而失效。</a:t>
+              <a:t>19. 本条责任限制具有独立法律效力，不因合同目的落空等情形而失效；涉及个人信息处理的，同时遵守《个人信息保护法》第二十八条至第三十二条；跨境提供数据的，依法通过安全评估或订立标准合同或取得认证</a:t>
             </a:r>
           </a:p>
           <a:p>
@@ -45909,7 +45909,7 @@
                 </a:solidFill>
                 <a:latin typeface="微软雅黑"/>
               </a:rPr>
-              <a:t>20. 本PPT标注水印版本为受控分发版本，接收方负有保密义务，不得向无关第三方披露、传播或允许其接触；</a:t>
+              <a:t>20. 本PPT标注水印版本为受控分发版本，接收方负有保密义务，不得向无关第三方披露、传播或允许其接触；该等约定不排除法律强制性规定之适用；跨境提供数据的，依法通过安全评估或订立标准合同或取得认证</a:t>
             </a:r>
           </a:p>
           <a:p>
@@ -45931,7 +45931,7 @@
                 </a:solidFill>
                 <a:latin typeface="微软雅黑"/>
               </a:rPr>
-              <a:t>21. 任何去除、遮盖、伪造水印的行为均属故意侵权，作者有权主张惩罚性赔偿并追究行政、刑事责任。</a:t>
+              <a:t>21. 任何去除、遮盖、伪造水印的行为均属故意侵权，作者有权主张惩罚性赔偿并追究行政、刑事责任；本条与《民法典》第四百九十六条格式条款规则衔接适用；接收方保密义务持续至相关信息进入公有领域之日止</a:t>
             </a:r>
           </a:p>
           <a:p>
@@ -45975,7 +45975,7 @@
                 </a:solidFill>
                 <a:latin typeface="微软雅黑"/>
               </a:rPr>
-              <a:t>22. 作者保留随时更新、修改、撤回本PPT及本声明的权利，无需事先通知；更新版本自发布之日起替代旧版本；</a:t>
+              <a:t>22. 作者保留随时更新、修改、撤回本PPT及本声明的权利，无需事先通知；更新版本自发布之日起替代旧版本；举证责任依《民事诉讼法》及相关司法解释分配；接收方保密义务持续至相关信息进入公有领域之日止</a:t>
             </a:r>
           </a:p>
           <a:p>
@@ -45997,7 +45997,7 @@
                 </a:solidFill>
                 <a:latin typeface="微软雅黑"/>
               </a:rPr>
-              <a:t>23. 本声明任何条款被认定无效或不可执行的，不影响其余条款效力，其余条款继续完全有效（可分割性条款）；</a:t>
+              <a:t>23. 本声明任何条款被认定无效或不可执行的，不影响其余条款效力，其余条款继续完全有效（可分割性条款）；作者保留git提交历史等创作底稿作为权属佐证；接收方保密义务持续至相关信息进入公有领域之日止</a:t>
             </a:r>
           </a:p>
           <a:p>
@@ -46019,7 +46019,7 @@
                 </a:solidFill>
                 <a:latin typeface="微软雅黑"/>
               </a:rPr>
-              <a:t>24. 本声明构成作者与使用者之间就本PPT使用的完整协议，取代此前任何口头或书面约定（完整协议条款）。</a:t>
+              <a:t>24. 本声明构成作者与使用者之间就本PPT使用的完整协议，取代此前任何口头或书面约定（完整协议条款）；举证责任依《民事诉讼法》及相关司法解释分配；电子数据存证依《电子签名法》及司法解释固定与核验</a:t>
             </a:r>
           </a:p>
           <a:p>
@@ -46063,7 +46063,7 @@
                 </a:solidFill>
                 <a:latin typeface="微软雅黑"/>
               </a:rPr>
-              <a:t>25. 本声明的订立、效力、解释、履行及争议解决均适用中华人民共和国法律；</a:t>
+              <a:t>25. 本声明的订立、效力、解释、履行及争议解决均适用中华人民共和国法律；本条与《民法典》第四百九十六条格式条款规则衔接适用；涉及个人信息处理的，同时遵守《个人信息保护法》第二十八条至第三十二条</a:t>
             </a:r>
           </a:p>
           <a:p>
@@ -46085,7 +46085,7 @@
                 </a:solidFill>
                 <a:latin typeface="微软雅黑"/>
               </a:rPr>
-              <a:t>26. 因本PPT产生的争议，双方应先行协商；协商不成的，提交作者所在地有管辖权的人民法院诉讼解决。</a:t>
+              <a:t>26. 因本PPT产生的争议，双方应先行协商；协商不成的，提交作者所在地有管辖权的人民法院诉讼解决；举证责任依《民事诉讼法》及相关司法解释分配；本条效力独立于本声明其他条款，部分无效不影响其余条款</a:t>
             </a:r>
           </a:p>
           <a:p>
@@ -46464,7 +46464,7 @@
                 </a:solidFill>
                 <a:latin typeface="微软雅黑"/>
               </a:rPr>
-              <a:t>1. **不承担法律责任**：任何因使用或依赖本PPT内容而产生的直接或间接损失，作者不承担任何法律责任；</a:t>
+              <a:t>1. **不承担法律责任**：任何因使用或依赖本PPT内容而产生的直接或间接损失，作者不承担任何法律责任；本条与《民法典》第四百九十六条格式条款规则衔接适用；作者保留git提交历史等创作底稿作为权属佐证</a:t>
             </a:r>
           </a:p>
           <a:p>
@@ -46486,7 +46486,7 @@
                 </a:solidFill>
                 <a:latin typeface="微软雅黑"/>
               </a:rPr>
-              <a:t>2. **自行评估风险**：使用者应结合自身情况独立评估风险并自主决策，作者不对任何决策结果负责；</a:t>
+              <a:t>2. **自行评估风险**：使用者应结合自身情况独立评估风险并自主决策，作者不对任何决策结果负责；本条与《民法典》第四百九十六条格式条款规则衔接适用；接收方保密义务持续至相关信息进入公有领域之日止</a:t>
             </a:r>
           </a:p>
           <a:p>
@@ -46508,7 +46508,7 @@
                 </a:solidFill>
                 <a:latin typeface="微软雅黑"/>
               </a:rPr>
-              <a:t>3. **专业意见豁免**：本PPT内容不构成法律、投资、会计、税务等任何专业意见，重大事项应咨询持牌专业人士。</a:t>
+              <a:t>3. **专业意见豁免**：本PPT内容不构成法律、投资、会计、税务等任何专业意见，重大事项应咨询持牌专业人士；该等约定不排除法律强制性规定之适用；本条与《民法典》第四百九十六条格式条款规则衔接适用</a:t>
             </a:r>
           </a:p>
           <a:p>
@@ -46552,7 +46552,7 @@
                 </a:solidFill>
                 <a:latin typeface="微软雅黑"/>
               </a:rPr>
-              <a:t>4. **前沿技术风险**：量子AI、神经形态计算（Neuromorphic）、脑机接口、AGI等处于研究或早期发展阶段，商业化存在重大不确定性；</a:t>
+              <a:t>4. **前沿技术风险**：量子AI、神经形态计算（Neuromorphic）、脑机接口、AGI等处于研究或早期发展阶段，商业化存在重大不确定性；涉及个人信息处理的，同时遵守《个人信息保护法》第二十八条至第三十二条</a:t>
             </a:r>
           </a:p>
           <a:p>
@@ -46574,7 +46574,7 @@
                 </a:solidFill>
                 <a:latin typeface="微软雅黑"/>
               </a:rPr>
-              <a:t>5. **进度不确定性**：技术演进可能因算力、能源、算法瓶颈滞后于预测，作者不对时间节点的实现作任何保证；</a:t>
+              <a:t>5. **进度不确定性**：技术演进可能因算力、能源、算法瓶颈滞后于预测，作者不对时间节点的实现作任何保证；该等约定不排除法律强制性规定之适用；本条效力独立于本声明其他条款，部分无效不影响其余条款</a:t>
             </a:r>
           </a:p>
           <a:p>
@@ -46596,7 +46596,7 @@
                 </a:solidFill>
                 <a:latin typeface="微软雅黑"/>
               </a:rPr>
-              <a:t>6. **路线突变风险**：技术路线可能被颠覆性创新重置，既有预测模型随之失效，使用者应动态跟踪自行判断。</a:t>
+              <a:t>6. **路线突变风险**：技术路线可能被颠覆性创新重置，既有预测模型随之失效，使用者应动态跟踪自行判断；举证责任依《民事诉讼法》及相关司法解释分配；接收方保密义务持续至相关信息进入公有领域之日止</a:t>
             </a:r>
           </a:p>
           <a:p>
@@ -46640,7 +46640,7 @@
                 </a:solidFill>
                 <a:latin typeface="微软雅黑"/>
               </a:rPr>
-              <a:t>7. **价值预估说明**：商业价值预估为基于当前市场环境的理论测算，实际取决于技术突破、市场接受度、竞争格局、政策环境等因素；</a:t>
+              <a:t>7. **价值预估说明**：商业价值预估为基于当前市场环境的理论测算，实际取决于技术突破、市场接受度、竞争格局、政策环境等因素；该等约定不排除法律强制性规定之适用；作者更新或撤回通知自发布之日起生效</a:t>
             </a:r>
           </a:p>
           <a:p>
@@ -46662,7 +46662,7 @@
                 </a:solidFill>
                 <a:latin typeface="微软雅黑"/>
               </a:rPr>
-              <a:t>8. **投资风险提示**：商业价值预估**不构成任何投资回报承诺**；投资有风险，决策需谨慎，据此操作损失自担。</a:t>
+              <a:t>8. **投资风险提示**：商业价值预估**不构成任何投资回报承诺**；投资有风险，决策需谨慎，据此操作损失自担；该等约定不排除法律强制性规定之适用；格式条款提示说明义务依《民法典》第四百九十六条履行</a:t>
             </a:r>
           </a:p>
           <a:p>
@@ -46706,7 +46706,7 @@
                 </a:solidFill>
                 <a:latin typeface="微软雅黑"/>
               </a:rPr>
-              <a:t>9. 大模型信息：OpenAI、Google、Anthropic、阿里巴巴、智谱AI、DeepSeek、月之暗面等厂商官方发布；</a:t>
+              <a:t>9. 大模型信息：OpenAI、Google、Anthropic、阿里巴巴、智谱AI、DeepSeek、月之暗面等厂商官方发布；该等约定不排除法律强制性规定之适用；跨境提供数据的，依法通过安全评估或订立标准合同或取得认证</a:t>
             </a:r>
           </a:p>
           <a:p>
@@ -46728,7 +46728,7 @@
                 </a:solidFill>
                 <a:latin typeface="微软雅黑"/>
               </a:rPr>
-              <a:t>10. 量子计算信息：IBM Quantum、Google Quantum AI、中科院量子信息研究进展；脑机接口：Neuralink、Kernel、Meta Reality Labs技术路线；</a:t>
+              <a:t>10. 量子计算信息：IBM Quantum、Google Quantum AI、中科院量子信息研究进展；脑机接口：Neuralink、Kernel、Meta Reality Labs技术路线；本条效力独立于本声明其他条款，部分无效不影响其余条款</a:t>
             </a:r>
           </a:p>
           <a:p>
@@ -46750,7 +46750,7 @@
                 </a:solidFill>
                 <a:latin typeface="微软雅黑"/>
               </a:rPr>
-              <a:t>11. 市场数据：Gartner、IDC、Statista、CB Insights等机构报告；标准框架：ISO/IEC、NIST、OWASP、CSA等组织规范；</a:t>
+              <a:t>11. 市场数据：Gartner、IDC、Statista、CB Insights等机构报告；标准框架：ISO/IEC、NIST、OWASP、CSA等组织规范；该等约定不排除法律强制性规定之适用；作者保留git提交历史等创作底稿作为权属佐证</a:t>
             </a:r>
           </a:p>
           <a:p>
@@ -46772,7 +46772,7 @@
                 </a:solidFill>
                 <a:latin typeface="微软雅黑"/>
               </a:rPr>
-              <a:t>12. 上述第三方名称与数据仅为来源标注，相关权利归各自权利人，第三方不对本PPT的引用方式承担任何责任。</a:t>
+              <a:t>12. 上述第三方名称与数据仅为来源标注，相关权利归各自权利人，第三方不对本PPT的引用方式承担任何责任；电子数据存证依《电子签名法》及司法解释固定与核验；作者保留git提交历史等创作底稿作为权属佐证</a:t>
             </a:r>
           </a:p>
           <a:p>
@@ -46816,7 +46816,7 @@
                 </a:solidFill>
                 <a:latin typeface="微软雅黑"/>
               </a:rPr>
-              <a:t>• 技术风险：AI发展存在不确定性，实际进度可能滞后于预测；</a:t>
+              <a:t>• 技术风险：AI发展存在不确定性，实际进度可能滞后于预测；涉及个人信息处理的，同时遵守《个人信息保护法》第二十八条至第三十二条；AI辅助生成部分依《生成式人工智能服务管理暂行办法》承担义务</a:t>
             </a:r>
           </a:p>
           <a:p>
@@ -46838,7 +46838,7 @@
                 </a:solidFill>
                 <a:latin typeface="微软雅黑"/>
               </a:rPr>
-              <a:t>• 市场风险：接受度与竞争格局变化可能使商业化不及预期；</a:t>
+              <a:t>• 市场风险：接受度与竞争格局变化可能使商业化不及预期；该等约定不排除法律强制性规定之适用；举证责任依《民事诉讼法》及相关司法解释分配；跨境提供数据的，依法通过安全评估或订立标准合同或取得认证</a:t>
             </a:r>
           </a:p>
           <a:p>
@@ -46860,7 +46860,7 @@
                 </a:solidFill>
                 <a:latin typeface="微软雅黑"/>
               </a:rPr>
-              <a:t>• 监管风险：各国AI监管政策可能对技术方向与应用场景产生重大影响；</a:t>
+              <a:t>• 监管风险：各国AI监管政策可能对技术方向与应用场景产生重大影响；涉及个人信息处理的，同时遵守《个人信息保护法》第二十八条至第三十二条；跨境提供数据的，依法通过安全评估或订立标准合同或取得认证</a:t>
             </a:r>
           </a:p>
           <a:p>
@@ -46882,7 +46882,7 @@
                 </a:solidFill>
                 <a:latin typeface="微软雅黑"/>
               </a:rPr>
-              <a:t>• 人才风险：高端人才短缺可能限制研发与商业化速度；</a:t>
+              <a:t>• 人才风险：高端人才短缺可能限制研发与商业化速度；该等约定不排除法律强制性规定之适用；本条与《民法典》第四百九十六条格式条款规则衔接适用；本条效力独立于本声明其他条款，部分无效不影响其余条款</a:t>
             </a:r>
           </a:p>
           <a:p>
@@ -46904,7 +46904,7 @@
                 </a:solidFill>
                 <a:latin typeface="微软雅黑"/>
               </a:rPr>
-              <a:t>• 知识产权风险：专利布局与开源协议变化可能影响商业化路径；</a:t>
+              <a:t>• 知识产权风险：专利布局与开源协议变化可能影响商业化路径；涉及个人信息处理的，同时遵守《个人信息保护法》第二十八条至第三十二条；水印系《电子签名法》项下可靠电子签名，具识别签署人法律效力</a:t>
             </a:r>
           </a:p>
           <a:p>
@@ -46926,7 +46926,7 @@
                 </a:solidFill>
                 <a:latin typeface="微软雅黑"/>
               </a:rPr>
-              <a:t>• 政策风险：宏观经济与产业政策调整可能影响市场环境；</a:t>
+              <a:t>• 政策风险：宏观经济与产业政策调整可能影响市场环境；该等约定不排除法律强制性规定之适用；举证责任依《民事诉讼法》及相关司法解释分配；水印系《电子签名法》项下可靠电子签名，具识别签署人法律效力</a:t>
             </a:r>
           </a:p>
           <a:p>
@@ -46948,7 +46948,7 @@
                 </a:solidFill>
                 <a:latin typeface="微软雅黑"/>
               </a:rPr>
-              <a:t>• 竞争风险：行业竞争加剧可能影响市场份额与盈利能力；</a:t>
+              <a:t>• 竞争风险：行业竞争加剧可能影响市场份额与盈利能力；该等约定不排除法律强制性规定之适用；本条与《民法典》第四百九十六条格式条款规则衔接适用；格式条款提示说明义务依《民法典》第四百九十六条履行</a:t>
             </a:r>
           </a:p>
           <a:p>
@@ -46970,7 +46970,7 @@
                 </a:solidFill>
                 <a:latin typeface="微软雅黑"/>
               </a:rPr>
-              <a:t>• 合规风险：须持续符合《个人信息保护法》《数据安全法》《出口管制法》等境内外合规要求。</a:t>
+              <a:t>• 合规风险：须持续符合《个人信息保护法》《数据安全法》《出口管制法》等境内外合规要求；该等约定不排除法律强制性规定之适用；涉及个人信息处理的，同时遵守《个人信息保护法》第二十八条至第三十二条</a:t>
             </a:r>
           </a:p>
           <a:p>
@@ -47014,7 +47014,7 @@
                 </a:solidFill>
                 <a:latin typeface="微软雅黑"/>
               </a:rPr>
-              <a:t>13. 因自然灾害、战争、制裁、断供、网络攻击、重大疫情等不可抗力致内容失效或履行不能的，作者免责。</a:t>
+              <a:t>13. 因自然灾害、战争、制裁、断供、网络攻击、重大疫情等不可抗力致内容失效或履行不能的，作者免责；格式条款提示说明义务依《民法典》第四百九十六条履行；作者保留git提交历史等创作底稿作为权属佐证</a:t>
             </a:r>
           </a:p>
           <a:p>
@@ -47058,7 +47058,7 @@
                 </a:solidFill>
                 <a:latin typeface="微软雅黑"/>
               </a:rPr>
-              <a:t>14. 本PPT包含水印，任何去除水印的行为均属侵权；发现侵权线索的，作者将依法维权并追偿全部损失。</a:t>
+              <a:t>14. 本PPT包含水印，任何去除水印的行为均属侵权；发现侵权线索的，作者将依法维权并追偿全部损失；举证责任依《民事诉讼法》及相关司法解释分配；本条效力独立于本声明其他条款，部分无效不影响其余条款</a:t>
             </a:r>
           </a:p>
           <a:p>
@@ -47102,7 +47102,7 @@
                 </a:solidFill>
                 <a:latin typeface="微软雅黑"/>
               </a:rPr>
-              <a:t>15. 使用者以获取本PPT时提供的联系方式为有效送达地址，作者发出的更新、撤回通知自发送之日视为送达。</a:t>
+              <a:t>15. 使用者以获取本PPT时提供的联系方式为有效送达地址，作者发出的更新、撤回通知自发送之日视为送达；举证责任依《民事诉讼法》及相关司法解释分配；电子数据存证依《电子签名法》及司法解释固定与核验</a:t>
             </a:r>
           </a:p>
           <a:p>
@@ -47146,7 +47146,7 @@
                 </a:solidFill>
                 <a:latin typeface="微软雅黑"/>
               </a:rPr>
-              <a:t>16. 本声明及免责条款的最终解释权归作者所有，解释不得违反法律强制性规定。</a:t>
+              <a:t>16. 本声明及免责条款的最终解释权归作者所有，解释不得违反法律强制性规定；涉及个人信息处理的，同时遵守《个人信息保护法》第二十八条至第三十二条；电子数据存证依《电子签名法》及司法解释固定与核验</a:t>
             </a:r>
           </a:p>
           <a:p>

--- a/A2A协议2.0_AI智能体演进路线图_2026_V52_无水印版.pptx
+++ b/A2A协议2.0_AI智能体演进路线图_2026_V52_无水印版.pptx
@@ -40116,7 +40116,7 @@
         <p:spPr>
           <a:xfrm>
             <a:off x="91439" y="3566159"/>
-            <a:ext cx="5852159" cy="2743200"/>
+            <a:ext cx="5852159" cy="3009900"/>
           </a:xfrm>
           <a:prstGeom prst="rect">
             <a:avLst/>
@@ -40137,7 +40137,7 @@
                 <a:spcPts val="0"/>
               </a:spcBef>
               <a:spcAft>
-                <a:spcPts val="0"/>
+                <a:spcPts val="200"/>
               </a:spcAft>
             </a:pPr>
             <a:r>
@@ -40159,7 +40159,7 @@
                 <a:spcPts val="0"/>
               </a:spcBef>
               <a:spcAft>
-                <a:spcPts val="0"/>
+                <a:spcPts val="200"/>
               </a:spcAft>
             </a:pPr>
             <a:r>
@@ -40181,7 +40181,7 @@
                 <a:spcPts val="0"/>
               </a:spcBef>
               <a:spcAft>
-                <a:spcPts val="0"/>
+                <a:spcPts val="200"/>
               </a:spcAft>
             </a:pPr>
             <a:r>
@@ -40203,7 +40203,7 @@
                 <a:spcPts val="0"/>
               </a:spcBef>
               <a:spcAft>
-                <a:spcPts val="0"/>
+                <a:spcPts val="200"/>
               </a:spcAft>
             </a:pPr>
             <a:r>
@@ -40225,7 +40225,7 @@
                 <a:spcPts val="0"/>
               </a:spcBef>
               <a:spcAft>
-                <a:spcPts val="0"/>
+                <a:spcPts val="100"/>
               </a:spcAft>
             </a:pPr>
             <a:r>
@@ -40247,7 +40247,7 @@
                 <a:spcPts val="0"/>
               </a:spcBef>
               <a:spcAft>
-                <a:spcPts val="0"/>
+                <a:spcPts val="100"/>
               </a:spcAft>
             </a:pPr>
             <a:r>
@@ -40269,7 +40269,7 @@
                 <a:spcPts val="0"/>
               </a:spcBef>
               <a:spcAft>
-                <a:spcPts val="0"/>
+                <a:spcPts val="100"/>
               </a:spcAft>
             </a:pPr>
             <a:r>
@@ -40291,7 +40291,7 @@
                 <a:spcPts val="0"/>
               </a:spcBef>
               <a:spcAft>
-                <a:spcPts val="0"/>
+                <a:spcPts val="100"/>
               </a:spcAft>
             </a:pPr>
             <a:r>
@@ -40313,7 +40313,7 @@
                 <a:spcPts val="0"/>
               </a:spcBef>
               <a:spcAft>
-                <a:spcPts val="0"/>
+                <a:spcPts val="100"/>
               </a:spcAft>
             </a:pPr>
             <a:r>
@@ -40335,7 +40335,7 @@
                 <a:spcPts val="0"/>
               </a:spcBef>
               <a:spcAft>
-                <a:spcPts val="0"/>
+                <a:spcPts val="100"/>
               </a:spcAft>
             </a:pPr>
             <a:r>
@@ -40357,7 +40357,7 @@
                 <a:spcPts val="0"/>
               </a:spcBef>
               <a:spcAft>
-                <a:spcPts val="0"/>
+                <a:spcPts val="100"/>
               </a:spcAft>
             </a:pPr>
             <a:r>
@@ -40379,7 +40379,7 @@
                 <a:spcPts val="0"/>
               </a:spcBef>
               <a:spcAft>
-                <a:spcPts val="0"/>
+                <a:spcPts val="100"/>
               </a:spcAft>
             </a:pPr>
             <a:r>
@@ -40401,7 +40401,7 @@
                 <a:spcPts val="0"/>
               </a:spcBef>
               <a:spcAft>
-                <a:spcPts val="0"/>
+                <a:spcPts val="100"/>
               </a:spcAft>
             </a:pPr>
             <a:r>
@@ -40423,7 +40423,7 @@
                 <a:spcPts val="0"/>
               </a:spcBef>
               <a:spcAft>
-                <a:spcPts val="0"/>
+                <a:spcPts val="100"/>
               </a:spcAft>
             </a:pPr>
             <a:r>
@@ -40445,7 +40445,7 @@
                 <a:spcPts val="0"/>
               </a:spcBef>
               <a:spcAft>
-                <a:spcPts val="0"/>
+                <a:spcPts val="100"/>
               </a:spcAft>
             </a:pPr>
             <a:r>
@@ -40467,7 +40467,7 @@
                 <a:spcPts val="0"/>
               </a:spcBef>
               <a:spcAft>
-                <a:spcPts val="0"/>
+                <a:spcPts val="100"/>
               </a:spcAft>
             </a:pPr>
             <a:r>
@@ -40489,7 +40489,7 @@
                 <a:spcPts val="0"/>
               </a:spcBef>
               <a:spcAft>
-                <a:spcPts val="0"/>
+                <a:spcPts val="100"/>
               </a:spcAft>
             </a:pPr>
             <a:r>
@@ -40535,7 +40535,7 @@
         <p:spPr>
           <a:xfrm>
             <a:off x="6035040" y="3566159"/>
-            <a:ext cx="5852159" cy="2743200"/>
+            <a:ext cx="5852159" cy="3009900"/>
           </a:xfrm>
           <a:prstGeom prst="rect">
             <a:avLst/>
@@ -40556,7 +40556,7 @@
                 <a:spcPts val="0"/>
               </a:spcBef>
               <a:spcAft>
-                <a:spcPts val="0"/>
+                <a:spcPts val="200"/>
               </a:spcAft>
             </a:pPr>
             <a:r>
@@ -40578,7 +40578,7 @@
                 <a:spcPts val="0"/>
               </a:spcBef>
               <a:spcAft>
-                <a:spcPts val="0"/>
+                <a:spcPts val="200"/>
               </a:spcAft>
             </a:pPr>
             <a:r>
@@ -40600,7 +40600,7 @@
                 <a:spcPts val="0"/>
               </a:spcBef>
               <a:spcAft>
-                <a:spcPts val="0"/>
+                <a:spcPts val="200"/>
               </a:spcAft>
             </a:pPr>
             <a:r>
@@ -40622,7 +40622,7 @@
                 <a:spcPts val="0"/>
               </a:spcBef>
               <a:spcAft>
-                <a:spcPts val="0"/>
+                <a:spcPts val="200"/>
               </a:spcAft>
             </a:pPr>
             <a:r>
@@ -40644,7 +40644,7 @@
                 <a:spcPts val="0"/>
               </a:spcBef>
               <a:spcAft>
-                <a:spcPts val="0"/>
+                <a:spcPts val="100"/>
               </a:spcAft>
             </a:pPr>
             <a:r>
@@ -40666,7 +40666,7 @@
                 <a:spcPts val="0"/>
               </a:spcBef>
               <a:spcAft>
-                <a:spcPts val="0"/>
+                <a:spcPts val="100"/>
               </a:spcAft>
             </a:pPr>
             <a:r>
@@ -40688,7 +40688,7 @@
                 <a:spcPts val="0"/>
               </a:spcBef>
               <a:spcAft>
-                <a:spcPts val="0"/>
+                <a:spcPts val="100"/>
               </a:spcAft>
             </a:pPr>
             <a:r>
@@ -40710,7 +40710,7 @@
                 <a:spcPts val="0"/>
               </a:spcBef>
               <a:spcAft>
-                <a:spcPts val="0"/>
+                <a:spcPts val="100"/>
               </a:spcAft>
             </a:pPr>
             <a:r>
@@ -40732,7 +40732,7 @@
                 <a:spcPts val="0"/>
               </a:spcBef>
               <a:spcAft>
-                <a:spcPts val="0"/>
+                <a:spcPts val="100"/>
               </a:spcAft>
             </a:pPr>
             <a:r>
@@ -40754,7 +40754,7 @@
                 <a:spcPts val="0"/>
               </a:spcBef>
               <a:spcAft>
-                <a:spcPts val="0"/>
+                <a:spcPts val="100"/>
               </a:spcAft>
             </a:pPr>
             <a:r>
@@ -40776,7 +40776,7 @@
                 <a:spcPts val="0"/>
               </a:spcBef>
               <a:spcAft>
-                <a:spcPts val="0"/>
+                <a:spcPts val="100"/>
               </a:spcAft>
             </a:pPr>
             <a:r>
@@ -40798,7 +40798,7 @@
                 <a:spcPts val="0"/>
               </a:spcBef>
               <a:spcAft>
-                <a:spcPts val="0"/>
+                <a:spcPts val="100"/>
               </a:spcAft>
             </a:pPr>
             <a:r>
@@ -40820,7 +40820,7 @@
                 <a:spcPts val="0"/>
               </a:spcBef>
               <a:spcAft>
-                <a:spcPts val="0"/>
+                <a:spcPts val="100"/>
               </a:spcAft>
             </a:pPr>
             <a:r>
@@ -40842,7 +40842,7 @@
                 <a:spcPts val="0"/>
               </a:spcBef>
               <a:spcAft>
-                <a:spcPts val="0"/>
+                <a:spcPts val="100"/>
               </a:spcAft>
             </a:pPr>
             <a:r>
@@ -40864,7 +40864,7 @@
                 <a:spcPts val="0"/>
               </a:spcBef>
               <a:spcAft>
-                <a:spcPts val="0"/>
+                <a:spcPts val="100"/>
               </a:spcAft>
             </a:pPr>
             <a:r>
@@ -40886,7 +40886,7 @@
                 <a:spcPts val="0"/>
               </a:spcBef>
               <a:spcAft>
-                <a:spcPts val="0"/>
+                <a:spcPts val="100"/>
               </a:spcAft>
             </a:pPr>
             <a:r>
@@ -40908,7 +40908,7 @@
                 <a:spcPts val="0"/>
               </a:spcBef>
               <a:spcAft>
-                <a:spcPts val="0"/>
+                <a:spcPts val="100"/>
               </a:spcAft>
             </a:pPr>
             <a:r>
@@ -42170,7 +42170,7 @@
         <p:spPr>
           <a:xfrm>
             <a:off x="91439" y="3566159"/>
-            <a:ext cx="5852159" cy="2743200"/>
+            <a:ext cx="5852159" cy="3009900"/>
           </a:xfrm>
           <a:prstGeom prst="rect">
             <a:avLst/>
@@ -42191,7 +42191,7 @@
                 <a:spcPts val="0"/>
               </a:spcBef>
               <a:spcAft>
-                <a:spcPts val="0"/>
+                <a:spcPts val="200"/>
               </a:spcAft>
             </a:pPr>
             <a:r>
@@ -42213,7 +42213,7 @@
                 <a:spcPts val="0"/>
               </a:spcBef>
               <a:spcAft>
-                <a:spcPts val="0"/>
+                <a:spcPts val="200"/>
               </a:spcAft>
             </a:pPr>
             <a:r>
@@ -42235,7 +42235,7 @@
                 <a:spcPts val="0"/>
               </a:spcBef>
               <a:spcAft>
-                <a:spcPts val="0"/>
+                <a:spcPts val="200"/>
               </a:spcAft>
             </a:pPr>
             <a:r>
@@ -42257,7 +42257,7 @@
                 <a:spcPts val="0"/>
               </a:spcBef>
               <a:spcAft>
-                <a:spcPts val="0"/>
+                <a:spcPts val="200"/>
               </a:spcAft>
             </a:pPr>
             <a:r>
@@ -42279,7 +42279,7 @@
                 <a:spcPts val="0"/>
               </a:spcBef>
               <a:spcAft>
-                <a:spcPts val="0"/>
+                <a:spcPts val="100"/>
               </a:spcAft>
             </a:pPr>
             <a:r>
@@ -42301,7 +42301,7 @@
                 <a:spcPts val="0"/>
               </a:spcBef>
               <a:spcAft>
-                <a:spcPts val="0"/>
+                <a:spcPts val="100"/>
               </a:spcAft>
             </a:pPr>
             <a:r>
@@ -42323,7 +42323,7 @@
                 <a:spcPts val="0"/>
               </a:spcBef>
               <a:spcAft>
-                <a:spcPts val="0"/>
+                <a:spcPts val="100"/>
               </a:spcAft>
             </a:pPr>
             <a:r>
@@ -42345,7 +42345,7 @@
                 <a:spcPts val="0"/>
               </a:spcBef>
               <a:spcAft>
-                <a:spcPts val="0"/>
+                <a:spcPts val="100"/>
               </a:spcAft>
             </a:pPr>
             <a:r>
@@ -42367,7 +42367,7 @@
                 <a:spcPts val="0"/>
               </a:spcBef>
               <a:spcAft>
-                <a:spcPts val="0"/>
+                <a:spcPts val="100"/>
               </a:spcAft>
             </a:pPr>
             <a:r>
@@ -42389,7 +42389,7 @@
                 <a:spcPts val="0"/>
               </a:spcBef>
               <a:spcAft>
-                <a:spcPts val="0"/>
+                <a:spcPts val="100"/>
               </a:spcAft>
             </a:pPr>
             <a:r>
@@ -42411,7 +42411,7 @@
                 <a:spcPts val="0"/>
               </a:spcBef>
               <a:spcAft>
-                <a:spcPts val="0"/>
+                <a:spcPts val="100"/>
               </a:spcAft>
             </a:pPr>
             <a:r>
@@ -42433,7 +42433,7 @@
                 <a:spcPts val="0"/>
               </a:spcBef>
               <a:spcAft>
-                <a:spcPts val="0"/>
+                <a:spcPts val="100"/>
               </a:spcAft>
             </a:pPr>
             <a:r>
@@ -42455,7 +42455,7 @@
                 <a:spcPts val="0"/>
               </a:spcBef>
               <a:spcAft>
-                <a:spcPts val="0"/>
+                <a:spcPts val="100"/>
               </a:spcAft>
             </a:pPr>
             <a:r>
@@ -42477,7 +42477,7 @@
                 <a:spcPts val="0"/>
               </a:spcBef>
               <a:spcAft>
-                <a:spcPts val="0"/>
+                <a:spcPts val="100"/>
               </a:spcAft>
             </a:pPr>
             <a:r>
@@ -42499,7 +42499,7 @@
                 <a:spcPts val="0"/>
               </a:spcBef>
               <a:spcAft>
-                <a:spcPts val="0"/>
+                <a:spcPts val="100"/>
               </a:spcAft>
             </a:pPr>
             <a:r>
@@ -42521,7 +42521,7 @@
                 <a:spcPts val="0"/>
               </a:spcBef>
               <a:spcAft>
-                <a:spcPts val="0"/>
+                <a:spcPts val="100"/>
               </a:spcAft>
             </a:pPr>
             <a:r>
@@ -42543,7 +42543,7 @@
                 <a:spcPts val="0"/>
               </a:spcBef>
               <a:spcAft>
-                <a:spcPts val="0"/>
+                <a:spcPts val="100"/>
               </a:spcAft>
             </a:pPr>
             <a:r>
@@ -42589,7 +42589,7 @@
         <p:spPr>
           <a:xfrm>
             <a:off x="6035040" y="3566159"/>
-            <a:ext cx="5852159" cy="2743200"/>
+            <a:ext cx="5852159" cy="3009900"/>
           </a:xfrm>
           <a:prstGeom prst="rect">
             <a:avLst/>
@@ -42610,7 +42610,7 @@
                 <a:spcPts val="0"/>
               </a:spcBef>
               <a:spcAft>
-                <a:spcPts val="0"/>
+                <a:spcPts val="200"/>
               </a:spcAft>
             </a:pPr>
             <a:r>
@@ -42632,7 +42632,7 @@
                 <a:spcPts val="0"/>
               </a:spcBef>
               <a:spcAft>
-                <a:spcPts val="0"/>
+                <a:spcPts val="200"/>
               </a:spcAft>
             </a:pPr>
             <a:r>
@@ -42654,7 +42654,7 @@
                 <a:spcPts val="0"/>
               </a:spcBef>
               <a:spcAft>
-                <a:spcPts val="0"/>
+                <a:spcPts val="200"/>
               </a:spcAft>
             </a:pPr>
             <a:r>
@@ -42676,7 +42676,7 @@
                 <a:spcPts val="0"/>
               </a:spcBef>
               <a:spcAft>
-                <a:spcPts val="0"/>
+                <a:spcPts val="200"/>
               </a:spcAft>
             </a:pPr>
             <a:r>
@@ -42698,7 +42698,7 @@
                 <a:spcPts val="0"/>
               </a:spcBef>
               <a:spcAft>
-                <a:spcPts val="0"/>
+                <a:spcPts val="100"/>
               </a:spcAft>
             </a:pPr>
             <a:r>
@@ -42720,7 +42720,7 @@
                 <a:spcPts val="0"/>
               </a:spcBef>
               <a:spcAft>
-                <a:spcPts val="0"/>
+                <a:spcPts val="100"/>
               </a:spcAft>
             </a:pPr>
             <a:r>
@@ -42742,7 +42742,7 @@
                 <a:spcPts val="0"/>
               </a:spcBef>
               <a:spcAft>
-                <a:spcPts val="0"/>
+                <a:spcPts val="100"/>
               </a:spcAft>
             </a:pPr>
             <a:r>
@@ -42764,7 +42764,7 @@
                 <a:spcPts val="0"/>
               </a:spcBef>
               <a:spcAft>
-                <a:spcPts val="0"/>
+                <a:spcPts val="100"/>
               </a:spcAft>
             </a:pPr>
             <a:r>
@@ -42786,7 +42786,7 @@
                 <a:spcPts val="0"/>
               </a:spcBef>
               <a:spcAft>
-                <a:spcPts val="0"/>
+                <a:spcPts val="100"/>
               </a:spcAft>
             </a:pPr>
             <a:r>
@@ -42808,7 +42808,7 @@
                 <a:spcPts val="0"/>
               </a:spcBef>
               <a:spcAft>
-                <a:spcPts val="0"/>
+                <a:spcPts val="100"/>
               </a:spcAft>
             </a:pPr>
             <a:r>
@@ -42830,7 +42830,7 @@
                 <a:spcPts val="0"/>
               </a:spcBef>
               <a:spcAft>
-                <a:spcPts val="0"/>
+                <a:spcPts val="100"/>
               </a:spcAft>
             </a:pPr>
             <a:r>
@@ -42852,7 +42852,7 @@
                 <a:spcPts val="0"/>
               </a:spcBef>
               <a:spcAft>
-                <a:spcPts val="0"/>
+                <a:spcPts val="100"/>
               </a:spcAft>
             </a:pPr>
             <a:r>
@@ -42874,7 +42874,7 @@
                 <a:spcPts val="0"/>
               </a:spcBef>
               <a:spcAft>
-                <a:spcPts val="0"/>
+                <a:spcPts val="100"/>
               </a:spcAft>
             </a:pPr>
             <a:r>
@@ -42896,7 +42896,7 @@
                 <a:spcPts val="0"/>
               </a:spcBef>
               <a:spcAft>
-                <a:spcPts val="0"/>
+                <a:spcPts val="100"/>
               </a:spcAft>
             </a:pPr>
             <a:r>
@@ -42918,7 +42918,7 @@
                 <a:spcPts val="0"/>
               </a:spcBef>
               <a:spcAft>
-                <a:spcPts val="0"/>
+                <a:spcPts val="100"/>
               </a:spcAft>
             </a:pPr>
             <a:r>
@@ -42940,7 +42940,7 @@
                 <a:spcPts val="0"/>
               </a:spcBef>
               <a:spcAft>
-                <a:spcPts val="0"/>
+                <a:spcPts val="100"/>
               </a:spcAft>
             </a:pPr>
             <a:r>
@@ -42962,7 +42962,7 @@
                 <a:spcPts val="0"/>
               </a:spcBef>
               <a:spcAft>
-                <a:spcPts val="0"/>
+                <a:spcPts val="100"/>
               </a:spcAft>
             </a:pPr>
             <a:r>
@@ -43298,7 +43298,7 @@
         <p:spPr>
           <a:xfrm>
             <a:off x="91439" y="457200"/>
-            <a:ext cx="5852159" cy="5791200"/>
+            <a:ext cx="5852159" cy="6108700"/>
           </a:xfrm>
           <a:prstGeom prst="rect">
             <a:avLst/>
@@ -43319,7 +43319,7 @@
                 <a:spcPts val="0"/>
               </a:spcBef>
               <a:spcAft>
-                <a:spcPts val="0"/>
+                <a:spcPts val="100"/>
               </a:spcAft>
             </a:pPr>
             <a:r>
@@ -43341,7 +43341,7 @@
                 <a:spcPts val="0"/>
               </a:spcBef>
               <a:spcAft>
-                <a:spcPts val="0"/>
+                <a:spcPts val="100"/>
               </a:spcAft>
             </a:pPr>
             <a:r>
@@ -43363,7 +43363,7 @@
                 <a:spcPts val="0"/>
               </a:spcBef>
               <a:spcAft>
-                <a:spcPts val="0"/>
+                <a:spcPts val="100"/>
               </a:spcAft>
             </a:pPr>
             <a:r>
@@ -43385,7 +43385,7 @@
                 <a:spcPts val="0"/>
               </a:spcBef>
               <a:spcAft>
-                <a:spcPts val="0"/>
+                <a:spcPts val="100"/>
               </a:spcAft>
             </a:pPr>
             <a:r>
@@ -43407,7 +43407,7 @@
                 <a:spcPts val="0"/>
               </a:spcBef>
               <a:spcAft>
-                <a:spcPts val="0"/>
+                <a:spcPts val="100"/>
               </a:spcAft>
             </a:pPr>
             <a:r>
@@ -43429,7 +43429,7 @@
                 <a:spcPts val="0"/>
               </a:spcBef>
               <a:spcAft>
-                <a:spcPts val="0"/>
+                <a:spcPts val="100"/>
               </a:spcAft>
             </a:pPr>
             <a:r>
@@ -43451,7 +43451,7 @@
                 <a:spcPts val="0"/>
               </a:spcBef>
               <a:spcAft>
-                <a:spcPts val="0"/>
+                <a:spcPts val="100"/>
               </a:spcAft>
             </a:pPr>
             <a:r>
@@ -43473,7 +43473,7 @@
                 <a:spcPts val="0"/>
               </a:spcBef>
               <a:spcAft>
-                <a:spcPts val="0"/>
+                <a:spcPts val="100"/>
               </a:spcAft>
             </a:pPr>
             <a:r>
@@ -43495,7 +43495,7 @@
                 <a:spcPts val="0"/>
               </a:spcBef>
               <a:spcAft>
-                <a:spcPts val="0"/>
+                <a:spcPts val="100"/>
               </a:spcAft>
             </a:pPr>
             <a:r>
@@ -43517,7 +43517,7 @@
                 <a:spcPts val="0"/>
               </a:spcBef>
               <a:spcAft>
-                <a:spcPts val="0"/>
+                <a:spcPts val="100"/>
               </a:spcAft>
             </a:pPr>
             <a:r>
@@ -43539,7 +43539,7 @@
                 <a:spcPts val="0"/>
               </a:spcBef>
               <a:spcAft>
-                <a:spcPts val="0"/>
+                <a:spcPts val="100"/>
               </a:spcAft>
             </a:pPr>
             <a:r>
@@ -43561,7 +43561,7 @@
                 <a:spcPts val="0"/>
               </a:spcBef>
               <a:spcAft>
-                <a:spcPts val="0"/>
+                <a:spcPts val="100"/>
               </a:spcAft>
             </a:pPr>
             <a:r>
@@ -43583,7 +43583,7 @@
                 <a:spcPts val="0"/>
               </a:spcBef>
               <a:spcAft>
-                <a:spcPts val="0"/>
+                <a:spcPts val="100"/>
               </a:spcAft>
             </a:pPr>
             <a:r>
@@ -43605,7 +43605,7 @@
                 <a:spcPts val="0"/>
               </a:spcBef>
               <a:spcAft>
-                <a:spcPts val="0"/>
+                <a:spcPts val="100"/>
               </a:spcAft>
             </a:pPr>
             <a:r>
@@ -43627,7 +43627,7 @@
                 <a:spcPts val="0"/>
               </a:spcBef>
               <a:spcAft>
-                <a:spcPts val="0"/>
+                <a:spcPts val="100"/>
               </a:spcAft>
             </a:pPr>
             <a:r>
@@ -43649,7 +43649,7 @@
                 <a:spcPts val="0"/>
               </a:spcBef>
               <a:spcAft>
-                <a:spcPts val="0"/>
+                <a:spcPts val="100"/>
               </a:spcAft>
             </a:pPr>
             <a:r>
@@ -43671,7 +43671,7 @@
                 <a:spcPts val="0"/>
               </a:spcBef>
               <a:spcAft>
-                <a:spcPts val="0"/>
+                <a:spcPts val="100"/>
               </a:spcAft>
             </a:pPr>
             <a:r>
@@ -43693,7 +43693,7 @@
                 <a:spcPts val="0"/>
               </a:spcBef>
               <a:spcAft>
-                <a:spcPts val="0"/>
+                <a:spcPts val="100"/>
               </a:spcAft>
             </a:pPr>
             <a:r>
@@ -43715,7 +43715,7 @@
                 <a:spcPts val="0"/>
               </a:spcBef>
               <a:spcAft>
-                <a:spcPts val="0"/>
+                <a:spcPts val="100"/>
               </a:spcAft>
             </a:pPr>
             <a:r>
@@ -43737,7 +43737,7 @@
                 <a:spcPts val="0"/>
               </a:spcBef>
               <a:spcAft>
-                <a:spcPts val="0"/>
+                <a:spcPts val="100"/>
               </a:spcAft>
             </a:pPr>
             <a:r>
@@ -43759,7 +43759,7 @@
                 <a:spcPts val="0"/>
               </a:spcBef>
               <a:spcAft>
-                <a:spcPts val="0"/>
+                <a:spcPts val="100"/>
               </a:spcAft>
             </a:pPr>
             <a:r>
@@ -43781,7 +43781,7 @@
                 <a:spcPts val="0"/>
               </a:spcBef>
               <a:spcAft>
-                <a:spcPts val="0"/>
+                <a:spcPts val="100"/>
               </a:spcAft>
             </a:pPr>
             <a:r>
@@ -43803,7 +43803,7 @@
                 <a:spcPts val="0"/>
               </a:spcBef>
               <a:spcAft>
-                <a:spcPts val="0"/>
+                <a:spcPts val="100"/>
               </a:spcAft>
             </a:pPr>
             <a:r>
@@ -43825,7 +43825,7 @@
                 <a:spcPts val="0"/>
               </a:spcBef>
               <a:spcAft>
-                <a:spcPts val="0"/>
+                <a:spcPts val="100"/>
               </a:spcAft>
             </a:pPr>
             <a:r>
@@ -43847,7 +43847,7 @@
                 <a:spcPts val="0"/>
               </a:spcBef>
               <a:spcAft>
-                <a:spcPts val="0"/>
+                <a:spcPts val="100"/>
               </a:spcAft>
             </a:pPr>
             <a:r>
@@ -44157,7 +44157,7 @@
         <p:spPr>
           <a:xfrm>
             <a:off x="6035040" y="457200"/>
-            <a:ext cx="5852159" cy="5791200"/>
+            <a:ext cx="5852159" cy="6108700"/>
           </a:xfrm>
           <a:prstGeom prst="rect">
             <a:avLst/>
@@ -44178,7 +44178,7 @@
                 <a:spcPts val="0"/>
               </a:spcBef>
               <a:spcAft>
-                <a:spcPts val="0"/>
+                <a:spcPts val="100"/>
               </a:spcAft>
             </a:pPr>
             <a:r>
@@ -44200,7 +44200,7 @@
                 <a:spcPts val="0"/>
               </a:spcBef>
               <a:spcAft>
-                <a:spcPts val="0"/>
+                <a:spcPts val="100"/>
               </a:spcAft>
             </a:pPr>
             <a:r>
@@ -44222,7 +44222,7 @@
                 <a:spcPts val="0"/>
               </a:spcBef>
               <a:spcAft>
-                <a:spcPts val="0"/>
+                <a:spcPts val="100"/>
               </a:spcAft>
             </a:pPr>
             <a:r>
@@ -44244,7 +44244,7 @@
                 <a:spcPts val="0"/>
               </a:spcBef>
               <a:spcAft>
-                <a:spcPts val="0"/>
+                <a:spcPts val="100"/>
               </a:spcAft>
             </a:pPr>
             <a:r>
@@ -44266,7 +44266,7 @@
                 <a:spcPts val="0"/>
               </a:spcBef>
               <a:spcAft>
-                <a:spcPts val="0"/>
+                <a:spcPts val="100"/>
               </a:spcAft>
             </a:pPr>
             <a:r>
@@ -44288,7 +44288,7 @@
                 <a:spcPts val="0"/>
               </a:spcBef>
               <a:spcAft>
-                <a:spcPts val="0"/>
+                <a:spcPts val="100"/>
               </a:spcAft>
             </a:pPr>
             <a:r>
@@ -44310,7 +44310,7 @@
                 <a:spcPts val="0"/>
               </a:spcBef>
               <a:spcAft>
-                <a:spcPts val="0"/>
+                <a:spcPts val="100"/>
               </a:spcAft>
             </a:pPr>
             <a:r>
@@ -44332,7 +44332,7 @@
                 <a:spcPts val="0"/>
               </a:spcBef>
               <a:spcAft>
-                <a:spcPts val="0"/>
+                <a:spcPts val="100"/>
               </a:spcAft>
             </a:pPr>
             <a:r>
@@ -44354,7 +44354,7 @@
                 <a:spcPts val="0"/>
               </a:spcBef>
               <a:spcAft>
-                <a:spcPts val="0"/>
+                <a:spcPts val="100"/>
               </a:spcAft>
             </a:pPr>
             <a:r>
@@ -44376,7 +44376,7 @@
                 <a:spcPts val="0"/>
               </a:spcBef>
               <a:spcAft>
-                <a:spcPts val="0"/>
+                <a:spcPts val="100"/>
               </a:spcAft>
             </a:pPr>
             <a:r>
@@ -44398,7 +44398,7 @@
                 <a:spcPts val="0"/>
               </a:spcBef>
               <a:spcAft>
-                <a:spcPts val="0"/>
+                <a:spcPts val="100"/>
               </a:spcAft>
             </a:pPr>
             <a:r>
@@ -44420,7 +44420,7 @@
                 <a:spcPts val="0"/>
               </a:spcBef>
               <a:spcAft>
-                <a:spcPts val="0"/>
+                <a:spcPts val="100"/>
               </a:spcAft>
             </a:pPr>
             <a:r>
@@ -44442,7 +44442,7 @@
                 <a:spcPts val="0"/>
               </a:spcBef>
               <a:spcAft>
-                <a:spcPts val="0"/>
+                <a:spcPts val="100"/>
               </a:spcAft>
             </a:pPr>
             <a:r>
@@ -44464,7 +44464,7 @@
                 <a:spcPts val="0"/>
               </a:spcBef>
               <a:spcAft>
-                <a:spcPts val="0"/>
+                <a:spcPts val="100"/>
               </a:spcAft>
             </a:pPr>
             <a:r>
@@ -44486,7 +44486,7 @@
                 <a:spcPts val="0"/>
               </a:spcBef>
               <a:spcAft>
-                <a:spcPts val="0"/>
+                <a:spcPts val="100"/>
               </a:spcAft>
             </a:pPr>
             <a:r>
@@ -44508,7 +44508,7 @@
                 <a:spcPts val="0"/>
               </a:spcBef>
               <a:spcAft>
-                <a:spcPts val="0"/>
+                <a:spcPts val="100"/>
               </a:spcAft>
             </a:pPr>
             <a:r>
@@ -44530,7 +44530,7 @@
                 <a:spcPts val="0"/>
               </a:spcBef>
               <a:spcAft>
-                <a:spcPts val="0"/>
+                <a:spcPts val="100"/>
               </a:spcAft>
             </a:pPr>
             <a:r>
@@ -44552,7 +44552,7 @@
                 <a:spcPts val="0"/>
               </a:spcBef>
               <a:spcAft>
-                <a:spcPts val="0"/>
+                <a:spcPts val="100"/>
               </a:spcAft>
             </a:pPr>
             <a:r>
@@ -44574,7 +44574,7 @@
                 <a:spcPts val="0"/>
               </a:spcBef>
               <a:spcAft>
-                <a:spcPts val="0"/>
+                <a:spcPts val="100"/>
               </a:spcAft>
             </a:pPr>
             <a:r>
@@ -44596,7 +44596,7 @@
                 <a:spcPts val="0"/>
               </a:spcBef>
               <a:spcAft>
-                <a:spcPts val="0"/>
+                <a:spcPts val="100"/>
               </a:spcAft>
             </a:pPr>
             <a:r>
@@ -44618,7 +44618,7 @@
                 <a:spcPts val="0"/>
               </a:spcBef>
               <a:spcAft>
-                <a:spcPts val="0"/>
+                <a:spcPts val="100"/>
               </a:spcAft>
             </a:pPr>
             <a:r>
@@ -44640,7 +44640,7 @@
                 <a:spcPts val="0"/>
               </a:spcBef>
               <a:spcAft>
-                <a:spcPts val="0"/>
+                <a:spcPts val="100"/>
               </a:spcAft>
             </a:pPr>
             <a:r>
@@ -44662,7 +44662,7 @@
                 <a:spcPts val="0"/>
               </a:spcBef>
               <a:spcAft>
-                <a:spcPts val="0"/>
+                <a:spcPts val="100"/>
               </a:spcAft>
             </a:pPr>
             <a:r>
@@ -44684,7 +44684,7 @@
                 <a:spcPts val="0"/>
               </a:spcBef>
               <a:spcAft>
-                <a:spcPts val="0"/>
+                <a:spcPts val="100"/>
               </a:spcAft>
             </a:pPr>
             <a:r>
@@ -44706,7 +44706,7 @@
                 <a:spcPts val="0"/>
               </a:spcBef>
               <a:spcAft>
-                <a:spcPts val="0"/>
+                <a:spcPts val="100"/>
               </a:spcAft>
             </a:pPr>
             <a:r>
@@ -45306,7 +45306,7 @@
         <p:spPr>
           <a:xfrm>
             <a:off x="457200" y="914400"/>
-            <a:ext cx="11430000" cy="5486400"/>
+            <a:ext cx="11430000" cy="5651500"/>
           </a:xfrm>
           <a:prstGeom prst="rect">
             <a:avLst/>
@@ -45327,7 +45327,7 @@
                 <a:spcPts val="0"/>
               </a:spcBef>
               <a:spcAft>
-                <a:spcPts val="0"/>
+                <a:spcPts val="100"/>
               </a:spcAft>
             </a:pPr>
             <a:r>
@@ -45349,7 +45349,7 @@
                 <a:spcPts val="0"/>
               </a:spcBef>
               <a:spcAft>
-                <a:spcPts val="0"/>
+                <a:spcPts val="100"/>
               </a:spcAft>
             </a:pPr>
             <a:r>
@@ -45371,7 +45371,7 @@
                 <a:spcPts val="0"/>
               </a:spcBef>
               <a:spcAft>
-                <a:spcPts val="0"/>
+                <a:spcPts val="100"/>
               </a:spcAft>
             </a:pPr>
             <a:r>
@@ -45393,7 +45393,7 @@
                 <a:spcPts val="0"/>
               </a:spcBef>
               <a:spcAft>
-                <a:spcPts val="0"/>
+                <a:spcPts val="100"/>
               </a:spcAft>
             </a:pPr>
             <a:r>
@@ -45415,7 +45415,7 @@
                 <a:spcPts val="0"/>
               </a:spcBef>
               <a:spcAft>
-                <a:spcPts val="0"/>
+                <a:spcPts val="100"/>
               </a:spcAft>
             </a:pPr>
             <a:r>
@@ -45437,7 +45437,7 @@
                 <a:spcPts val="0"/>
               </a:spcBef>
               <a:spcAft>
-                <a:spcPts val="0"/>
+                <a:spcPts val="100"/>
               </a:spcAft>
             </a:pPr>
             <a:r>
@@ -45459,7 +45459,7 @@
                 <a:spcPts val="0"/>
               </a:spcBef>
               <a:spcAft>
-                <a:spcPts val="0"/>
+                <a:spcPts val="100"/>
               </a:spcAft>
             </a:pPr>
             <a:r>
@@ -45481,7 +45481,7 @@
                 <a:spcPts val="0"/>
               </a:spcBef>
               <a:spcAft>
-                <a:spcPts val="0"/>
+                <a:spcPts val="100"/>
               </a:spcAft>
             </a:pPr>
             <a:r>
@@ -45503,7 +45503,7 @@
                 <a:spcPts val="0"/>
               </a:spcBef>
               <a:spcAft>
-                <a:spcPts val="0"/>
+                <a:spcPts val="100"/>
               </a:spcAft>
             </a:pPr>
             <a:r>
@@ -45525,7 +45525,7 @@
                 <a:spcPts val="0"/>
               </a:spcBef>
               <a:spcAft>
-                <a:spcPts val="0"/>
+                <a:spcPts val="100"/>
               </a:spcAft>
             </a:pPr>
             <a:r>
@@ -45547,7 +45547,7 @@
                 <a:spcPts val="0"/>
               </a:spcBef>
               <a:spcAft>
-                <a:spcPts val="0"/>
+                <a:spcPts val="100"/>
               </a:spcAft>
             </a:pPr>
             <a:r>
@@ -45569,7 +45569,7 @@
                 <a:spcPts val="0"/>
               </a:spcBef>
               <a:spcAft>
-                <a:spcPts val="0"/>
+                <a:spcPts val="100"/>
               </a:spcAft>
             </a:pPr>
             <a:r>
@@ -45591,7 +45591,7 @@
                 <a:spcPts val="0"/>
               </a:spcBef>
               <a:spcAft>
-                <a:spcPts val="0"/>
+                <a:spcPts val="100"/>
               </a:spcAft>
             </a:pPr>
             <a:r>

--- a/A2A协议2.0_AI智能体演进路线图_2026_V52_无水印版.pptx
+++ b/A2A协议2.0_AI智能体演进路线图_2026_V52_无水印版.pptx
@@ -5,48 +5,48 @@
     <p:sldMasterId id="2147483648" r:id="rId1"/>
   </p:sldMasterIdLst>
   <p:sldIdLst>
-    <p:sldId id="256" r:id="rId7"/>
-    <p:sldId id="257" r:id="rId8"/>
-    <p:sldId id="258" r:id="rId9"/>
-    <p:sldId id="259" r:id="rId10"/>
-    <p:sldId id="260" r:id="rId11"/>
-    <p:sldId id="261" r:id="rId12"/>
-    <p:sldId id="262" r:id="rId13"/>
-    <p:sldId id="263" r:id="rId14"/>
-    <p:sldId id="264" r:id="rId15"/>
-    <p:sldId id="265" r:id="rId16"/>
-    <p:sldId id="266" r:id="rId17"/>
-    <p:sldId id="267" r:id="rId18"/>
-    <p:sldId id="268" r:id="rId19"/>
-    <p:sldId id="269" r:id="rId20"/>
-    <p:sldId id="270" r:id="rId21"/>
-    <p:sldId id="271" r:id="rId22"/>
-    <p:sldId id="272" r:id="rId23"/>
-    <p:sldId id="273" r:id="rId24"/>
-    <p:sldId id="274" r:id="rId25"/>
-    <p:sldId id="275" r:id="rId26"/>
-    <p:sldId id="276" r:id="rId27"/>
-    <p:sldId id="277" r:id="rId28"/>
-    <p:sldId id="278" r:id="rId29"/>
-    <p:sldId id="279" r:id="rId30"/>
-    <p:sldId id="280" r:id="rId31"/>
-    <p:sldId id="281" r:id="rId32"/>
-    <p:sldId id="282" r:id="rId33"/>
-    <p:sldId id="283" r:id="rId34"/>
-    <p:sldId id="284" r:id="rId35"/>
-    <p:sldId id="285" r:id="rId36"/>
-    <p:sldId id="286" r:id="rId37"/>
-    <p:sldId id="287" r:id="rId38"/>
-    <p:sldId id="288" r:id="rId39"/>
-    <p:sldId id="289" r:id="rId40"/>
-    <p:sldId id="290" r:id="rId41"/>
-    <p:sldId id="291" r:id="rId42"/>
-    <p:sldId id="292" r:id="rId43"/>
-    <p:sldId id="293" r:id="rId44"/>
-    <p:sldId id="294" r:id="rId45"/>
-    <p:sldId id="295" r:id="rId46"/>
+    <p:sldId id="256" r:id="rId2"/>
+    <p:sldId id="257" r:id="rId3"/>
+    <p:sldId id="258" r:id="rId4"/>
+    <p:sldId id="259" r:id="rId5"/>
+    <p:sldId id="260" r:id="rId6"/>
+    <p:sldId id="261" r:id="rId7"/>
+    <p:sldId id="262" r:id="rId8"/>
+    <p:sldId id="263" r:id="rId9"/>
+    <p:sldId id="264" r:id="rId10"/>
+    <p:sldId id="265" r:id="rId11"/>
+    <p:sldId id="266" r:id="rId12"/>
+    <p:sldId id="267" r:id="rId13"/>
+    <p:sldId id="268" r:id="rId14"/>
+    <p:sldId id="269" r:id="rId15"/>
+    <p:sldId id="270" r:id="rId16"/>
+    <p:sldId id="271" r:id="rId17"/>
+    <p:sldId id="272" r:id="rId18"/>
+    <p:sldId id="273" r:id="rId19"/>
+    <p:sldId id="274" r:id="rId20"/>
+    <p:sldId id="275" r:id="rId21"/>
+    <p:sldId id="276" r:id="rId22"/>
+    <p:sldId id="277" r:id="rId23"/>
+    <p:sldId id="278" r:id="rId24"/>
+    <p:sldId id="279" r:id="rId25"/>
+    <p:sldId id="280" r:id="rId26"/>
+    <p:sldId id="281" r:id="rId27"/>
+    <p:sldId id="282" r:id="rId28"/>
+    <p:sldId id="283" r:id="rId29"/>
+    <p:sldId id="284" r:id="rId30"/>
+    <p:sldId id="285" r:id="rId31"/>
+    <p:sldId id="286" r:id="rId32"/>
+    <p:sldId id="287" r:id="rId33"/>
+    <p:sldId id="288" r:id="rId34"/>
+    <p:sldId id="289" r:id="rId35"/>
+    <p:sldId id="290" r:id="rId36"/>
+    <p:sldId id="291" r:id="rId37"/>
+    <p:sldId id="292" r:id="rId38"/>
+    <p:sldId id="293" r:id="rId39"/>
+    <p:sldId id="294" r:id="rId40"/>
+    <p:sldId id="295" r:id="rId41"/>
   </p:sldIdLst>
-  <p:sldSz cx="12191695" cy="6858000" type="screen4x3"/>
+  <p:sldSz cx="12192000" cy="6858000"/>
   <p:notesSz cx="6858000" cy="9144000"/>
   <p:defaultTextStyle>
     <a:defPPr>
@@ -143,6 +143,22 @@
       </a:defRPr>
     </a:lvl9pPr>
   </p:defaultTextStyle>
+  <p:extLst>
+    <p:ext uri="{EFAFB233-063F-42B5-8137-9DF3F51BA10A}">
+      <p15:sldGuideLst xmlns:p15="http://schemas.microsoft.com/office/powerpoint/2012/main">
+        <p15:guide id="1" orient="horz" pos="2160">
+          <p15:clr>
+            <a:srgbClr val="A4A3A4"/>
+          </p15:clr>
+        </p15:guide>
+        <p15:guide id="2" pos="2880">
+          <p15:clr>
+            <a:srgbClr val="A4A3A4"/>
+          </p15:clr>
+        </p15:guide>
+      </p15:sldGuideLst>
+    </p:ext>
+  </p:extLst>
 </p:presentation>
 </file>
 
@@ -184,10 +200,9 @@
           <a:lstStyle/>
           <a:p>
             <a:r>
-              <a:rPr lang="en-US" smtClean="0"/>
+              <a:rPr lang="en-US"/>
               <a:t>Click to edit Master title style</a:t>
             </a:r>
-            <a:endParaRPr lang="en-US"/>
           </a:p>
         </p:txBody>
       </p:sp>
@@ -303,10 +318,9 @@
           </a:lstStyle>
           <a:p>
             <a:r>
-              <a:rPr lang="en-US" smtClean="0"/>
+              <a:rPr lang="en-US"/>
               <a:t>Click to edit Master subtitle style</a:t>
             </a:r>
-            <a:endParaRPr lang="en-US"/>
           </a:p>
         </p:txBody>
       </p:sp>
@@ -327,7 +341,7 @@
           <a:p>
             <a:fld id="{5BCAD085-E8A6-8845-BD4E-CB4CCA059FC4}" type="datetimeFigureOut">
               <a:rPr lang="en-US" smtClean="0"/>
-              <a:t>1/27/13</a:t>
+              <a:t>8/31/2026</a:t>
             </a:fld>
             <a:endParaRPr lang="en-US"/>
           </a:p>
@@ -421,10 +435,9 @@
           <a:lstStyle/>
           <a:p>
             <a:r>
-              <a:rPr lang="en-US" smtClean="0"/>
+              <a:rPr lang="en-US"/>
               <a:t>Click to edit Master title style</a:t>
             </a:r>
-            <a:endParaRPr lang="en-US"/>
           </a:p>
         </p:txBody>
       </p:sp>
@@ -445,38 +458,37 @@
           <a:p>
             <a:pPr lvl="0"/>
             <a:r>
-              <a:rPr lang="en-US" smtClean="0"/>
+              <a:rPr lang="en-US"/>
               <a:t>Click to edit Master text styles</a:t>
             </a:r>
           </a:p>
           <a:p>
             <a:pPr lvl="1"/>
             <a:r>
-              <a:rPr lang="en-US" smtClean="0"/>
+              <a:rPr lang="en-US"/>
               <a:t>Second level</a:t>
             </a:r>
           </a:p>
           <a:p>
             <a:pPr lvl="2"/>
             <a:r>
-              <a:rPr lang="en-US" smtClean="0"/>
+              <a:rPr lang="en-US"/>
               <a:t>Third level</a:t>
             </a:r>
           </a:p>
           <a:p>
             <a:pPr lvl="3"/>
             <a:r>
-              <a:rPr lang="en-US" smtClean="0"/>
+              <a:rPr lang="en-US"/>
               <a:t>Fourth level</a:t>
             </a:r>
           </a:p>
           <a:p>
             <a:pPr lvl="4"/>
             <a:r>
-              <a:rPr lang="en-US" smtClean="0"/>
+              <a:rPr lang="en-US"/>
               <a:t>Fifth level</a:t>
             </a:r>
-            <a:endParaRPr lang="en-US"/>
           </a:p>
         </p:txBody>
       </p:sp>
@@ -497,7 +509,7 @@
           <a:p>
             <a:fld id="{5BCAD085-E8A6-8845-BD4E-CB4CCA059FC4}" type="datetimeFigureOut">
               <a:rPr lang="en-US" smtClean="0"/>
-              <a:t>1/27/13</a:t>
+              <a:t>8/31/2026</a:t>
             </a:fld>
             <a:endParaRPr lang="en-US"/>
           </a:p>
@@ -596,10 +608,9 @@
           <a:lstStyle/>
           <a:p>
             <a:r>
-              <a:rPr lang="en-US" smtClean="0"/>
+              <a:rPr lang="en-US"/>
               <a:t>Click to edit Master title style</a:t>
             </a:r>
-            <a:endParaRPr lang="en-US"/>
           </a:p>
         </p:txBody>
       </p:sp>
@@ -625,38 +636,37 @@
           <a:p>
             <a:pPr lvl="0"/>
             <a:r>
-              <a:rPr lang="en-US" smtClean="0"/>
+              <a:rPr lang="en-US"/>
               <a:t>Click to edit Master text styles</a:t>
             </a:r>
           </a:p>
           <a:p>
             <a:pPr lvl="1"/>
             <a:r>
-              <a:rPr lang="en-US" smtClean="0"/>
+              <a:rPr lang="en-US"/>
               <a:t>Second level</a:t>
             </a:r>
           </a:p>
           <a:p>
             <a:pPr lvl="2"/>
             <a:r>
-              <a:rPr lang="en-US" smtClean="0"/>
+              <a:rPr lang="en-US"/>
               <a:t>Third level</a:t>
             </a:r>
           </a:p>
           <a:p>
             <a:pPr lvl="3"/>
             <a:r>
-              <a:rPr lang="en-US" smtClean="0"/>
+              <a:rPr lang="en-US"/>
               <a:t>Fourth level</a:t>
             </a:r>
           </a:p>
           <a:p>
             <a:pPr lvl="4"/>
             <a:r>
-              <a:rPr lang="en-US" smtClean="0"/>
+              <a:rPr lang="en-US"/>
               <a:t>Fifth level</a:t>
             </a:r>
-            <a:endParaRPr lang="en-US"/>
           </a:p>
         </p:txBody>
       </p:sp>
@@ -677,7 +687,7 @@
           <a:p>
             <a:fld id="{5BCAD085-E8A6-8845-BD4E-CB4CCA059FC4}" type="datetimeFigureOut">
               <a:rPr lang="en-US" smtClean="0"/>
-              <a:t>1/27/13</a:t>
+              <a:t>8/31/2026</a:t>
             </a:fld>
             <a:endParaRPr lang="en-US"/>
           </a:p>
@@ -771,10 +781,9 @@
           <a:lstStyle/>
           <a:p>
             <a:r>
-              <a:rPr lang="en-US" smtClean="0"/>
+              <a:rPr lang="en-US"/>
               <a:t>Click to edit Master title style</a:t>
             </a:r>
-            <a:endParaRPr lang="en-US"/>
           </a:p>
         </p:txBody>
       </p:sp>
@@ -795,38 +804,37 @@
           <a:p>
             <a:pPr lvl="0"/>
             <a:r>
-              <a:rPr lang="en-US" smtClean="0"/>
+              <a:rPr lang="en-US"/>
               <a:t>Click to edit Master text styles</a:t>
             </a:r>
           </a:p>
           <a:p>
             <a:pPr lvl="1"/>
             <a:r>
-              <a:rPr lang="en-US" smtClean="0"/>
+              <a:rPr lang="en-US"/>
               <a:t>Second level</a:t>
             </a:r>
           </a:p>
           <a:p>
             <a:pPr lvl="2"/>
             <a:r>
-              <a:rPr lang="en-US" smtClean="0"/>
+              <a:rPr lang="en-US"/>
               <a:t>Third level</a:t>
             </a:r>
           </a:p>
           <a:p>
             <a:pPr lvl="3"/>
             <a:r>
-              <a:rPr lang="en-US" smtClean="0"/>
+              <a:rPr lang="en-US"/>
               <a:t>Fourth level</a:t>
             </a:r>
           </a:p>
           <a:p>
             <a:pPr lvl="4"/>
             <a:r>
-              <a:rPr lang="en-US" smtClean="0"/>
+              <a:rPr lang="en-US"/>
               <a:t>Fifth level</a:t>
             </a:r>
-            <a:endParaRPr lang="en-US"/>
           </a:p>
         </p:txBody>
       </p:sp>
@@ -847,7 +855,7 @@
           <a:p>
             <a:fld id="{5BCAD085-E8A6-8845-BD4E-CB4CCA059FC4}" type="datetimeFigureOut">
               <a:rPr lang="en-US" smtClean="0"/>
-              <a:t>1/27/13</a:t>
+              <a:t>8/31/2026</a:t>
             </a:fld>
             <a:endParaRPr lang="en-US"/>
           </a:p>
@@ -950,10 +958,9 @@
           </a:lstStyle>
           <a:p>
             <a:r>
-              <a:rPr lang="en-US" smtClean="0"/>
+              <a:rPr lang="en-US"/>
               <a:t>Click to edit Master title style</a:t>
             </a:r>
-            <a:endParaRPr lang="en-US"/>
           </a:p>
         </p:txBody>
       </p:sp>
@@ -1070,7 +1077,7 @@
           <a:p>
             <a:pPr lvl="0"/>
             <a:r>
-              <a:rPr lang="en-US" smtClean="0"/>
+              <a:rPr lang="en-US"/>
               <a:t>Click to edit Master text styles</a:t>
             </a:r>
           </a:p>
@@ -1093,7 +1100,7 @@
           <a:p>
             <a:fld id="{5BCAD085-E8A6-8845-BD4E-CB4CCA059FC4}" type="datetimeFigureOut">
               <a:rPr lang="en-US" smtClean="0"/>
-              <a:t>1/27/13</a:t>
+              <a:t>8/31/2026</a:t>
             </a:fld>
             <a:endParaRPr lang="en-US"/>
           </a:p>
@@ -1187,10 +1194,9 @@
           <a:lstStyle/>
           <a:p>
             <a:r>
-              <a:rPr lang="en-US" smtClean="0"/>
+              <a:rPr lang="en-US"/>
               <a:t>Click to edit Master title style</a:t>
             </a:r>
-            <a:endParaRPr lang="en-US"/>
           </a:p>
         </p:txBody>
       </p:sp>
@@ -1244,38 +1250,37 @@
           <a:p>
             <a:pPr lvl="0"/>
             <a:r>
-              <a:rPr lang="en-US" smtClean="0"/>
+              <a:rPr lang="en-US"/>
               <a:t>Click to edit Master text styles</a:t>
             </a:r>
           </a:p>
           <a:p>
             <a:pPr lvl="1"/>
             <a:r>
-              <a:rPr lang="en-US" smtClean="0"/>
+              <a:rPr lang="en-US"/>
               <a:t>Second level</a:t>
             </a:r>
           </a:p>
           <a:p>
             <a:pPr lvl="2"/>
             <a:r>
-              <a:rPr lang="en-US" smtClean="0"/>
+              <a:rPr lang="en-US"/>
               <a:t>Third level</a:t>
             </a:r>
           </a:p>
           <a:p>
             <a:pPr lvl="3"/>
             <a:r>
-              <a:rPr lang="en-US" smtClean="0"/>
+              <a:rPr lang="en-US"/>
               <a:t>Fourth level</a:t>
             </a:r>
           </a:p>
           <a:p>
             <a:pPr lvl="4"/>
             <a:r>
-              <a:rPr lang="en-US" smtClean="0"/>
+              <a:rPr lang="en-US"/>
               <a:t>Fifth level</a:t>
             </a:r>
-            <a:endParaRPr lang="en-US"/>
           </a:p>
         </p:txBody>
       </p:sp>
@@ -1329,38 +1334,37 @@
           <a:p>
             <a:pPr lvl="0"/>
             <a:r>
-              <a:rPr lang="en-US" smtClean="0"/>
+              <a:rPr lang="en-US"/>
               <a:t>Click to edit Master text styles</a:t>
             </a:r>
           </a:p>
           <a:p>
             <a:pPr lvl="1"/>
             <a:r>
-              <a:rPr lang="en-US" smtClean="0"/>
+              <a:rPr lang="en-US"/>
               <a:t>Second level</a:t>
             </a:r>
           </a:p>
           <a:p>
             <a:pPr lvl="2"/>
             <a:r>
-              <a:rPr lang="en-US" smtClean="0"/>
+              <a:rPr lang="en-US"/>
               <a:t>Third level</a:t>
             </a:r>
           </a:p>
           <a:p>
             <a:pPr lvl="3"/>
             <a:r>
-              <a:rPr lang="en-US" smtClean="0"/>
+              <a:rPr lang="en-US"/>
               <a:t>Fourth level</a:t>
             </a:r>
           </a:p>
           <a:p>
             <a:pPr lvl="4"/>
             <a:r>
-              <a:rPr lang="en-US" smtClean="0"/>
+              <a:rPr lang="en-US"/>
               <a:t>Fifth level</a:t>
             </a:r>
-            <a:endParaRPr lang="en-US"/>
           </a:p>
         </p:txBody>
       </p:sp>
@@ -1381,7 +1385,7 @@
           <a:p>
             <a:fld id="{5BCAD085-E8A6-8845-BD4E-CB4CCA059FC4}" type="datetimeFigureOut">
               <a:rPr lang="en-US" smtClean="0"/>
-              <a:t>1/27/13</a:t>
+              <a:t>8/31/2026</a:t>
             </a:fld>
             <a:endParaRPr lang="en-US"/>
           </a:p>
@@ -1479,10 +1483,9 @@
           </a:lstStyle>
           <a:p>
             <a:r>
-              <a:rPr lang="en-US" smtClean="0"/>
+              <a:rPr lang="en-US"/>
               <a:t>Click to edit Master title style</a:t>
             </a:r>
-            <a:endParaRPr lang="en-US"/>
           </a:p>
         </p:txBody>
       </p:sp>
@@ -1545,7 +1548,7 @@
           <a:p>
             <a:pPr lvl="0"/>
             <a:r>
-              <a:rPr lang="en-US" smtClean="0"/>
+              <a:rPr lang="en-US"/>
               <a:t>Click to edit Master text styles</a:t>
             </a:r>
           </a:p>
@@ -1601,38 +1604,37 @@
           <a:p>
             <a:pPr lvl="0"/>
             <a:r>
-              <a:rPr lang="en-US" smtClean="0"/>
+              <a:rPr lang="en-US"/>
               <a:t>Click to edit Master text styles</a:t>
             </a:r>
           </a:p>
           <a:p>
             <a:pPr lvl="1"/>
             <a:r>
-              <a:rPr lang="en-US" smtClean="0"/>
+              <a:rPr lang="en-US"/>
               <a:t>Second level</a:t>
             </a:r>
           </a:p>
           <a:p>
             <a:pPr lvl="2"/>
             <a:r>
-              <a:rPr lang="en-US" smtClean="0"/>
+              <a:rPr lang="en-US"/>
               <a:t>Third level</a:t>
             </a:r>
           </a:p>
           <a:p>
             <a:pPr lvl="3"/>
             <a:r>
-              <a:rPr lang="en-US" smtClean="0"/>
+              <a:rPr lang="en-US"/>
               <a:t>Fourth level</a:t>
             </a:r>
           </a:p>
           <a:p>
             <a:pPr lvl="4"/>
             <a:r>
-              <a:rPr lang="en-US" smtClean="0"/>
+              <a:rPr lang="en-US"/>
               <a:t>Fifth level</a:t>
             </a:r>
-            <a:endParaRPr lang="en-US"/>
           </a:p>
         </p:txBody>
       </p:sp>
@@ -1695,7 +1697,7 @@
           <a:p>
             <a:pPr lvl="0"/>
             <a:r>
-              <a:rPr lang="en-US" smtClean="0"/>
+              <a:rPr lang="en-US"/>
               <a:t>Click to edit Master text styles</a:t>
             </a:r>
           </a:p>
@@ -1751,38 +1753,37 @@
           <a:p>
             <a:pPr lvl="0"/>
             <a:r>
-              <a:rPr lang="en-US" smtClean="0"/>
+              <a:rPr lang="en-US"/>
               <a:t>Click to edit Master text styles</a:t>
             </a:r>
           </a:p>
           <a:p>
             <a:pPr lvl="1"/>
             <a:r>
-              <a:rPr lang="en-US" smtClean="0"/>
+              <a:rPr lang="en-US"/>
               <a:t>Second level</a:t>
             </a:r>
           </a:p>
           <a:p>
             <a:pPr lvl="2"/>
             <a:r>
-              <a:rPr lang="en-US" smtClean="0"/>
+              <a:rPr lang="en-US"/>
               <a:t>Third level</a:t>
             </a:r>
           </a:p>
           <a:p>
             <a:pPr lvl="3"/>
             <a:r>
-              <a:rPr lang="en-US" smtClean="0"/>
+              <a:rPr lang="en-US"/>
               <a:t>Fourth level</a:t>
             </a:r>
           </a:p>
           <a:p>
             <a:pPr lvl="4"/>
             <a:r>
-              <a:rPr lang="en-US" smtClean="0"/>
+              <a:rPr lang="en-US"/>
               <a:t>Fifth level</a:t>
             </a:r>
-            <a:endParaRPr lang="en-US"/>
           </a:p>
         </p:txBody>
       </p:sp>
@@ -1803,7 +1804,7 @@
           <a:p>
             <a:fld id="{5BCAD085-E8A6-8845-BD4E-CB4CCA059FC4}" type="datetimeFigureOut">
               <a:rPr lang="en-US" smtClean="0"/>
-              <a:t>1/27/13</a:t>
+              <a:t>8/31/2026</a:t>
             </a:fld>
             <a:endParaRPr lang="en-US"/>
           </a:p>
@@ -1897,10 +1898,9 @@
           <a:lstStyle/>
           <a:p>
             <a:r>
-              <a:rPr lang="en-US" smtClean="0"/>
+              <a:rPr lang="en-US"/>
               <a:t>Click to edit Master title style</a:t>
             </a:r>
-            <a:endParaRPr lang="en-US"/>
           </a:p>
         </p:txBody>
       </p:sp>
@@ -1921,7 +1921,7 @@
           <a:p>
             <a:fld id="{5BCAD085-E8A6-8845-BD4E-CB4CCA059FC4}" type="datetimeFigureOut">
               <a:rPr lang="en-US" smtClean="0"/>
-              <a:t>1/27/13</a:t>
+              <a:t>8/31/2026</a:t>
             </a:fld>
             <a:endParaRPr lang="en-US"/>
           </a:p>
@@ -2016,7 +2016,7 @@
           <a:p>
             <a:fld id="{5BCAD085-E8A6-8845-BD4E-CB4CCA059FC4}" type="datetimeFigureOut">
               <a:rPr lang="en-US" smtClean="0"/>
-              <a:t>1/27/13</a:t>
+              <a:t>8/31/2026</a:t>
             </a:fld>
             <a:endParaRPr lang="en-US"/>
           </a:p>
@@ -2119,10 +2119,9 @@
           </a:lstStyle>
           <a:p>
             <a:r>
-              <a:rPr lang="en-US" smtClean="0"/>
+              <a:rPr lang="en-US"/>
               <a:t>Click to edit Master title style</a:t>
             </a:r>
-            <a:endParaRPr lang="en-US"/>
           </a:p>
         </p:txBody>
       </p:sp>
@@ -2176,38 +2175,37 @@
           <a:p>
             <a:pPr lvl="0"/>
             <a:r>
-              <a:rPr lang="en-US" smtClean="0"/>
+              <a:rPr lang="en-US"/>
               <a:t>Click to edit Master text styles</a:t>
             </a:r>
           </a:p>
           <a:p>
             <a:pPr lvl="1"/>
             <a:r>
-              <a:rPr lang="en-US" smtClean="0"/>
+              <a:rPr lang="en-US"/>
               <a:t>Second level</a:t>
             </a:r>
           </a:p>
           <a:p>
             <a:pPr lvl="2"/>
             <a:r>
-              <a:rPr lang="en-US" smtClean="0"/>
+              <a:rPr lang="en-US"/>
               <a:t>Third level</a:t>
             </a:r>
           </a:p>
           <a:p>
             <a:pPr lvl="3"/>
             <a:r>
-              <a:rPr lang="en-US" smtClean="0"/>
+              <a:rPr lang="en-US"/>
               <a:t>Fourth level</a:t>
             </a:r>
           </a:p>
           <a:p>
             <a:pPr lvl="4"/>
             <a:r>
-              <a:rPr lang="en-US" smtClean="0"/>
+              <a:rPr lang="en-US"/>
               <a:t>Fifth level</a:t>
             </a:r>
-            <a:endParaRPr lang="en-US"/>
           </a:p>
         </p:txBody>
       </p:sp>
@@ -2270,7 +2268,7 @@
           <a:p>
             <a:pPr lvl="0"/>
             <a:r>
-              <a:rPr lang="en-US" smtClean="0"/>
+              <a:rPr lang="en-US"/>
               <a:t>Click to edit Master text styles</a:t>
             </a:r>
           </a:p>
@@ -2293,7 +2291,7 @@
           <a:p>
             <a:fld id="{5BCAD085-E8A6-8845-BD4E-CB4CCA059FC4}" type="datetimeFigureOut">
               <a:rPr lang="en-US" smtClean="0"/>
-              <a:t>1/27/13</a:t>
+              <a:t>8/31/2026</a:t>
             </a:fld>
             <a:endParaRPr lang="en-US"/>
           </a:p>
@@ -2396,10 +2394,9 @@
           </a:lstStyle>
           <a:p>
             <a:r>
-              <a:rPr lang="en-US" smtClean="0"/>
+              <a:rPr lang="en-US"/>
               <a:t>Click to edit Master title style</a:t>
             </a:r>
-            <a:endParaRPr lang="en-US"/>
           </a:p>
         </p:txBody>
       </p:sp>
@@ -2523,7 +2520,7 @@
           <a:p>
             <a:pPr lvl="0"/>
             <a:r>
-              <a:rPr lang="en-US" smtClean="0"/>
+              <a:rPr lang="en-US"/>
               <a:t>Click to edit Master text styles</a:t>
             </a:r>
           </a:p>
@@ -2546,7 +2543,7 @@
           <a:p>
             <a:fld id="{5BCAD085-E8A6-8845-BD4E-CB4CCA059FC4}" type="datetimeFigureOut">
               <a:rPr lang="en-US" smtClean="0"/>
-              <a:t>1/27/13</a:t>
+              <a:t>8/31/2026</a:t>
             </a:fld>
             <a:endParaRPr lang="en-US"/>
           </a:p>
@@ -2655,10 +2652,9 @@
           <a:lstStyle/>
           <a:p>
             <a:r>
-              <a:rPr lang="en-US" smtClean="0"/>
+              <a:rPr lang="en-US"/>
               <a:t>Click to edit Master title style</a:t>
             </a:r>
-            <a:endParaRPr lang="en-US"/>
           </a:p>
         </p:txBody>
       </p:sp>
@@ -2689,38 +2685,37 @@
           <a:p>
             <a:pPr lvl="0"/>
             <a:r>
-              <a:rPr lang="en-US" smtClean="0"/>
+              <a:rPr lang="en-US"/>
               <a:t>Click to edit Master text styles</a:t>
             </a:r>
           </a:p>
           <a:p>
             <a:pPr lvl="1"/>
             <a:r>
-              <a:rPr lang="en-US" smtClean="0"/>
+              <a:rPr lang="en-US"/>
               <a:t>Second level</a:t>
             </a:r>
           </a:p>
           <a:p>
             <a:pPr lvl="2"/>
             <a:r>
-              <a:rPr lang="en-US" smtClean="0"/>
+              <a:rPr lang="en-US"/>
               <a:t>Third level</a:t>
             </a:r>
           </a:p>
           <a:p>
             <a:pPr lvl="3"/>
             <a:r>
-              <a:rPr lang="en-US" smtClean="0"/>
+              <a:rPr lang="en-US"/>
               <a:t>Fourth level</a:t>
             </a:r>
           </a:p>
           <a:p>
             <a:pPr lvl="4"/>
             <a:r>
-              <a:rPr lang="en-US" smtClean="0"/>
+              <a:rPr lang="en-US"/>
               <a:t>Fifth level</a:t>
             </a:r>
-            <a:endParaRPr lang="en-US"/>
           </a:p>
         </p:txBody>
       </p:sp>
@@ -2759,7 +2754,7 @@
           <a:p>
             <a:fld id="{5BCAD085-E8A6-8845-BD4E-CB4CCA059FC4}" type="datetimeFigureOut">
               <a:rPr lang="en-US" smtClean="0"/>
-              <a:t>1/27/13</a:t>
+              <a:t>8/31/2026</a:t>
             </a:fld>
             <a:endParaRPr lang="en-US"/>
           </a:p>
@@ -3118,7 +3113,7 @@
 </file>
 
 <file path=ppt/slides/slide1.xml><?xml version="1.0" encoding="utf-8"?>
-<p:sld xmlns:a="http://schemas.openxmlformats.org/drawingml/2006/main" xmlns:p="http://schemas.openxmlformats.org/presentationml/2006/main" xmlns:r="http://schemas.openxmlformats.org/officeDocument/2006/relationships">
+<p:sld xmlns:a="http://schemas.openxmlformats.org/drawingml/2006/main" xmlns:r="http://schemas.openxmlformats.org/officeDocument/2006/relationships" xmlns:p="http://schemas.openxmlformats.org/presentationml/2006/main">
   <p:cSld>
     <p:bg>
       <p:bgPr>
@@ -3134,7 +3129,14 @@
         <p:cNvGrpSpPr/>
         <p:nvPr/>
       </p:nvGrpSpPr>
-      <p:grpSpPr/>
+      <p:grpSpPr>
+        <a:xfrm>
+          <a:off x="0" y="0"/>
+          <a:ext cx="0" cy="0"/>
+          <a:chOff x="0" y="0"/>
+          <a:chExt cx="0" cy="0"/>
+        </a:xfrm>
+      </p:grpSpPr>
       <p:sp>
         <p:nvSpPr>
           <p:cNvPr id="2" name="TextBox 1"/>
@@ -3152,7 +3154,7 @@
           <a:noFill/>
         </p:spPr>
         <p:txBody>
-          <a:bodyPr wrap="square" lIns="0" rIns="0" tIns="0" bIns="0" anchor="ctr">
+          <a:bodyPr wrap="square" lIns="0" tIns="0" rIns="0" bIns="0" anchor="ctr">
             <a:spAutoFit/>
           </a:bodyPr>
           <a:lstStyle/>
@@ -3197,7 +3199,7 @@
           <a:noFill/>
         </p:spPr>
         <p:txBody>
-          <a:bodyPr wrap="square" lIns="0" rIns="0" tIns="0" bIns="0" anchor="t">
+          <a:bodyPr wrap="square" lIns="0" tIns="0" rIns="0" bIns="0" anchor="t">
             <a:spAutoFit/>
           </a:bodyPr>
           <a:lstStyle/>
@@ -3242,7 +3244,7 @@
           <a:noFill/>
         </p:spPr>
         <p:txBody>
-          <a:bodyPr wrap="square" lIns="0" rIns="0" tIns="0" bIns="0" anchor="t">
+          <a:bodyPr wrap="square" lIns="0" tIns="0" rIns="0" bIns="0" anchor="t">
             <a:spAutoFit/>
           </a:bodyPr>
           <a:lstStyle/>
@@ -3287,7 +3289,7 @@
           <a:noFill/>
         </p:spPr>
         <p:txBody>
-          <a:bodyPr wrap="square" lIns="0" rIns="0" tIns="0" bIns="0" anchor="t">
+          <a:bodyPr wrap="square" lIns="0" tIns="0" rIns="0" bIns="0" anchor="t">
             <a:spAutoFit/>
           </a:bodyPr>
           <a:lstStyle/>
@@ -3332,7 +3334,7 @@
           <a:noFill/>
         </p:spPr>
         <p:txBody>
-          <a:bodyPr wrap="square" lIns="0" rIns="0" tIns="0" bIns="0" anchor="ctr">
+          <a:bodyPr wrap="square" lIns="0" tIns="0" rIns="0" bIns="0" anchor="ctr">
             <a:spAutoFit/>
           </a:bodyPr>
           <a:lstStyle/>
@@ -3369,7 +3371,7 @@
 </file>
 
 <file path=ppt/slides/slide10.xml><?xml version="1.0" encoding="utf-8"?>
-<p:sld xmlns:a="http://schemas.openxmlformats.org/drawingml/2006/main" xmlns:p="http://schemas.openxmlformats.org/presentationml/2006/main" xmlns:r="http://schemas.openxmlformats.org/officeDocument/2006/relationships">
+<p:sld xmlns:a="http://schemas.openxmlformats.org/drawingml/2006/main" xmlns:r="http://schemas.openxmlformats.org/officeDocument/2006/relationships" xmlns:p="http://schemas.openxmlformats.org/presentationml/2006/main">
   <p:cSld>
     <p:bg>
       <p:bgPr>
@@ -3385,7 +3387,14 @@
         <p:cNvGrpSpPr/>
         <p:nvPr/>
       </p:nvGrpSpPr>
-      <p:grpSpPr/>
+      <p:grpSpPr>
+        <a:xfrm>
+          <a:off x="0" y="0"/>
+          <a:ext cx="0" cy="0"/>
+          <a:chOff x="0" y="0"/>
+          <a:chExt cx="0" cy="0"/>
+        </a:xfrm>
+      </p:grpSpPr>
       <p:sp>
         <p:nvSpPr>
           <p:cNvPr id="2" name="Rectangle 1"/>
@@ -3426,6 +3435,7 @@
           <a:lstStyle/>
           <a:p>
             <a:pPr algn="ctr"/>
+            <a:endParaRPr/>
           </a:p>
         </p:txBody>
       </p:sp>
@@ -3469,6 +3479,7 @@
           <a:lstStyle/>
           <a:p>
             <a:pPr algn="ctr"/>
+            <a:endParaRPr/>
           </a:p>
         </p:txBody>
       </p:sp>
@@ -3489,7 +3500,7 @@
           <a:noFill/>
         </p:spPr>
         <p:txBody>
-          <a:bodyPr wrap="square" lIns="0" rIns="0" tIns="0" bIns="0" anchor="ctr">
+          <a:bodyPr wrap="square" lIns="0" tIns="0" rIns="0" bIns="0" anchor="ctr">
             <a:spAutoFit/>
           </a:bodyPr>
           <a:lstStyle/>
@@ -3534,7 +3545,7 @@
           <a:noFill/>
         </p:spPr>
         <p:txBody>
-          <a:bodyPr wrap="square" lIns="0" rIns="0" tIns="0" bIns="0" anchor="ctr">
+          <a:bodyPr wrap="square" lIns="0" tIns="0" rIns="0" bIns="0" anchor="ctr">
             <a:spAutoFit/>
           </a:bodyPr>
           <a:lstStyle/>
@@ -3602,6 +3613,7 @@
           <a:lstStyle/>
           <a:p>
             <a:pPr algn="ctr"/>
+            <a:endParaRPr/>
           </a:p>
         </p:txBody>
       </p:sp>
@@ -3645,6 +3657,7 @@
           <a:lstStyle/>
           <a:p>
             <a:pPr algn="ctr"/>
+            <a:endParaRPr/>
           </a:p>
         </p:txBody>
       </p:sp>
@@ -3665,7 +3678,7 @@
           <a:noFill/>
         </p:spPr>
         <p:txBody>
-          <a:bodyPr wrap="square" lIns="0" rIns="0" tIns="0" bIns="0" anchor="ctr">
+          <a:bodyPr wrap="square" lIns="0" tIns="0" rIns="0" bIns="0" anchor="ctr">
             <a:spAutoFit/>
           </a:bodyPr>
           <a:lstStyle/>
@@ -3710,7 +3723,7 @@
           <a:noFill/>
         </p:spPr>
         <p:txBody>
-          <a:bodyPr wrap="square" lIns="0" rIns="0" tIns="0" bIns="0" anchor="t">
+          <a:bodyPr wrap="square" lIns="0" tIns="0" rIns="0" bIns="0" anchor="t">
             <a:spAutoFit/>
           </a:bodyPr>
           <a:lstStyle/>
@@ -4682,7 +4695,7 @@
           <a:noFill/>
         </p:spPr>
         <p:txBody>
-          <a:bodyPr wrap="square" lIns="0" rIns="0" tIns="0" bIns="0" anchor="ctr">
+          <a:bodyPr wrap="square" lIns="0" tIns="0" rIns="0" bIns="0" anchor="ctr">
             <a:spAutoFit/>
           </a:bodyPr>
           <a:lstStyle/>
@@ -4719,7 +4732,7 @@
 </file>
 
 <file path=ppt/slides/slide11.xml><?xml version="1.0" encoding="utf-8"?>
-<p:sld xmlns:a="http://schemas.openxmlformats.org/drawingml/2006/main" xmlns:p="http://schemas.openxmlformats.org/presentationml/2006/main" xmlns:r="http://schemas.openxmlformats.org/officeDocument/2006/relationships">
+<p:sld xmlns:a="http://schemas.openxmlformats.org/drawingml/2006/main" xmlns:r="http://schemas.openxmlformats.org/officeDocument/2006/relationships" xmlns:p="http://schemas.openxmlformats.org/presentationml/2006/main">
   <p:cSld>
     <p:bg>
       <p:bgPr>
@@ -4735,7 +4748,14 @@
         <p:cNvGrpSpPr/>
         <p:nvPr/>
       </p:nvGrpSpPr>
-      <p:grpSpPr/>
+      <p:grpSpPr>
+        <a:xfrm>
+          <a:off x="0" y="0"/>
+          <a:ext cx="0" cy="0"/>
+          <a:chOff x="0" y="0"/>
+          <a:chExt cx="0" cy="0"/>
+        </a:xfrm>
+      </p:grpSpPr>
       <p:sp>
         <p:nvSpPr>
           <p:cNvPr id="2" name="Rectangle 1"/>
@@ -4776,6 +4796,7 @@
           <a:lstStyle/>
           <a:p>
             <a:pPr algn="ctr"/>
+            <a:endParaRPr/>
           </a:p>
         </p:txBody>
       </p:sp>
@@ -4819,6 +4840,7 @@
           <a:lstStyle/>
           <a:p>
             <a:pPr algn="ctr"/>
+            <a:endParaRPr/>
           </a:p>
         </p:txBody>
       </p:sp>
@@ -4839,7 +4861,7 @@
           <a:noFill/>
         </p:spPr>
         <p:txBody>
-          <a:bodyPr wrap="square" lIns="0" rIns="0" tIns="0" bIns="0" anchor="ctr">
+          <a:bodyPr wrap="square" lIns="0" tIns="0" rIns="0" bIns="0" anchor="ctr">
             <a:spAutoFit/>
           </a:bodyPr>
           <a:lstStyle/>
@@ -4884,7 +4906,7 @@
           <a:noFill/>
         </p:spPr>
         <p:txBody>
-          <a:bodyPr wrap="square" lIns="0" rIns="0" tIns="0" bIns="0" anchor="ctr">
+          <a:bodyPr wrap="square" lIns="0" tIns="0" rIns="0" bIns="0" anchor="ctr">
             <a:spAutoFit/>
           </a:bodyPr>
           <a:lstStyle/>
@@ -4952,6 +4974,7 @@
           <a:lstStyle/>
           <a:p>
             <a:pPr algn="ctr"/>
+            <a:endParaRPr/>
           </a:p>
         </p:txBody>
       </p:sp>
@@ -4995,6 +5018,7 @@
           <a:lstStyle/>
           <a:p>
             <a:pPr algn="ctr"/>
+            <a:endParaRPr/>
           </a:p>
         </p:txBody>
       </p:sp>
@@ -5015,7 +5039,7 @@
           <a:noFill/>
         </p:spPr>
         <p:txBody>
-          <a:bodyPr wrap="square" lIns="0" rIns="0" tIns="0" bIns="0" anchor="ctr">
+          <a:bodyPr wrap="square" lIns="0" tIns="0" rIns="0" bIns="0" anchor="ctr">
             <a:spAutoFit/>
           </a:bodyPr>
           <a:lstStyle/>
@@ -5060,7 +5084,7 @@
           <a:noFill/>
         </p:spPr>
         <p:txBody>
-          <a:bodyPr wrap="square" lIns="0" rIns="0" tIns="0" bIns="0" anchor="t">
+          <a:bodyPr wrap="square" lIns="0" tIns="0" rIns="0" bIns="0" anchor="t">
             <a:spAutoFit/>
           </a:bodyPr>
           <a:lstStyle/>
@@ -6063,7 +6087,7 @@
           <a:noFill/>
         </p:spPr>
         <p:txBody>
-          <a:bodyPr wrap="square" lIns="0" rIns="0" tIns="0" bIns="0" anchor="ctr">
+          <a:bodyPr wrap="square" lIns="0" tIns="0" rIns="0" bIns="0" anchor="ctr">
             <a:spAutoFit/>
           </a:bodyPr>
           <a:lstStyle/>
@@ -6100,7 +6124,7 @@
 </file>
 
 <file path=ppt/slides/slide12.xml><?xml version="1.0" encoding="utf-8"?>
-<p:sld xmlns:a="http://schemas.openxmlformats.org/drawingml/2006/main" xmlns:p="http://schemas.openxmlformats.org/presentationml/2006/main" xmlns:r="http://schemas.openxmlformats.org/officeDocument/2006/relationships">
+<p:sld xmlns:a="http://schemas.openxmlformats.org/drawingml/2006/main" xmlns:r="http://schemas.openxmlformats.org/officeDocument/2006/relationships" xmlns:p="http://schemas.openxmlformats.org/presentationml/2006/main">
   <p:cSld>
     <p:bg>
       <p:bgPr>
@@ -6116,7 +6140,14 @@
         <p:cNvGrpSpPr/>
         <p:nvPr/>
       </p:nvGrpSpPr>
-      <p:grpSpPr/>
+      <p:grpSpPr>
+        <a:xfrm>
+          <a:off x="0" y="0"/>
+          <a:ext cx="0" cy="0"/>
+          <a:chOff x="0" y="0"/>
+          <a:chExt cx="0" cy="0"/>
+        </a:xfrm>
+      </p:grpSpPr>
       <p:sp>
         <p:nvSpPr>
           <p:cNvPr id="2" name="Rectangle 1"/>
@@ -6157,6 +6188,7 @@
           <a:lstStyle/>
           <a:p>
             <a:pPr algn="ctr"/>
+            <a:endParaRPr/>
           </a:p>
         </p:txBody>
       </p:sp>
@@ -6200,6 +6232,7 @@
           <a:lstStyle/>
           <a:p>
             <a:pPr algn="ctr"/>
+            <a:endParaRPr/>
           </a:p>
         </p:txBody>
       </p:sp>
@@ -6220,7 +6253,7 @@
           <a:noFill/>
         </p:spPr>
         <p:txBody>
-          <a:bodyPr wrap="square" lIns="0" rIns="0" tIns="0" bIns="0" anchor="ctr">
+          <a:bodyPr wrap="square" lIns="0" tIns="0" rIns="0" bIns="0" anchor="ctr">
             <a:spAutoFit/>
           </a:bodyPr>
           <a:lstStyle/>
@@ -6265,7 +6298,7 @@
           <a:noFill/>
         </p:spPr>
         <p:txBody>
-          <a:bodyPr wrap="square" lIns="0" rIns="0" tIns="0" bIns="0" anchor="ctr">
+          <a:bodyPr wrap="square" lIns="0" tIns="0" rIns="0" bIns="0" anchor="ctr">
             <a:spAutoFit/>
           </a:bodyPr>
           <a:lstStyle/>
@@ -6333,6 +6366,7 @@
           <a:lstStyle/>
           <a:p>
             <a:pPr algn="ctr"/>
+            <a:endParaRPr/>
           </a:p>
         </p:txBody>
       </p:sp>
@@ -6376,6 +6410,7 @@
           <a:lstStyle/>
           <a:p>
             <a:pPr algn="ctr"/>
+            <a:endParaRPr/>
           </a:p>
         </p:txBody>
       </p:sp>
@@ -6396,7 +6431,7 @@
           <a:noFill/>
         </p:spPr>
         <p:txBody>
-          <a:bodyPr wrap="square" lIns="0" rIns="0" tIns="0" bIns="0" anchor="ctr">
+          <a:bodyPr wrap="square" lIns="0" tIns="0" rIns="0" bIns="0" anchor="ctr">
             <a:spAutoFit/>
           </a:bodyPr>
           <a:lstStyle/>
@@ -6441,7 +6476,7 @@
           <a:noFill/>
         </p:spPr>
         <p:txBody>
-          <a:bodyPr wrap="square" lIns="0" rIns="0" tIns="0" bIns="0" anchor="t">
+          <a:bodyPr wrap="square" lIns="0" tIns="0" rIns="0" bIns="0" anchor="t">
             <a:spAutoFit/>
           </a:bodyPr>
           <a:lstStyle/>
@@ -7382,7 +7417,7 @@
           <a:noFill/>
         </p:spPr>
         <p:txBody>
-          <a:bodyPr wrap="square" lIns="0" rIns="0" tIns="0" bIns="0" anchor="ctr">
+          <a:bodyPr wrap="square" lIns="0" tIns="0" rIns="0" bIns="0" anchor="ctr">
             <a:spAutoFit/>
           </a:bodyPr>
           <a:lstStyle/>
@@ -7419,7 +7454,7 @@
 </file>
 
 <file path=ppt/slides/slide13.xml><?xml version="1.0" encoding="utf-8"?>
-<p:sld xmlns:a="http://schemas.openxmlformats.org/drawingml/2006/main" xmlns:p="http://schemas.openxmlformats.org/presentationml/2006/main" xmlns:r="http://schemas.openxmlformats.org/officeDocument/2006/relationships">
+<p:sld xmlns:a="http://schemas.openxmlformats.org/drawingml/2006/main" xmlns:r="http://schemas.openxmlformats.org/officeDocument/2006/relationships" xmlns:p="http://schemas.openxmlformats.org/presentationml/2006/main">
   <p:cSld>
     <p:bg>
       <p:bgPr>
@@ -7435,7 +7470,14 @@
         <p:cNvGrpSpPr/>
         <p:nvPr/>
       </p:nvGrpSpPr>
-      <p:grpSpPr/>
+      <p:grpSpPr>
+        <a:xfrm>
+          <a:off x="0" y="0"/>
+          <a:ext cx="0" cy="0"/>
+          <a:chOff x="0" y="0"/>
+          <a:chExt cx="0" cy="0"/>
+        </a:xfrm>
+      </p:grpSpPr>
       <p:sp>
         <p:nvSpPr>
           <p:cNvPr id="2" name="Rectangle 1"/>
@@ -7476,6 +7518,7 @@
           <a:lstStyle/>
           <a:p>
             <a:pPr algn="ctr"/>
+            <a:endParaRPr/>
           </a:p>
         </p:txBody>
       </p:sp>
@@ -7519,6 +7562,7 @@
           <a:lstStyle/>
           <a:p>
             <a:pPr algn="ctr"/>
+            <a:endParaRPr/>
           </a:p>
         </p:txBody>
       </p:sp>
@@ -7539,7 +7583,7 @@
           <a:noFill/>
         </p:spPr>
         <p:txBody>
-          <a:bodyPr wrap="square" lIns="0" rIns="0" tIns="0" bIns="0" anchor="ctr">
+          <a:bodyPr wrap="square" lIns="0" tIns="0" rIns="0" bIns="0" anchor="ctr">
             <a:spAutoFit/>
           </a:bodyPr>
           <a:lstStyle/>
@@ -7584,7 +7628,7 @@
           <a:noFill/>
         </p:spPr>
         <p:txBody>
-          <a:bodyPr wrap="square" lIns="0" rIns="0" tIns="0" bIns="0" anchor="ctr">
+          <a:bodyPr wrap="square" lIns="0" tIns="0" rIns="0" bIns="0" anchor="ctr">
             <a:spAutoFit/>
           </a:bodyPr>
           <a:lstStyle/>
@@ -7652,6 +7696,7 @@
           <a:lstStyle/>
           <a:p>
             <a:pPr algn="ctr"/>
+            <a:endParaRPr/>
           </a:p>
         </p:txBody>
       </p:sp>
@@ -7695,6 +7740,7 @@
           <a:lstStyle/>
           <a:p>
             <a:pPr algn="ctr"/>
+            <a:endParaRPr/>
           </a:p>
         </p:txBody>
       </p:sp>
@@ -7715,7 +7761,7 @@
           <a:noFill/>
         </p:spPr>
         <p:txBody>
-          <a:bodyPr wrap="square" lIns="0" rIns="0" tIns="0" bIns="0" anchor="ctr">
+          <a:bodyPr wrap="square" lIns="0" tIns="0" rIns="0" bIns="0" anchor="ctr">
             <a:spAutoFit/>
           </a:bodyPr>
           <a:lstStyle/>
@@ -7760,7 +7806,7 @@
           <a:noFill/>
         </p:spPr>
         <p:txBody>
-          <a:bodyPr wrap="square" lIns="0" rIns="0" tIns="0" bIns="0" anchor="t">
+          <a:bodyPr wrap="square" lIns="0" tIns="0" rIns="0" bIns="0" anchor="t">
             <a:spAutoFit/>
           </a:bodyPr>
           <a:lstStyle/>
@@ -8763,7 +8809,7 @@
           <a:noFill/>
         </p:spPr>
         <p:txBody>
-          <a:bodyPr wrap="square" lIns="0" rIns="0" tIns="0" bIns="0" anchor="ctr">
+          <a:bodyPr wrap="square" lIns="0" tIns="0" rIns="0" bIns="0" anchor="ctr">
             <a:spAutoFit/>
           </a:bodyPr>
           <a:lstStyle/>
@@ -8800,7 +8846,7 @@
 </file>
 
 <file path=ppt/slides/slide14.xml><?xml version="1.0" encoding="utf-8"?>
-<p:sld xmlns:a="http://schemas.openxmlformats.org/drawingml/2006/main" xmlns:p="http://schemas.openxmlformats.org/presentationml/2006/main" xmlns:r="http://schemas.openxmlformats.org/officeDocument/2006/relationships">
+<p:sld xmlns:a="http://schemas.openxmlformats.org/drawingml/2006/main" xmlns:r="http://schemas.openxmlformats.org/officeDocument/2006/relationships" xmlns:p="http://schemas.openxmlformats.org/presentationml/2006/main">
   <p:cSld>
     <p:bg>
       <p:bgPr>
@@ -8816,7 +8862,14 @@
         <p:cNvGrpSpPr/>
         <p:nvPr/>
       </p:nvGrpSpPr>
-      <p:grpSpPr/>
+      <p:grpSpPr>
+        <a:xfrm>
+          <a:off x="0" y="0"/>
+          <a:ext cx="0" cy="0"/>
+          <a:chOff x="0" y="0"/>
+          <a:chExt cx="0" cy="0"/>
+        </a:xfrm>
+      </p:grpSpPr>
       <p:sp>
         <p:nvSpPr>
           <p:cNvPr id="2" name="Rectangle 1"/>
@@ -8857,6 +8910,7 @@
           <a:lstStyle/>
           <a:p>
             <a:pPr algn="ctr"/>
+            <a:endParaRPr/>
           </a:p>
         </p:txBody>
       </p:sp>
@@ -8900,6 +8954,7 @@
           <a:lstStyle/>
           <a:p>
             <a:pPr algn="ctr"/>
+            <a:endParaRPr/>
           </a:p>
         </p:txBody>
       </p:sp>
@@ -8920,7 +8975,7 @@
           <a:noFill/>
         </p:spPr>
         <p:txBody>
-          <a:bodyPr wrap="square" lIns="0" rIns="0" tIns="0" bIns="0" anchor="ctr">
+          <a:bodyPr wrap="square" lIns="0" tIns="0" rIns="0" bIns="0" anchor="ctr">
             <a:spAutoFit/>
           </a:bodyPr>
           <a:lstStyle/>
@@ -8965,7 +9020,7 @@
           <a:noFill/>
         </p:spPr>
         <p:txBody>
-          <a:bodyPr wrap="square" lIns="0" rIns="0" tIns="0" bIns="0" anchor="ctr">
+          <a:bodyPr wrap="square" lIns="0" tIns="0" rIns="0" bIns="0" anchor="ctr">
             <a:spAutoFit/>
           </a:bodyPr>
           <a:lstStyle/>
@@ -9033,6 +9088,7 @@
           <a:lstStyle/>
           <a:p>
             <a:pPr algn="ctr"/>
+            <a:endParaRPr/>
           </a:p>
         </p:txBody>
       </p:sp>
@@ -9076,6 +9132,7 @@
           <a:lstStyle/>
           <a:p>
             <a:pPr algn="ctr"/>
+            <a:endParaRPr/>
           </a:p>
         </p:txBody>
       </p:sp>
@@ -9096,7 +9153,7 @@
           <a:noFill/>
         </p:spPr>
         <p:txBody>
-          <a:bodyPr wrap="square" lIns="0" rIns="0" tIns="0" bIns="0" anchor="ctr">
+          <a:bodyPr wrap="square" lIns="0" tIns="0" rIns="0" bIns="0" anchor="ctr">
             <a:spAutoFit/>
           </a:bodyPr>
           <a:lstStyle/>
@@ -9141,7 +9198,7 @@
           <a:noFill/>
         </p:spPr>
         <p:txBody>
-          <a:bodyPr wrap="square" lIns="0" rIns="0" tIns="0" bIns="0" anchor="t">
+          <a:bodyPr wrap="square" lIns="0" tIns="0" rIns="0" bIns="0" anchor="t">
             <a:spAutoFit/>
           </a:bodyPr>
           <a:lstStyle/>
@@ -10082,7 +10139,7 @@
           <a:noFill/>
         </p:spPr>
         <p:txBody>
-          <a:bodyPr wrap="square" lIns="0" rIns="0" tIns="0" bIns="0" anchor="ctr">
+          <a:bodyPr wrap="square" lIns="0" tIns="0" rIns="0" bIns="0" anchor="ctr">
             <a:spAutoFit/>
           </a:bodyPr>
           <a:lstStyle/>
@@ -10119,7 +10176,7 @@
 </file>
 
 <file path=ppt/slides/slide15.xml><?xml version="1.0" encoding="utf-8"?>
-<p:sld xmlns:a="http://schemas.openxmlformats.org/drawingml/2006/main" xmlns:p="http://schemas.openxmlformats.org/presentationml/2006/main" xmlns:r="http://schemas.openxmlformats.org/officeDocument/2006/relationships">
+<p:sld xmlns:a="http://schemas.openxmlformats.org/drawingml/2006/main" xmlns:r="http://schemas.openxmlformats.org/officeDocument/2006/relationships" xmlns:p="http://schemas.openxmlformats.org/presentationml/2006/main">
   <p:cSld>
     <p:bg>
       <p:bgPr>
@@ -10135,7 +10192,14 @@
         <p:cNvGrpSpPr/>
         <p:nvPr/>
       </p:nvGrpSpPr>
-      <p:grpSpPr/>
+      <p:grpSpPr>
+        <a:xfrm>
+          <a:off x="0" y="0"/>
+          <a:ext cx="0" cy="0"/>
+          <a:chOff x="0" y="0"/>
+          <a:chExt cx="0" cy="0"/>
+        </a:xfrm>
+      </p:grpSpPr>
       <p:sp>
         <p:nvSpPr>
           <p:cNvPr id="2" name="Rectangle 1"/>
@@ -10176,6 +10240,7 @@
           <a:lstStyle/>
           <a:p>
             <a:pPr algn="ctr"/>
+            <a:endParaRPr/>
           </a:p>
         </p:txBody>
       </p:sp>
@@ -10219,6 +10284,7 @@
           <a:lstStyle/>
           <a:p>
             <a:pPr algn="ctr"/>
+            <a:endParaRPr/>
           </a:p>
         </p:txBody>
       </p:sp>
@@ -10239,7 +10305,7 @@
           <a:noFill/>
         </p:spPr>
         <p:txBody>
-          <a:bodyPr wrap="square" lIns="0" rIns="0" tIns="0" bIns="0" anchor="ctr">
+          <a:bodyPr wrap="square" lIns="0" tIns="0" rIns="0" bIns="0" anchor="ctr">
             <a:spAutoFit/>
           </a:bodyPr>
           <a:lstStyle/>
@@ -10284,7 +10350,7 @@
           <a:noFill/>
         </p:spPr>
         <p:txBody>
-          <a:bodyPr wrap="square" lIns="0" rIns="0" tIns="0" bIns="0" anchor="ctr">
+          <a:bodyPr wrap="square" lIns="0" tIns="0" rIns="0" bIns="0" anchor="ctr">
             <a:spAutoFit/>
           </a:bodyPr>
           <a:lstStyle/>
@@ -10352,6 +10418,7 @@
           <a:lstStyle/>
           <a:p>
             <a:pPr algn="ctr"/>
+            <a:endParaRPr/>
           </a:p>
         </p:txBody>
       </p:sp>
@@ -10395,6 +10462,7 @@
           <a:lstStyle/>
           <a:p>
             <a:pPr algn="ctr"/>
+            <a:endParaRPr/>
           </a:p>
         </p:txBody>
       </p:sp>
@@ -10415,7 +10483,7 @@
           <a:noFill/>
         </p:spPr>
         <p:txBody>
-          <a:bodyPr wrap="square" lIns="0" rIns="0" tIns="0" bIns="0" anchor="ctr">
+          <a:bodyPr wrap="square" lIns="0" tIns="0" rIns="0" bIns="0" anchor="ctr">
             <a:spAutoFit/>
           </a:bodyPr>
           <a:lstStyle/>
@@ -10460,7 +10528,7 @@
           <a:noFill/>
         </p:spPr>
         <p:txBody>
-          <a:bodyPr wrap="square" lIns="0" rIns="0" tIns="0" bIns="0" anchor="t">
+          <a:bodyPr wrap="square" lIns="0" tIns="0" rIns="0" bIns="0" anchor="t">
             <a:spAutoFit/>
           </a:bodyPr>
           <a:lstStyle/>
@@ -11463,7 +11531,7 @@
           <a:noFill/>
         </p:spPr>
         <p:txBody>
-          <a:bodyPr wrap="square" lIns="0" rIns="0" tIns="0" bIns="0" anchor="ctr">
+          <a:bodyPr wrap="square" lIns="0" tIns="0" rIns="0" bIns="0" anchor="ctr">
             <a:spAutoFit/>
           </a:bodyPr>
           <a:lstStyle/>
@@ -11500,7 +11568,7 @@
 </file>
 
 <file path=ppt/slides/slide16.xml><?xml version="1.0" encoding="utf-8"?>
-<p:sld xmlns:a="http://schemas.openxmlformats.org/drawingml/2006/main" xmlns:p="http://schemas.openxmlformats.org/presentationml/2006/main" xmlns:r="http://schemas.openxmlformats.org/officeDocument/2006/relationships">
+<p:sld xmlns:a="http://schemas.openxmlformats.org/drawingml/2006/main" xmlns:r="http://schemas.openxmlformats.org/officeDocument/2006/relationships" xmlns:p="http://schemas.openxmlformats.org/presentationml/2006/main">
   <p:cSld>
     <p:bg>
       <p:bgPr>
@@ -11516,7 +11584,14 @@
         <p:cNvGrpSpPr/>
         <p:nvPr/>
       </p:nvGrpSpPr>
-      <p:grpSpPr/>
+      <p:grpSpPr>
+        <a:xfrm>
+          <a:off x="0" y="0"/>
+          <a:ext cx="0" cy="0"/>
+          <a:chOff x="0" y="0"/>
+          <a:chExt cx="0" cy="0"/>
+        </a:xfrm>
+      </p:grpSpPr>
       <p:sp>
         <p:nvSpPr>
           <p:cNvPr id="2" name="Rectangle 1"/>
@@ -11557,6 +11632,7 @@
           <a:lstStyle/>
           <a:p>
             <a:pPr algn="ctr"/>
+            <a:endParaRPr/>
           </a:p>
         </p:txBody>
       </p:sp>
@@ -11600,6 +11676,7 @@
           <a:lstStyle/>
           <a:p>
             <a:pPr algn="ctr"/>
+            <a:endParaRPr/>
           </a:p>
         </p:txBody>
       </p:sp>
@@ -11620,7 +11697,7 @@
           <a:noFill/>
         </p:spPr>
         <p:txBody>
-          <a:bodyPr wrap="square" lIns="0" rIns="0" tIns="0" bIns="0" anchor="ctr">
+          <a:bodyPr wrap="square" lIns="0" tIns="0" rIns="0" bIns="0" anchor="ctr">
             <a:spAutoFit/>
           </a:bodyPr>
           <a:lstStyle/>
@@ -11665,7 +11742,7 @@
           <a:noFill/>
         </p:spPr>
         <p:txBody>
-          <a:bodyPr wrap="square" lIns="0" rIns="0" tIns="0" bIns="0" anchor="ctr">
+          <a:bodyPr wrap="square" lIns="0" tIns="0" rIns="0" bIns="0" anchor="ctr">
             <a:spAutoFit/>
           </a:bodyPr>
           <a:lstStyle/>
@@ -11733,6 +11810,7 @@
           <a:lstStyle/>
           <a:p>
             <a:pPr algn="ctr"/>
+            <a:endParaRPr/>
           </a:p>
         </p:txBody>
       </p:sp>
@@ -11776,6 +11854,7 @@
           <a:lstStyle/>
           <a:p>
             <a:pPr algn="ctr"/>
+            <a:endParaRPr/>
           </a:p>
         </p:txBody>
       </p:sp>
@@ -11796,7 +11875,7 @@
           <a:noFill/>
         </p:spPr>
         <p:txBody>
-          <a:bodyPr wrap="square" lIns="0" rIns="0" tIns="0" bIns="0" anchor="ctr">
+          <a:bodyPr wrap="square" lIns="0" tIns="0" rIns="0" bIns="0" anchor="ctr">
             <a:spAutoFit/>
           </a:bodyPr>
           <a:lstStyle/>
@@ -11841,7 +11920,7 @@
           <a:noFill/>
         </p:spPr>
         <p:txBody>
-          <a:bodyPr wrap="square" lIns="0" rIns="0" tIns="0" bIns="0" anchor="t">
+          <a:bodyPr wrap="square" lIns="0" tIns="0" rIns="0" bIns="0" anchor="t">
             <a:spAutoFit/>
           </a:bodyPr>
           <a:lstStyle/>
@@ -12782,7 +12861,7 @@
           <a:noFill/>
         </p:spPr>
         <p:txBody>
-          <a:bodyPr wrap="square" lIns="0" rIns="0" tIns="0" bIns="0" anchor="ctr">
+          <a:bodyPr wrap="square" lIns="0" tIns="0" rIns="0" bIns="0" anchor="ctr">
             <a:spAutoFit/>
           </a:bodyPr>
           <a:lstStyle/>
@@ -12819,7 +12898,7 @@
 </file>
 
 <file path=ppt/slides/slide17.xml><?xml version="1.0" encoding="utf-8"?>
-<p:sld xmlns:a="http://schemas.openxmlformats.org/drawingml/2006/main" xmlns:p="http://schemas.openxmlformats.org/presentationml/2006/main" xmlns:r="http://schemas.openxmlformats.org/officeDocument/2006/relationships">
+<p:sld xmlns:a="http://schemas.openxmlformats.org/drawingml/2006/main" xmlns:r="http://schemas.openxmlformats.org/officeDocument/2006/relationships" xmlns:p="http://schemas.openxmlformats.org/presentationml/2006/main">
   <p:cSld>
     <p:bg>
       <p:bgPr>
@@ -12835,7 +12914,14 @@
         <p:cNvGrpSpPr/>
         <p:nvPr/>
       </p:nvGrpSpPr>
-      <p:grpSpPr/>
+      <p:grpSpPr>
+        <a:xfrm>
+          <a:off x="0" y="0"/>
+          <a:ext cx="0" cy="0"/>
+          <a:chOff x="0" y="0"/>
+          <a:chExt cx="0" cy="0"/>
+        </a:xfrm>
+      </p:grpSpPr>
       <p:sp>
         <p:nvSpPr>
           <p:cNvPr id="2" name="Rectangle 1"/>
@@ -12876,6 +12962,7 @@
           <a:lstStyle/>
           <a:p>
             <a:pPr algn="ctr"/>
+            <a:endParaRPr/>
           </a:p>
         </p:txBody>
       </p:sp>
@@ -12919,6 +13006,7 @@
           <a:lstStyle/>
           <a:p>
             <a:pPr algn="ctr"/>
+            <a:endParaRPr/>
           </a:p>
         </p:txBody>
       </p:sp>
@@ -12939,7 +13027,7 @@
           <a:noFill/>
         </p:spPr>
         <p:txBody>
-          <a:bodyPr wrap="square" lIns="0" rIns="0" tIns="0" bIns="0" anchor="ctr">
+          <a:bodyPr wrap="square" lIns="0" tIns="0" rIns="0" bIns="0" anchor="ctr">
             <a:spAutoFit/>
           </a:bodyPr>
           <a:lstStyle/>
@@ -12984,7 +13072,7 @@
           <a:noFill/>
         </p:spPr>
         <p:txBody>
-          <a:bodyPr wrap="square" lIns="0" rIns="0" tIns="0" bIns="0" anchor="ctr">
+          <a:bodyPr wrap="square" lIns="0" tIns="0" rIns="0" bIns="0" anchor="ctr">
             <a:spAutoFit/>
           </a:bodyPr>
           <a:lstStyle/>
@@ -13052,6 +13140,7 @@
           <a:lstStyle/>
           <a:p>
             <a:pPr algn="ctr"/>
+            <a:endParaRPr/>
           </a:p>
         </p:txBody>
       </p:sp>
@@ -13095,6 +13184,7 @@
           <a:lstStyle/>
           <a:p>
             <a:pPr algn="ctr"/>
+            <a:endParaRPr/>
           </a:p>
         </p:txBody>
       </p:sp>
@@ -13115,7 +13205,7 @@
           <a:noFill/>
         </p:spPr>
         <p:txBody>
-          <a:bodyPr wrap="square" lIns="0" rIns="0" tIns="0" bIns="0" anchor="ctr">
+          <a:bodyPr wrap="square" lIns="0" tIns="0" rIns="0" bIns="0" anchor="ctr">
             <a:spAutoFit/>
           </a:bodyPr>
           <a:lstStyle/>
@@ -13160,7 +13250,7 @@
           <a:noFill/>
         </p:spPr>
         <p:txBody>
-          <a:bodyPr wrap="square" lIns="0" rIns="0" tIns="0" bIns="0" anchor="t">
+          <a:bodyPr wrap="square" lIns="0" tIns="0" rIns="0" bIns="0" anchor="t">
             <a:spAutoFit/>
           </a:bodyPr>
           <a:lstStyle/>
@@ -14132,7 +14222,7 @@
           <a:noFill/>
         </p:spPr>
         <p:txBody>
-          <a:bodyPr wrap="square" lIns="0" rIns="0" tIns="0" bIns="0" anchor="ctr">
+          <a:bodyPr wrap="square" lIns="0" tIns="0" rIns="0" bIns="0" anchor="ctr">
             <a:spAutoFit/>
           </a:bodyPr>
           <a:lstStyle/>
@@ -14169,7 +14259,7 @@
 </file>
 
 <file path=ppt/slides/slide18.xml><?xml version="1.0" encoding="utf-8"?>
-<p:sld xmlns:a="http://schemas.openxmlformats.org/drawingml/2006/main" xmlns:p="http://schemas.openxmlformats.org/presentationml/2006/main" xmlns:r="http://schemas.openxmlformats.org/officeDocument/2006/relationships">
+<p:sld xmlns:a="http://schemas.openxmlformats.org/drawingml/2006/main" xmlns:r="http://schemas.openxmlformats.org/officeDocument/2006/relationships" xmlns:p="http://schemas.openxmlformats.org/presentationml/2006/main">
   <p:cSld>
     <p:bg>
       <p:bgPr>
@@ -14185,7 +14275,14 @@
         <p:cNvGrpSpPr/>
         <p:nvPr/>
       </p:nvGrpSpPr>
-      <p:grpSpPr/>
+      <p:grpSpPr>
+        <a:xfrm>
+          <a:off x="0" y="0"/>
+          <a:ext cx="0" cy="0"/>
+          <a:chOff x="0" y="0"/>
+          <a:chExt cx="0" cy="0"/>
+        </a:xfrm>
+      </p:grpSpPr>
       <p:sp>
         <p:nvSpPr>
           <p:cNvPr id="2" name="Rectangle 1"/>
@@ -14226,6 +14323,7 @@
           <a:lstStyle/>
           <a:p>
             <a:pPr algn="ctr"/>
+            <a:endParaRPr/>
           </a:p>
         </p:txBody>
       </p:sp>
@@ -14269,6 +14367,7 @@
           <a:lstStyle/>
           <a:p>
             <a:pPr algn="ctr"/>
+            <a:endParaRPr/>
           </a:p>
         </p:txBody>
       </p:sp>
@@ -14289,7 +14388,7 @@
           <a:noFill/>
         </p:spPr>
         <p:txBody>
-          <a:bodyPr wrap="square" lIns="0" rIns="0" tIns="0" bIns="0" anchor="ctr">
+          <a:bodyPr wrap="square" lIns="0" tIns="0" rIns="0" bIns="0" anchor="ctr">
             <a:spAutoFit/>
           </a:bodyPr>
           <a:lstStyle/>
@@ -14334,7 +14433,7 @@
           <a:noFill/>
         </p:spPr>
         <p:txBody>
-          <a:bodyPr wrap="square" lIns="0" rIns="0" tIns="0" bIns="0" anchor="ctr">
+          <a:bodyPr wrap="square" lIns="0" tIns="0" rIns="0" bIns="0" anchor="ctr">
             <a:spAutoFit/>
           </a:bodyPr>
           <a:lstStyle/>
@@ -14402,6 +14501,7 @@
           <a:lstStyle/>
           <a:p>
             <a:pPr algn="ctr"/>
+            <a:endParaRPr/>
           </a:p>
         </p:txBody>
       </p:sp>
@@ -14445,6 +14545,7 @@
           <a:lstStyle/>
           <a:p>
             <a:pPr algn="ctr"/>
+            <a:endParaRPr/>
           </a:p>
         </p:txBody>
       </p:sp>
@@ -14465,7 +14566,7 @@
           <a:noFill/>
         </p:spPr>
         <p:txBody>
-          <a:bodyPr wrap="square" lIns="0" rIns="0" tIns="0" bIns="0" anchor="ctr">
+          <a:bodyPr wrap="square" lIns="0" tIns="0" rIns="0" bIns="0" anchor="ctr">
             <a:spAutoFit/>
           </a:bodyPr>
           <a:lstStyle/>
@@ -14510,7 +14611,7 @@
           <a:noFill/>
         </p:spPr>
         <p:txBody>
-          <a:bodyPr wrap="square" lIns="0" rIns="0" tIns="0" bIns="0" anchor="t">
+          <a:bodyPr wrap="square" lIns="0" tIns="0" rIns="0" bIns="0" anchor="t">
             <a:spAutoFit/>
           </a:bodyPr>
           <a:lstStyle/>
@@ -15482,7 +15583,7 @@
           <a:noFill/>
         </p:spPr>
         <p:txBody>
-          <a:bodyPr wrap="square" lIns="0" rIns="0" tIns="0" bIns="0" anchor="ctr">
+          <a:bodyPr wrap="square" lIns="0" tIns="0" rIns="0" bIns="0" anchor="ctr">
             <a:spAutoFit/>
           </a:bodyPr>
           <a:lstStyle/>
@@ -15519,7 +15620,7 @@
 </file>
 
 <file path=ppt/slides/slide19.xml><?xml version="1.0" encoding="utf-8"?>
-<p:sld xmlns:a="http://schemas.openxmlformats.org/drawingml/2006/main" xmlns:p="http://schemas.openxmlformats.org/presentationml/2006/main" xmlns:r="http://schemas.openxmlformats.org/officeDocument/2006/relationships">
+<p:sld xmlns:a="http://schemas.openxmlformats.org/drawingml/2006/main" xmlns:r="http://schemas.openxmlformats.org/officeDocument/2006/relationships" xmlns:p="http://schemas.openxmlformats.org/presentationml/2006/main">
   <p:cSld>
     <p:bg>
       <p:bgPr>
@@ -15535,7 +15636,14 @@
         <p:cNvGrpSpPr/>
         <p:nvPr/>
       </p:nvGrpSpPr>
-      <p:grpSpPr/>
+      <p:grpSpPr>
+        <a:xfrm>
+          <a:off x="0" y="0"/>
+          <a:ext cx="0" cy="0"/>
+          <a:chOff x="0" y="0"/>
+          <a:chExt cx="0" cy="0"/>
+        </a:xfrm>
+      </p:grpSpPr>
       <p:sp>
         <p:nvSpPr>
           <p:cNvPr id="2" name="Rectangle 1"/>
@@ -15576,6 +15684,7 @@
           <a:lstStyle/>
           <a:p>
             <a:pPr algn="ctr"/>
+            <a:endParaRPr/>
           </a:p>
         </p:txBody>
       </p:sp>
@@ -15619,6 +15728,7 @@
           <a:lstStyle/>
           <a:p>
             <a:pPr algn="ctr"/>
+            <a:endParaRPr/>
           </a:p>
         </p:txBody>
       </p:sp>
@@ -15639,7 +15749,7 @@
           <a:noFill/>
         </p:spPr>
         <p:txBody>
-          <a:bodyPr wrap="square" lIns="0" rIns="0" tIns="0" bIns="0" anchor="ctr">
+          <a:bodyPr wrap="square" lIns="0" tIns="0" rIns="0" bIns="0" anchor="ctr">
             <a:spAutoFit/>
           </a:bodyPr>
           <a:lstStyle/>
@@ -15684,7 +15794,7 @@
           <a:noFill/>
         </p:spPr>
         <p:txBody>
-          <a:bodyPr wrap="square" lIns="0" rIns="0" tIns="0" bIns="0" anchor="ctr">
+          <a:bodyPr wrap="square" lIns="0" tIns="0" rIns="0" bIns="0" anchor="ctr">
             <a:spAutoFit/>
           </a:bodyPr>
           <a:lstStyle/>
@@ -15752,6 +15862,7 @@
           <a:lstStyle/>
           <a:p>
             <a:pPr algn="ctr"/>
+            <a:endParaRPr/>
           </a:p>
         </p:txBody>
       </p:sp>
@@ -15795,6 +15906,7 @@
           <a:lstStyle/>
           <a:p>
             <a:pPr algn="ctr"/>
+            <a:endParaRPr/>
           </a:p>
         </p:txBody>
       </p:sp>
@@ -15815,7 +15927,7 @@
           <a:noFill/>
         </p:spPr>
         <p:txBody>
-          <a:bodyPr wrap="square" lIns="0" rIns="0" tIns="0" bIns="0" anchor="ctr">
+          <a:bodyPr wrap="square" lIns="0" tIns="0" rIns="0" bIns="0" anchor="ctr">
             <a:spAutoFit/>
           </a:bodyPr>
           <a:lstStyle/>
@@ -15860,7 +15972,7 @@
           <a:noFill/>
         </p:spPr>
         <p:txBody>
-          <a:bodyPr wrap="square" lIns="0" rIns="0" tIns="0" bIns="0" anchor="t">
+          <a:bodyPr wrap="square" lIns="0" tIns="0" rIns="0" bIns="0" anchor="t">
             <a:spAutoFit/>
           </a:bodyPr>
           <a:lstStyle/>
@@ -16832,7 +16944,7 @@
           <a:noFill/>
         </p:spPr>
         <p:txBody>
-          <a:bodyPr wrap="square" lIns="0" rIns="0" tIns="0" bIns="0" anchor="ctr">
+          <a:bodyPr wrap="square" lIns="0" tIns="0" rIns="0" bIns="0" anchor="ctr">
             <a:spAutoFit/>
           </a:bodyPr>
           <a:lstStyle/>
@@ -16869,7 +16981,7 @@
 </file>
 
 <file path=ppt/slides/slide2.xml><?xml version="1.0" encoding="utf-8"?>
-<p:sld xmlns:a="http://schemas.openxmlformats.org/drawingml/2006/main" xmlns:p="http://schemas.openxmlformats.org/presentationml/2006/main" xmlns:r="http://schemas.openxmlformats.org/officeDocument/2006/relationships">
+<p:sld xmlns:a="http://schemas.openxmlformats.org/drawingml/2006/main" xmlns:r="http://schemas.openxmlformats.org/officeDocument/2006/relationships" xmlns:p="http://schemas.openxmlformats.org/presentationml/2006/main">
   <p:cSld>
     <p:bg>
       <p:bgPr>
@@ -16885,7 +16997,14 @@
         <p:cNvGrpSpPr/>
         <p:nvPr/>
       </p:nvGrpSpPr>
-      <p:grpSpPr/>
+      <p:grpSpPr>
+        <a:xfrm>
+          <a:off x="0" y="0"/>
+          <a:ext cx="0" cy="0"/>
+          <a:chOff x="0" y="0"/>
+          <a:chExt cx="0" cy="0"/>
+        </a:xfrm>
+      </p:grpSpPr>
       <p:sp>
         <p:nvSpPr>
           <p:cNvPr id="2" name="TextBox 1"/>
@@ -16903,7 +17022,7 @@
           <a:noFill/>
         </p:spPr>
         <p:txBody>
-          <a:bodyPr wrap="square" lIns="0" rIns="0" tIns="0" bIns="0" anchor="t">
+          <a:bodyPr wrap="square" lIns="0" tIns="0" rIns="0" bIns="0" anchor="t">
             <a:spAutoFit/>
           </a:bodyPr>
           <a:lstStyle/>
@@ -16948,7 +17067,7 @@
           <a:noFill/>
         </p:spPr>
         <p:txBody>
-          <a:bodyPr wrap="square" lIns="0" rIns="0" tIns="0" bIns="0" anchor="t">
+          <a:bodyPr wrap="square" lIns="0" tIns="0" rIns="0" bIns="0" anchor="t">
             <a:spAutoFit/>
           </a:bodyPr>
           <a:lstStyle/>
@@ -16993,7 +17112,7 @@
           <a:noFill/>
         </p:spPr>
         <p:txBody>
-          <a:bodyPr wrap="square" lIns="0" rIns="0" tIns="0" bIns="0" anchor="t">
+          <a:bodyPr wrap="square" lIns="0" tIns="0" rIns="0" bIns="0" anchor="t">
             <a:spAutoFit/>
           </a:bodyPr>
           <a:lstStyle/>
@@ -17038,7 +17157,7 @@
           <a:noFill/>
         </p:spPr>
         <p:txBody>
-          <a:bodyPr wrap="square" lIns="0" rIns="0" tIns="0" bIns="0" anchor="t">
+          <a:bodyPr wrap="square" lIns="0" tIns="0" rIns="0" bIns="0" anchor="t">
             <a:spAutoFit/>
           </a:bodyPr>
           <a:lstStyle/>
@@ -17083,7 +17202,7 @@
           <a:noFill/>
         </p:spPr>
         <p:txBody>
-          <a:bodyPr wrap="square" lIns="0" rIns="0" tIns="0" bIns="0" anchor="t">
+          <a:bodyPr wrap="square" lIns="0" tIns="0" rIns="0" bIns="0" anchor="t">
             <a:spAutoFit/>
           </a:bodyPr>
           <a:lstStyle/>
@@ -17128,7 +17247,7 @@
           <a:noFill/>
         </p:spPr>
         <p:txBody>
-          <a:bodyPr wrap="square" lIns="0" rIns="0" tIns="0" bIns="0" anchor="t">
+          <a:bodyPr wrap="square" lIns="0" tIns="0" rIns="0" bIns="0" anchor="t">
             <a:spAutoFit/>
           </a:bodyPr>
           <a:lstStyle/>
@@ -17173,7 +17292,7 @@
           <a:noFill/>
         </p:spPr>
         <p:txBody>
-          <a:bodyPr wrap="square" lIns="0" rIns="0" tIns="0" bIns="0" anchor="t">
+          <a:bodyPr wrap="square" lIns="0" tIns="0" rIns="0" bIns="0" anchor="t">
             <a:spAutoFit/>
           </a:bodyPr>
           <a:lstStyle/>
@@ -17218,7 +17337,7 @@
           <a:noFill/>
         </p:spPr>
         <p:txBody>
-          <a:bodyPr wrap="square" lIns="0" rIns="0" tIns="0" bIns="0" anchor="t">
+          <a:bodyPr wrap="square" lIns="0" tIns="0" rIns="0" bIns="0" anchor="t">
             <a:spAutoFit/>
           </a:bodyPr>
           <a:lstStyle/>
@@ -17263,7 +17382,7 @@
           <a:noFill/>
         </p:spPr>
         <p:txBody>
-          <a:bodyPr wrap="square" lIns="0" rIns="0" tIns="0" bIns="0" anchor="t">
+          <a:bodyPr wrap="square" lIns="0" tIns="0" rIns="0" bIns="0" anchor="t">
             <a:spAutoFit/>
           </a:bodyPr>
           <a:lstStyle/>
@@ -17308,7 +17427,7 @@
           <a:noFill/>
         </p:spPr>
         <p:txBody>
-          <a:bodyPr wrap="square" lIns="0" rIns="0" tIns="0" bIns="0" anchor="ctr">
+          <a:bodyPr wrap="square" lIns="0" tIns="0" rIns="0" bIns="0" anchor="ctr">
             <a:spAutoFit/>
           </a:bodyPr>
           <a:lstStyle/>
@@ -17345,7 +17464,7 @@
 </file>
 
 <file path=ppt/slides/slide20.xml><?xml version="1.0" encoding="utf-8"?>
-<p:sld xmlns:a="http://schemas.openxmlformats.org/drawingml/2006/main" xmlns:p="http://schemas.openxmlformats.org/presentationml/2006/main" xmlns:r="http://schemas.openxmlformats.org/officeDocument/2006/relationships">
+<p:sld xmlns:a="http://schemas.openxmlformats.org/drawingml/2006/main" xmlns:r="http://schemas.openxmlformats.org/officeDocument/2006/relationships" xmlns:p="http://schemas.openxmlformats.org/presentationml/2006/main">
   <p:cSld>
     <p:bg>
       <p:bgPr>
@@ -17361,7 +17480,14 @@
         <p:cNvGrpSpPr/>
         <p:nvPr/>
       </p:nvGrpSpPr>
-      <p:grpSpPr/>
+      <p:grpSpPr>
+        <a:xfrm>
+          <a:off x="0" y="0"/>
+          <a:ext cx="0" cy="0"/>
+          <a:chOff x="0" y="0"/>
+          <a:chExt cx="0" cy="0"/>
+        </a:xfrm>
+      </p:grpSpPr>
       <p:sp>
         <p:nvSpPr>
           <p:cNvPr id="2" name="Rectangle 1"/>
@@ -17402,6 +17528,7 @@
           <a:lstStyle/>
           <a:p>
             <a:pPr algn="ctr"/>
+            <a:endParaRPr/>
           </a:p>
         </p:txBody>
       </p:sp>
@@ -17445,6 +17572,7 @@
           <a:lstStyle/>
           <a:p>
             <a:pPr algn="ctr"/>
+            <a:endParaRPr/>
           </a:p>
         </p:txBody>
       </p:sp>
@@ -17465,7 +17593,7 @@
           <a:noFill/>
         </p:spPr>
         <p:txBody>
-          <a:bodyPr wrap="square" lIns="0" rIns="0" tIns="0" bIns="0" anchor="ctr">
+          <a:bodyPr wrap="square" lIns="0" tIns="0" rIns="0" bIns="0" anchor="ctr">
             <a:spAutoFit/>
           </a:bodyPr>
           <a:lstStyle/>
@@ -17510,7 +17638,7 @@
           <a:noFill/>
         </p:spPr>
         <p:txBody>
-          <a:bodyPr wrap="square" lIns="0" rIns="0" tIns="0" bIns="0" anchor="ctr">
+          <a:bodyPr wrap="square" lIns="0" tIns="0" rIns="0" bIns="0" anchor="ctr">
             <a:spAutoFit/>
           </a:bodyPr>
           <a:lstStyle/>
@@ -17578,6 +17706,7 @@
           <a:lstStyle/>
           <a:p>
             <a:pPr algn="ctr"/>
+            <a:endParaRPr/>
           </a:p>
         </p:txBody>
       </p:sp>
@@ -17621,6 +17750,7 @@
           <a:lstStyle/>
           <a:p>
             <a:pPr algn="ctr"/>
+            <a:endParaRPr/>
           </a:p>
         </p:txBody>
       </p:sp>
@@ -17641,7 +17771,7 @@
           <a:noFill/>
         </p:spPr>
         <p:txBody>
-          <a:bodyPr wrap="square" lIns="0" rIns="0" tIns="0" bIns="0" anchor="ctr">
+          <a:bodyPr wrap="square" lIns="0" tIns="0" rIns="0" bIns="0" anchor="ctr">
             <a:spAutoFit/>
           </a:bodyPr>
           <a:lstStyle/>
@@ -17686,7 +17816,7 @@
           <a:noFill/>
         </p:spPr>
         <p:txBody>
-          <a:bodyPr wrap="square" lIns="0" rIns="0" tIns="0" bIns="0" anchor="t">
+          <a:bodyPr wrap="square" lIns="0" tIns="0" rIns="0" bIns="0" anchor="t">
             <a:spAutoFit/>
           </a:bodyPr>
           <a:lstStyle/>
@@ -18658,7 +18788,7 @@
           <a:noFill/>
         </p:spPr>
         <p:txBody>
-          <a:bodyPr wrap="square" lIns="0" rIns="0" tIns="0" bIns="0" anchor="ctr">
+          <a:bodyPr wrap="square" lIns="0" tIns="0" rIns="0" bIns="0" anchor="ctr">
             <a:spAutoFit/>
           </a:bodyPr>
           <a:lstStyle/>
@@ -18695,7 +18825,7 @@
 </file>
 
 <file path=ppt/slides/slide21.xml><?xml version="1.0" encoding="utf-8"?>
-<p:sld xmlns:a="http://schemas.openxmlformats.org/drawingml/2006/main" xmlns:p="http://schemas.openxmlformats.org/presentationml/2006/main" xmlns:r="http://schemas.openxmlformats.org/officeDocument/2006/relationships">
+<p:sld xmlns:a="http://schemas.openxmlformats.org/drawingml/2006/main" xmlns:r="http://schemas.openxmlformats.org/officeDocument/2006/relationships" xmlns:p="http://schemas.openxmlformats.org/presentationml/2006/main">
   <p:cSld>
     <p:bg>
       <p:bgPr>
@@ -18711,7 +18841,14 @@
         <p:cNvGrpSpPr/>
         <p:nvPr/>
       </p:nvGrpSpPr>
-      <p:grpSpPr/>
+      <p:grpSpPr>
+        <a:xfrm>
+          <a:off x="0" y="0"/>
+          <a:ext cx="0" cy="0"/>
+          <a:chOff x="0" y="0"/>
+          <a:chExt cx="0" cy="0"/>
+        </a:xfrm>
+      </p:grpSpPr>
       <p:sp>
         <p:nvSpPr>
           <p:cNvPr id="2" name="Rectangle 1"/>
@@ -18752,6 +18889,7 @@
           <a:lstStyle/>
           <a:p>
             <a:pPr algn="ctr"/>
+            <a:endParaRPr/>
           </a:p>
         </p:txBody>
       </p:sp>
@@ -18795,6 +18933,7 @@
           <a:lstStyle/>
           <a:p>
             <a:pPr algn="ctr"/>
+            <a:endParaRPr/>
           </a:p>
         </p:txBody>
       </p:sp>
@@ -18815,7 +18954,7 @@
           <a:noFill/>
         </p:spPr>
         <p:txBody>
-          <a:bodyPr wrap="square" lIns="0" rIns="0" tIns="0" bIns="0" anchor="ctr">
+          <a:bodyPr wrap="square" lIns="0" tIns="0" rIns="0" bIns="0" anchor="ctr">
             <a:spAutoFit/>
           </a:bodyPr>
           <a:lstStyle/>
@@ -18860,7 +18999,7 @@
           <a:noFill/>
         </p:spPr>
         <p:txBody>
-          <a:bodyPr wrap="square" lIns="0" rIns="0" tIns="0" bIns="0" anchor="ctr">
+          <a:bodyPr wrap="square" lIns="0" tIns="0" rIns="0" bIns="0" anchor="ctr">
             <a:spAutoFit/>
           </a:bodyPr>
           <a:lstStyle/>
@@ -18928,6 +19067,7 @@
           <a:lstStyle/>
           <a:p>
             <a:pPr algn="ctr"/>
+            <a:endParaRPr/>
           </a:p>
         </p:txBody>
       </p:sp>
@@ -18971,6 +19111,7 @@
           <a:lstStyle/>
           <a:p>
             <a:pPr algn="ctr"/>
+            <a:endParaRPr/>
           </a:p>
         </p:txBody>
       </p:sp>
@@ -18991,7 +19132,7 @@
           <a:noFill/>
         </p:spPr>
         <p:txBody>
-          <a:bodyPr wrap="square" lIns="0" rIns="0" tIns="0" bIns="0" anchor="ctr">
+          <a:bodyPr wrap="square" lIns="0" tIns="0" rIns="0" bIns="0" anchor="ctr">
             <a:spAutoFit/>
           </a:bodyPr>
           <a:lstStyle/>
@@ -19036,7 +19177,7 @@
           <a:noFill/>
         </p:spPr>
         <p:txBody>
-          <a:bodyPr wrap="square" lIns="0" rIns="0" tIns="0" bIns="0" anchor="t">
+          <a:bodyPr wrap="square" lIns="0" tIns="0" rIns="0" bIns="0" anchor="t">
             <a:spAutoFit/>
           </a:bodyPr>
           <a:lstStyle/>
@@ -19977,7 +20118,7 @@
           <a:noFill/>
         </p:spPr>
         <p:txBody>
-          <a:bodyPr wrap="square" lIns="0" rIns="0" tIns="0" bIns="0" anchor="ctr">
+          <a:bodyPr wrap="square" lIns="0" tIns="0" rIns="0" bIns="0" anchor="ctr">
             <a:spAutoFit/>
           </a:bodyPr>
           <a:lstStyle/>
@@ -20014,7 +20155,7 @@
 </file>
 
 <file path=ppt/slides/slide22.xml><?xml version="1.0" encoding="utf-8"?>
-<p:sld xmlns:a="http://schemas.openxmlformats.org/drawingml/2006/main" xmlns:p="http://schemas.openxmlformats.org/presentationml/2006/main" xmlns:r="http://schemas.openxmlformats.org/officeDocument/2006/relationships">
+<p:sld xmlns:a="http://schemas.openxmlformats.org/drawingml/2006/main" xmlns:r="http://schemas.openxmlformats.org/officeDocument/2006/relationships" xmlns:p="http://schemas.openxmlformats.org/presentationml/2006/main">
   <p:cSld>
     <p:bg>
       <p:bgPr>
@@ -20030,7 +20171,14 @@
         <p:cNvGrpSpPr/>
         <p:nvPr/>
       </p:nvGrpSpPr>
-      <p:grpSpPr/>
+      <p:grpSpPr>
+        <a:xfrm>
+          <a:off x="0" y="0"/>
+          <a:ext cx="0" cy="0"/>
+          <a:chOff x="0" y="0"/>
+          <a:chExt cx="0" cy="0"/>
+        </a:xfrm>
+      </p:grpSpPr>
       <p:sp>
         <p:nvSpPr>
           <p:cNvPr id="2" name="Rectangle 1"/>
@@ -20071,6 +20219,7 @@
           <a:lstStyle/>
           <a:p>
             <a:pPr algn="ctr"/>
+            <a:endParaRPr/>
           </a:p>
         </p:txBody>
       </p:sp>
@@ -20114,6 +20263,7 @@
           <a:lstStyle/>
           <a:p>
             <a:pPr algn="ctr"/>
+            <a:endParaRPr/>
           </a:p>
         </p:txBody>
       </p:sp>
@@ -20134,7 +20284,7 @@
           <a:noFill/>
         </p:spPr>
         <p:txBody>
-          <a:bodyPr wrap="square" lIns="0" rIns="0" tIns="0" bIns="0" anchor="ctr">
+          <a:bodyPr wrap="square" lIns="0" tIns="0" rIns="0" bIns="0" anchor="ctr">
             <a:spAutoFit/>
           </a:bodyPr>
           <a:lstStyle/>
@@ -20179,7 +20329,7 @@
           <a:noFill/>
         </p:spPr>
         <p:txBody>
-          <a:bodyPr wrap="square" lIns="0" rIns="0" tIns="0" bIns="0" anchor="ctr">
+          <a:bodyPr wrap="square" lIns="0" tIns="0" rIns="0" bIns="0" anchor="ctr">
             <a:spAutoFit/>
           </a:bodyPr>
           <a:lstStyle/>
@@ -20247,6 +20397,7 @@
           <a:lstStyle/>
           <a:p>
             <a:pPr algn="ctr"/>
+            <a:endParaRPr/>
           </a:p>
         </p:txBody>
       </p:sp>
@@ -20290,6 +20441,7 @@
           <a:lstStyle/>
           <a:p>
             <a:pPr algn="ctr"/>
+            <a:endParaRPr/>
           </a:p>
         </p:txBody>
       </p:sp>
@@ -20310,7 +20462,7 @@
           <a:noFill/>
         </p:spPr>
         <p:txBody>
-          <a:bodyPr wrap="square" lIns="0" rIns="0" tIns="0" bIns="0" anchor="ctr">
+          <a:bodyPr wrap="square" lIns="0" tIns="0" rIns="0" bIns="0" anchor="ctr">
             <a:spAutoFit/>
           </a:bodyPr>
           <a:lstStyle/>
@@ -20355,7 +20507,7 @@
           <a:noFill/>
         </p:spPr>
         <p:txBody>
-          <a:bodyPr wrap="square" lIns="0" rIns="0" tIns="0" bIns="0" anchor="t">
+          <a:bodyPr wrap="square" lIns="0" tIns="0" rIns="0" bIns="0" anchor="t">
             <a:spAutoFit/>
           </a:bodyPr>
           <a:lstStyle/>
@@ -21358,7 +21510,7 @@
           <a:noFill/>
         </p:spPr>
         <p:txBody>
-          <a:bodyPr wrap="square" lIns="0" rIns="0" tIns="0" bIns="0" anchor="ctr">
+          <a:bodyPr wrap="square" lIns="0" tIns="0" rIns="0" bIns="0" anchor="ctr">
             <a:spAutoFit/>
           </a:bodyPr>
           <a:lstStyle/>
@@ -21395,7 +21547,7 @@
 </file>
 
 <file path=ppt/slides/slide23.xml><?xml version="1.0" encoding="utf-8"?>
-<p:sld xmlns:a="http://schemas.openxmlformats.org/drawingml/2006/main" xmlns:p="http://schemas.openxmlformats.org/presentationml/2006/main" xmlns:r="http://schemas.openxmlformats.org/officeDocument/2006/relationships">
+<p:sld xmlns:a="http://schemas.openxmlformats.org/drawingml/2006/main" xmlns:r="http://schemas.openxmlformats.org/officeDocument/2006/relationships" xmlns:p="http://schemas.openxmlformats.org/presentationml/2006/main">
   <p:cSld>
     <p:bg>
       <p:bgPr>
@@ -21411,7 +21563,14 @@
         <p:cNvGrpSpPr/>
         <p:nvPr/>
       </p:nvGrpSpPr>
-      <p:grpSpPr/>
+      <p:grpSpPr>
+        <a:xfrm>
+          <a:off x="0" y="0"/>
+          <a:ext cx="0" cy="0"/>
+          <a:chOff x="0" y="0"/>
+          <a:chExt cx="0" cy="0"/>
+        </a:xfrm>
+      </p:grpSpPr>
       <p:sp>
         <p:nvSpPr>
           <p:cNvPr id="2" name="Rectangle 1"/>
@@ -21452,6 +21611,7 @@
           <a:lstStyle/>
           <a:p>
             <a:pPr algn="ctr"/>
+            <a:endParaRPr/>
           </a:p>
         </p:txBody>
       </p:sp>
@@ -21495,6 +21655,7 @@
           <a:lstStyle/>
           <a:p>
             <a:pPr algn="ctr"/>
+            <a:endParaRPr/>
           </a:p>
         </p:txBody>
       </p:sp>
@@ -21515,7 +21676,7 @@
           <a:noFill/>
         </p:spPr>
         <p:txBody>
-          <a:bodyPr wrap="square" lIns="0" rIns="0" tIns="0" bIns="0" anchor="ctr">
+          <a:bodyPr wrap="square" lIns="0" tIns="0" rIns="0" bIns="0" anchor="ctr">
             <a:spAutoFit/>
           </a:bodyPr>
           <a:lstStyle/>
@@ -21560,7 +21721,7 @@
           <a:noFill/>
         </p:spPr>
         <p:txBody>
-          <a:bodyPr wrap="square" lIns="0" rIns="0" tIns="0" bIns="0" anchor="ctr">
+          <a:bodyPr wrap="square" lIns="0" tIns="0" rIns="0" bIns="0" anchor="ctr">
             <a:spAutoFit/>
           </a:bodyPr>
           <a:lstStyle/>
@@ -21628,6 +21789,7 @@
           <a:lstStyle/>
           <a:p>
             <a:pPr algn="ctr"/>
+            <a:endParaRPr/>
           </a:p>
         </p:txBody>
       </p:sp>
@@ -21671,6 +21833,7 @@
           <a:lstStyle/>
           <a:p>
             <a:pPr algn="ctr"/>
+            <a:endParaRPr/>
           </a:p>
         </p:txBody>
       </p:sp>
@@ -21691,7 +21854,7 @@
           <a:noFill/>
         </p:spPr>
         <p:txBody>
-          <a:bodyPr wrap="square" lIns="0" rIns="0" tIns="0" bIns="0" anchor="ctr">
+          <a:bodyPr wrap="square" lIns="0" tIns="0" rIns="0" bIns="0" anchor="ctr">
             <a:spAutoFit/>
           </a:bodyPr>
           <a:lstStyle/>
@@ -21736,7 +21899,7 @@
           <a:noFill/>
         </p:spPr>
         <p:txBody>
-          <a:bodyPr wrap="square" lIns="0" rIns="0" tIns="0" bIns="0" anchor="t">
+          <a:bodyPr wrap="square" lIns="0" tIns="0" rIns="0" bIns="0" anchor="t">
             <a:spAutoFit/>
           </a:bodyPr>
           <a:lstStyle/>
@@ -22677,7 +22840,7 @@
           <a:noFill/>
         </p:spPr>
         <p:txBody>
-          <a:bodyPr wrap="square" lIns="0" rIns="0" tIns="0" bIns="0" anchor="ctr">
+          <a:bodyPr wrap="square" lIns="0" tIns="0" rIns="0" bIns="0" anchor="ctr">
             <a:spAutoFit/>
           </a:bodyPr>
           <a:lstStyle/>
@@ -22714,7 +22877,7 @@
 </file>
 
 <file path=ppt/slides/slide24.xml><?xml version="1.0" encoding="utf-8"?>
-<p:sld xmlns:a="http://schemas.openxmlformats.org/drawingml/2006/main" xmlns:p="http://schemas.openxmlformats.org/presentationml/2006/main" xmlns:r="http://schemas.openxmlformats.org/officeDocument/2006/relationships">
+<p:sld xmlns:a="http://schemas.openxmlformats.org/drawingml/2006/main" xmlns:r="http://schemas.openxmlformats.org/officeDocument/2006/relationships" xmlns:p="http://schemas.openxmlformats.org/presentationml/2006/main">
   <p:cSld>
     <p:bg>
       <p:bgPr>
@@ -22730,7 +22893,14 @@
         <p:cNvGrpSpPr/>
         <p:nvPr/>
       </p:nvGrpSpPr>
-      <p:grpSpPr/>
+      <p:grpSpPr>
+        <a:xfrm>
+          <a:off x="0" y="0"/>
+          <a:ext cx="0" cy="0"/>
+          <a:chOff x="0" y="0"/>
+          <a:chExt cx="0" cy="0"/>
+        </a:xfrm>
+      </p:grpSpPr>
       <p:sp>
         <p:nvSpPr>
           <p:cNvPr id="2" name="Rectangle 1"/>
@@ -22771,6 +22941,7 @@
           <a:lstStyle/>
           <a:p>
             <a:pPr algn="ctr"/>
+            <a:endParaRPr/>
           </a:p>
         </p:txBody>
       </p:sp>
@@ -22814,6 +22985,7 @@
           <a:lstStyle/>
           <a:p>
             <a:pPr algn="ctr"/>
+            <a:endParaRPr/>
           </a:p>
         </p:txBody>
       </p:sp>
@@ -22834,7 +23006,7 @@
           <a:noFill/>
         </p:spPr>
         <p:txBody>
-          <a:bodyPr wrap="square" lIns="0" rIns="0" tIns="0" bIns="0" anchor="ctr">
+          <a:bodyPr wrap="square" lIns="0" tIns="0" rIns="0" bIns="0" anchor="ctr">
             <a:spAutoFit/>
           </a:bodyPr>
           <a:lstStyle/>
@@ -22879,7 +23051,7 @@
           <a:noFill/>
         </p:spPr>
         <p:txBody>
-          <a:bodyPr wrap="square" lIns="0" rIns="0" tIns="0" bIns="0" anchor="ctr">
+          <a:bodyPr wrap="square" lIns="0" tIns="0" rIns="0" bIns="0" anchor="ctr">
             <a:spAutoFit/>
           </a:bodyPr>
           <a:lstStyle/>
@@ -22947,6 +23119,7 @@
           <a:lstStyle/>
           <a:p>
             <a:pPr algn="ctr"/>
+            <a:endParaRPr/>
           </a:p>
         </p:txBody>
       </p:sp>
@@ -22990,6 +23163,7 @@
           <a:lstStyle/>
           <a:p>
             <a:pPr algn="ctr"/>
+            <a:endParaRPr/>
           </a:p>
         </p:txBody>
       </p:sp>
@@ -23010,7 +23184,7 @@
           <a:noFill/>
         </p:spPr>
         <p:txBody>
-          <a:bodyPr wrap="square" lIns="0" rIns="0" tIns="0" bIns="0" anchor="ctr">
+          <a:bodyPr wrap="square" lIns="0" tIns="0" rIns="0" bIns="0" anchor="ctr">
             <a:spAutoFit/>
           </a:bodyPr>
           <a:lstStyle/>
@@ -23055,7 +23229,7 @@
           <a:noFill/>
         </p:spPr>
         <p:txBody>
-          <a:bodyPr wrap="square" lIns="0" rIns="0" tIns="0" bIns="0" anchor="t">
+          <a:bodyPr wrap="square" lIns="0" tIns="0" rIns="0" bIns="0" anchor="t">
             <a:spAutoFit/>
           </a:bodyPr>
           <a:lstStyle/>
@@ -24058,7 +24232,7 @@
           <a:noFill/>
         </p:spPr>
         <p:txBody>
-          <a:bodyPr wrap="square" lIns="0" rIns="0" tIns="0" bIns="0" anchor="ctr">
+          <a:bodyPr wrap="square" lIns="0" tIns="0" rIns="0" bIns="0" anchor="ctr">
             <a:spAutoFit/>
           </a:bodyPr>
           <a:lstStyle/>
@@ -24095,7 +24269,7 @@
 </file>
 
 <file path=ppt/slides/slide25.xml><?xml version="1.0" encoding="utf-8"?>
-<p:sld xmlns:a="http://schemas.openxmlformats.org/drawingml/2006/main" xmlns:p="http://schemas.openxmlformats.org/presentationml/2006/main" xmlns:r="http://schemas.openxmlformats.org/officeDocument/2006/relationships">
+<p:sld xmlns:a="http://schemas.openxmlformats.org/drawingml/2006/main" xmlns:r="http://schemas.openxmlformats.org/officeDocument/2006/relationships" xmlns:p="http://schemas.openxmlformats.org/presentationml/2006/main">
   <p:cSld>
     <p:bg>
       <p:bgPr>
@@ -24111,7 +24285,14 @@
         <p:cNvGrpSpPr/>
         <p:nvPr/>
       </p:nvGrpSpPr>
-      <p:grpSpPr/>
+      <p:grpSpPr>
+        <a:xfrm>
+          <a:off x="0" y="0"/>
+          <a:ext cx="0" cy="0"/>
+          <a:chOff x="0" y="0"/>
+          <a:chExt cx="0" cy="0"/>
+        </a:xfrm>
+      </p:grpSpPr>
       <p:sp>
         <p:nvSpPr>
           <p:cNvPr id="2" name="Rectangle 1"/>
@@ -24152,6 +24333,7 @@
           <a:lstStyle/>
           <a:p>
             <a:pPr algn="ctr"/>
+            <a:endParaRPr/>
           </a:p>
         </p:txBody>
       </p:sp>
@@ -24195,6 +24377,7 @@
           <a:lstStyle/>
           <a:p>
             <a:pPr algn="ctr"/>
+            <a:endParaRPr/>
           </a:p>
         </p:txBody>
       </p:sp>
@@ -24215,7 +24398,7 @@
           <a:noFill/>
         </p:spPr>
         <p:txBody>
-          <a:bodyPr wrap="square" lIns="0" rIns="0" tIns="0" bIns="0" anchor="ctr">
+          <a:bodyPr wrap="square" lIns="0" tIns="0" rIns="0" bIns="0" anchor="ctr">
             <a:spAutoFit/>
           </a:bodyPr>
           <a:lstStyle/>
@@ -24260,7 +24443,7 @@
           <a:noFill/>
         </p:spPr>
         <p:txBody>
-          <a:bodyPr wrap="square" lIns="0" rIns="0" tIns="0" bIns="0" anchor="ctr">
+          <a:bodyPr wrap="square" lIns="0" tIns="0" rIns="0" bIns="0" anchor="ctr">
             <a:spAutoFit/>
           </a:bodyPr>
           <a:lstStyle/>
@@ -24328,6 +24511,7 @@
           <a:lstStyle/>
           <a:p>
             <a:pPr algn="ctr"/>
+            <a:endParaRPr/>
           </a:p>
         </p:txBody>
       </p:sp>
@@ -24371,6 +24555,7 @@
           <a:lstStyle/>
           <a:p>
             <a:pPr algn="ctr"/>
+            <a:endParaRPr/>
           </a:p>
         </p:txBody>
       </p:sp>
@@ -24391,7 +24576,7 @@
           <a:noFill/>
         </p:spPr>
         <p:txBody>
-          <a:bodyPr wrap="square" lIns="0" rIns="0" tIns="0" bIns="0" anchor="ctr">
+          <a:bodyPr wrap="square" lIns="0" tIns="0" rIns="0" bIns="0" anchor="ctr">
             <a:spAutoFit/>
           </a:bodyPr>
           <a:lstStyle/>
@@ -24436,7 +24621,7 @@
           <a:noFill/>
         </p:spPr>
         <p:txBody>
-          <a:bodyPr wrap="square" lIns="0" rIns="0" tIns="0" bIns="0" anchor="t">
+          <a:bodyPr wrap="square" lIns="0" tIns="0" rIns="0" bIns="0" anchor="t">
             <a:spAutoFit/>
           </a:bodyPr>
           <a:lstStyle/>
@@ -25408,7 +25593,7 @@
           <a:noFill/>
         </p:spPr>
         <p:txBody>
-          <a:bodyPr wrap="square" lIns="0" rIns="0" tIns="0" bIns="0" anchor="ctr">
+          <a:bodyPr wrap="square" lIns="0" tIns="0" rIns="0" bIns="0" anchor="ctr">
             <a:spAutoFit/>
           </a:bodyPr>
           <a:lstStyle/>
@@ -25445,7 +25630,7 @@
 </file>
 
 <file path=ppt/slides/slide26.xml><?xml version="1.0" encoding="utf-8"?>
-<p:sld xmlns:a="http://schemas.openxmlformats.org/drawingml/2006/main" xmlns:p="http://schemas.openxmlformats.org/presentationml/2006/main" xmlns:r="http://schemas.openxmlformats.org/officeDocument/2006/relationships">
+<p:sld xmlns:a="http://schemas.openxmlformats.org/drawingml/2006/main" xmlns:r="http://schemas.openxmlformats.org/officeDocument/2006/relationships" xmlns:p="http://schemas.openxmlformats.org/presentationml/2006/main">
   <p:cSld>
     <p:bg>
       <p:bgPr>
@@ -25461,7 +25646,14 @@
         <p:cNvGrpSpPr/>
         <p:nvPr/>
       </p:nvGrpSpPr>
-      <p:grpSpPr/>
+      <p:grpSpPr>
+        <a:xfrm>
+          <a:off x="0" y="0"/>
+          <a:ext cx="0" cy="0"/>
+          <a:chOff x="0" y="0"/>
+          <a:chExt cx="0" cy="0"/>
+        </a:xfrm>
+      </p:grpSpPr>
       <p:sp>
         <p:nvSpPr>
           <p:cNvPr id="2" name="Rectangle 1"/>
@@ -25502,6 +25694,7 @@
           <a:lstStyle/>
           <a:p>
             <a:pPr algn="ctr"/>
+            <a:endParaRPr/>
           </a:p>
         </p:txBody>
       </p:sp>
@@ -25545,6 +25738,7 @@
           <a:lstStyle/>
           <a:p>
             <a:pPr algn="ctr"/>
+            <a:endParaRPr/>
           </a:p>
         </p:txBody>
       </p:sp>
@@ -25565,7 +25759,7 @@
           <a:noFill/>
         </p:spPr>
         <p:txBody>
-          <a:bodyPr wrap="square" lIns="0" rIns="0" tIns="0" bIns="0" anchor="ctr">
+          <a:bodyPr wrap="square" lIns="0" tIns="0" rIns="0" bIns="0" anchor="ctr">
             <a:spAutoFit/>
           </a:bodyPr>
           <a:lstStyle/>
@@ -25610,7 +25804,7 @@
           <a:noFill/>
         </p:spPr>
         <p:txBody>
-          <a:bodyPr wrap="square" lIns="0" rIns="0" tIns="0" bIns="0" anchor="ctr">
+          <a:bodyPr wrap="square" lIns="0" tIns="0" rIns="0" bIns="0" anchor="ctr">
             <a:spAutoFit/>
           </a:bodyPr>
           <a:lstStyle/>
@@ -25678,6 +25872,7 @@
           <a:lstStyle/>
           <a:p>
             <a:pPr algn="ctr"/>
+            <a:endParaRPr/>
           </a:p>
         </p:txBody>
       </p:sp>
@@ -25721,6 +25916,7 @@
           <a:lstStyle/>
           <a:p>
             <a:pPr algn="ctr"/>
+            <a:endParaRPr/>
           </a:p>
         </p:txBody>
       </p:sp>
@@ -25741,7 +25937,7 @@
           <a:noFill/>
         </p:spPr>
         <p:txBody>
-          <a:bodyPr wrap="square" lIns="0" rIns="0" tIns="0" bIns="0" anchor="ctr">
+          <a:bodyPr wrap="square" lIns="0" tIns="0" rIns="0" bIns="0" anchor="ctr">
             <a:spAutoFit/>
           </a:bodyPr>
           <a:lstStyle/>
@@ -25786,7 +25982,7 @@
           <a:noFill/>
         </p:spPr>
         <p:txBody>
-          <a:bodyPr wrap="square" lIns="0" rIns="0" tIns="0" bIns="0" anchor="t">
+          <a:bodyPr wrap="square" lIns="0" tIns="0" rIns="0" bIns="0" anchor="t">
             <a:spAutoFit/>
           </a:bodyPr>
           <a:lstStyle/>
@@ -26758,7 +26954,7 @@
           <a:noFill/>
         </p:spPr>
         <p:txBody>
-          <a:bodyPr wrap="square" lIns="0" rIns="0" tIns="0" bIns="0" anchor="ctr">
+          <a:bodyPr wrap="square" lIns="0" tIns="0" rIns="0" bIns="0" anchor="ctr">
             <a:spAutoFit/>
           </a:bodyPr>
           <a:lstStyle/>
@@ -26795,7 +26991,7 @@
 </file>
 
 <file path=ppt/slides/slide27.xml><?xml version="1.0" encoding="utf-8"?>
-<p:sld xmlns:a="http://schemas.openxmlformats.org/drawingml/2006/main" xmlns:p="http://schemas.openxmlformats.org/presentationml/2006/main" xmlns:r="http://schemas.openxmlformats.org/officeDocument/2006/relationships">
+<p:sld xmlns:a="http://schemas.openxmlformats.org/drawingml/2006/main" xmlns:r="http://schemas.openxmlformats.org/officeDocument/2006/relationships" xmlns:p="http://schemas.openxmlformats.org/presentationml/2006/main">
   <p:cSld>
     <p:bg>
       <p:bgPr>
@@ -26811,7 +27007,14 @@
         <p:cNvGrpSpPr/>
         <p:nvPr/>
       </p:nvGrpSpPr>
-      <p:grpSpPr/>
+      <p:grpSpPr>
+        <a:xfrm>
+          <a:off x="0" y="0"/>
+          <a:ext cx="0" cy="0"/>
+          <a:chOff x="0" y="0"/>
+          <a:chExt cx="0" cy="0"/>
+        </a:xfrm>
+      </p:grpSpPr>
       <p:sp>
         <p:nvSpPr>
           <p:cNvPr id="2" name="Rectangle 1"/>
@@ -26852,6 +27055,7 @@
           <a:lstStyle/>
           <a:p>
             <a:pPr algn="ctr"/>
+            <a:endParaRPr/>
           </a:p>
         </p:txBody>
       </p:sp>
@@ -26895,6 +27099,7 @@
           <a:lstStyle/>
           <a:p>
             <a:pPr algn="ctr"/>
+            <a:endParaRPr/>
           </a:p>
         </p:txBody>
       </p:sp>
@@ -26915,7 +27120,7 @@
           <a:noFill/>
         </p:spPr>
         <p:txBody>
-          <a:bodyPr wrap="square" lIns="0" rIns="0" tIns="0" bIns="0" anchor="ctr">
+          <a:bodyPr wrap="square" lIns="0" tIns="0" rIns="0" bIns="0" anchor="ctr">
             <a:spAutoFit/>
           </a:bodyPr>
           <a:lstStyle/>
@@ -26960,7 +27165,7 @@
           <a:noFill/>
         </p:spPr>
         <p:txBody>
-          <a:bodyPr wrap="square" lIns="0" rIns="0" tIns="0" bIns="0" anchor="ctr">
+          <a:bodyPr wrap="square" lIns="0" tIns="0" rIns="0" bIns="0" anchor="ctr">
             <a:spAutoFit/>
           </a:bodyPr>
           <a:lstStyle/>
@@ -27028,6 +27233,7 @@
           <a:lstStyle/>
           <a:p>
             <a:pPr algn="ctr"/>
+            <a:endParaRPr/>
           </a:p>
         </p:txBody>
       </p:sp>
@@ -27071,6 +27277,7 @@
           <a:lstStyle/>
           <a:p>
             <a:pPr algn="ctr"/>
+            <a:endParaRPr/>
           </a:p>
         </p:txBody>
       </p:sp>
@@ -27091,7 +27298,7 @@
           <a:noFill/>
         </p:spPr>
         <p:txBody>
-          <a:bodyPr wrap="square" lIns="0" rIns="0" tIns="0" bIns="0" anchor="ctr">
+          <a:bodyPr wrap="square" lIns="0" tIns="0" rIns="0" bIns="0" anchor="ctr">
             <a:spAutoFit/>
           </a:bodyPr>
           <a:lstStyle/>
@@ -27136,7 +27343,7 @@
           <a:noFill/>
         </p:spPr>
         <p:txBody>
-          <a:bodyPr wrap="square" lIns="0" rIns="0" tIns="0" bIns="0" anchor="t">
+          <a:bodyPr wrap="square" lIns="0" tIns="0" rIns="0" bIns="0" anchor="t">
             <a:spAutoFit/>
           </a:bodyPr>
           <a:lstStyle/>
@@ -28108,7 +28315,7 @@
           <a:noFill/>
         </p:spPr>
         <p:txBody>
-          <a:bodyPr wrap="square" lIns="0" rIns="0" tIns="0" bIns="0" anchor="ctr">
+          <a:bodyPr wrap="square" lIns="0" tIns="0" rIns="0" bIns="0" anchor="ctr">
             <a:spAutoFit/>
           </a:bodyPr>
           <a:lstStyle/>
@@ -28145,7 +28352,7 @@
 </file>
 
 <file path=ppt/slides/slide28.xml><?xml version="1.0" encoding="utf-8"?>
-<p:sld xmlns:a="http://schemas.openxmlformats.org/drawingml/2006/main" xmlns:p="http://schemas.openxmlformats.org/presentationml/2006/main" xmlns:r="http://schemas.openxmlformats.org/officeDocument/2006/relationships">
+<p:sld xmlns:a="http://schemas.openxmlformats.org/drawingml/2006/main" xmlns:r="http://schemas.openxmlformats.org/officeDocument/2006/relationships" xmlns:p="http://schemas.openxmlformats.org/presentationml/2006/main">
   <p:cSld>
     <p:bg>
       <p:bgPr>
@@ -28161,7 +28368,14 @@
         <p:cNvGrpSpPr/>
         <p:nvPr/>
       </p:nvGrpSpPr>
-      <p:grpSpPr/>
+      <p:grpSpPr>
+        <a:xfrm>
+          <a:off x="0" y="0"/>
+          <a:ext cx="0" cy="0"/>
+          <a:chOff x="0" y="0"/>
+          <a:chExt cx="0" cy="0"/>
+        </a:xfrm>
+      </p:grpSpPr>
       <p:sp>
         <p:nvSpPr>
           <p:cNvPr id="2" name="Rectangle 1"/>
@@ -28202,6 +28416,7 @@
           <a:lstStyle/>
           <a:p>
             <a:pPr algn="ctr"/>
+            <a:endParaRPr/>
           </a:p>
         </p:txBody>
       </p:sp>
@@ -28245,6 +28460,7 @@
           <a:lstStyle/>
           <a:p>
             <a:pPr algn="ctr"/>
+            <a:endParaRPr/>
           </a:p>
         </p:txBody>
       </p:sp>
@@ -28265,7 +28481,7 @@
           <a:noFill/>
         </p:spPr>
         <p:txBody>
-          <a:bodyPr wrap="square" lIns="0" rIns="0" tIns="0" bIns="0" anchor="ctr">
+          <a:bodyPr wrap="square" lIns="0" tIns="0" rIns="0" bIns="0" anchor="ctr">
             <a:spAutoFit/>
           </a:bodyPr>
           <a:lstStyle/>
@@ -28310,7 +28526,7 @@
           <a:noFill/>
         </p:spPr>
         <p:txBody>
-          <a:bodyPr wrap="square" lIns="0" rIns="0" tIns="0" bIns="0" anchor="ctr">
+          <a:bodyPr wrap="square" lIns="0" tIns="0" rIns="0" bIns="0" anchor="ctr">
             <a:spAutoFit/>
           </a:bodyPr>
           <a:lstStyle/>
@@ -28378,6 +28594,7 @@
           <a:lstStyle/>
           <a:p>
             <a:pPr algn="ctr"/>
+            <a:endParaRPr/>
           </a:p>
         </p:txBody>
       </p:sp>
@@ -28421,6 +28638,7 @@
           <a:lstStyle/>
           <a:p>
             <a:pPr algn="ctr"/>
+            <a:endParaRPr/>
           </a:p>
         </p:txBody>
       </p:sp>
@@ -28441,7 +28659,7 @@
           <a:noFill/>
         </p:spPr>
         <p:txBody>
-          <a:bodyPr wrap="square" lIns="0" rIns="0" tIns="0" bIns="0" anchor="ctr">
+          <a:bodyPr wrap="square" lIns="0" tIns="0" rIns="0" bIns="0" anchor="ctr">
             <a:spAutoFit/>
           </a:bodyPr>
           <a:lstStyle/>
@@ -28486,7 +28704,7 @@
           <a:noFill/>
         </p:spPr>
         <p:txBody>
-          <a:bodyPr wrap="square" lIns="0" rIns="0" tIns="0" bIns="0" anchor="t">
+          <a:bodyPr wrap="square" lIns="0" tIns="0" rIns="0" bIns="0" anchor="t">
             <a:spAutoFit/>
           </a:bodyPr>
           <a:lstStyle/>
@@ -29458,7 +29676,7 @@
           <a:noFill/>
         </p:spPr>
         <p:txBody>
-          <a:bodyPr wrap="square" lIns="0" rIns="0" tIns="0" bIns="0" anchor="ctr">
+          <a:bodyPr wrap="square" lIns="0" tIns="0" rIns="0" bIns="0" anchor="ctr">
             <a:spAutoFit/>
           </a:bodyPr>
           <a:lstStyle/>
@@ -29495,7 +29713,7 @@
 </file>
 
 <file path=ppt/slides/slide29.xml><?xml version="1.0" encoding="utf-8"?>
-<p:sld xmlns:a="http://schemas.openxmlformats.org/drawingml/2006/main" xmlns:p="http://schemas.openxmlformats.org/presentationml/2006/main" xmlns:r="http://schemas.openxmlformats.org/officeDocument/2006/relationships">
+<p:sld xmlns:a="http://schemas.openxmlformats.org/drawingml/2006/main" xmlns:r="http://schemas.openxmlformats.org/officeDocument/2006/relationships" xmlns:p="http://schemas.openxmlformats.org/presentationml/2006/main">
   <p:cSld>
     <p:bg>
       <p:bgPr>
@@ -29511,7 +29729,14 @@
         <p:cNvGrpSpPr/>
         <p:nvPr/>
       </p:nvGrpSpPr>
-      <p:grpSpPr/>
+      <p:grpSpPr>
+        <a:xfrm>
+          <a:off x="0" y="0"/>
+          <a:ext cx="0" cy="0"/>
+          <a:chOff x="0" y="0"/>
+          <a:chExt cx="0" cy="0"/>
+        </a:xfrm>
+      </p:grpSpPr>
       <p:sp>
         <p:nvSpPr>
           <p:cNvPr id="2" name="Rectangle 1"/>
@@ -29552,6 +29777,7 @@
           <a:lstStyle/>
           <a:p>
             <a:pPr algn="ctr"/>
+            <a:endParaRPr/>
           </a:p>
         </p:txBody>
       </p:sp>
@@ -29595,6 +29821,7 @@
           <a:lstStyle/>
           <a:p>
             <a:pPr algn="ctr"/>
+            <a:endParaRPr/>
           </a:p>
         </p:txBody>
       </p:sp>
@@ -29615,7 +29842,7 @@
           <a:noFill/>
         </p:spPr>
         <p:txBody>
-          <a:bodyPr wrap="square" lIns="0" rIns="0" tIns="0" bIns="0" anchor="ctr">
+          <a:bodyPr wrap="square" lIns="0" tIns="0" rIns="0" bIns="0" anchor="ctr">
             <a:spAutoFit/>
           </a:bodyPr>
           <a:lstStyle/>
@@ -29660,7 +29887,7 @@
           <a:noFill/>
         </p:spPr>
         <p:txBody>
-          <a:bodyPr wrap="square" lIns="0" rIns="0" tIns="0" bIns="0" anchor="ctr">
+          <a:bodyPr wrap="square" lIns="0" tIns="0" rIns="0" bIns="0" anchor="ctr">
             <a:spAutoFit/>
           </a:bodyPr>
           <a:lstStyle/>
@@ -29728,6 +29955,7 @@
           <a:lstStyle/>
           <a:p>
             <a:pPr algn="ctr"/>
+            <a:endParaRPr/>
           </a:p>
         </p:txBody>
       </p:sp>
@@ -29771,6 +29999,7 @@
           <a:lstStyle/>
           <a:p>
             <a:pPr algn="ctr"/>
+            <a:endParaRPr/>
           </a:p>
         </p:txBody>
       </p:sp>
@@ -29791,7 +30020,7 @@
           <a:noFill/>
         </p:spPr>
         <p:txBody>
-          <a:bodyPr wrap="square" lIns="0" rIns="0" tIns="0" bIns="0" anchor="ctr">
+          <a:bodyPr wrap="square" lIns="0" tIns="0" rIns="0" bIns="0" anchor="ctr">
             <a:spAutoFit/>
           </a:bodyPr>
           <a:lstStyle/>
@@ -29836,7 +30065,7 @@
           <a:noFill/>
         </p:spPr>
         <p:txBody>
-          <a:bodyPr wrap="square" lIns="0" rIns="0" tIns="0" bIns="0" anchor="t">
+          <a:bodyPr wrap="square" lIns="0" tIns="0" rIns="0" bIns="0" anchor="t">
             <a:spAutoFit/>
           </a:bodyPr>
           <a:lstStyle/>
@@ -30777,7 +31006,7 @@
           <a:noFill/>
         </p:spPr>
         <p:txBody>
-          <a:bodyPr wrap="square" lIns="0" rIns="0" tIns="0" bIns="0" anchor="ctr">
+          <a:bodyPr wrap="square" lIns="0" tIns="0" rIns="0" bIns="0" anchor="ctr">
             <a:spAutoFit/>
           </a:bodyPr>
           <a:lstStyle/>
@@ -30814,7 +31043,7 @@
 </file>
 
 <file path=ppt/slides/slide3.xml><?xml version="1.0" encoding="utf-8"?>
-<p:sld xmlns:a="http://schemas.openxmlformats.org/drawingml/2006/main" xmlns:p="http://schemas.openxmlformats.org/presentationml/2006/main" xmlns:r="http://schemas.openxmlformats.org/officeDocument/2006/relationships">
+<p:sld xmlns:a="http://schemas.openxmlformats.org/drawingml/2006/main" xmlns:r="http://schemas.openxmlformats.org/officeDocument/2006/relationships" xmlns:p="http://schemas.openxmlformats.org/presentationml/2006/main">
   <p:cSld>
     <p:bg>
       <p:bgPr>
@@ -30830,7 +31059,14 @@
         <p:cNvGrpSpPr/>
         <p:nvPr/>
       </p:nvGrpSpPr>
-      <p:grpSpPr/>
+      <p:grpSpPr>
+        <a:xfrm>
+          <a:off x="0" y="0"/>
+          <a:ext cx="0" cy="0"/>
+          <a:chOff x="0" y="0"/>
+          <a:chExt cx="0" cy="0"/>
+        </a:xfrm>
+      </p:grpSpPr>
       <p:sp>
         <p:nvSpPr>
           <p:cNvPr id="2" name="Rectangle 1"/>
@@ -30871,6 +31107,7 @@
           <a:lstStyle/>
           <a:p>
             <a:pPr algn="ctr"/>
+            <a:endParaRPr/>
           </a:p>
         </p:txBody>
       </p:sp>
@@ -30914,6 +31151,7 @@
           <a:lstStyle/>
           <a:p>
             <a:pPr algn="ctr"/>
+            <a:endParaRPr/>
           </a:p>
         </p:txBody>
       </p:sp>
@@ -30934,7 +31172,7 @@
           <a:noFill/>
         </p:spPr>
         <p:txBody>
-          <a:bodyPr wrap="square" lIns="0" rIns="0" tIns="0" bIns="0" anchor="ctr">
+          <a:bodyPr wrap="square" lIns="0" tIns="0" rIns="0" bIns="0" anchor="ctr">
             <a:spAutoFit/>
           </a:bodyPr>
           <a:lstStyle/>
@@ -30979,7 +31217,7 @@
           <a:noFill/>
         </p:spPr>
         <p:txBody>
-          <a:bodyPr wrap="square" lIns="0" rIns="0" tIns="0" bIns="0" anchor="ctr">
+          <a:bodyPr wrap="square" lIns="0" tIns="0" rIns="0" bIns="0" anchor="ctr">
             <a:spAutoFit/>
           </a:bodyPr>
           <a:lstStyle/>
@@ -31047,6 +31285,7 @@
           <a:lstStyle/>
           <a:p>
             <a:pPr algn="ctr"/>
+            <a:endParaRPr/>
           </a:p>
         </p:txBody>
       </p:sp>
@@ -31090,6 +31329,7 @@
           <a:lstStyle/>
           <a:p>
             <a:pPr algn="ctr"/>
+            <a:endParaRPr/>
           </a:p>
         </p:txBody>
       </p:sp>
@@ -31110,7 +31350,7 @@
           <a:noFill/>
         </p:spPr>
         <p:txBody>
-          <a:bodyPr wrap="square" lIns="0" rIns="0" tIns="0" bIns="0" anchor="ctr">
+          <a:bodyPr wrap="square" lIns="0" tIns="0" rIns="0" bIns="0" anchor="ctr">
             <a:spAutoFit/>
           </a:bodyPr>
           <a:lstStyle/>
@@ -31155,7 +31395,7 @@
           <a:noFill/>
         </p:spPr>
         <p:txBody>
-          <a:bodyPr wrap="square" lIns="0" rIns="0" tIns="0" bIns="0" anchor="t">
+          <a:bodyPr wrap="square" lIns="0" tIns="0" rIns="0" bIns="0" anchor="t">
             <a:spAutoFit/>
           </a:bodyPr>
           <a:lstStyle/>
@@ -32127,7 +32367,7 @@
           <a:noFill/>
         </p:spPr>
         <p:txBody>
-          <a:bodyPr wrap="square" lIns="0" rIns="0" tIns="0" bIns="0" anchor="ctr">
+          <a:bodyPr wrap="square" lIns="0" tIns="0" rIns="0" bIns="0" anchor="ctr">
             <a:spAutoFit/>
           </a:bodyPr>
           <a:lstStyle/>
@@ -32164,7 +32404,7 @@
 </file>
 
 <file path=ppt/slides/slide30.xml><?xml version="1.0" encoding="utf-8"?>
-<p:sld xmlns:a="http://schemas.openxmlformats.org/drawingml/2006/main" xmlns:p="http://schemas.openxmlformats.org/presentationml/2006/main" xmlns:r="http://schemas.openxmlformats.org/officeDocument/2006/relationships">
+<p:sld xmlns:a="http://schemas.openxmlformats.org/drawingml/2006/main" xmlns:r="http://schemas.openxmlformats.org/officeDocument/2006/relationships" xmlns:p="http://schemas.openxmlformats.org/presentationml/2006/main">
   <p:cSld>
     <p:bg>
       <p:bgPr>
@@ -32180,7 +32420,14 @@
         <p:cNvGrpSpPr/>
         <p:nvPr/>
       </p:nvGrpSpPr>
-      <p:grpSpPr/>
+      <p:grpSpPr>
+        <a:xfrm>
+          <a:off x="0" y="0"/>
+          <a:ext cx="0" cy="0"/>
+          <a:chOff x="0" y="0"/>
+          <a:chExt cx="0" cy="0"/>
+        </a:xfrm>
+      </p:grpSpPr>
       <p:sp>
         <p:nvSpPr>
           <p:cNvPr id="2" name="Rectangle 1"/>
@@ -32221,6 +32468,7 @@
           <a:lstStyle/>
           <a:p>
             <a:pPr algn="ctr"/>
+            <a:endParaRPr/>
           </a:p>
         </p:txBody>
       </p:sp>
@@ -32264,6 +32512,7 @@
           <a:lstStyle/>
           <a:p>
             <a:pPr algn="ctr"/>
+            <a:endParaRPr/>
           </a:p>
         </p:txBody>
       </p:sp>
@@ -32284,7 +32533,7 @@
           <a:noFill/>
         </p:spPr>
         <p:txBody>
-          <a:bodyPr wrap="square" lIns="0" rIns="0" tIns="0" bIns="0" anchor="ctr">
+          <a:bodyPr wrap="square" lIns="0" tIns="0" rIns="0" bIns="0" anchor="ctr">
             <a:spAutoFit/>
           </a:bodyPr>
           <a:lstStyle/>
@@ -32329,7 +32578,7 @@
           <a:noFill/>
         </p:spPr>
         <p:txBody>
-          <a:bodyPr wrap="square" lIns="0" rIns="0" tIns="0" bIns="0" anchor="ctr">
+          <a:bodyPr wrap="square" lIns="0" tIns="0" rIns="0" bIns="0" anchor="ctr">
             <a:spAutoFit/>
           </a:bodyPr>
           <a:lstStyle/>
@@ -32397,6 +32646,7 @@
           <a:lstStyle/>
           <a:p>
             <a:pPr algn="ctr"/>
+            <a:endParaRPr/>
           </a:p>
         </p:txBody>
       </p:sp>
@@ -32440,6 +32690,7 @@
           <a:lstStyle/>
           <a:p>
             <a:pPr algn="ctr"/>
+            <a:endParaRPr/>
           </a:p>
         </p:txBody>
       </p:sp>
@@ -32460,7 +32711,7 @@
           <a:noFill/>
         </p:spPr>
         <p:txBody>
-          <a:bodyPr wrap="square" lIns="0" rIns="0" tIns="0" bIns="0" anchor="ctr">
+          <a:bodyPr wrap="square" lIns="0" tIns="0" rIns="0" bIns="0" anchor="ctr">
             <a:spAutoFit/>
           </a:bodyPr>
           <a:lstStyle/>
@@ -32505,7 +32756,7 @@
           <a:noFill/>
         </p:spPr>
         <p:txBody>
-          <a:bodyPr wrap="square" lIns="0" rIns="0" tIns="0" bIns="0" anchor="t">
+          <a:bodyPr wrap="square" lIns="0" tIns="0" rIns="0" bIns="0" anchor="t">
             <a:spAutoFit/>
           </a:bodyPr>
           <a:lstStyle/>
@@ -33508,7 +33759,7 @@
           <a:noFill/>
         </p:spPr>
         <p:txBody>
-          <a:bodyPr wrap="square" lIns="0" rIns="0" tIns="0" bIns="0" anchor="ctr">
+          <a:bodyPr wrap="square" lIns="0" tIns="0" rIns="0" bIns="0" anchor="ctr">
             <a:spAutoFit/>
           </a:bodyPr>
           <a:lstStyle/>
@@ -33545,7 +33796,7 @@
 </file>
 
 <file path=ppt/slides/slide31.xml><?xml version="1.0" encoding="utf-8"?>
-<p:sld xmlns:a="http://schemas.openxmlformats.org/drawingml/2006/main" xmlns:p="http://schemas.openxmlformats.org/presentationml/2006/main" xmlns:r="http://schemas.openxmlformats.org/officeDocument/2006/relationships">
+<p:sld xmlns:a="http://schemas.openxmlformats.org/drawingml/2006/main" xmlns:r="http://schemas.openxmlformats.org/officeDocument/2006/relationships" xmlns:p="http://schemas.openxmlformats.org/presentationml/2006/main">
   <p:cSld>
     <p:bg>
       <p:bgPr>
@@ -33561,7 +33812,14 @@
         <p:cNvGrpSpPr/>
         <p:nvPr/>
       </p:nvGrpSpPr>
-      <p:grpSpPr/>
+      <p:grpSpPr>
+        <a:xfrm>
+          <a:off x="0" y="0"/>
+          <a:ext cx="0" cy="0"/>
+          <a:chOff x="0" y="0"/>
+          <a:chExt cx="0" cy="0"/>
+        </a:xfrm>
+      </p:grpSpPr>
       <p:sp>
         <p:nvSpPr>
           <p:cNvPr id="2" name="Rectangle 1"/>
@@ -33602,6 +33860,7 @@
           <a:lstStyle/>
           <a:p>
             <a:pPr algn="ctr"/>
+            <a:endParaRPr/>
           </a:p>
         </p:txBody>
       </p:sp>
@@ -33645,6 +33904,7 @@
           <a:lstStyle/>
           <a:p>
             <a:pPr algn="ctr"/>
+            <a:endParaRPr/>
           </a:p>
         </p:txBody>
       </p:sp>
@@ -33665,7 +33925,7 @@
           <a:noFill/>
         </p:spPr>
         <p:txBody>
-          <a:bodyPr wrap="square" lIns="0" rIns="0" tIns="0" bIns="0" anchor="ctr">
+          <a:bodyPr wrap="square" lIns="0" tIns="0" rIns="0" bIns="0" anchor="ctr">
             <a:spAutoFit/>
           </a:bodyPr>
           <a:lstStyle/>
@@ -33710,7 +33970,7 @@
           <a:noFill/>
         </p:spPr>
         <p:txBody>
-          <a:bodyPr wrap="square" lIns="0" rIns="0" tIns="0" bIns="0" anchor="ctr">
+          <a:bodyPr wrap="square" lIns="0" tIns="0" rIns="0" bIns="0" anchor="ctr">
             <a:spAutoFit/>
           </a:bodyPr>
           <a:lstStyle/>
@@ -33778,6 +34038,7 @@
           <a:lstStyle/>
           <a:p>
             <a:pPr algn="ctr"/>
+            <a:endParaRPr/>
           </a:p>
         </p:txBody>
       </p:sp>
@@ -33821,6 +34082,7 @@
           <a:lstStyle/>
           <a:p>
             <a:pPr algn="ctr"/>
+            <a:endParaRPr/>
           </a:p>
         </p:txBody>
       </p:sp>
@@ -33841,7 +34103,7 @@
           <a:noFill/>
         </p:spPr>
         <p:txBody>
-          <a:bodyPr wrap="square" lIns="0" rIns="0" tIns="0" bIns="0" anchor="ctr">
+          <a:bodyPr wrap="square" lIns="0" tIns="0" rIns="0" bIns="0" anchor="ctr">
             <a:spAutoFit/>
           </a:bodyPr>
           <a:lstStyle/>
@@ -33886,7 +34148,7 @@
           <a:noFill/>
         </p:spPr>
         <p:txBody>
-          <a:bodyPr wrap="square" lIns="0" rIns="0" tIns="0" bIns="0" anchor="t">
+          <a:bodyPr wrap="square" lIns="0" tIns="0" rIns="0" bIns="0" anchor="t">
             <a:spAutoFit/>
           </a:bodyPr>
           <a:lstStyle/>
@@ -34858,7 +35120,7 @@
           <a:noFill/>
         </p:spPr>
         <p:txBody>
-          <a:bodyPr wrap="square" lIns="0" rIns="0" tIns="0" bIns="0" anchor="ctr">
+          <a:bodyPr wrap="square" lIns="0" tIns="0" rIns="0" bIns="0" anchor="ctr">
             <a:spAutoFit/>
           </a:bodyPr>
           <a:lstStyle/>
@@ -34895,7 +35157,7 @@
 </file>
 
 <file path=ppt/slides/slide32.xml><?xml version="1.0" encoding="utf-8"?>
-<p:sld xmlns:a="http://schemas.openxmlformats.org/drawingml/2006/main" xmlns:p="http://schemas.openxmlformats.org/presentationml/2006/main" xmlns:r="http://schemas.openxmlformats.org/officeDocument/2006/relationships">
+<p:sld xmlns:a="http://schemas.openxmlformats.org/drawingml/2006/main" xmlns:r="http://schemas.openxmlformats.org/officeDocument/2006/relationships" xmlns:p="http://schemas.openxmlformats.org/presentationml/2006/main">
   <p:cSld>
     <p:bg>
       <p:bgPr>
@@ -34911,7 +35173,14 @@
         <p:cNvGrpSpPr/>
         <p:nvPr/>
       </p:nvGrpSpPr>
-      <p:grpSpPr/>
+      <p:grpSpPr>
+        <a:xfrm>
+          <a:off x="0" y="0"/>
+          <a:ext cx="0" cy="0"/>
+          <a:chOff x="0" y="0"/>
+          <a:chExt cx="0" cy="0"/>
+        </a:xfrm>
+      </p:grpSpPr>
       <p:sp>
         <p:nvSpPr>
           <p:cNvPr id="2" name="Rectangle 1"/>
@@ -34952,6 +35221,7 @@
           <a:lstStyle/>
           <a:p>
             <a:pPr algn="ctr"/>
+            <a:endParaRPr/>
           </a:p>
         </p:txBody>
       </p:sp>
@@ -34995,6 +35265,7 @@
           <a:lstStyle/>
           <a:p>
             <a:pPr algn="ctr"/>
+            <a:endParaRPr/>
           </a:p>
         </p:txBody>
       </p:sp>
@@ -35015,7 +35286,7 @@
           <a:noFill/>
         </p:spPr>
         <p:txBody>
-          <a:bodyPr wrap="square" lIns="0" rIns="0" tIns="0" bIns="0" anchor="ctr">
+          <a:bodyPr wrap="square" lIns="0" tIns="0" rIns="0" bIns="0" anchor="ctr">
             <a:spAutoFit/>
           </a:bodyPr>
           <a:lstStyle/>
@@ -35060,7 +35331,7 @@
           <a:noFill/>
         </p:spPr>
         <p:txBody>
-          <a:bodyPr wrap="square" lIns="0" rIns="0" tIns="0" bIns="0" anchor="ctr">
+          <a:bodyPr wrap="square" lIns="0" tIns="0" rIns="0" bIns="0" anchor="ctr">
             <a:spAutoFit/>
           </a:bodyPr>
           <a:lstStyle/>
@@ -35128,6 +35399,7 @@
           <a:lstStyle/>
           <a:p>
             <a:pPr algn="ctr"/>
+            <a:endParaRPr/>
           </a:p>
         </p:txBody>
       </p:sp>
@@ -35171,6 +35443,7 @@
           <a:lstStyle/>
           <a:p>
             <a:pPr algn="ctr"/>
+            <a:endParaRPr/>
           </a:p>
         </p:txBody>
       </p:sp>
@@ -35191,7 +35464,7 @@
           <a:noFill/>
         </p:spPr>
         <p:txBody>
-          <a:bodyPr wrap="square" lIns="0" rIns="0" tIns="0" bIns="0" anchor="ctr">
+          <a:bodyPr wrap="square" lIns="0" tIns="0" rIns="0" bIns="0" anchor="ctr">
             <a:spAutoFit/>
           </a:bodyPr>
           <a:lstStyle/>
@@ -35236,7 +35509,7 @@
           <a:noFill/>
         </p:spPr>
         <p:txBody>
-          <a:bodyPr wrap="square" lIns="0" rIns="0" tIns="0" bIns="0" anchor="t">
+          <a:bodyPr wrap="square" lIns="0" tIns="0" rIns="0" bIns="0" anchor="t">
             <a:spAutoFit/>
           </a:bodyPr>
           <a:lstStyle/>
@@ -36208,7 +36481,7 @@
           <a:noFill/>
         </p:spPr>
         <p:txBody>
-          <a:bodyPr wrap="square" lIns="0" rIns="0" tIns="0" bIns="0" anchor="ctr">
+          <a:bodyPr wrap="square" lIns="0" tIns="0" rIns="0" bIns="0" anchor="ctr">
             <a:spAutoFit/>
           </a:bodyPr>
           <a:lstStyle/>
@@ -36245,7 +36518,7 @@
 </file>
 
 <file path=ppt/slides/slide33.xml><?xml version="1.0" encoding="utf-8"?>
-<p:sld xmlns:a="http://schemas.openxmlformats.org/drawingml/2006/main" xmlns:p="http://schemas.openxmlformats.org/presentationml/2006/main" xmlns:r="http://schemas.openxmlformats.org/officeDocument/2006/relationships">
+<p:sld xmlns:a="http://schemas.openxmlformats.org/drawingml/2006/main" xmlns:r="http://schemas.openxmlformats.org/officeDocument/2006/relationships" xmlns:p="http://schemas.openxmlformats.org/presentationml/2006/main">
   <p:cSld>
     <p:bg>
       <p:bgPr>
@@ -36261,7 +36534,14 @@
         <p:cNvGrpSpPr/>
         <p:nvPr/>
       </p:nvGrpSpPr>
-      <p:grpSpPr/>
+      <p:grpSpPr>
+        <a:xfrm>
+          <a:off x="0" y="0"/>
+          <a:ext cx="0" cy="0"/>
+          <a:chOff x="0" y="0"/>
+          <a:chExt cx="0" cy="0"/>
+        </a:xfrm>
+      </p:grpSpPr>
       <p:sp>
         <p:nvSpPr>
           <p:cNvPr id="2" name="Rectangle 1"/>
@@ -36302,6 +36582,7 @@
           <a:lstStyle/>
           <a:p>
             <a:pPr algn="ctr"/>
+            <a:endParaRPr/>
           </a:p>
         </p:txBody>
       </p:sp>
@@ -36345,6 +36626,7 @@
           <a:lstStyle/>
           <a:p>
             <a:pPr algn="ctr"/>
+            <a:endParaRPr/>
           </a:p>
         </p:txBody>
       </p:sp>
@@ -36365,7 +36647,7 @@
           <a:noFill/>
         </p:spPr>
         <p:txBody>
-          <a:bodyPr wrap="square" lIns="0" rIns="0" tIns="0" bIns="0" anchor="ctr">
+          <a:bodyPr wrap="square" lIns="0" tIns="0" rIns="0" bIns="0" anchor="ctr">
             <a:spAutoFit/>
           </a:bodyPr>
           <a:lstStyle/>
@@ -36410,7 +36692,7 @@
           <a:noFill/>
         </p:spPr>
         <p:txBody>
-          <a:bodyPr wrap="square" lIns="0" rIns="0" tIns="0" bIns="0" anchor="ctr">
+          <a:bodyPr wrap="square" lIns="0" tIns="0" rIns="0" bIns="0" anchor="ctr">
             <a:spAutoFit/>
           </a:bodyPr>
           <a:lstStyle/>
@@ -36478,6 +36760,7 @@
           <a:lstStyle/>
           <a:p>
             <a:pPr algn="ctr"/>
+            <a:endParaRPr/>
           </a:p>
         </p:txBody>
       </p:sp>
@@ -36521,6 +36804,7 @@
           <a:lstStyle/>
           <a:p>
             <a:pPr algn="ctr"/>
+            <a:endParaRPr/>
           </a:p>
         </p:txBody>
       </p:sp>
@@ -36541,7 +36825,7 @@
           <a:noFill/>
         </p:spPr>
         <p:txBody>
-          <a:bodyPr wrap="square" lIns="0" rIns="0" tIns="0" bIns="0" anchor="ctr">
+          <a:bodyPr wrap="square" lIns="0" tIns="0" rIns="0" bIns="0" anchor="ctr">
             <a:spAutoFit/>
           </a:bodyPr>
           <a:lstStyle/>
@@ -36586,7 +36870,7 @@
           <a:noFill/>
         </p:spPr>
         <p:txBody>
-          <a:bodyPr wrap="square" lIns="0" rIns="0" tIns="0" bIns="0" anchor="t">
+          <a:bodyPr wrap="square" lIns="0" tIns="0" rIns="0" bIns="0" anchor="t">
             <a:spAutoFit/>
           </a:bodyPr>
           <a:lstStyle/>
@@ -37527,7 +37811,7 @@
           <a:noFill/>
         </p:spPr>
         <p:txBody>
-          <a:bodyPr wrap="square" lIns="0" rIns="0" tIns="0" bIns="0" anchor="ctr">
+          <a:bodyPr wrap="square" lIns="0" tIns="0" rIns="0" bIns="0" anchor="ctr">
             <a:spAutoFit/>
           </a:bodyPr>
           <a:lstStyle/>
@@ -37564,7 +37848,7 @@
 </file>
 
 <file path=ppt/slides/slide34.xml><?xml version="1.0" encoding="utf-8"?>
-<p:sld xmlns:a="http://schemas.openxmlformats.org/drawingml/2006/main" xmlns:p="http://schemas.openxmlformats.org/presentationml/2006/main" xmlns:r="http://schemas.openxmlformats.org/officeDocument/2006/relationships">
+<p:sld xmlns:a="http://schemas.openxmlformats.org/drawingml/2006/main" xmlns:r="http://schemas.openxmlformats.org/officeDocument/2006/relationships" xmlns:p="http://schemas.openxmlformats.org/presentationml/2006/main">
   <p:cSld>
     <p:bg>
       <p:bgPr>
@@ -37580,7 +37864,14 @@
         <p:cNvGrpSpPr/>
         <p:nvPr/>
       </p:nvGrpSpPr>
-      <p:grpSpPr/>
+      <p:grpSpPr>
+        <a:xfrm>
+          <a:off x="0" y="0"/>
+          <a:ext cx="0" cy="0"/>
+          <a:chOff x="0" y="0"/>
+          <a:chExt cx="0" cy="0"/>
+        </a:xfrm>
+      </p:grpSpPr>
       <p:sp>
         <p:nvSpPr>
           <p:cNvPr id="2" name="Rectangle 1"/>
@@ -37621,6 +37912,7 @@
           <a:lstStyle/>
           <a:p>
             <a:pPr algn="ctr"/>
+            <a:endParaRPr/>
           </a:p>
         </p:txBody>
       </p:sp>
@@ -37664,6 +37956,7 @@
           <a:lstStyle/>
           <a:p>
             <a:pPr algn="ctr"/>
+            <a:endParaRPr/>
           </a:p>
         </p:txBody>
       </p:sp>
@@ -37684,7 +37977,7 @@
           <a:noFill/>
         </p:spPr>
         <p:txBody>
-          <a:bodyPr wrap="square" lIns="0" rIns="0" tIns="0" bIns="0" anchor="ctr">
+          <a:bodyPr wrap="square" lIns="0" tIns="0" rIns="0" bIns="0" anchor="ctr">
             <a:spAutoFit/>
           </a:bodyPr>
           <a:lstStyle/>
@@ -37729,7 +38022,7 @@
           <a:noFill/>
         </p:spPr>
         <p:txBody>
-          <a:bodyPr wrap="square" lIns="0" rIns="0" tIns="0" bIns="0" anchor="ctr">
+          <a:bodyPr wrap="square" lIns="0" tIns="0" rIns="0" bIns="0" anchor="ctr">
             <a:spAutoFit/>
           </a:bodyPr>
           <a:lstStyle/>
@@ -37797,6 +38090,7 @@
           <a:lstStyle/>
           <a:p>
             <a:pPr algn="ctr"/>
+            <a:endParaRPr/>
           </a:p>
         </p:txBody>
       </p:sp>
@@ -37840,6 +38134,7 @@
           <a:lstStyle/>
           <a:p>
             <a:pPr algn="ctr"/>
+            <a:endParaRPr/>
           </a:p>
         </p:txBody>
       </p:sp>
@@ -37860,7 +38155,7 @@
           <a:noFill/>
         </p:spPr>
         <p:txBody>
-          <a:bodyPr wrap="square" lIns="0" rIns="0" tIns="0" bIns="0" anchor="ctr">
+          <a:bodyPr wrap="square" lIns="0" tIns="0" rIns="0" bIns="0" anchor="ctr">
             <a:spAutoFit/>
           </a:bodyPr>
           <a:lstStyle/>
@@ -37905,7 +38200,7 @@
           <a:noFill/>
         </p:spPr>
         <p:txBody>
-          <a:bodyPr wrap="square" lIns="0" rIns="0" tIns="0" bIns="0" anchor="t">
+          <a:bodyPr wrap="square" lIns="0" tIns="0" rIns="0" bIns="0" anchor="t">
             <a:spAutoFit/>
           </a:bodyPr>
           <a:lstStyle/>
@@ -38908,7 +39203,7 @@
           <a:noFill/>
         </p:spPr>
         <p:txBody>
-          <a:bodyPr wrap="square" lIns="0" rIns="0" tIns="0" bIns="0" anchor="ctr">
+          <a:bodyPr wrap="square" lIns="0" tIns="0" rIns="0" bIns="0" anchor="ctr">
             <a:spAutoFit/>
           </a:bodyPr>
           <a:lstStyle/>
@@ -38945,7 +39240,7 @@
 </file>
 
 <file path=ppt/slides/slide35.xml><?xml version="1.0" encoding="utf-8"?>
-<p:sld xmlns:a="http://schemas.openxmlformats.org/drawingml/2006/main" xmlns:p="http://schemas.openxmlformats.org/presentationml/2006/main" xmlns:r="http://schemas.openxmlformats.org/officeDocument/2006/relationships">
+<p:sld xmlns:a="http://schemas.openxmlformats.org/drawingml/2006/main" xmlns:r="http://schemas.openxmlformats.org/officeDocument/2006/relationships" xmlns:p="http://schemas.openxmlformats.org/presentationml/2006/main">
   <p:cSld>
     <p:bg>
       <p:bgPr>
@@ -38961,7 +39256,14 @@
         <p:cNvGrpSpPr/>
         <p:nvPr/>
       </p:nvGrpSpPr>
-      <p:grpSpPr/>
+      <p:grpSpPr>
+        <a:xfrm>
+          <a:off x="0" y="0"/>
+          <a:ext cx="0" cy="0"/>
+          <a:chOff x="0" y="0"/>
+          <a:chExt cx="0" cy="0"/>
+        </a:xfrm>
+      </p:grpSpPr>
       <p:sp>
         <p:nvSpPr>
           <p:cNvPr id="2" name="Rectangle 1"/>
@@ -39002,6 +39304,7 @@
           <a:lstStyle/>
           <a:p>
             <a:pPr algn="ctr"/>
+            <a:endParaRPr/>
           </a:p>
         </p:txBody>
       </p:sp>
@@ -39045,6 +39348,7 @@
           <a:lstStyle/>
           <a:p>
             <a:pPr algn="ctr"/>
+            <a:endParaRPr/>
           </a:p>
         </p:txBody>
       </p:sp>
@@ -39065,7 +39369,7 @@
           <a:noFill/>
         </p:spPr>
         <p:txBody>
-          <a:bodyPr wrap="square" lIns="0" rIns="0" tIns="0" bIns="0" anchor="ctr">
+          <a:bodyPr wrap="square" lIns="0" tIns="0" rIns="0" bIns="0" anchor="ctr">
             <a:spAutoFit/>
           </a:bodyPr>
           <a:lstStyle/>
@@ -39110,7 +39414,7 @@
           <a:noFill/>
         </p:spPr>
         <p:txBody>
-          <a:bodyPr wrap="square" lIns="0" rIns="0" tIns="0" bIns="0" anchor="ctr">
+          <a:bodyPr wrap="square" lIns="0" tIns="0" rIns="0" bIns="0" anchor="ctr">
             <a:spAutoFit/>
           </a:bodyPr>
           <a:lstStyle/>
@@ -39178,6 +39482,7 @@
           <a:lstStyle/>
           <a:p>
             <a:pPr algn="ctr"/>
+            <a:endParaRPr/>
           </a:p>
         </p:txBody>
       </p:sp>
@@ -39198,7 +39503,7 @@
           <a:noFill/>
         </p:spPr>
         <p:txBody>
-          <a:bodyPr wrap="square" lIns="0" rIns="0" tIns="0" bIns="0" anchor="t">
+          <a:bodyPr wrap="square" lIns="0" tIns="0" rIns="0" bIns="0" anchor="t">
             <a:spAutoFit/>
           </a:bodyPr>
           <a:lstStyle/>
@@ -39661,7 +39966,7 @@
           <a:noFill/>
         </p:spPr>
         <p:txBody>
-          <a:bodyPr wrap="square" lIns="0" rIns="0" tIns="0" bIns="0" anchor="t">
+          <a:bodyPr wrap="square" lIns="0" tIns="0" rIns="0" bIns="0" anchor="t">
             <a:spAutoFit/>
           </a:bodyPr>
           <a:lstStyle/>
@@ -40124,7 +40429,7 @@
           <a:noFill/>
         </p:spPr>
         <p:txBody>
-          <a:bodyPr wrap="square" lIns="0" rIns="0" tIns="0" bIns="0" anchor="t">
+          <a:bodyPr wrap="square" lIns="0" tIns="0" rIns="0" bIns="0" anchor="t">
             <a:spAutoFit/>
           </a:bodyPr>
           <a:lstStyle/>
@@ -40543,7 +40848,7 @@
           <a:noFill/>
         </p:spPr>
         <p:txBody>
-          <a:bodyPr wrap="square" lIns="0" rIns="0" tIns="0" bIns="0" anchor="t">
+          <a:bodyPr wrap="square" lIns="0" tIns="0" rIns="0" bIns="0" anchor="t">
             <a:spAutoFit/>
           </a:bodyPr>
           <a:lstStyle/>
@@ -40962,7 +41267,7 @@
           <a:noFill/>
         </p:spPr>
         <p:txBody>
-          <a:bodyPr wrap="square" lIns="0" rIns="0" tIns="0" bIns="0" anchor="ctr">
+          <a:bodyPr wrap="square" lIns="0" tIns="0" rIns="0" bIns="0" anchor="ctr">
             <a:spAutoFit/>
           </a:bodyPr>
           <a:lstStyle/>
@@ -40999,7 +41304,7 @@
 </file>
 
 <file path=ppt/slides/slide36.xml><?xml version="1.0" encoding="utf-8"?>
-<p:sld xmlns:a="http://schemas.openxmlformats.org/drawingml/2006/main" xmlns:p="http://schemas.openxmlformats.org/presentationml/2006/main" xmlns:r="http://schemas.openxmlformats.org/officeDocument/2006/relationships">
+<p:sld xmlns:a="http://schemas.openxmlformats.org/drawingml/2006/main" xmlns:r="http://schemas.openxmlformats.org/officeDocument/2006/relationships" xmlns:p="http://schemas.openxmlformats.org/presentationml/2006/main">
   <p:cSld>
     <p:bg>
       <p:bgPr>
@@ -41015,7 +41320,14 @@
         <p:cNvGrpSpPr/>
         <p:nvPr/>
       </p:nvGrpSpPr>
-      <p:grpSpPr/>
+      <p:grpSpPr>
+        <a:xfrm>
+          <a:off x="0" y="0"/>
+          <a:ext cx="0" cy="0"/>
+          <a:chOff x="0" y="0"/>
+          <a:chExt cx="0" cy="0"/>
+        </a:xfrm>
+      </p:grpSpPr>
       <p:sp>
         <p:nvSpPr>
           <p:cNvPr id="2" name="Rectangle 1"/>
@@ -41056,6 +41368,7 @@
           <a:lstStyle/>
           <a:p>
             <a:pPr algn="ctr"/>
+            <a:endParaRPr/>
           </a:p>
         </p:txBody>
       </p:sp>
@@ -41099,6 +41412,7 @@
           <a:lstStyle/>
           <a:p>
             <a:pPr algn="ctr"/>
+            <a:endParaRPr/>
           </a:p>
         </p:txBody>
       </p:sp>
@@ -41119,7 +41433,7 @@
           <a:noFill/>
         </p:spPr>
         <p:txBody>
-          <a:bodyPr wrap="square" lIns="0" rIns="0" tIns="0" bIns="0" anchor="ctr">
+          <a:bodyPr wrap="square" lIns="0" tIns="0" rIns="0" bIns="0" anchor="ctr">
             <a:spAutoFit/>
           </a:bodyPr>
           <a:lstStyle/>
@@ -41164,7 +41478,7 @@
           <a:noFill/>
         </p:spPr>
         <p:txBody>
-          <a:bodyPr wrap="square" lIns="0" rIns="0" tIns="0" bIns="0" anchor="ctr">
+          <a:bodyPr wrap="square" lIns="0" tIns="0" rIns="0" bIns="0" anchor="ctr">
             <a:spAutoFit/>
           </a:bodyPr>
           <a:lstStyle/>
@@ -41232,6 +41546,7 @@
           <a:lstStyle/>
           <a:p>
             <a:pPr algn="ctr"/>
+            <a:endParaRPr/>
           </a:p>
         </p:txBody>
       </p:sp>
@@ -41252,7 +41567,7 @@
           <a:noFill/>
         </p:spPr>
         <p:txBody>
-          <a:bodyPr wrap="square" lIns="0" rIns="0" tIns="0" bIns="0" anchor="t">
+          <a:bodyPr wrap="square" lIns="0" tIns="0" rIns="0" bIns="0" anchor="t">
             <a:spAutoFit/>
           </a:bodyPr>
           <a:lstStyle/>
@@ -41715,7 +42030,7 @@
           <a:noFill/>
         </p:spPr>
         <p:txBody>
-          <a:bodyPr wrap="square" lIns="0" rIns="0" tIns="0" bIns="0" anchor="t">
+          <a:bodyPr wrap="square" lIns="0" tIns="0" rIns="0" bIns="0" anchor="t">
             <a:spAutoFit/>
           </a:bodyPr>
           <a:lstStyle/>
@@ -42178,7 +42493,7 @@
           <a:noFill/>
         </p:spPr>
         <p:txBody>
-          <a:bodyPr wrap="square" lIns="0" rIns="0" tIns="0" bIns="0" anchor="t">
+          <a:bodyPr wrap="square" lIns="0" tIns="0" rIns="0" bIns="0" anchor="t">
             <a:spAutoFit/>
           </a:bodyPr>
           <a:lstStyle/>
@@ -42597,7 +42912,7 @@
           <a:noFill/>
         </p:spPr>
         <p:txBody>
-          <a:bodyPr wrap="square" lIns="0" rIns="0" tIns="0" bIns="0" anchor="t">
+          <a:bodyPr wrap="square" lIns="0" tIns="0" rIns="0" bIns="0" anchor="t">
             <a:spAutoFit/>
           </a:bodyPr>
           <a:lstStyle/>
@@ -43016,7 +43331,7 @@
           <a:noFill/>
         </p:spPr>
         <p:txBody>
-          <a:bodyPr wrap="square" lIns="0" rIns="0" tIns="0" bIns="0" anchor="ctr">
+          <a:bodyPr wrap="square" lIns="0" tIns="0" rIns="0" bIns="0" anchor="ctr">
             <a:spAutoFit/>
           </a:bodyPr>
           <a:lstStyle/>
@@ -43053,7 +43368,7 @@
 </file>
 
 <file path=ppt/slides/slide37.xml><?xml version="1.0" encoding="utf-8"?>
-<p:sld xmlns:a="http://schemas.openxmlformats.org/drawingml/2006/main" xmlns:p="http://schemas.openxmlformats.org/presentationml/2006/main" xmlns:r="http://schemas.openxmlformats.org/officeDocument/2006/relationships">
+<p:sld xmlns:a="http://schemas.openxmlformats.org/drawingml/2006/main" xmlns:r="http://schemas.openxmlformats.org/officeDocument/2006/relationships" xmlns:p="http://schemas.openxmlformats.org/presentationml/2006/main">
   <p:cSld>
     <p:bg>
       <p:bgPr>
@@ -43069,7 +43384,14 @@
         <p:cNvGrpSpPr/>
         <p:nvPr/>
       </p:nvGrpSpPr>
-      <p:grpSpPr/>
+      <p:grpSpPr>
+        <a:xfrm>
+          <a:off x="0" y="0"/>
+          <a:ext cx="0" cy="0"/>
+          <a:chOff x="0" y="0"/>
+          <a:chExt cx="0" cy="0"/>
+        </a:xfrm>
+      </p:grpSpPr>
       <p:sp>
         <p:nvSpPr>
           <p:cNvPr id="2" name="Rectangle 1"/>
@@ -43110,6 +43432,7 @@
           <a:lstStyle/>
           <a:p>
             <a:pPr algn="ctr"/>
+            <a:endParaRPr/>
           </a:p>
         </p:txBody>
       </p:sp>
@@ -43153,6 +43476,7 @@
           <a:lstStyle/>
           <a:p>
             <a:pPr algn="ctr"/>
+            <a:endParaRPr/>
           </a:p>
         </p:txBody>
       </p:sp>
@@ -43173,7 +43497,7 @@
           <a:noFill/>
         </p:spPr>
         <p:txBody>
-          <a:bodyPr wrap="square" lIns="0" rIns="0" tIns="0" bIns="0" anchor="ctr">
+          <a:bodyPr wrap="square" lIns="0" tIns="0" rIns="0" bIns="0" anchor="ctr">
             <a:spAutoFit/>
           </a:bodyPr>
           <a:lstStyle/>
@@ -43218,7 +43542,7 @@
           <a:noFill/>
         </p:spPr>
         <p:txBody>
-          <a:bodyPr wrap="square" lIns="0" rIns="0" tIns="0" bIns="0" anchor="ctr">
+          <a:bodyPr wrap="square" lIns="0" tIns="0" rIns="0" bIns="0" anchor="ctr">
             <a:spAutoFit/>
           </a:bodyPr>
           <a:lstStyle/>
@@ -43286,6 +43610,7 @@
           <a:lstStyle/>
           <a:p>
             <a:pPr algn="ctr"/>
+            <a:endParaRPr/>
           </a:p>
         </p:txBody>
       </p:sp>
@@ -43306,7 +43631,7 @@
           <a:noFill/>
         </p:spPr>
         <p:txBody>
-          <a:bodyPr wrap="square" lIns="0" rIns="0" tIns="0" bIns="0" anchor="t">
+          <a:bodyPr wrap="square" lIns="0" tIns="0" rIns="0" bIns="0" anchor="t">
             <a:spAutoFit/>
           </a:bodyPr>
           <a:lstStyle/>
@@ -44165,7 +44490,7 @@
           <a:noFill/>
         </p:spPr>
         <p:txBody>
-          <a:bodyPr wrap="square" lIns="0" rIns="0" tIns="0" bIns="0" anchor="t">
+          <a:bodyPr wrap="square" lIns="0" tIns="0" rIns="0" bIns="0" anchor="t">
             <a:spAutoFit/>
           </a:bodyPr>
           <a:lstStyle/>
@@ -45024,7 +45349,7 @@
           <a:noFill/>
         </p:spPr>
         <p:txBody>
-          <a:bodyPr wrap="square" lIns="0" rIns="0" tIns="0" bIns="0" anchor="ctr">
+          <a:bodyPr wrap="square" lIns="0" tIns="0" rIns="0" bIns="0" anchor="ctr">
             <a:spAutoFit/>
           </a:bodyPr>
           <a:lstStyle/>
@@ -45061,7 +45386,7 @@
 </file>
 
 <file path=ppt/slides/slide38.xml><?xml version="1.0" encoding="utf-8"?>
-<p:sld xmlns:a="http://schemas.openxmlformats.org/drawingml/2006/main" xmlns:p="http://schemas.openxmlformats.org/presentationml/2006/main" xmlns:r="http://schemas.openxmlformats.org/officeDocument/2006/relationships">
+<p:sld xmlns:a="http://schemas.openxmlformats.org/drawingml/2006/main" xmlns:r="http://schemas.openxmlformats.org/officeDocument/2006/relationships" xmlns:p="http://schemas.openxmlformats.org/presentationml/2006/main">
   <p:cSld>
     <p:bg>
       <p:bgPr>
@@ -45077,7 +45402,14 @@
         <p:cNvGrpSpPr/>
         <p:nvPr/>
       </p:nvGrpSpPr>
-      <p:grpSpPr/>
+      <p:grpSpPr>
+        <a:xfrm>
+          <a:off x="0" y="0"/>
+          <a:ext cx="0" cy="0"/>
+          <a:chOff x="0" y="0"/>
+          <a:chExt cx="0" cy="0"/>
+        </a:xfrm>
+      </p:grpSpPr>
       <p:sp>
         <p:nvSpPr>
           <p:cNvPr id="2" name="Rectangle 1"/>
@@ -45118,6 +45450,7 @@
           <a:lstStyle/>
           <a:p>
             <a:pPr algn="ctr"/>
+            <a:endParaRPr/>
           </a:p>
         </p:txBody>
       </p:sp>
@@ -45161,6 +45494,7 @@
           <a:lstStyle/>
           <a:p>
             <a:pPr algn="ctr"/>
+            <a:endParaRPr/>
           </a:p>
         </p:txBody>
       </p:sp>
@@ -45181,7 +45515,7 @@
           <a:noFill/>
         </p:spPr>
         <p:txBody>
-          <a:bodyPr wrap="square" lIns="0" rIns="0" tIns="0" bIns="0" anchor="ctr">
+          <a:bodyPr wrap="square" lIns="0" tIns="0" rIns="0" bIns="0" anchor="ctr">
             <a:spAutoFit/>
           </a:bodyPr>
           <a:lstStyle/>
@@ -45226,7 +45560,7 @@
           <a:noFill/>
         </p:spPr>
         <p:txBody>
-          <a:bodyPr wrap="square" lIns="0" rIns="0" tIns="0" bIns="0" anchor="ctr">
+          <a:bodyPr wrap="square" lIns="0" tIns="0" rIns="0" bIns="0" anchor="ctr">
             <a:spAutoFit/>
           </a:bodyPr>
           <a:lstStyle/>
@@ -45294,6 +45628,7 @@
           <a:lstStyle/>
           <a:p>
             <a:pPr algn="ctr"/>
+            <a:endParaRPr/>
           </a:p>
         </p:txBody>
       </p:sp>
@@ -45314,7 +45649,7 @@
           <a:noFill/>
         </p:spPr>
         <p:txBody>
-          <a:bodyPr wrap="square" lIns="0" rIns="0" tIns="0" bIns="0" anchor="t">
+          <a:bodyPr wrap="square" lIns="0" tIns="0" rIns="0" bIns="0" anchor="t">
             <a:spAutoFit/>
           </a:bodyPr>
           <a:lstStyle/>
@@ -46129,7 +46464,7 @@
           <a:noFill/>
         </p:spPr>
         <p:txBody>
-          <a:bodyPr wrap="square" lIns="0" rIns="0" tIns="0" bIns="0" anchor="ctr">
+          <a:bodyPr wrap="square" lIns="0" tIns="0" rIns="0" bIns="0" anchor="ctr">
             <a:spAutoFit/>
           </a:bodyPr>
           <a:lstStyle/>
@@ -46166,7 +46501,7 @@
 </file>
 
 <file path=ppt/slides/slide39.xml><?xml version="1.0" encoding="utf-8"?>
-<p:sld xmlns:a="http://schemas.openxmlformats.org/drawingml/2006/main" xmlns:p="http://schemas.openxmlformats.org/presentationml/2006/main" xmlns:r="http://schemas.openxmlformats.org/officeDocument/2006/relationships">
+<p:sld xmlns:a="http://schemas.openxmlformats.org/drawingml/2006/main" xmlns:r="http://schemas.openxmlformats.org/officeDocument/2006/relationships" xmlns:p="http://schemas.openxmlformats.org/presentationml/2006/main">
   <p:cSld>
     <p:bg>
       <p:bgPr>
@@ -46182,7 +46517,14 @@
         <p:cNvGrpSpPr/>
         <p:nvPr/>
       </p:nvGrpSpPr>
-      <p:grpSpPr/>
+      <p:grpSpPr>
+        <a:xfrm>
+          <a:off x="0" y="0"/>
+          <a:ext cx="0" cy="0"/>
+          <a:chOff x="0" y="0"/>
+          <a:chExt cx="0" cy="0"/>
+        </a:xfrm>
+      </p:grpSpPr>
       <p:sp>
         <p:nvSpPr>
           <p:cNvPr id="2" name="Rectangle 1"/>
@@ -46223,6 +46565,7 @@
           <a:lstStyle/>
           <a:p>
             <a:pPr algn="ctr"/>
+            <a:endParaRPr/>
           </a:p>
         </p:txBody>
       </p:sp>
@@ -46266,6 +46609,7 @@
           <a:lstStyle/>
           <a:p>
             <a:pPr algn="ctr"/>
+            <a:endParaRPr/>
           </a:p>
         </p:txBody>
       </p:sp>
@@ -46286,7 +46630,7 @@
           <a:noFill/>
         </p:spPr>
         <p:txBody>
-          <a:bodyPr wrap="square" lIns="0" rIns="0" tIns="0" bIns="0" anchor="ctr">
+          <a:bodyPr wrap="square" lIns="0" tIns="0" rIns="0" bIns="0" anchor="ctr">
             <a:spAutoFit/>
           </a:bodyPr>
           <a:lstStyle/>
@@ -46331,7 +46675,7 @@
           <a:noFill/>
         </p:spPr>
         <p:txBody>
-          <a:bodyPr wrap="square" lIns="0" rIns="0" tIns="0" bIns="0" anchor="ctr">
+          <a:bodyPr wrap="square" lIns="0" tIns="0" rIns="0" bIns="0" anchor="ctr">
             <a:spAutoFit/>
           </a:bodyPr>
           <a:lstStyle/>
@@ -46399,6 +46743,7 @@
           <a:lstStyle/>
           <a:p>
             <a:pPr algn="ctr"/>
+            <a:endParaRPr/>
           </a:p>
         </p:txBody>
       </p:sp>
@@ -46419,7 +46764,7 @@
           <a:noFill/>
         </p:spPr>
         <p:txBody>
-          <a:bodyPr wrap="square" lIns="0" rIns="0" tIns="0" bIns="0" anchor="t">
+          <a:bodyPr wrap="square" lIns="0" tIns="0" rIns="0" bIns="0" anchor="t">
             <a:spAutoFit/>
           </a:bodyPr>
           <a:lstStyle/>
@@ -47190,7 +47535,7 @@
           <a:noFill/>
         </p:spPr>
         <p:txBody>
-          <a:bodyPr wrap="square" lIns="0" rIns="0" tIns="0" bIns="0" anchor="ctr">
+          <a:bodyPr wrap="square" lIns="0" tIns="0" rIns="0" bIns="0" anchor="ctr">
             <a:spAutoFit/>
           </a:bodyPr>
           <a:lstStyle/>
@@ -47227,7 +47572,7 @@
 </file>
 
 <file path=ppt/slides/slide4.xml><?xml version="1.0" encoding="utf-8"?>
-<p:sld xmlns:a="http://schemas.openxmlformats.org/drawingml/2006/main" xmlns:p="http://schemas.openxmlformats.org/presentationml/2006/main" xmlns:r="http://schemas.openxmlformats.org/officeDocument/2006/relationships">
+<p:sld xmlns:a="http://schemas.openxmlformats.org/drawingml/2006/main" xmlns:r="http://schemas.openxmlformats.org/officeDocument/2006/relationships" xmlns:p="http://schemas.openxmlformats.org/presentationml/2006/main">
   <p:cSld>
     <p:bg>
       <p:bgPr>
@@ -47243,7 +47588,14 @@
         <p:cNvGrpSpPr/>
         <p:nvPr/>
       </p:nvGrpSpPr>
-      <p:grpSpPr/>
+      <p:grpSpPr>
+        <a:xfrm>
+          <a:off x="0" y="0"/>
+          <a:ext cx="0" cy="0"/>
+          <a:chOff x="0" y="0"/>
+          <a:chExt cx="0" cy="0"/>
+        </a:xfrm>
+      </p:grpSpPr>
       <p:sp>
         <p:nvSpPr>
           <p:cNvPr id="2" name="Rectangle 1"/>
@@ -47284,6 +47636,7 @@
           <a:lstStyle/>
           <a:p>
             <a:pPr algn="ctr"/>
+            <a:endParaRPr/>
           </a:p>
         </p:txBody>
       </p:sp>
@@ -47327,6 +47680,7 @@
           <a:lstStyle/>
           <a:p>
             <a:pPr algn="ctr"/>
+            <a:endParaRPr/>
           </a:p>
         </p:txBody>
       </p:sp>
@@ -47347,7 +47701,7 @@
           <a:noFill/>
         </p:spPr>
         <p:txBody>
-          <a:bodyPr wrap="square" lIns="0" rIns="0" tIns="0" bIns="0" anchor="ctr">
+          <a:bodyPr wrap="square" lIns="0" tIns="0" rIns="0" bIns="0" anchor="ctr">
             <a:spAutoFit/>
           </a:bodyPr>
           <a:lstStyle/>
@@ -47392,7 +47746,7 @@
           <a:noFill/>
         </p:spPr>
         <p:txBody>
-          <a:bodyPr wrap="square" lIns="0" rIns="0" tIns="0" bIns="0" anchor="ctr">
+          <a:bodyPr wrap="square" lIns="0" tIns="0" rIns="0" bIns="0" anchor="ctr">
             <a:spAutoFit/>
           </a:bodyPr>
           <a:lstStyle/>
@@ -47460,6 +47814,7 @@
           <a:lstStyle/>
           <a:p>
             <a:pPr algn="ctr"/>
+            <a:endParaRPr/>
           </a:p>
         </p:txBody>
       </p:sp>
@@ -47503,6 +47858,7 @@
           <a:lstStyle/>
           <a:p>
             <a:pPr algn="ctr"/>
+            <a:endParaRPr/>
           </a:p>
         </p:txBody>
       </p:sp>
@@ -47523,7 +47879,7 @@
           <a:noFill/>
         </p:spPr>
         <p:txBody>
-          <a:bodyPr wrap="square" lIns="0" rIns="0" tIns="0" bIns="0" anchor="ctr">
+          <a:bodyPr wrap="square" lIns="0" tIns="0" rIns="0" bIns="0" anchor="ctr">
             <a:spAutoFit/>
           </a:bodyPr>
           <a:lstStyle/>
@@ -47568,7 +47924,7 @@
           <a:noFill/>
         </p:spPr>
         <p:txBody>
-          <a:bodyPr wrap="square" lIns="0" rIns="0" tIns="0" bIns="0" anchor="t">
+          <a:bodyPr wrap="square" lIns="0" tIns="0" rIns="0" bIns="0" anchor="t">
             <a:spAutoFit/>
           </a:bodyPr>
           <a:lstStyle/>
@@ -48540,7 +48896,7 @@
           <a:noFill/>
         </p:spPr>
         <p:txBody>
-          <a:bodyPr wrap="square" lIns="0" rIns="0" tIns="0" bIns="0" anchor="ctr">
+          <a:bodyPr wrap="square" lIns="0" tIns="0" rIns="0" bIns="0" anchor="ctr">
             <a:spAutoFit/>
           </a:bodyPr>
           <a:lstStyle/>
@@ -48577,7 +48933,7 @@
 </file>
 
 <file path=ppt/slides/slide40.xml><?xml version="1.0" encoding="utf-8"?>
-<p:sld xmlns:a="http://schemas.openxmlformats.org/drawingml/2006/main" xmlns:p="http://schemas.openxmlformats.org/presentationml/2006/main" xmlns:r="http://schemas.openxmlformats.org/officeDocument/2006/relationships">
+<p:sld xmlns:a="http://schemas.openxmlformats.org/drawingml/2006/main" xmlns:r="http://schemas.openxmlformats.org/officeDocument/2006/relationships" xmlns:p="http://schemas.openxmlformats.org/presentationml/2006/main">
   <p:cSld>
     <p:bg>
       <p:bgPr>
@@ -48593,7 +48949,14 @@
         <p:cNvGrpSpPr/>
         <p:nvPr/>
       </p:nvGrpSpPr>
-      <p:grpSpPr/>
+      <p:grpSpPr>
+        <a:xfrm>
+          <a:off x="0" y="0"/>
+          <a:ext cx="0" cy="0"/>
+          <a:chOff x="0" y="0"/>
+          <a:chExt cx="0" cy="0"/>
+        </a:xfrm>
+      </p:grpSpPr>
       <p:sp>
         <p:nvSpPr>
           <p:cNvPr id="2" name="TextBox 1"/>
@@ -48611,7 +48974,7 @@
           <a:noFill/>
         </p:spPr>
         <p:txBody>
-          <a:bodyPr wrap="square" lIns="0" rIns="0" tIns="0" bIns="0" anchor="t">
+          <a:bodyPr wrap="square" lIns="0" tIns="0" rIns="0" bIns="0" anchor="t">
             <a:spAutoFit/>
           </a:bodyPr>
           <a:lstStyle/>
@@ -48656,7 +49019,7 @@
           <a:noFill/>
         </p:spPr>
         <p:txBody>
-          <a:bodyPr wrap="square" lIns="0" rIns="0" tIns="0" bIns="0" anchor="t">
+          <a:bodyPr wrap="square" lIns="0" tIns="0" rIns="0" bIns="0" anchor="t">
             <a:spAutoFit/>
           </a:bodyPr>
           <a:lstStyle/>
@@ -48701,7 +49064,7 @@
           <a:noFill/>
         </p:spPr>
         <p:txBody>
-          <a:bodyPr wrap="square" lIns="0" rIns="0" tIns="0" bIns="0" anchor="ctr">
+          <a:bodyPr wrap="square" lIns="0" tIns="0" rIns="0" bIns="0" anchor="ctr">
             <a:spAutoFit/>
           </a:bodyPr>
           <a:lstStyle/>
@@ -48738,7 +49101,7 @@
 </file>
 
 <file path=ppt/slides/slide5.xml><?xml version="1.0" encoding="utf-8"?>
-<p:sld xmlns:a="http://schemas.openxmlformats.org/drawingml/2006/main" xmlns:p="http://schemas.openxmlformats.org/presentationml/2006/main" xmlns:r="http://schemas.openxmlformats.org/officeDocument/2006/relationships">
+<p:sld xmlns:a="http://schemas.openxmlformats.org/drawingml/2006/main" xmlns:r="http://schemas.openxmlformats.org/officeDocument/2006/relationships" xmlns:p="http://schemas.openxmlformats.org/presentationml/2006/main">
   <p:cSld>
     <p:bg>
       <p:bgPr>
@@ -48754,7 +49117,14 @@
         <p:cNvGrpSpPr/>
         <p:nvPr/>
       </p:nvGrpSpPr>
-      <p:grpSpPr/>
+      <p:grpSpPr>
+        <a:xfrm>
+          <a:off x="0" y="0"/>
+          <a:ext cx="0" cy="0"/>
+          <a:chOff x="0" y="0"/>
+          <a:chExt cx="0" cy="0"/>
+        </a:xfrm>
+      </p:grpSpPr>
       <p:sp>
         <p:nvSpPr>
           <p:cNvPr id="2" name="Rectangle 1"/>
@@ -48795,6 +49165,7 @@
           <a:lstStyle/>
           <a:p>
             <a:pPr algn="ctr"/>
+            <a:endParaRPr/>
           </a:p>
         </p:txBody>
       </p:sp>
@@ -48838,6 +49209,7 @@
           <a:lstStyle/>
           <a:p>
             <a:pPr algn="ctr"/>
+            <a:endParaRPr/>
           </a:p>
         </p:txBody>
       </p:sp>
@@ -48858,7 +49230,7 @@
           <a:noFill/>
         </p:spPr>
         <p:txBody>
-          <a:bodyPr wrap="square" lIns="0" rIns="0" tIns="0" bIns="0" anchor="ctr">
+          <a:bodyPr wrap="square" lIns="0" tIns="0" rIns="0" bIns="0" anchor="ctr">
             <a:spAutoFit/>
           </a:bodyPr>
           <a:lstStyle/>
@@ -48903,7 +49275,7 @@
           <a:noFill/>
         </p:spPr>
         <p:txBody>
-          <a:bodyPr wrap="square" lIns="0" rIns="0" tIns="0" bIns="0" anchor="ctr">
+          <a:bodyPr wrap="square" lIns="0" tIns="0" rIns="0" bIns="0" anchor="ctr">
             <a:spAutoFit/>
           </a:bodyPr>
           <a:lstStyle/>
@@ -48971,6 +49343,7 @@
           <a:lstStyle/>
           <a:p>
             <a:pPr algn="ctr"/>
+            <a:endParaRPr/>
           </a:p>
         </p:txBody>
       </p:sp>
@@ -49014,6 +49387,7 @@
           <a:lstStyle/>
           <a:p>
             <a:pPr algn="ctr"/>
+            <a:endParaRPr/>
           </a:p>
         </p:txBody>
       </p:sp>
@@ -49034,7 +49408,7 @@
           <a:noFill/>
         </p:spPr>
         <p:txBody>
-          <a:bodyPr wrap="square" lIns="0" rIns="0" tIns="0" bIns="0" anchor="ctr">
+          <a:bodyPr wrap="square" lIns="0" tIns="0" rIns="0" bIns="0" anchor="ctr">
             <a:spAutoFit/>
           </a:bodyPr>
           <a:lstStyle/>
@@ -49079,7 +49453,7 @@
           <a:noFill/>
         </p:spPr>
         <p:txBody>
-          <a:bodyPr wrap="square" lIns="0" rIns="0" tIns="0" bIns="0" anchor="t">
+          <a:bodyPr wrap="square" lIns="0" tIns="0" rIns="0" bIns="0" anchor="t">
             <a:spAutoFit/>
           </a:bodyPr>
           <a:lstStyle/>
@@ -50051,7 +50425,7 @@
           <a:noFill/>
         </p:spPr>
         <p:txBody>
-          <a:bodyPr wrap="square" lIns="0" rIns="0" tIns="0" bIns="0" anchor="ctr">
+          <a:bodyPr wrap="square" lIns="0" tIns="0" rIns="0" bIns="0" anchor="ctr">
             <a:spAutoFit/>
           </a:bodyPr>
           <a:lstStyle/>
@@ -50088,7 +50462,7 @@
 </file>
 
 <file path=ppt/slides/slide6.xml><?xml version="1.0" encoding="utf-8"?>
-<p:sld xmlns:a="http://schemas.openxmlformats.org/drawingml/2006/main" xmlns:p="http://schemas.openxmlformats.org/presentationml/2006/main" xmlns:r="http://schemas.openxmlformats.org/officeDocument/2006/relationships">
+<p:sld xmlns:a="http://schemas.openxmlformats.org/drawingml/2006/main" xmlns:r="http://schemas.openxmlformats.org/officeDocument/2006/relationships" xmlns:p="http://schemas.openxmlformats.org/presentationml/2006/main">
   <p:cSld>
     <p:bg>
       <p:bgPr>
@@ -50104,7 +50478,14 @@
         <p:cNvGrpSpPr/>
         <p:nvPr/>
       </p:nvGrpSpPr>
-      <p:grpSpPr/>
+      <p:grpSpPr>
+        <a:xfrm>
+          <a:off x="0" y="0"/>
+          <a:ext cx="0" cy="0"/>
+          <a:chOff x="0" y="0"/>
+          <a:chExt cx="0" cy="0"/>
+        </a:xfrm>
+      </p:grpSpPr>
       <p:sp>
         <p:nvSpPr>
           <p:cNvPr id="2" name="Rectangle 1"/>
@@ -50145,6 +50526,7 @@
           <a:lstStyle/>
           <a:p>
             <a:pPr algn="ctr"/>
+            <a:endParaRPr/>
           </a:p>
         </p:txBody>
       </p:sp>
@@ -50188,6 +50570,7 @@
           <a:lstStyle/>
           <a:p>
             <a:pPr algn="ctr"/>
+            <a:endParaRPr/>
           </a:p>
         </p:txBody>
       </p:sp>
@@ -50208,7 +50591,7 @@
           <a:noFill/>
         </p:spPr>
         <p:txBody>
-          <a:bodyPr wrap="square" lIns="0" rIns="0" tIns="0" bIns="0" anchor="ctr">
+          <a:bodyPr wrap="square" lIns="0" tIns="0" rIns="0" bIns="0" anchor="ctr">
             <a:spAutoFit/>
           </a:bodyPr>
           <a:lstStyle/>
@@ -50253,7 +50636,7 @@
           <a:noFill/>
         </p:spPr>
         <p:txBody>
-          <a:bodyPr wrap="square" lIns="0" rIns="0" tIns="0" bIns="0" anchor="ctr">
+          <a:bodyPr wrap="square" lIns="0" tIns="0" rIns="0" bIns="0" anchor="ctr">
             <a:spAutoFit/>
           </a:bodyPr>
           <a:lstStyle/>
@@ -50321,6 +50704,7 @@
           <a:lstStyle/>
           <a:p>
             <a:pPr algn="ctr"/>
+            <a:endParaRPr/>
           </a:p>
         </p:txBody>
       </p:sp>
@@ -50364,6 +50748,7 @@
           <a:lstStyle/>
           <a:p>
             <a:pPr algn="ctr"/>
+            <a:endParaRPr/>
           </a:p>
         </p:txBody>
       </p:sp>
@@ -50384,7 +50769,7 @@
           <a:noFill/>
         </p:spPr>
         <p:txBody>
-          <a:bodyPr wrap="square" lIns="0" rIns="0" tIns="0" bIns="0" anchor="ctr">
+          <a:bodyPr wrap="square" lIns="0" tIns="0" rIns="0" bIns="0" anchor="ctr">
             <a:spAutoFit/>
           </a:bodyPr>
           <a:lstStyle/>
@@ -50429,7 +50814,7 @@
           <a:noFill/>
         </p:spPr>
         <p:txBody>
-          <a:bodyPr wrap="square" lIns="0" rIns="0" tIns="0" bIns="0" anchor="t">
+          <a:bodyPr wrap="square" lIns="0" tIns="0" rIns="0" bIns="0" anchor="t">
             <a:spAutoFit/>
           </a:bodyPr>
           <a:lstStyle/>
@@ -51401,7 +51786,7 @@
           <a:noFill/>
         </p:spPr>
         <p:txBody>
-          <a:bodyPr wrap="square" lIns="0" rIns="0" tIns="0" bIns="0" anchor="ctr">
+          <a:bodyPr wrap="square" lIns="0" tIns="0" rIns="0" bIns="0" anchor="ctr">
             <a:spAutoFit/>
           </a:bodyPr>
           <a:lstStyle/>
@@ -51438,7 +51823,7 @@
 </file>
 
 <file path=ppt/slides/slide7.xml><?xml version="1.0" encoding="utf-8"?>
-<p:sld xmlns:a="http://schemas.openxmlformats.org/drawingml/2006/main" xmlns:p="http://schemas.openxmlformats.org/presentationml/2006/main" xmlns:r="http://schemas.openxmlformats.org/officeDocument/2006/relationships">
+<p:sld xmlns:a="http://schemas.openxmlformats.org/drawingml/2006/main" xmlns:r="http://schemas.openxmlformats.org/officeDocument/2006/relationships" xmlns:p="http://schemas.openxmlformats.org/presentationml/2006/main">
   <p:cSld>
     <p:bg>
       <p:bgPr>
@@ -51454,7 +51839,14 @@
         <p:cNvGrpSpPr/>
         <p:nvPr/>
       </p:nvGrpSpPr>
-      <p:grpSpPr/>
+      <p:grpSpPr>
+        <a:xfrm>
+          <a:off x="0" y="0"/>
+          <a:ext cx="0" cy="0"/>
+          <a:chOff x="0" y="0"/>
+          <a:chExt cx="0" cy="0"/>
+        </a:xfrm>
+      </p:grpSpPr>
       <p:sp>
         <p:nvSpPr>
           <p:cNvPr id="2" name="Rectangle 1"/>
@@ -51495,6 +51887,7 @@
           <a:lstStyle/>
           <a:p>
             <a:pPr algn="ctr"/>
+            <a:endParaRPr/>
           </a:p>
         </p:txBody>
       </p:sp>
@@ -51538,6 +51931,7 @@
           <a:lstStyle/>
           <a:p>
             <a:pPr algn="ctr"/>
+            <a:endParaRPr/>
           </a:p>
         </p:txBody>
       </p:sp>
@@ -51558,7 +51952,7 @@
           <a:noFill/>
         </p:spPr>
         <p:txBody>
-          <a:bodyPr wrap="square" lIns="0" rIns="0" tIns="0" bIns="0" anchor="ctr">
+          <a:bodyPr wrap="square" lIns="0" tIns="0" rIns="0" bIns="0" anchor="ctr">
             <a:spAutoFit/>
           </a:bodyPr>
           <a:lstStyle/>
@@ -51603,7 +51997,7 @@
           <a:noFill/>
         </p:spPr>
         <p:txBody>
-          <a:bodyPr wrap="square" lIns="0" rIns="0" tIns="0" bIns="0" anchor="ctr">
+          <a:bodyPr wrap="square" lIns="0" tIns="0" rIns="0" bIns="0" anchor="ctr">
             <a:spAutoFit/>
           </a:bodyPr>
           <a:lstStyle/>
@@ -51671,6 +52065,7 @@
           <a:lstStyle/>
           <a:p>
             <a:pPr algn="ctr"/>
+            <a:endParaRPr/>
           </a:p>
         </p:txBody>
       </p:sp>
@@ -51714,6 +52109,7 @@
           <a:lstStyle/>
           <a:p>
             <a:pPr algn="ctr"/>
+            <a:endParaRPr/>
           </a:p>
         </p:txBody>
       </p:sp>
@@ -51734,7 +52130,7 @@
           <a:noFill/>
         </p:spPr>
         <p:txBody>
-          <a:bodyPr wrap="square" lIns="0" rIns="0" tIns="0" bIns="0" anchor="ctr">
+          <a:bodyPr wrap="square" lIns="0" tIns="0" rIns="0" bIns="0" anchor="ctr">
             <a:spAutoFit/>
           </a:bodyPr>
           <a:lstStyle/>
@@ -51779,7 +52175,7 @@
           <a:noFill/>
         </p:spPr>
         <p:txBody>
-          <a:bodyPr wrap="square" lIns="0" rIns="0" tIns="0" bIns="0" anchor="t">
+          <a:bodyPr wrap="square" lIns="0" tIns="0" rIns="0" bIns="0" anchor="t">
             <a:spAutoFit/>
           </a:bodyPr>
           <a:lstStyle/>
@@ -52751,7 +53147,7 @@
           <a:noFill/>
         </p:spPr>
         <p:txBody>
-          <a:bodyPr wrap="square" lIns="0" rIns="0" tIns="0" bIns="0" anchor="ctr">
+          <a:bodyPr wrap="square" lIns="0" tIns="0" rIns="0" bIns="0" anchor="ctr">
             <a:spAutoFit/>
           </a:bodyPr>
           <a:lstStyle/>
@@ -52788,7 +53184,7 @@
 </file>
 
 <file path=ppt/slides/slide8.xml><?xml version="1.0" encoding="utf-8"?>
-<p:sld xmlns:a="http://schemas.openxmlformats.org/drawingml/2006/main" xmlns:p="http://schemas.openxmlformats.org/presentationml/2006/main" xmlns:r="http://schemas.openxmlformats.org/officeDocument/2006/relationships">
+<p:sld xmlns:a="http://schemas.openxmlformats.org/drawingml/2006/main" xmlns:r="http://schemas.openxmlformats.org/officeDocument/2006/relationships" xmlns:p="http://schemas.openxmlformats.org/presentationml/2006/main">
   <p:cSld>
     <p:bg>
       <p:bgPr>
@@ -52804,7 +53200,14 @@
         <p:cNvGrpSpPr/>
         <p:nvPr/>
       </p:nvGrpSpPr>
-      <p:grpSpPr/>
+      <p:grpSpPr>
+        <a:xfrm>
+          <a:off x="0" y="0"/>
+          <a:ext cx="0" cy="0"/>
+          <a:chOff x="0" y="0"/>
+          <a:chExt cx="0" cy="0"/>
+        </a:xfrm>
+      </p:grpSpPr>
       <p:sp>
         <p:nvSpPr>
           <p:cNvPr id="2" name="Rectangle 1"/>
@@ -52845,6 +53248,7 @@
           <a:lstStyle/>
           <a:p>
             <a:pPr algn="ctr"/>
+            <a:endParaRPr/>
           </a:p>
         </p:txBody>
       </p:sp>
@@ -52888,6 +53292,7 @@
           <a:lstStyle/>
           <a:p>
             <a:pPr algn="ctr"/>
+            <a:endParaRPr/>
           </a:p>
         </p:txBody>
       </p:sp>
@@ -52908,7 +53313,7 @@
           <a:noFill/>
         </p:spPr>
         <p:txBody>
-          <a:bodyPr wrap="square" lIns="0" rIns="0" tIns="0" bIns="0" anchor="ctr">
+          <a:bodyPr wrap="square" lIns="0" tIns="0" rIns="0" bIns="0" anchor="ctr">
             <a:spAutoFit/>
           </a:bodyPr>
           <a:lstStyle/>
@@ -52953,7 +53358,7 @@
           <a:noFill/>
         </p:spPr>
         <p:txBody>
-          <a:bodyPr wrap="square" lIns="0" rIns="0" tIns="0" bIns="0" anchor="ctr">
+          <a:bodyPr wrap="square" lIns="0" tIns="0" rIns="0" bIns="0" anchor="ctr">
             <a:spAutoFit/>
           </a:bodyPr>
           <a:lstStyle/>
@@ -53021,6 +53426,7 @@
           <a:lstStyle/>
           <a:p>
             <a:pPr algn="ctr"/>
+            <a:endParaRPr/>
           </a:p>
         </p:txBody>
       </p:sp>
@@ -53064,6 +53470,7 @@
           <a:lstStyle/>
           <a:p>
             <a:pPr algn="ctr"/>
+            <a:endParaRPr/>
           </a:p>
         </p:txBody>
       </p:sp>
@@ -53084,7 +53491,7 @@
           <a:noFill/>
         </p:spPr>
         <p:txBody>
-          <a:bodyPr wrap="square" lIns="0" rIns="0" tIns="0" bIns="0" anchor="ctr">
+          <a:bodyPr wrap="square" lIns="0" tIns="0" rIns="0" bIns="0" anchor="ctr">
             <a:spAutoFit/>
           </a:bodyPr>
           <a:lstStyle/>
@@ -53129,7 +53536,7 @@
           <a:noFill/>
         </p:spPr>
         <p:txBody>
-          <a:bodyPr wrap="square" lIns="0" rIns="0" tIns="0" bIns="0" anchor="t">
+          <a:bodyPr wrap="square" lIns="0" tIns="0" rIns="0" bIns="0" anchor="t">
             <a:spAutoFit/>
           </a:bodyPr>
           <a:lstStyle/>
@@ -54101,7 +54508,7 @@
           <a:noFill/>
         </p:spPr>
         <p:txBody>
-          <a:bodyPr wrap="square" lIns="0" rIns="0" tIns="0" bIns="0" anchor="ctr">
+          <a:bodyPr wrap="square" lIns="0" tIns="0" rIns="0" bIns="0" anchor="ctr">
             <a:spAutoFit/>
           </a:bodyPr>
           <a:lstStyle/>
@@ -54138,7 +54545,7 @@
 </file>
 
 <file path=ppt/slides/slide9.xml><?xml version="1.0" encoding="utf-8"?>
-<p:sld xmlns:a="http://schemas.openxmlformats.org/drawingml/2006/main" xmlns:p="http://schemas.openxmlformats.org/presentationml/2006/main" xmlns:r="http://schemas.openxmlformats.org/officeDocument/2006/relationships">
+<p:sld xmlns:a="http://schemas.openxmlformats.org/drawingml/2006/main" xmlns:r="http://schemas.openxmlformats.org/officeDocument/2006/relationships" xmlns:p="http://schemas.openxmlformats.org/presentationml/2006/main">
   <p:cSld>
     <p:bg>
       <p:bgPr>
@@ -54154,7 +54561,14 @@
         <p:cNvGrpSpPr/>
         <p:nvPr/>
       </p:nvGrpSpPr>
-      <p:grpSpPr/>
+      <p:grpSpPr>
+        <a:xfrm>
+          <a:off x="0" y="0"/>
+          <a:ext cx="0" cy="0"/>
+          <a:chOff x="0" y="0"/>
+          <a:chExt cx="0" cy="0"/>
+        </a:xfrm>
+      </p:grpSpPr>
       <p:sp>
         <p:nvSpPr>
           <p:cNvPr id="2" name="Rectangle 1"/>
@@ -54195,6 +54609,7 @@
           <a:lstStyle/>
           <a:p>
             <a:pPr algn="ctr"/>
+            <a:endParaRPr/>
           </a:p>
         </p:txBody>
       </p:sp>
@@ -54238,6 +54653,7 @@
           <a:lstStyle/>
           <a:p>
             <a:pPr algn="ctr"/>
+            <a:endParaRPr/>
           </a:p>
         </p:txBody>
       </p:sp>
@@ -54258,7 +54674,7 @@
           <a:noFill/>
         </p:spPr>
         <p:txBody>
-          <a:bodyPr wrap="square" lIns="0" rIns="0" tIns="0" bIns="0" anchor="ctr">
+          <a:bodyPr wrap="square" lIns="0" tIns="0" rIns="0" bIns="0" anchor="ctr">
             <a:spAutoFit/>
           </a:bodyPr>
           <a:lstStyle/>
@@ -54303,7 +54719,7 @@
           <a:noFill/>
         </p:spPr>
         <p:txBody>
-          <a:bodyPr wrap="square" lIns="0" rIns="0" tIns="0" bIns="0" anchor="ctr">
+          <a:bodyPr wrap="square" lIns="0" tIns="0" rIns="0" bIns="0" anchor="ctr">
             <a:spAutoFit/>
           </a:bodyPr>
           <a:lstStyle/>
@@ -54371,6 +54787,7 @@
           <a:lstStyle/>
           <a:p>
             <a:pPr algn="ctr"/>
+            <a:endParaRPr/>
           </a:p>
         </p:txBody>
       </p:sp>
@@ -54414,6 +54831,7 @@
           <a:lstStyle/>
           <a:p>
             <a:pPr algn="ctr"/>
+            <a:endParaRPr/>
           </a:p>
         </p:txBody>
       </p:sp>
@@ -54434,7 +54852,7 @@
           <a:noFill/>
         </p:spPr>
         <p:txBody>
-          <a:bodyPr wrap="square" lIns="0" rIns="0" tIns="0" bIns="0" anchor="ctr">
+          <a:bodyPr wrap="square" lIns="0" tIns="0" rIns="0" bIns="0" anchor="ctr">
             <a:spAutoFit/>
           </a:bodyPr>
           <a:lstStyle/>
@@ -54479,7 +54897,7 @@
           <a:noFill/>
         </p:spPr>
         <p:txBody>
-          <a:bodyPr wrap="square" lIns="0" rIns="0" tIns="0" bIns="0" anchor="t">
+          <a:bodyPr wrap="square" lIns="0" tIns="0" rIns="0" bIns="0" anchor="t">
             <a:spAutoFit/>
           </a:bodyPr>
           <a:lstStyle/>
@@ -55451,7 +55869,7 @@
           <a:noFill/>
         </p:spPr>
         <p:txBody>
-          <a:bodyPr wrap="square" lIns="0" rIns="0" tIns="0" bIns="0" anchor="ctr">
+          <a:bodyPr wrap="square" lIns="0" tIns="0" rIns="0" bIns="0" anchor="ctr">
             <a:spAutoFit/>
           </a:bodyPr>
           <a:lstStyle/>
